--- a/odevzdani/cviceni-06-cross-review/prezentace.pptx
+++ b/odevzdani/cviceni-06-cross-review/prezentace.pptx
@@ -787,7 +787,7 @@
           <a:lstStyle/>
           <a:p>
             <a:r>
-              <a:t>Na vlastním projektu lze ukázat rozdíl mezi důkazem a tvrzením. Datový validátor skutečně spočítá entity a ověří reference, ale nezměří srozumitelnost rozhraní. Architektura localStorage dokládá místní ukládání, nikoli sdílené účty. A absence cizího webu znamená, že peer review není provedeno. Tyto příklady jsou označené jako vlastní ověření Prague Rocks a nesmějí se objevit v tabulce nálezů jiného týmu. Po přidělení projektu je nahradíme skutečně pozorovanými případy.</a:t>
+              <a:t>Na vlastním projektu lze ukázat rozdíl mezi důkazem a tvrzením. Datový validátor skutečně spočítá entity a ověří reference, ale nezměří srozumitelnost rozhraní. Architektura localStorage dokládá místní ukládání, nikoli sdílené účty. A absence cizího webu znamená, že peer review není provedeno. Tyto příklady jsou označené jako vlastní ověření Prague Pulse Fest a nesmějí se objevit v tabulce nálezů jiného týmu. Po přidělení projektu je nahradíme skutečně pozorovanými případy.</a:t>
             </a:r>
           </a:p>
         </p:txBody>
@@ -4028,7 +4028,7 @@
               </a:defRPr>
             </a:pPr>
             <a:r>
-              <a:t>ROCKS</a:t>
+              <a:t>PULSE</a:t>
             </a:r>
           </a:p>
         </p:txBody>
@@ -4070,7 +4070,7 @@
               </a:defRPr>
             </a:pPr>
             <a:r>
-              <a:t>FESTIVAL / 2026</a:t>
+              <a:t>FEST / 2027</a:t>
             </a:r>
           </a:p>
         </p:txBody>
@@ -4403,7 +4403,7 @@
               </a:defRPr>
             </a:pPr>
             <a:r>
-              <a:t>2026</a:t>
+              <a:t>2027</a:t>
             </a:r>
           </a:p>
         </p:txBody>
@@ -4754,7 +4754,7 @@
               </a:defRPr>
             </a:pPr>
             <a:r>
-              <a:t>ROCKS</a:t>
+              <a:t>PULSE</a:t>
             </a:r>
           </a:p>
         </p:txBody>
@@ -4796,7 +4796,7 @@
               </a:defRPr>
             </a:pPr>
             <a:r>
-              <a:t>FESTIVAL / 2026</a:t>
+              <a:t>FEST / 2027</a:t>
             </a:r>
           </a:p>
         </p:txBody>
@@ -5666,7 +5666,7 @@
               </a:defRPr>
             </a:pPr>
             <a:r>
-              <a:t>ROCKS</a:t>
+              <a:t>PULSE</a:t>
             </a:r>
           </a:p>
         </p:txBody>
@@ -5708,7 +5708,7 @@
               </a:defRPr>
             </a:pPr>
             <a:r>
-              <a:t>FESTIVAL / 2026</a:t>
+              <a:t>FEST / 2027</a:t>
             </a:r>
           </a:p>
         </p:txBody>
@@ -6836,7 +6836,7 @@
               </a:defRPr>
             </a:pPr>
             <a:r>
-              <a:t>ROCKS</a:t>
+              <a:t>PULSE</a:t>
             </a:r>
           </a:p>
         </p:txBody>
@@ -6878,7 +6878,7 @@
               </a:defRPr>
             </a:pPr>
             <a:r>
-              <a:t>FESTIVAL / 2026</a:t>
+              <a:t>FEST / 2027</a:t>
             </a:r>
           </a:p>
         </p:txBody>
@@ -8140,7 +8140,7 @@
               </a:defRPr>
             </a:pPr>
             <a:r>
-              <a:t>ROCKS</a:t>
+              <a:t>PULSE</a:t>
             </a:r>
           </a:p>
         </p:txBody>
@@ -8182,7 +8182,7 @@
               </a:defRPr>
             </a:pPr>
             <a:r>
-              <a:t>FESTIVAL / 2026</a:t>
+              <a:t>FEST / 2027</a:t>
             </a:r>
           </a:p>
         </p:txBody>
@@ -8267,7 +8267,7 @@
               </a:defRPr>
             </a:pPr>
             <a:r>
-              <a:t>VLASTNÍ OVĚŘENÍ / PRAGUE ROCKS</a:t>
+              <a:t>VLASTNÍ OVĚŘENÍ / PRAGUE PULSE FEST</a:t>
             </a:r>
           </a:p>
         </p:txBody>
@@ -9272,7 +9272,7 @@
               </a:defRPr>
             </a:pPr>
             <a:r>
-              <a:t>ROCKS</a:t>
+              <a:t>PULSE</a:t>
             </a:r>
           </a:p>
         </p:txBody>
@@ -9314,7 +9314,7 @@
               </a:defRPr>
             </a:pPr>
             <a:r>
-              <a:t>FESTIVAL / 2026</a:t>
+              <a:t>FEST / 2027</a:t>
             </a:r>
           </a:p>
         </p:txBody>

--- a/odevzdani/cviceni-06-cross-review/prezentace.pptx
+++ b/odevzdani/cviceni-06-cross-review/prezentace.pptx
@@ -4077,50 +4077,7 @@
       </p:sp>
       <p:sp>
         <p:nvSpPr>
-          <p:cNvPr id="7" name="Rectangle 6"/>
-          <p:cNvSpPr/>
-          <p:nvPr/>
-        </p:nvSpPr>
-        <p:spPr>
-          <a:xfrm>
-            <a:off x="2266950" y="463550"/>
-            <a:ext cx="115570" cy="561340"/>
-          </a:xfrm>
-          <a:prstGeom prst="rect">
-            <a:avLst/>
-          </a:prstGeom>
-          <a:solidFill>
-            <a:srgbClr val="F4F0E7"/>
-          </a:solidFill>
-          <a:ln>
-            <a:noFill/>
-          </a:ln>
-        </p:spPr>
-        <p:style>
-          <a:lnRef idx="1">
-            <a:schemeClr val="accent1"/>
-          </a:lnRef>
-          <a:fillRef idx="3">
-            <a:schemeClr val="accent1"/>
-          </a:fillRef>
-          <a:effectRef idx="2">
-            <a:schemeClr val="accent1"/>
-          </a:effectRef>
-          <a:fontRef idx="minor">
-            <a:schemeClr val="lt1"/>
-          </a:fontRef>
-        </p:style>
-        <p:txBody>
-          <a:bodyPr rtlCol="0" anchor="ctr"/>
-          <a:lstStyle/>
-          <a:p>
-            <a:pPr algn="ctr"/>
-          </a:p>
-        </p:txBody>
-      </p:sp>
-      <p:sp>
-        <p:nvSpPr>
-          <p:cNvPr id="8" name="TextBox 7"/>
+          <p:cNvPr id="7" name="TextBox 6"/>
           <p:cNvSpPr txBox="1"/>
           <p:nvPr/>
         </p:nvSpPr>
@@ -4162,7 +4119,7 @@
       </p:sp>
       <p:sp>
         <p:nvSpPr>
-          <p:cNvPr id="9" name="TextBox 8"/>
+          <p:cNvPr id="8" name="TextBox 7"/>
           <p:cNvSpPr txBox="1"/>
           <p:nvPr/>
         </p:nvSpPr>
@@ -4223,7 +4180,7 @@
       </p:sp>
       <p:sp>
         <p:nvSpPr>
-          <p:cNvPr id="10" name="TextBox 9"/>
+          <p:cNvPr id="9" name="TextBox 8"/>
           <p:cNvSpPr txBox="1"/>
           <p:nvPr/>
         </p:nvSpPr>
@@ -4284,7 +4241,7 @@
       </p:sp>
       <p:sp>
         <p:nvSpPr>
-          <p:cNvPr id="11" name="TextBox 10"/>
+          <p:cNvPr id="10" name="TextBox 9"/>
           <p:cNvSpPr txBox="1"/>
           <p:nvPr/>
         </p:nvSpPr>
@@ -4326,7 +4283,7 @@
       </p:sp>
       <p:sp>
         <p:nvSpPr>
-          <p:cNvPr id="12" name="TextBox 11"/>
+          <p:cNvPr id="11" name="TextBox 10"/>
           <p:cNvSpPr txBox="1"/>
           <p:nvPr/>
         </p:nvSpPr>
@@ -4368,7 +4325,7 @@
       </p:sp>
       <p:sp>
         <p:nvSpPr>
-          <p:cNvPr id="13" name="TextBox 12"/>
+          <p:cNvPr id="12" name="TextBox 11"/>
           <p:cNvSpPr txBox="1"/>
           <p:nvPr/>
         </p:nvSpPr>
@@ -4410,7 +4367,7 @@
       </p:sp>
       <p:sp>
         <p:nvSpPr>
-          <p:cNvPr id="14" name="TextBox 13"/>
+          <p:cNvPr id="13" name="TextBox 12"/>
           <p:cNvSpPr txBox="1"/>
           <p:nvPr/>
         </p:nvSpPr>
@@ -4471,7 +4428,7 @@
       </p:sp>
       <p:sp>
         <p:nvSpPr>
-          <p:cNvPr id="15" name="TextBox 14"/>
+          <p:cNvPr id="14" name="TextBox 13"/>
           <p:cNvSpPr txBox="1"/>
           <p:nvPr/>
         </p:nvSpPr>
@@ -4532,7 +4489,7 @@
       </p:sp>
       <p:sp>
         <p:nvSpPr>
-          <p:cNvPr id="16" name="TextBox 15"/>
+          <p:cNvPr id="15" name="TextBox 14"/>
           <p:cNvSpPr txBox="1"/>
           <p:nvPr/>
         </p:nvSpPr>
@@ -4574,7 +4531,7 @@
       </p:sp>
       <p:sp>
         <p:nvSpPr>
-          <p:cNvPr id="17" name="TextBox 16"/>
+          <p:cNvPr id="16" name="TextBox 15"/>
           <p:cNvSpPr txBox="1"/>
           <p:nvPr/>
         </p:nvSpPr>
@@ -4803,14 +4760,184 @@
       </p:sp>
       <p:sp>
         <p:nvSpPr>
-          <p:cNvPr id="6" name="Rectangle 5"/>
+          <p:cNvPr id="6" name="TextBox 5"/>
+          <p:cNvSpPr txBox="1"/>
+          <p:nvPr/>
+        </p:nvSpPr>
+        <p:spPr>
+          <a:xfrm>
+            <a:off x="5588000" y="533400"/>
+            <a:ext cx="6070600" cy="220979"/>
+          </a:xfrm>
+          <a:prstGeom prst="rect">
+            <a:avLst/>
+          </a:prstGeom>
+          <a:noFill/>
+        </p:spPr>
+        <p:txBody>
+          <a:bodyPr wrap="none" lIns="0" rIns="0" tIns="0" bIns="0">
+            <a:spAutoFit/>
+          </a:bodyPr>
+          <a:lstStyle/>
+          <a:p>
+            <a:pPr>
+              <a:lnSpc>
+                <a:spcPts val="1240"/>
+              </a:lnSpc>
+              <a:spcAft>
+                <a:spcPts val="0"/>
+              </a:spcAft>
+              <a:defRPr sz="1000" b="1">
+                <a:solidFill>
+                  <a:srgbClr val="68635B"/>
+                </a:solidFill>
+                <a:latin typeface="Arial"/>
+              </a:defRPr>
+            </a:pPr>
+            <a:r>
+              <a:t>PLÁN EXPERTNÍHO HODNOCENÍ</a:t>
+            </a:r>
+          </a:p>
+        </p:txBody>
+      </p:sp>
+      <p:sp>
+        <p:nvSpPr>
+          <p:cNvPr id="7" name="Rectangle 6"/>
           <p:cNvSpPr/>
           <p:nvPr/>
         </p:nvSpPr>
         <p:spPr>
           <a:xfrm>
-            <a:off x="1866900" y="368300"/>
-            <a:ext cx="88900" cy="431800"/>
+            <a:off x="533400" y="1155700"/>
+            <a:ext cx="11125200" cy="25400"/>
+          </a:xfrm>
+          <a:prstGeom prst="rect">
+            <a:avLst/>
+          </a:prstGeom>
+          <a:solidFill>
+            <a:srgbClr val="181817"/>
+          </a:solidFill>
+          <a:ln>
+            <a:noFill/>
+          </a:ln>
+        </p:spPr>
+        <p:style>
+          <a:lnRef idx="1">
+            <a:schemeClr val="accent1"/>
+          </a:lnRef>
+          <a:fillRef idx="3">
+            <a:schemeClr val="accent1"/>
+          </a:fillRef>
+          <a:effectRef idx="2">
+            <a:schemeClr val="accent1"/>
+          </a:effectRef>
+          <a:fontRef idx="minor">
+            <a:schemeClr val="lt1"/>
+          </a:fontRef>
+        </p:style>
+        <p:txBody>
+          <a:bodyPr rtlCol="0" anchor="ctr"/>
+          <a:lstStyle/>
+          <a:p>
+            <a:pPr algn="ctr"/>
+          </a:p>
+        </p:txBody>
+      </p:sp>
+      <p:sp>
+        <p:nvSpPr>
+          <p:cNvPr id="8" name="TextBox 7"/>
+          <p:cNvSpPr txBox="1"/>
+          <p:nvPr/>
+        </p:nvSpPr>
+        <p:spPr>
+          <a:xfrm>
+            <a:off x="508000" y="1422400"/>
+            <a:ext cx="11176000" cy="1079500"/>
+          </a:xfrm>
+          <a:prstGeom prst="rect">
+            <a:avLst/>
+          </a:prstGeom>
+          <a:noFill/>
+        </p:spPr>
+        <p:txBody>
+          <a:bodyPr wrap="none" lIns="0" rIns="0" tIns="0" bIns="0">
+            <a:spAutoFit/>
+          </a:bodyPr>
+          <a:lstStyle/>
+          <a:p>
+            <a:pPr>
+              <a:lnSpc>
+                <a:spcPts val="3740"/>
+              </a:lnSpc>
+              <a:spcAft>
+                <a:spcPts val="0"/>
+              </a:spcAft>
+              <a:defRPr sz="3400" b="1">
+                <a:solidFill>
+                  <a:srgbClr val="181817"/>
+                </a:solidFill>
+                <a:latin typeface="Arial"/>
+              </a:defRPr>
+            </a:pPr>
+            <a:r>
+              <a:t>Dvě metody, odlišný pohled.</a:t>
+            </a:r>
+          </a:p>
+        </p:txBody>
+      </p:sp>
+      <p:sp>
+        <p:nvSpPr>
+          <p:cNvPr id="9" name="Rectangle 8"/>
+          <p:cNvSpPr/>
+          <p:nvPr/>
+        </p:nvSpPr>
+        <p:spPr>
+          <a:xfrm>
+            <a:off x="533400" y="2768600"/>
+            <a:ext cx="5448300" cy="2603500"/>
+          </a:xfrm>
+          <a:prstGeom prst="rect">
+            <a:avLst/>
+          </a:prstGeom>
+          <a:solidFill>
+            <a:srgbClr val="181817"/>
+          </a:solidFill>
+          <a:ln>
+            <a:noFill/>
+          </a:ln>
+        </p:spPr>
+        <p:style>
+          <a:lnRef idx="1">
+            <a:schemeClr val="accent1"/>
+          </a:lnRef>
+          <a:fillRef idx="3">
+            <a:schemeClr val="accent1"/>
+          </a:fillRef>
+          <a:effectRef idx="2">
+            <a:schemeClr val="accent1"/>
+          </a:effectRef>
+          <a:fontRef idx="minor">
+            <a:schemeClr val="lt1"/>
+          </a:fontRef>
+        </p:style>
+        <p:txBody>
+          <a:bodyPr rtlCol="0" anchor="ctr"/>
+          <a:lstStyle/>
+          <a:p>
+            <a:pPr algn="ctr"/>
+          </a:p>
+        </p:txBody>
+      </p:sp>
+      <p:sp>
+        <p:nvSpPr>
+          <p:cNvPr id="10" name="Rectangle 9"/>
+          <p:cNvSpPr/>
+          <p:nvPr/>
+        </p:nvSpPr>
+        <p:spPr>
+          <a:xfrm>
+            <a:off x="533400" y="2768600"/>
+            <a:ext cx="5448300" cy="76200"/>
           </a:xfrm>
           <a:prstGeom prst="rect">
             <a:avLst/>
@@ -4846,14 +4973,14 @@
       </p:sp>
       <p:sp>
         <p:nvSpPr>
-          <p:cNvPr id="7" name="TextBox 6"/>
+          <p:cNvPr id="11" name="TextBox 10"/>
           <p:cNvSpPr txBox="1"/>
           <p:nvPr/>
         </p:nvSpPr>
         <p:spPr>
           <a:xfrm>
-            <a:off x="5588000" y="533400"/>
-            <a:ext cx="6070600" cy="220979"/>
+            <a:off x="749300" y="3035300"/>
+            <a:ext cx="5016500" cy="685800"/>
           </a:xfrm>
           <a:prstGeom prst="rect">
             <a:avLst/>
@@ -4868,40 +4995,136 @@
           <a:p>
             <a:pPr>
               <a:lnSpc>
-                <a:spcPts val="1240"/>
-              </a:lnSpc>
-              <a:spcAft>
-                <a:spcPts val="0"/>
-              </a:spcAft>
-              <a:defRPr sz="1000" b="1">
-                <a:solidFill>
-                  <a:srgbClr val="68635B"/>
-                </a:solidFill>
-                <a:latin typeface="Arial"/>
-              </a:defRPr>
-            </a:pPr>
-            <a:r>
-              <a:t>PLÁN EXPERTNÍHO HODNOCENÍ</a:t>
-            </a:r>
-          </a:p>
-        </p:txBody>
-      </p:sp>
-      <p:sp>
-        <p:nvSpPr>
-          <p:cNvPr id="8" name="Rectangle 7"/>
+                <a:spcPts val="2200"/>
+              </a:lnSpc>
+              <a:spcAft>
+                <a:spcPts val="0"/>
+              </a:spcAft>
+              <a:defRPr sz="2000" b="1">
+                <a:solidFill>
+                  <a:srgbClr val="F4F0E7"/>
+                </a:solidFill>
+                <a:latin typeface="Arial"/>
+              </a:defRPr>
+            </a:pPr>
+            <a:r>
+              <a:t>Nielsenovy heuristiky</a:t>
+            </a:r>
+          </a:p>
+        </p:txBody>
+      </p:sp>
+      <p:sp>
+        <p:nvSpPr>
+          <p:cNvPr id="12" name="TextBox 11"/>
+          <p:cNvSpPr txBox="1"/>
+          <p:nvPr/>
+        </p:nvSpPr>
+        <p:spPr>
+          <a:xfrm>
+            <a:off x="749300" y="3733800"/>
+            <a:ext cx="5016500" cy="1511300"/>
+          </a:xfrm>
+          <a:prstGeom prst="rect">
+            <a:avLst/>
+          </a:prstGeom>
+          <a:noFill/>
+        </p:spPr>
+        <p:txBody>
+          <a:bodyPr wrap="none" lIns="0" rIns="0" tIns="0" bIns="0">
+            <a:spAutoFit/>
+          </a:bodyPr>
+          <a:lstStyle/>
+          <a:p>
+            <a:pPr>
+              <a:lnSpc>
+                <a:spcPts val="1689"/>
+              </a:lnSpc>
+              <a:spcAft>
+                <a:spcPts val="0"/>
+              </a:spcAft>
+              <a:defRPr sz="1420" b="0">
+                <a:solidFill>
+                  <a:srgbClr val="F4F0E7"/>
+                </a:solidFill>
+                <a:latin typeface="Arial"/>
+              </a:defRPr>
+            </a:pPr>
+            <a:r>
+              <a:t>Stav systému, konzistence, prevence chyb, kontrola</a:t>
+            </a:r>
+          </a:p>
+          <a:p>
+            <a:pPr>
+              <a:lnSpc>
+                <a:spcPts val="1689"/>
+              </a:lnSpc>
+              <a:spcAft>
+                <a:spcPts val="0"/>
+              </a:spcAft>
+              <a:defRPr sz="1420" b="0">
+                <a:solidFill>
+                  <a:srgbClr val="F4F0E7"/>
+                </a:solidFill>
+                <a:latin typeface="Arial"/>
+              </a:defRPr>
+            </a:pPr>
+            <a:r>
+              <a:t>uživatele a srozumitelná pomoc.</a:t>
+            </a:r>
+          </a:p>
+          <a:p>
+            <a:pPr>
+              <a:lnSpc>
+                <a:spcPts val="1689"/>
+              </a:lnSpc>
+              <a:spcAft>
+                <a:spcPts val="0"/>
+              </a:spcAft>
+              <a:defRPr sz="1420" b="0">
+                <a:solidFill>
+                  <a:srgbClr val="F4F0E7"/>
+                </a:solidFill>
+                <a:latin typeface="Arial"/>
+              </a:defRPr>
+            </a:pPr>
+          </a:p>
+          <a:p>
+            <a:pPr>
+              <a:lnSpc>
+                <a:spcPts val="1689"/>
+              </a:lnSpc>
+              <a:spcAft>
+                <a:spcPts val="0"/>
+              </a:spcAft>
+              <a:defRPr sz="1420" b="0">
+                <a:solidFill>
+                  <a:srgbClr val="F4F0E7"/>
+                </a:solidFill>
+                <a:latin typeface="Arial"/>
+              </a:defRPr>
+            </a:pPr>
+            <a:r>
+              <a:t>Nález přiřadit konkrétnímu pravidlu.</a:t>
+            </a:r>
+          </a:p>
+        </p:txBody>
+      </p:sp>
+      <p:sp>
+        <p:nvSpPr>
+          <p:cNvPr id="13" name="Rectangle 12"/>
           <p:cNvSpPr/>
           <p:nvPr/>
         </p:nvSpPr>
         <p:spPr>
           <a:xfrm>
-            <a:off x="533400" y="1155700"/>
-            <a:ext cx="11125200" cy="25400"/>
+            <a:off x="6210300" y="2768600"/>
+            <a:ext cx="5448300" cy="2603500"/>
           </a:xfrm>
           <a:prstGeom prst="rect">
             <a:avLst/>
           </a:prstGeom>
           <a:solidFill>
-            <a:srgbClr val="181817"/>
+            <a:srgbClr val="E7E0D5"/>
           </a:solidFill>
           <a:ln>
             <a:noFill/>
@@ -4931,98 +5154,13 @@
       </p:sp>
       <p:sp>
         <p:nvSpPr>
-          <p:cNvPr id="9" name="TextBox 8"/>
-          <p:cNvSpPr txBox="1"/>
-          <p:nvPr/>
-        </p:nvSpPr>
-        <p:spPr>
-          <a:xfrm>
-            <a:off x="508000" y="1422400"/>
-            <a:ext cx="11176000" cy="1079500"/>
-          </a:xfrm>
-          <a:prstGeom prst="rect">
-            <a:avLst/>
-          </a:prstGeom>
-          <a:noFill/>
-        </p:spPr>
-        <p:txBody>
-          <a:bodyPr wrap="none" lIns="0" rIns="0" tIns="0" bIns="0">
-            <a:spAutoFit/>
-          </a:bodyPr>
-          <a:lstStyle/>
-          <a:p>
-            <a:pPr>
-              <a:lnSpc>
-                <a:spcPts val="3740"/>
-              </a:lnSpc>
-              <a:spcAft>
-                <a:spcPts val="0"/>
-              </a:spcAft>
-              <a:defRPr sz="3400" b="1">
-                <a:solidFill>
-                  <a:srgbClr val="181817"/>
-                </a:solidFill>
-                <a:latin typeface="Arial"/>
-              </a:defRPr>
-            </a:pPr>
-            <a:r>
-              <a:t>Dvě metody, odlišný pohled.</a:t>
-            </a:r>
-          </a:p>
-        </p:txBody>
-      </p:sp>
-      <p:sp>
-        <p:nvSpPr>
-          <p:cNvPr id="10" name="Rectangle 9"/>
+          <p:cNvPr id="14" name="Rectangle 13"/>
           <p:cNvSpPr/>
           <p:nvPr/>
         </p:nvSpPr>
         <p:spPr>
           <a:xfrm>
-            <a:off x="533400" y="2768600"/>
-            <a:ext cx="5448300" cy="2603500"/>
-          </a:xfrm>
-          <a:prstGeom prst="rect">
-            <a:avLst/>
-          </a:prstGeom>
-          <a:solidFill>
-            <a:srgbClr val="181817"/>
-          </a:solidFill>
-          <a:ln>
-            <a:noFill/>
-          </a:ln>
-        </p:spPr>
-        <p:style>
-          <a:lnRef idx="1">
-            <a:schemeClr val="accent1"/>
-          </a:lnRef>
-          <a:fillRef idx="3">
-            <a:schemeClr val="accent1"/>
-          </a:fillRef>
-          <a:effectRef idx="2">
-            <a:schemeClr val="accent1"/>
-          </a:effectRef>
-          <a:fontRef idx="minor">
-            <a:schemeClr val="lt1"/>
-          </a:fontRef>
-        </p:style>
-        <p:txBody>
-          <a:bodyPr rtlCol="0" anchor="ctr"/>
-          <a:lstStyle/>
-          <a:p>
-            <a:pPr algn="ctr"/>
-          </a:p>
-        </p:txBody>
-      </p:sp>
-      <p:sp>
-        <p:nvSpPr>
-          <p:cNvPr id="11" name="Rectangle 10"/>
-          <p:cNvSpPr/>
-          <p:nvPr/>
-        </p:nvSpPr>
-        <p:spPr>
-          <a:xfrm>
-            <a:off x="533400" y="2768600"/>
+            <a:off x="6210300" y="2768600"/>
             <a:ext cx="5448300" cy="76200"/>
           </a:xfrm>
           <a:prstGeom prst="rect">
@@ -5059,13 +5197,13 @@
       </p:sp>
       <p:sp>
         <p:nvSpPr>
-          <p:cNvPr id="12" name="TextBox 11"/>
+          <p:cNvPr id="15" name="TextBox 14"/>
           <p:cNvSpPr txBox="1"/>
           <p:nvPr/>
         </p:nvSpPr>
         <p:spPr>
           <a:xfrm>
-            <a:off x="749300" y="3035300"/>
+            <a:off x="6426200" y="3035300"/>
             <a:ext cx="5016500" cy="685800"/>
           </a:xfrm>
           <a:prstGeom prst="rect">
@@ -5088,26 +5226,26 @@
               </a:spcAft>
               <a:defRPr sz="2000" b="1">
                 <a:solidFill>
-                  <a:srgbClr val="F4F0E7"/>
-                </a:solidFill>
-                <a:latin typeface="Arial"/>
-              </a:defRPr>
-            </a:pPr>
-            <a:r>
-              <a:t>Nielsenovy heuristiky</a:t>
-            </a:r>
-          </a:p>
-        </p:txBody>
-      </p:sp>
-      <p:sp>
-        <p:nvSpPr>
-          <p:cNvPr id="13" name="TextBox 12"/>
+                  <a:srgbClr val="181817"/>
+                </a:solidFill>
+                <a:latin typeface="Arial"/>
+              </a:defRPr>
+            </a:pPr>
+            <a:r>
+              <a:t>Kognitivní průchod</a:t>
+            </a:r>
+          </a:p>
+        </p:txBody>
+      </p:sp>
+      <p:sp>
+        <p:nvSpPr>
+          <p:cNvPr id="16" name="TextBox 15"/>
           <p:cNvSpPr txBox="1"/>
           <p:nvPr/>
         </p:nvSpPr>
         <p:spPr>
           <a:xfrm>
-            <a:off x="749300" y="3733800"/>
+            <a:off x="6426200" y="3733800"/>
             <a:ext cx="5016500" cy="1511300"/>
           </a:xfrm>
           <a:prstGeom prst="rect">
@@ -5130,13 +5268,13 @@
               </a:spcAft>
               <a:defRPr sz="1420" b="0">
                 <a:solidFill>
-                  <a:srgbClr val="F4F0E7"/>
-                </a:solidFill>
-                <a:latin typeface="Arial"/>
-              </a:defRPr>
-            </a:pPr>
-            <a:r>
-              <a:t>Stav systému, konzistence, prevence chyb, kontrola</a:t>
+                  <a:srgbClr val="181817"/>
+                </a:solidFill>
+                <a:latin typeface="Arial"/>
+              </a:defRPr>
+            </a:pPr>
+            <a:r>
+              <a:t>Dva scénáře z cizí specifikace, krok po kroku.</a:t>
             </a:r>
           </a:p>
           <a:p>
@@ -5149,14 +5287,11 @@
               </a:spcAft>
               <a:defRPr sz="1420" b="0">
                 <a:solidFill>
-                  <a:srgbClr val="F4F0E7"/>
-                </a:solidFill>
-                <a:latin typeface="Arial"/>
-              </a:defRPr>
-            </a:pPr>
-            <a:r>
-              <a:t>uživatele a srozumitelná pomoc.</a:t>
-            </a:r>
+                  <a:srgbClr val="181817"/>
+                </a:solidFill>
+                <a:latin typeface="Arial"/>
+              </a:defRPr>
+            </a:pPr>
           </a:p>
           <a:p>
             <a:pPr>
@@ -5168,129 +5303,27 @@
               </a:spcAft>
               <a:defRPr sz="1420" b="0">
                 <a:solidFill>
-                  <a:srgbClr val="F4F0E7"/>
-                </a:solidFill>
-                <a:latin typeface="Arial"/>
-              </a:defRPr>
-            </a:pPr>
-          </a:p>
-          <a:p>
-            <a:pPr>
-              <a:lnSpc>
-                <a:spcPts val="1689"/>
-              </a:lnSpc>
-              <a:spcAft>
-                <a:spcPts val="0"/>
-              </a:spcAft>
-              <a:defRPr sz="1420" b="0">
-                <a:solidFill>
-                  <a:srgbClr val="F4F0E7"/>
-                </a:solidFill>
-                <a:latin typeface="Arial"/>
-              </a:defRPr>
-            </a:pPr>
-            <a:r>
-              <a:t>Nález přiřadit konkrétnímu pravidlu.</a:t>
-            </a:r>
-          </a:p>
-        </p:txBody>
-      </p:sp>
-      <p:sp>
-        <p:nvSpPr>
-          <p:cNvPr id="14" name="Rectangle 13"/>
-          <p:cNvSpPr/>
-          <p:nvPr/>
-        </p:nvSpPr>
-        <p:spPr>
-          <a:xfrm>
-            <a:off x="6210300" y="2768600"/>
-            <a:ext cx="5448300" cy="2603500"/>
-          </a:xfrm>
-          <a:prstGeom prst="rect">
-            <a:avLst/>
-          </a:prstGeom>
-          <a:solidFill>
-            <a:srgbClr val="E7E0D5"/>
-          </a:solidFill>
-          <a:ln>
-            <a:noFill/>
-          </a:ln>
-        </p:spPr>
-        <p:style>
-          <a:lnRef idx="1">
-            <a:schemeClr val="accent1"/>
-          </a:lnRef>
-          <a:fillRef idx="3">
-            <a:schemeClr val="accent1"/>
-          </a:fillRef>
-          <a:effectRef idx="2">
-            <a:schemeClr val="accent1"/>
-          </a:effectRef>
-          <a:fontRef idx="minor">
-            <a:schemeClr val="lt1"/>
-          </a:fontRef>
-        </p:style>
-        <p:txBody>
-          <a:bodyPr rtlCol="0" anchor="ctr"/>
-          <a:lstStyle/>
-          <a:p>
-            <a:pPr algn="ctr"/>
-          </a:p>
-        </p:txBody>
-      </p:sp>
-      <p:sp>
-        <p:nvSpPr>
-          <p:cNvPr id="15" name="Rectangle 14"/>
-          <p:cNvSpPr/>
-          <p:nvPr/>
-        </p:nvSpPr>
-        <p:spPr>
-          <a:xfrm>
-            <a:off x="6210300" y="2768600"/>
-            <a:ext cx="5448300" cy="76200"/>
-          </a:xfrm>
-          <a:prstGeom prst="rect">
-            <a:avLst/>
-          </a:prstGeom>
-          <a:solidFill>
-            <a:srgbClr val="F45E2B"/>
-          </a:solidFill>
-          <a:ln>
-            <a:noFill/>
-          </a:ln>
-        </p:spPr>
-        <p:style>
-          <a:lnRef idx="1">
-            <a:schemeClr val="accent1"/>
-          </a:lnRef>
-          <a:fillRef idx="3">
-            <a:schemeClr val="accent1"/>
-          </a:fillRef>
-          <a:effectRef idx="2">
-            <a:schemeClr val="accent1"/>
-          </a:effectRef>
-          <a:fontRef idx="minor">
-            <a:schemeClr val="lt1"/>
-          </a:fontRef>
-        </p:style>
-        <p:txBody>
-          <a:bodyPr rtlCol="0" anchor="ctr"/>
-          <a:lstStyle/>
-          <a:p>
-            <a:pPr algn="ctr"/>
-          </a:p>
-        </p:txBody>
-      </p:sp>
-      <p:sp>
-        <p:nvSpPr>
-          <p:cNvPr id="16" name="TextBox 15"/>
+                  <a:srgbClr val="181817"/>
+                </a:solidFill>
+                <a:latin typeface="Arial"/>
+              </a:defRPr>
+            </a:pPr>
+            <a:r>
+              <a:t>Ví uživatel co udělat, najde ovládání a pozná výsledek?</a:t>
+            </a:r>
+          </a:p>
+        </p:txBody>
+      </p:sp>
+      <p:sp>
+        <p:nvSpPr>
+          <p:cNvPr id="17" name="TextBox 16"/>
           <p:cNvSpPr txBox="1"/>
           <p:nvPr/>
         </p:nvSpPr>
         <p:spPr>
           <a:xfrm>
-            <a:off x="6426200" y="3035300"/>
-            <a:ext cx="5016500" cy="685800"/>
+            <a:off x="533400" y="5676900"/>
+            <a:ext cx="11125200" cy="546100"/>
           </a:xfrm>
           <a:prstGeom prst="rect">
             <a:avLst/>
@@ -5305,34 +5338,34 @@
           <a:p>
             <a:pPr>
               <a:lnSpc>
-                <a:spcPts val="2200"/>
-              </a:lnSpc>
-              <a:spcAft>
-                <a:spcPts val="0"/>
-              </a:spcAft>
-              <a:defRPr sz="2000" b="1">
-                <a:solidFill>
-                  <a:srgbClr val="181817"/>
-                </a:solidFill>
-                <a:latin typeface="Arial"/>
-              </a:defRPr>
-            </a:pPr>
-            <a:r>
-              <a:t>Kognitivní průchod</a:t>
-            </a:r>
-          </a:p>
-        </p:txBody>
-      </p:sp>
-      <p:sp>
-        <p:nvSpPr>
-          <p:cNvPr id="17" name="TextBox 16"/>
+                <a:spcPts val="1583"/>
+              </a:lnSpc>
+              <a:spcAft>
+                <a:spcPts val="0"/>
+              </a:spcAft>
+              <a:defRPr sz="1320" b="0">
+                <a:solidFill>
+                  <a:srgbClr val="68635B"/>
+                </a:solidFill>
+                <a:latin typeface="Arial"/>
+              </a:defRPr>
+            </a:pPr>
+            <a:r>
+              <a:t>Doplněk: úzký viewport, klávesnice, navigace a interaktivní stavy.</a:t>
+            </a:r>
+          </a:p>
+        </p:txBody>
+      </p:sp>
+      <p:sp>
+        <p:nvSpPr>
+          <p:cNvPr id="18" name="TextBox 17"/>
           <p:cNvSpPr txBox="1"/>
           <p:nvPr/>
         </p:nvSpPr>
         <p:spPr>
           <a:xfrm>
-            <a:off x="6426200" y="3733800"/>
-            <a:ext cx="5016500" cy="1511300"/>
+            <a:off x="533400" y="6413500"/>
+            <a:ext cx="10033000" cy="181610"/>
           </a:xfrm>
           <a:prstGeom prst="rect">
             <a:avLst/>
@@ -5347,89 +5380,12 @@
           <a:p>
             <a:pPr>
               <a:lnSpc>
-                <a:spcPts val="1689"/>
-              </a:lnSpc>
-              <a:spcAft>
-                <a:spcPts val="0"/>
-              </a:spcAft>
-              <a:defRPr sz="1420" b="0">
-                <a:solidFill>
-                  <a:srgbClr val="181817"/>
-                </a:solidFill>
-                <a:latin typeface="Arial"/>
-              </a:defRPr>
-            </a:pPr>
-            <a:r>
-              <a:t>Dva scénáře z cizí specifikace, krok po kroku.</a:t>
-            </a:r>
-          </a:p>
-          <a:p>
-            <a:pPr>
-              <a:lnSpc>
-                <a:spcPts val="1689"/>
-              </a:lnSpc>
-              <a:spcAft>
-                <a:spcPts val="0"/>
-              </a:spcAft>
-              <a:defRPr sz="1420" b="0">
-                <a:solidFill>
-                  <a:srgbClr val="181817"/>
-                </a:solidFill>
-                <a:latin typeface="Arial"/>
-              </a:defRPr>
-            </a:pPr>
-          </a:p>
-          <a:p>
-            <a:pPr>
-              <a:lnSpc>
-                <a:spcPts val="1689"/>
-              </a:lnSpc>
-              <a:spcAft>
-                <a:spcPts val="0"/>
-              </a:spcAft>
-              <a:defRPr sz="1420" b="0">
-                <a:solidFill>
-                  <a:srgbClr val="181817"/>
-                </a:solidFill>
-                <a:latin typeface="Arial"/>
-              </a:defRPr>
-            </a:pPr>
-            <a:r>
-              <a:t>Ví uživatel co udělat, najde ovládání a pozná výsledek?</a:t>
-            </a:r>
-          </a:p>
-        </p:txBody>
-      </p:sp>
-      <p:sp>
-        <p:nvSpPr>
-          <p:cNvPr id="18" name="TextBox 17"/>
-          <p:cNvSpPr txBox="1"/>
-          <p:nvPr/>
-        </p:nvSpPr>
-        <p:spPr>
-          <a:xfrm>
-            <a:off x="533400" y="5676900"/>
-            <a:ext cx="11125200" cy="546100"/>
-          </a:xfrm>
-          <a:prstGeom prst="rect">
-            <a:avLst/>
-          </a:prstGeom>
-          <a:noFill/>
-        </p:spPr>
-        <p:txBody>
-          <a:bodyPr wrap="none" lIns="0" rIns="0" tIns="0" bIns="0">
-            <a:spAutoFit/>
-          </a:bodyPr>
-          <a:lstStyle/>
-          <a:p>
-            <a:pPr>
-              <a:lnSpc>
-                <a:spcPts val="1583"/>
-              </a:lnSpc>
-              <a:spcAft>
-                <a:spcPts val="0"/>
-              </a:spcAft>
-              <a:defRPr sz="1320" b="0">
+                <a:spcPts val="930"/>
+              </a:lnSpc>
+              <a:spcAft>
+                <a:spcPts val="0"/>
+              </a:spcAft>
+              <a:defRPr sz="750" b="0">
                 <a:solidFill>
                   <a:srgbClr val="68635B"/>
                 </a:solidFill>
@@ -5437,7 +5393,7 @@
               </a:defRPr>
             </a:pPr>
             <a:r>
-              <a:t>Doplněk: úzký viewport, klávesnice, navigace a interaktivní stavy.</a:t>
+              <a:t>METODICKÁ ŠABLONA — DOPLNIT CIZÍ PROJEKT</a:t>
             </a:r>
           </a:p>
         </p:txBody>
@@ -5445,48 +5401,6 @@
       <p:sp>
         <p:nvSpPr>
           <p:cNvPr id="19" name="TextBox 18"/>
-          <p:cNvSpPr txBox="1"/>
-          <p:nvPr/>
-        </p:nvSpPr>
-        <p:spPr>
-          <a:xfrm>
-            <a:off x="533400" y="6413500"/>
-            <a:ext cx="10033000" cy="181610"/>
-          </a:xfrm>
-          <a:prstGeom prst="rect">
-            <a:avLst/>
-          </a:prstGeom>
-          <a:noFill/>
-        </p:spPr>
-        <p:txBody>
-          <a:bodyPr wrap="none" lIns="0" rIns="0" tIns="0" bIns="0">
-            <a:spAutoFit/>
-          </a:bodyPr>
-          <a:lstStyle/>
-          <a:p>
-            <a:pPr>
-              <a:lnSpc>
-                <a:spcPts val="930"/>
-              </a:lnSpc>
-              <a:spcAft>
-                <a:spcPts val="0"/>
-              </a:spcAft>
-              <a:defRPr sz="750" b="0">
-                <a:solidFill>
-                  <a:srgbClr val="68635B"/>
-                </a:solidFill>
-                <a:latin typeface="Arial"/>
-              </a:defRPr>
-            </a:pPr>
-            <a:r>
-              <a:t>METODICKÁ ŠABLONA — DOPLNIT CIZÍ PROJEKT</a:t>
-            </a:r>
-          </a:p>
-        </p:txBody>
-      </p:sp>
-      <p:sp>
-        <p:nvSpPr>
-          <p:cNvPr id="20" name="TextBox 19"/>
           <p:cNvSpPr txBox="1"/>
           <p:nvPr/>
         </p:nvSpPr>
@@ -5715,14 +5629,184 @@
       </p:sp>
       <p:sp>
         <p:nvSpPr>
-          <p:cNvPr id="6" name="Rectangle 5"/>
+          <p:cNvPr id="6" name="TextBox 5"/>
+          <p:cNvSpPr txBox="1"/>
+          <p:nvPr/>
+        </p:nvSpPr>
+        <p:spPr>
+          <a:xfrm>
+            <a:off x="5588000" y="533400"/>
+            <a:ext cx="6070600" cy="220979"/>
+          </a:xfrm>
+          <a:prstGeom prst="rect">
+            <a:avLst/>
+          </a:prstGeom>
+          <a:noFill/>
+        </p:spPr>
+        <p:txBody>
+          <a:bodyPr wrap="none" lIns="0" rIns="0" tIns="0" bIns="0">
+            <a:spAutoFit/>
+          </a:bodyPr>
+          <a:lstStyle/>
+          <a:p>
+            <a:pPr>
+              <a:lnSpc>
+                <a:spcPts val="1240"/>
+              </a:lnSpc>
+              <a:spcAft>
+                <a:spcPts val="0"/>
+              </a:spcAft>
+              <a:defRPr sz="1000" b="1">
+                <a:solidFill>
+                  <a:srgbClr val="68635B"/>
+                </a:solidFill>
+                <a:latin typeface="Arial"/>
+              </a:defRPr>
+            </a:pPr>
+            <a:r>
+              <a:t>PŘEDEM SJEDNOCENÁ STUPNICE</a:t>
+            </a:r>
+          </a:p>
+        </p:txBody>
+      </p:sp>
+      <p:sp>
+        <p:nvSpPr>
+          <p:cNvPr id="7" name="Rectangle 6"/>
           <p:cNvSpPr/>
           <p:nvPr/>
         </p:nvSpPr>
         <p:spPr>
           <a:xfrm>
-            <a:off x="1866900" y="368300"/>
-            <a:ext cx="88900" cy="431800"/>
+            <a:off x="533400" y="1155700"/>
+            <a:ext cx="11125200" cy="25400"/>
+          </a:xfrm>
+          <a:prstGeom prst="rect">
+            <a:avLst/>
+          </a:prstGeom>
+          <a:solidFill>
+            <a:srgbClr val="181817"/>
+          </a:solidFill>
+          <a:ln>
+            <a:noFill/>
+          </a:ln>
+        </p:spPr>
+        <p:style>
+          <a:lnRef idx="1">
+            <a:schemeClr val="accent1"/>
+          </a:lnRef>
+          <a:fillRef idx="3">
+            <a:schemeClr val="accent1"/>
+          </a:fillRef>
+          <a:effectRef idx="2">
+            <a:schemeClr val="accent1"/>
+          </a:effectRef>
+          <a:fontRef idx="minor">
+            <a:schemeClr val="lt1"/>
+          </a:fontRef>
+        </p:style>
+        <p:txBody>
+          <a:bodyPr rtlCol="0" anchor="ctr"/>
+          <a:lstStyle/>
+          <a:p>
+            <a:pPr algn="ctr"/>
+          </a:p>
+        </p:txBody>
+      </p:sp>
+      <p:sp>
+        <p:nvSpPr>
+          <p:cNvPr id="8" name="TextBox 7"/>
+          <p:cNvSpPr txBox="1"/>
+          <p:nvPr/>
+        </p:nvSpPr>
+        <p:spPr>
+          <a:xfrm>
+            <a:off x="508000" y="1422400"/>
+            <a:ext cx="11176000" cy="1079500"/>
+          </a:xfrm>
+          <a:prstGeom prst="rect">
+            <a:avLst/>
+          </a:prstGeom>
+          <a:noFill/>
+        </p:spPr>
+        <p:txBody>
+          <a:bodyPr wrap="none" lIns="0" rIns="0" tIns="0" bIns="0">
+            <a:spAutoFit/>
+          </a:bodyPr>
+          <a:lstStyle/>
+          <a:p>
+            <a:pPr>
+              <a:lnSpc>
+                <a:spcPts val="3740"/>
+              </a:lnSpc>
+              <a:spcAft>
+                <a:spcPts val="0"/>
+              </a:spcAft>
+              <a:defRPr sz="3400" b="1">
+                <a:solidFill>
+                  <a:srgbClr val="181817"/>
+                </a:solidFill>
+                <a:latin typeface="Arial"/>
+              </a:defRPr>
+            </a:pPr>
+            <a:r>
+              <a:t>Závažnost určuje dopad.</a:t>
+            </a:r>
+          </a:p>
+        </p:txBody>
+      </p:sp>
+      <p:sp>
+        <p:nvSpPr>
+          <p:cNvPr id="9" name="Rectangle 8"/>
+          <p:cNvSpPr/>
+          <p:nvPr/>
+        </p:nvSpPr>
+        <p:spPr>
+          <a:xfrm>
+            <a:off x="533400" y="2768600"/>
+            <a:ext cx="3556000" cy="2603500"/>
+          </a:xfrm>
+          <a:prstGeom prst="rect">
+            <a:avLst/>
+          </a:prstGeom>
+          <a:solidFill>
+            <a:srgbClr val="181817"/>
+          </a:solidFill>
+          <a:ln>
+            <a:noFill/>
+          </a:ln>
+        </p:spPr>
+        <p:style>
+          <a:lnRef idx="1">
+            <a:schemeClr val="accent1"/>
+          </a:lnRef>
+          <a:fillRef idx="3">
+            <a:schemeClr val="accent1"/>
+          </a:fillRef>
+          <a:effectRef idx="2">
+            <a:schemeClr val="accent1"/>
+          </a:effectRef>
+          <a:fontRef idx="minor">
+            <a:schemeClr val="lt1"/>
+          </a:fontRef>
+        </p:style>
+        <p:txBody>
+          <a:bodyPr rtlCol="0" anchor="ctr"/>
+          <a:lstStyle/>
+          <a:p>
+            <a:pPr algn="ctr"/>
+          </a:p>
+        </p:txBody>
+      </p:sp>
+      <p:sp>
+        <p:nvSpPr>
+          <p:cNvPr id="10" name="Rectangle 9"/>
+          <p:cNvSpPr/>
+          <p:nvPr/>
+        </p:nvSpPr>
+        <p:spPr>
+          <a:xfrm>
+            <a:off x="533400" y="2768600"/>
+            <a:ext cx="3556000" cy="76200"/>
           </a:xfrm>
           <a:prstGeom prst="rect">
             <a:avLst/>
@@ -5758,14 +5842,14 @@
       </p:sp>
       <p:sp>
         <p:nvSpPr>
-          <p:cNvPr id="7" name="TextBox 6"/>
+          <p:cNvPr id="11" name="TextBox 10"/>
           <p:cNvSpPr txBox="1"/>
           <p:nvPr/>
         </p:nvSpPr>
         <p:spPr>
           <a:xfrm>
-            <a:off x="5588000" y="533400"/>
-            <a:ext cx="6070600" cy="220979"/>
+            <a:off x="749300" y="3035300"/>
+            <a:ext cx="3124200" cy="685800"/>
           </a:xfrm>
           <a:prstGeom prst="rect">
             <a:avLst/>
@@ -5780,40 +5864,155 @@
           <a:p>
             <a:pPr>
               <a:lnSpc>
-                <a:spcPts val="1240"/>
-              </a:lnSpc>
-              <a:spcAft>
-                <a:spcPts val="0"/>
-              </a:spcAft>
-              <a:defRPr sz="1000" b="1">
-                <a:solidFill>
-                  <a:srgbClr val="68635B"/>
-                </a:solidFill>
-                <a:latin typeface="Arial"/>
-              </a:defRPr>
-            </a:pPr>
-            <a:r>
-              <a:t>PŘEDEM SJEDNOCENÁ STUPNICE</a:t>
-            </a:r>
-          </a:p>
-        </p:txBody>
-      </p:sp>
-      <p:sp>
-        <p:nvSpPr>
-          <p:cNvPr id="8" name="Rectangle 7"/>
+                <a:spcPts val="2200"/>
+              </a:lnSpc>
+              <a:spcAft>
+                <a:spcPts val="0"/>
+              </a:spcAft>
+              <a:defRPr sz="2000" b="1">
+                <a:solidFill>
+                  <a:srgbClr val="F4F0E7"/>
+                </a:solidFill>
+                <a:latin typeface="Arial"/>
+              </a:defRPr>
+            </a:pPr>
+            <a:r>
+              <a:t>Kritický</a:t>
+            </a:r>
+          </a:p>
+        </p:txBody>
+      </p:sp>
+      <p:sp>
+        <p:nvSpPr>
+          <p:cNvPr id="12" name="TextBox 11"/>
+          <p:cNvSpPr txBox="1"/>
+          <p:nvPr/>
+        </p:nvSpPr>
+        <p:spPr>
+          <a:xfrm>
+            <a:off x="749300" y="3733800"/>
+            <a:ext cx="3124200" cy="1511300"/>
+          </a:xfrm>
+          <a:prstGeom prst="rect">
+            <a:avLst/>
+          </a:prstGeom>
+          <a:noFill/>
+        </p:spPr>
+        <p:txBody>
+          <a:bodyPr wrap="none" lIns="0" rIns="0" tIns="0" bIns="0">
+            <a:spAutoFit/>
+          </a:bodyPr>
+          <a:lstStyle/>
+          <a:p>
+            <a:pPr>
+              <a:lnSpc>
+                <a:spcPts val="1689"/>
+              </a:lnSpc>
+              <a:spcAft>
+                <a:spcPts val="0"/>
+              </a:spcAft>
+              <a:defRPr sz="1420" b="0">
+                <a:solidFill>
+                  <a:srgbClr val="F4F0E7"/>
+                </a:solidFill>
+                <a:latin typeface="Arial"/>
+              </a:defRPr>
+            </a:pPr>
+            <a:r>
+              <a:t>Klíčový scénář nelze dokončit a</a:t>
+            </a:r>
+          </a:p>
+          <a:p>
+            <a:pPr>
+              <a:lnSpc>
+                <a:spcPts val="1689"/>
+              </a:lnSpc>
+              <a:spcAft>
+                <a:spcPts val="0"/>
+              </a:spcAft>
+              <a:defRPr sz="1420" b="0">
+                <a:solidFill>
+                  <a:srgbClr val="F4F0E7"/>
+                </a:solidFill>
+                <a:latin typeface="Arial"/>
+              </a:defRPr>
+            </a:pPr>
+            <a:r>
+              <a:t>neexistuje rozumná náhradní</a:t>
+            </a:r>
+          </a:p>
+          <a:p>
+            <a:pPr>
+              <a:lnSpc>
+                <a:spcPts val="1689"/>
+              </a:lnSpc>
+              <a:spcAft>
+                <a:spcPts val="0"/>
+              </a:spcAft>
+              <a:defRPr sz="1420" b="0">
+                <a:solidFill>
+                  <a:srgbClr val="F4F0E7"/>
+                </a:solidFill>
+                <a:latin typeface="Arial"/>
+              </a:defRPr>
+            </a:pPr>
+            <a:r>
+              <a:t>cesta.</a:t>
+            </a:r>
+          </a:p>
+          <a:p>
+            <a:pPr>
+              <a:lnSpc>
+                <a:spcPts val="1689"/>
+              </a:lnSpc>
+              <a:spcAft>
+                <a:spcPts val="0"/>
+              </a:spcAft>
+              <a:defRPr sz="1420" b="0">
+                <a:solidFill>
+                  <a:srgbClr val="F4F0E7"/>
+                </a:solidFill>
+                <a:latin typeface="Arial"/>
+              </a:defRPr>
+            </a:pPr>
+          </a:p>
+          <a:p>
+            <a:pPr>
+              <a:lnSpc>
+                <a:spcPts val="1689"/>
+              </a:lnSpc>
+              <a:spcAft>
+                <a:spcPts val="0"/>
+              </a:spcAft>
+              <a:defRPr sz="1420" b="0">
+                <a:solidFill>
+                  <a:srgbClr val="F4F0E7"/>
+                </a:solidFill>
+                <a:latin typeface="Arial"/>
+              </a:defRPr>
+            </a:pPr>
+            <a:r>
+              <a:t>Doložit konkrétní blokující krok.</a:t>
+            </a:r>
+          </a:p>
+        </p:txBody>
+      </p:sp>
+      <p:sp>
+        <p:nvSpPr>
+          <p:cNvPr id="13" name="Rectangle 12"/>
           <p:cNvSpPr/>
           <p:nvPr/>
         </p:nvSpPr>
         <p:spPr>
           <a:xfrm>
-            <a:off x="533400" y="1155700"/>
-            <a:ext cx="11125200" cy="25400"/>
+            <a:off x="4318000" y="2768600"/>
+            <a:ext cx="3556000" cy="2603500"/>
           </a:xfrm>
           <a:prstGeom prst="rect">
             <a:avLst/>
           </a:prstGeom>
           <a:solidFill>
-            <a:srgbClr val="181817"/>
+            <a:srgbClr val="E7E0D5"/>
           </a:solidFill>
           <a:ln>
             <a:noFill/>
@@ -5843,98 +6042,13 @@
       </p:sp>
       <p:sp>
         <p:nvSpPr>
-          <p:cNvPr id="9" name="TextBox 8"/>
-          <p:cNvSpPr txBox="1"/>
-          <p:nvPr/>
-        </p:nvSpPr>
-        <p:spPr>
-          <a:xfrm>
-            <a:off x="508000" y="1422400"/>
-            <a:ext cx="11176000" cy="1079500"/>
-          </a:xfrm>
-          <a:prstGeom prst="rect">
-            <a:avLst/>
-          </a:prstGeom>
-          <a:noFill/>
-        </p:spPr>
-        <p:txBody>
-          <a:bodyPr wrap="none" lIns="0" rIns="0" tIns="0" bIns="0">
-            <a:spAutoFit/>
-          </a:bodyPr>
-          <a:lstStyle/>
-          <a:p>
-            <a:pPr>
-              <a:lnSpc>
-                <a:spcPts val="3740"/>
-              </a:lnSpc>
-              <a:spcAft>
-                <a:spcPts val="0"/>
-              </a:spcAft>
-              <a:defRPr sz="3400" b="1">
-                <a:solidFill>
-                  <a:srgbClr val="181817"/>
-                </a:solidFill>
-                <a:latin typeface="Arial"/>
-              </a:defRPr>
-            </a:pPr>
-            <a:r>
-              <a:t>Závažnost určuje dopad.</a:t>
-            </a:r>
-          </a:p>
-        </p:txBody>
-      </p:sp>
-      <p:sp>
-        <p:nvSpPr>
-          <p:cNvPr id="10" name="Rectangle 9"/>
+          <p:cNvPr id="14" name="Rectangle 13"/>
           <p:cNvSpPr/>
           <p:nvPr/>
         </p:nvSpPr>
         <p:spPr>
           <a:xfrm>
-            <a:off x="533400" y="2768600"/>
-            <a:ext cx="3556000" cy="2603500"/>
-          </a:xfrm>
-          <a:prstGeom prst="rect">
-            <a:avLst/>
-          </a:prstGeom>
-          <a:solidFill>
-            <a:srgbClr val="181817"/>
-          </a:solidFill>
-          <a:ln>
-            <a:noFill/>
-          </a:ln>
-        </p:spPr>
-        <p:style>
-          <a:lnRef idx="1">
-            <a:schemeClr val="accent1"/>
-          </a:lnRef>
-          <a:fillRef idx="3">
-            <a:schemeClr val="accent1"/>
-          </a:fillRef>
-          <a:effectRef idx="2">
-            <a:schemeClr val="accent1"/>
-          </a:effectRef>
-          <a:fontRef idx="minor">
-            <a:schemeClr val="lt1"/>
-          </a:fontRef>
-        </p:style>
-        <p:txBody>
-          <a:bodyPr rtlCol="0" anchor="ctr"/>
-          <a:lstStyle/>
-          <a:p>
-            <a:pPr algn="ctr"/>
-          </a:p>
-        </p:txBody>
-      </p:sp>
-      <p:sp>
-        <p:nvSpPr>
-          <p:cNvPr id="11" name="Rectangle 10"/>
-          <p:cNvSpPr/>
-          <p:nvPr/>
-        </p:nvSpPr>
-        <p:spPr>
-          <a:xfrm>
-            <a:off x="533400" y="2768600"/>
+            <a:off x="4318000" y="2768600"/>
             <a:ext cx="3556000" cy="76200"/>
           </a:xfrm>
           <a:prstGeom prst="rect">
@@ -5971,13 +6085,13 @@
       </p:sp>
       <p:sp>
         <p:nvSpPr>
-          <p:cNvPr id="12" name="TextBox 11"/>
+          <p:cNvPr id="15" name="TextBox 14"/>
           <p:cNvSpPr txBox="1"/>
           <p:nvPr/>
         </p:nvSpPr>
         <p:spPr>
           <a:xfrm>
-            <a:off x="749300" y="3035300"/>
+            <a:off x="4533900" y="3035300"/>
             <a:ext cx="3124200" cy="685800"/>
           </a:xfrm>
           <a:prstGeom prst="rect">
@@ -6000,26 +6114,26 @@
               </a:spcAft>
               <a:defRPr sz="2000" b="1">
                 <a:solidFill>
-                  <a:srgbClr val="F4F0E7"/>
-                </a:solidFill>
-                <a:latin typeface="Arial"/>
-              </a:defRPr>
-            </a:pPr>
-            <a:r>
-              <a:t>Kritický</a:t>
-            </a:r>
-          </a:p>
-        </p:txBody>
-      </p:sp>
-      <p:sp>
-        <p:nvSpPr>
-          <p:cNvPr id="13" name="TextBox 12"/>
+                  <a:srgbClr val="181817"/>
+                </a:solidFill>
+                <a:latin typeface="Arial"/>
+              </a:defRPr>
+            </a:pPr>
+            <a:r>
+              <a:t>Významný</a:t>
+            </a:r>
+          </a:p>
+        </p:txBody>
+      </p:sp>
+      <p:sp>
+        <p:nvSpPr>
+          <p:cNvPr id="16" name="TextBox 15"/>
           <p:cNvSpPr txBox="1"/>
           <p:nvPr/>
         </p:nvSpPr>
         <p:spPr>
           <a:xfrm>
-            <a:off x="749300" y="3733800"/>
+            <a:off x="4533900" y="3733800"/>
             <a:ext cx="3124200" cy="1511300"/>
           </a:xfrm>
           <a:prstGeom prst="rect">
@@ -6042,13 +6156,13 @@
               </a:spcAft>
               <a:defRPr sz="1420" b="0">
                 <a:solidFill>
-                  <a:srgbClr val="F4F0E7"/>
-                </a:solidFill>
-                <a:latin typeface="Arial"/>
-              </a:defRPr>
-            </a:pPr>
-            <a:r>
-              <a:t>Klíčový scénář nelze dokončit a</a:t>
+                  <a:srgbClr val="181817"/>
+                </a:solidFill>
+                <a:latin typeface="Arial"/>
+              </a:defRPr>
+            </a:pPr>
+            <a:r>
+              <a:t>Cesta existuje, ale opakovaně</a:t>
             </a:r>
           </a:p>
           <a:p>
@@ -6061,13 +6175,13 @@
               </a:spcAft>
               <a:defRPr sz="1420" b="0">
                 <a:solidFill>
-                  <a:srgbClr val="F4F0E7"/>
-                </a:solidFill>
-                <a:latin typeface="Arial"/>
-              </a:defRPr>
-            </a:pPr>
-            <a:r>
-              <a:t>neexistuje rozumná náhradní</a:t>
+                  <a:srgbClr val="181817"/>
+                </a:solidFill>
+                <a:latin typeface="Arial"/>
+              </a:defRPr>
+            </a:pPr>
+            <a:r>
+              <a:t>vede k chybám nebo zásadní</a:t>
             </a:r>
           </a:p>
           <a:p>
@@ -6080,13 +6194,13 @@
               </a:spcAft>
               <a:defRPr sz="1420" b="0">
                 <a:solidFill>
-                  <a:srgbClr val="F4F0E7"/>
-                </a:solidFill>
-                <a:latin typeface="Arial"/>
-              </a:defRPr>
-            </a:pPr>
-            <a:r>
-              <a:t>cesta.</a:t>
+                  <a:srgbClr val="181817"/>
+                </a:solidFill>
+                <a:latin typeface="Arial"/>
+              </a:defRPr>
+            </a:pPr>
+            <a:r>
+              <a:t>nejistotě.</a:t>
             </a:r>
           </a:p>
           <a:p>
@@ -6099,7 +6213,7 @@
               </a:spcAft>
               <a:defRPr sz="1420" b="0">
                 <a:solidFill>
-                  <a:srgbClr val="F4F0E7"/>
+                  <a:srgbClr val="181817"/>
                 </a:solidFill>
                 <a:latin typeface="Arial"/>
               </a:defRPr>
@@ -6115,26 +6229,45 @@
               </a:spcAft>
               <a:defRPr sz="1420" b="0">
                 <a:solidFill>
-                  <a:srgbClr val="F4F0E7"/>
-                </a:solidFill>
-                <a:latin typeface="Arial"/>
-              </a:defRPr>
-            </a:pPr>
-            <a:r>
-              <a:t>Doložit konkrétní blokující krok.</a:t>
-            </a:r>
-          </a:p>
-        </p:txBody>
-      </p:sp>
-      <p:sp>
-        <p:nvSpPr>
-          <p:cNvPr id="14" name="Rectangle 13"/>
+                  <a:srgbClr val="181817"/>
+                </a:solidFill>
+                <a:latin typeface="Arial"/>
+              </a:defRPr>
+            </a:pPr>
+            <a:r>
+              <a:t>Popsat náklady a četnost</a:t>
+            </a:r>
+          </a:p>
+          <a:p>
+            <a:pPr>
+              <a:lnSpc>
+                <a:spcPts val="1689"/>
+              </a:lnSpc>
+              <a:spcAft>
+                <a:spcPts val="0"/>
+              </a:spcAft>
+              <a:defRPr sz="1420" b="0">
+                <a:solidFill>
+                  <a:srgbClr val="181817"/>
+                </a:solidFill>
+                <a:latin typeface="Arial"/>
+              </a:defRPr>
+            </a:pPr>
+            <a:r>
+              <a:t>problému.</a:t>
+            </a:r>
+          </a:p>
+        </p:txBody>
+      </p:sp>
+      <p:sp>
+        <p:nvSpPr>
+          <p:cNvPr id="17" name="Rectangle 16"/>
           <p:cNvSpPr/>
           <p:nvPr/>
         </p:nvSpPr>
         <p:spPr>
           <a:xfrm>
-            <a:off x="4318000" y="2768600"/>
+            <a:off x="8102600" y="2768600"/>
             <a:ext cx="3556000" cy="2603500"/>
           </a:xfrm>
           <a:prstGeom prst="rect">
@@ -6171,13 +6304,13 @@
       </p:sp>
       <p:sp>
         <p:nvSpPr>
-          <p:cNvPr id="15" name="Rectangle 14"/>
+          <p:cNvPr id="18" name="Rectangle 17"/>
           <p:cNvSpPr/>
           <p:nvPr/>
         </p:nvSpPr>
         <p:spPr>
           <a:xfrm>
-            <a:off x="4318000" y="2768600"/>
+            <a:off x="8102600" y="2768600"/>
             <a:ext cx="3556000" cy="76200"/>
           </a:xfrm>
           <a:prstGeom prst="rect">
@@ -6214,13 +6347,13 @@
       </p:sp>
       <p:sp>
         <p:nvSpPr>
-          <p:cNvPr id="16" name="TextBox 15"/>
+          <p:cNvPr id="19" name="TextBox 18"/>
           <p:cNvSpPr txBox="1"/>
           <p:nvPr/>
         </p:nvSpPr>
         <p:spPr>
           <a:xfrm>
-            <a:off x="4533900" y="3035300"/>
+            <a:off x="8318500" y="3035300"/>
             <a:ext cx="3124200" cy="685800"/>
           </a:xfrm>
           <a:prstGeom prst="rect">
@@ -6249,20 +6382,20 @@
               </a:defRPr>
             </a:pPr>
             <a:r>
-              <a:t>Významný</a:t>
-            </a:r>
-          </a:p>
-        </p:txBody>
-      </p:sp>
-      <p:sp>
-        <p:nvSpPr>
-          <p:cNvPr id="17" name="TextBox 16"/>
+              <a:t>Drobný</a:t>
+            </a:r>
+          </a:p>
+        </p:txBody>
+      </p:sp>
+      <p:sp>
+        <p:nvSpPr>
+          <p:cNvPr id="20" name="TextBox 19"/>
           <p:cNvSpPr txBox="1"/>
           <p:nvPr/>
         </p:nvSpPr>
         <p:spPr>
           <a:xfrm>
-            <a:off x="4533900" y="3733800"/>
+            <a:off x="8318500" y="3733800"/>
             <a:ext cx="3124200" cy="1511300"/>
           </a:xfrm>
           <a:prstGeom prst="rect">
@@ -6291,7 +6424,7 @@
               </a:defRPr>
             </a:pPr>
             <a:r>
-              <a:t>Cesta existuje, ale opakovaně</a:t>
+              <a:t>Lokální nesrovnalost či čitelnost;</a:t>
             </a:r>
           </a:p>
           <a:p>
@@ -6310,7 +6443,7 @@
               </a:defRPr>
             </a:pPr>
             <a:r>
-              <a:t>vede k chybám nebo zásadní</a:t>
+              <a:t>cíl zůstává dosažitelný.</a:t>
             </a:r>
           </a:p>
           <a:p>
@@ -6328,9 +6461,6 @@
                 <a:latin typeface="Arial"/>
               </a:defRPr>
             </a:pPr>
-            <a:r>
-              <a:t>nejistotě.</a:t>
-            </a:r>
           </a:p>
           <a:p>
             <a:pPr>
@@ -6347,143 +6477,22 @@
                 <a:latin typeface="Arial"/>
               </a:defRPr>
             </a:pPr>
-          </a:p>
-          <a:p>
-            <a:pPr>
-              <a:lnSpc>
-                <a:spcPts val="1689"/>
-              </a:lnSpc>
-              <a:spcAft>
-                <a:spcPts val="0"/>
-              </a:spcAft>
-              <a:defRPr sz="1420" b="0">
-                <a:solidFill>
-                  <a:srgbClr val="181817"/>
-                </a:solidFill>
-                <a:latin typeface="Arial"/>
-              </a:defRPr>
-            </a:pPr>
-            <a:r>
-              <a:t>Popsat náklady a četnost</a:t>
-            </a:r>
-          </a:p>
-          <a:p>
-            <a:pPr>
-              <a:lnSpc>
-                <a:spcPts val="1689"/>
-              </a:lnSpc>
-              <a:spcAft>
-                <a:spcPts val="0"/>
-              </a:spcAft>
-              <a:defRPr sz="1420" b="0">
-                <a:solidFill>
-                  <a:srgbClr val="181817"/>
-                </a:solidFill>
-                <a:latin typeface="Arial"/>
-              </a:defRPr>
-            </a:pPr>
-            <a:r>
-              <a:t>problému.</a:t>
-            </a:r>
-          </a:p>
-        </p:txBody>
-      </p:sp>
-      <p:sp>
-        <p:nvSpPr>
-          <p:cNvPr id="18" name="Rectangle 17"/>
-          <p:cNvSpPr/>
-          <p:nvPr/>
-        </p:nvSpPr>
-        <p:spPr>
-          <a:xfrm>
-            <a:off x="8102600" y="2768600"/>
-            <a:ext cx="3556000" cy="2603500"/>
-          </a:xfrm>
-          <a:prstGeom prst="rect">
-            <a:avLst/>
-          </a:prstGeom>
-          <a:solidFill>
-            <a:srgbClr val="E7E0D5"/>
-          </a:solidFill>
-          <a:ln>
-            <a:noFill/>
-          </a:ln>
-        </p:spPr>
-        <p:style>
-          <a:lnRef idx="1">
-            <a:schemeClr val="accent1"/>
-          </a:lnRef>
-          <a:fillRef idx="3">
-            <a:schemeClr val="accent1"/>
-          </a:fillRef>
-          <a:effectRef idx="2">
-            <a:schemeClr val="accent1"/>
-          </a:effectRef>
-          <a:fontRef idx="minor">
-            <a:schemeClr val="lt1"/>
-          </a:fontRef>
-        </p:style>
-        <p:txBody>
-          <a:bodyPr rtlCol="0" anchor="ctr"/>
-          <a:lstStyle/>
-          <a:p>
-            <a:pPr algn="ctr"/>
-          </a:p>
-        </p:txBody>
-      </p:sp>
-      <p:sp>
-        <p:nvSpPr>
-          <p:cNvPr id="19" name="Rectangle 18"/>
-          <p:cNvSpPr/>
-          <p:nvPr/>
-        </p:nvSpPr>
-        <p:spPr>
-          <a:xfrm>
-            <a:off x="8102600" y="2768600"/>
-            <a:ext cx="3556000" cy="76200"/>
-          </a:xfrm>
-          <a:prstGeom prst="rect">
-            <a:avLst/>
-          </a:prstGeom>
-          <a:solidFill>
-            <a:srgbClr val="F45E2B"/>
-          </a:solidFill>
-          <a:ln>
-            <a:noFill/>
-          </a:ln>
-        </p:spPr>
-        <p:style>
-          <a:lnRef idx="1">
-            <a:schemeClr val="accent1"/>
-          </a:lnRef>
-          <a:fillRef idx="3">
-            <a:schemeClr val="accent1"/>
-          </a:fillRef>
-          <a:effectRef idx="2">
-            <a:schemeClr val="accent1"/>
-          </a:effectRef>
-          <a:fontRef idx="minor">
-            <a:schemeClr val="lt1"/>
-          </a:fontRef>
-        </p:style>
-        <p:txBody>
-          <a:bodyPr rtlCol="0" anchor="ctr"/>
-          <a:lstStyle/>
-          <a:p>
-            <a:pPr algn="ctr"/>
-          </a:p>
-        </p:txBody>
-      </p:sp>
-      <p:sp>
-        <p:nvSpPr>
-          <p:cNvPr id="20" name="TextBox 19"/>
+            <a:r>
+              <a:t>Oddělit od pouhé preference.</a:t>
+            </a:r>
+          </a:p>
+        </p:txBody>
+      </p:sp>
+      <p:sp>
+        <p:nvSpPr>
+          <p:cNvPr id="21" name="TextBox 20"/>
           <p:cNvSpPr txBox="1"/>
           <p:nvPr/>
         </p:nvSpPr>
         <p:spPr>
           <a:xfrm>
-            <a:off x="8318500" y="3035300"/>
-            <a:ext cx="3124200" cy="685800"/>
+            <a:off x="533400" y="6413500"/>
+            <a:ext cx="10033000" cy="181610"/>
           </a:xfrm>
           <a:prstGeom prst="rect">
             <a:avLst/>
@@ -6498,116 +6507,20 @@
           <a:p>
             <a:pPr>
               <a:lnSpc>
-                <a:spcPts val="2200"/>
-              </a:lnSpc>
-              <a:spcAft>
-                <a:spcPts val="0"/>
-              </a:spcAft>
-              <a:defRPr sz="2000" b="1">
-                <a:solidFill>
-                  <a:srgbClr val="181817"/>
-                </a:solidFill>
-                <a:latin typeface="Arial"/>
-              </a:defRPr>
-            </a:pPr>
-            <a:r>
-              <a:t>Drobný</a:t>
-            </a:r>
-          </a:p>
-        </p:txBody>
-      </p:sp>
-      <p:sp>
-        <p:nvSpPr>
-          <p:cNvPr id="21" name="TextBox 20"/>
-          <p:cNvSpPr txBox="1"/>
-          <p:nvPr/>
-        </p:nvSpPr>
-        <p:spPr>
-          <a:xfrm>
-            <a:off x="8318500" y="3733800"/>
-            <a:ext cx="3124200" cy="1511300"/>
-          </a:xfrm>
-          <a:prstGeom prst="rect">
-            <a:avLst/>
-          </a:prstGeom>
-          <a:noFill/>
-        </p:spPr>
-        <p:txBody>
-          <a:bodyPr wrap="none" lIns="0" rIns="0" tIns="0" bIns="0">
-            <a:spAutoFit/>
-          </a:bodyPr>
-          <a:lstStyle/>
-          <a:p>
-            <a:pPr>
-              <a:lnSpc>
-                <a:spcPts val="1689"/>
-              </a:lnSpc>
-              <a:spcAft>
-                <a:spcPts val="0"/>
-              </a:spcAft>
-              <a:defRPr sz="1420" b="0">
-                <a:solidFill>
-                  <a:srgbClr val="181817"/>
-                </a:solidFill>
-                <a:latin typeface="Arial"/>
-              </a:defRPr>
-            </a:pPr>
-            <a:r>
-              <a:t>Lokální nesrovnalost či čitelnost;</a:t>
-            </a:r>
-          </a:p>
-          <a:p>
-            <a:pPr>
-              <a:lnSpc>
-                <a:spcPts val="1689"/>
-              </a:lnSpc>
-              <a:spcAft>
-                <a:spcPts val="0"/>
-              </a:spcAft>
-              <a:defRPr sz="1420" b="0">
-                <a:solidFill>
-                  <a:srgbClr val="181817"/>
-                </a:solidFill>
-                <a:latin typeface="Arial"/>
-              </a:defRPr>
-            </a:pPr>
-            <a:r>
-              <a:t>cíl zůstává dosažitelný.</a:t>
-            </a:r>
-          </a:p>
-          <a:p>
-            <a:pPr>
-              <a:lnSpc>
-                <a:spcPts val="1689"/>
-              </a:lnSpc>
-              <a:spcAft>
-                <a:spcPts val="0"/>
-              </a:spcAft>
-              <a:defRPr sz="1420" b="0">
-                <a:solidFill>
-                  <a:srgbClr val="181817"/>
-                </a:solidFill>
-                <a:latin typeface="Arial"/>
-              </a:defRPr>
-            </a:pPr>
-          </a:p>
-          <a:p>
-            <a:pPr>
-              <a:lnSpc>
-                <a:spcPts val="1689"/>
-              </a:lnSpc>
-              <a:spcAft>
-                <a:spcPts val="0"/>
-              </a:spcAft>
-              <a:defRPr sz="1420" b="0">
-                <a:solidFill>
-                  <a:srgbClr val="181817"/>
-                </a:solidFill>
-                <a:latin typeface="Arial"/>
-              </a:defRPr>
-            </a:pPr>
-            <a:r>
-              <a:t>Oddělit od pouhé preference.</a:t>
+                <a:spcPts val="930"/>
+              </a:lnSpc>
+              <a:spcAft>
+                <a:spcPts val="0"/>
+              </a:spcAft>
+              <a:defRPr sz="750" b="0">
+                <a:solidFill>
+                  <a:srgbClr val="68635B"/>
+                </a:solidFill>
+                <a:latin typeface="Arial"/>
+              </a:defRPr>
+            </a:pPr>
+            <a:r>
+              <a:t>METODICKÁ ŠABLONA — DOPLNIT CIZÍ PROJEKT</a:t>
             </a:r>
           </a:p>
         </p:txBody>
@@ -6615,48 +6528,6 @@
       <p:sp>
         <p:nvSpPr>
           <p:cNvPr id="22" name="TextBox 21"/>
-          <p:cNvSpPr txBox="1"/>
-          <p:nvPr/>
-        </p:nvSpPr>
-        <p:spPr>
-          <a:xfrm>
-            <a:off x="533400" y="6413500"/>
-            <a:ext cx="10033000" cy="181610"/>
-          </a:xfrm>
-          <a:prstGeom prst="rect">
-            <a:avLst/>
-          </a:prstGeom>
-          <a:noFill/>
-        </p:spPr>
-        <p:txBody>
-          <a:bodyPr wrap="none" lIns="0" rIns="0" tIns="0" bIns="0">
-            <a:spAutoFit/>
-          </a:bodyPr>
-          <a:lstStyle/>
-          <a:p>
-            <a:pPr>
-              <a:lnSpc>
-                <a:spcPts val="930"/>
-              </a:lnSpc>
-              <a:spcAft>
-                <a:spcPts val="0"/>
-              </a:spcAft>
-              <a:defRPr sz="750" b="0">
-                <a:solidFill>
-                  <a:srgbClr val="68635B"/>
-                </a:solidFill>
-                <a:latin typeface="Arial"/>
-              </a:defRPr>
-            </a:pPr>
-            <a:r>
-              <a:t>METODICKÁ ŠABLONA — DOPLNIT CIZÍ PROJEKT</a:t>
-            </a:r>
-          </a:p>
-        </p:txBody>
-      </p:sp>
-      <p:sp>
-        <p:nvSpPr>
-          <p:cNvPr id="23" name="TextBox 22"/>
           <p:cNvSpPr txBox="1"/>
           <p:nvPr/>
         </p:nvSpPr>
@@ -6885,50 +6756,7 @@
       </p:sp>
       <p:sp>
         <p:nvSpPr>
-          <p:cNvPr id="6" name="Rectangle 5"/>
-          <p:cNvSpPr/>
-          <p:nvPr/>
-        </p:nvSpPr>
-        <p:spPr>
-          <a:xfrm>
-            <a:off x="1866900" y="368300"/>
-            <a:ext cx="88900" cy="431800"/>
-          </a:xfrm>
-          <a:prstGeom prst="rect">
-            <a:avLst/>
-          </a:prstGeom>
-          <a:solidFill>
-            <a:srgbClr val="F45E2B"/>
-          </a:solidFill>
-          <a:ln>
-            <a:noFill/>
-          </a:ln>
-        </p:spPr>
-        <p:style>
-          <a:lnRef idx="1">
-            <a:schemeClr val="accent1"/>
-          </a:lnRef>
-          <a:fillRef idx="3">
-            <a:schemeClr val="accent1"/>
-          </a:fillRef>
-          <a:effectRef idx="2">
-            <a:schemeClr val="accent1"/>
-          </a:effectRef>
-          <a:fontRef idx="minor">
-            <a:schemeClr val="lt1"/>
-          </a:fontRef>
-        </p:style>
-        <p:txBody>
-          <a:bodyPr rtlCol="0" anchor="ctr"/>
-          <a:lstStyle/>
-          <a:p>
-            <a:pPr algn="ctr"/>
-          </a:p>
-        </p:txBody>
-      </p:sp>
-      <p:sp>
-        <p:nvSpPr>
-          <p:cNvPr id="7" name="TextBox 6"/>
+          <p:cNvPr id="6" name="TextBox 5"/>
           <p:cNvSpPr txBox="1"/>
           <p:nvPr/>
         </p:nvSpPr>
@@ -6970,7 +6798,7 @@
       </p:sp>
       <p:sp>
         <p:nvSpPr>
-          <p:cNvPr id="8" name="Rectangle 7"/>
+          <p:cNvPr id="7" name="Rectangle 6"/>
           <p:cNvSpPr/>
           <p:nvPr/>
         </p:nvSpPr>
@@ -7013,7 +6841,7 @@
       </p:sp>
       <p:sp>
         <p:nvSpPr>
-          <p:cNvPr id="9" name="TextBox 8"/>
+          <p:cNvPr id="8" name="TextBox 7"/>
           <p:cNvSpPr txBox="1"/>
           <p:nvPr/>
         </p:nvSpPr>
@@ -7055,7 +6883,7 @@
       </p:sp>
       <p:sp>
         <p:nvSpPr>
-          <p:cNvPr id="10" name="Rectangle 9"/>
+          <p:cNvPr id="9" name="Rectangle 8"/>
           <p:cNvSpPr/>
           <p:nvPr/>
         </p:nvSpPr>
@@ -7098,7 +6926,7 @@
       </p:sp>
       <p:sp>
         <p:nvSpPr>
-          <p:cNvPr id="11" name="TextBox 10"/>
+          <p:cNvPr id="10" name="TextBox 9"/>
           <p:cNvSpPr txBox="1"/>
           <p:nvPr/>
         </p:nvSpPr>
@@ -7140,7 +6968,7 @@
       </p:sp>
       <p:sp>
         <p:nvSpPr>
-          <p:cNvPr id="12" name="TextBox 11"/>
+          <p:cNvPr id="11" name="TextBox 10"/>
           <p:cNvSpPr txBox="1"/>
           <p:nvPr/>
         </p:nvSpPr>
@@ -7182,7 +7010,7 @@
       </p:sp>
       <p:sp>
         <p:nvSpPr>
-          <p:cNvPr id="13" name="TextBox 12"/>
+          <p:cNvPr id="12" name="TextBox 11"/>
           <p:cNvSpPr txBox="1"/>
           <p:nvPr/>
         </p:nvSpPr>
@@ -7224,7 +7052,7 @@
       </p:sp>
       <p:sp>
         <p:nvSpPr>
-          <p:cNvPr id="14" name="TextBox 13"/>
+          <p:cNvPr id="13" name="TextBox 12"/>
           <p:cNvSpPr txBox="1"/>
           <p:nvPr/>
         </p:nvSpPr>
@@ -7266,7 +7094,7 @@
       </p:sp>
       <p:sp>
         <p:nvSpPr>
-          <p:cNvPr id="15" name="Rectangle 14"/>
+          <p:cNvPr id="14" name="Rectangle 13"/>
           <p:cNvSpPr/>
           <p:nvPr/>
         </p:nvSpPr>
@@ -7309,7 +7137,7 @@
       </p:sp>
       <p:sp>
         <p:nvSpPr>
-          <p:cNvPr id="16" name="TextBox 15"/>
+          <p:cNvPr id="15" name="TextBox 14"/>
           <p:cNvSpPr txBox="1"/>
           <p:nvPr/>
         </p:nvSpPr>
@@ -7351,7 +7179,7 @@
       </p:sp>
       <p:sp>
         <p:nvSpPr>
-          <p:cNvPr id="17" name="TextBox 16"/>
+          <p:cNvPr id="16" name="TextBox 15"/>
           <p:cNvSpPr txBox="1"/>
           <p:nvPr/>
         </p:nvSpPr>
@@ -7393,7 +7221,7 @@
       </p:sp>
       <p:sp>
         <p:nvSpPr>
-          <p:cNvPr id="18" name="TextBox 17"/>
+          <p:cNvPr id="17" name="TextBox 16"/>
           <p:cNvSpPr txBox="1"/>
           <p:nvPr/>
         </p:nvSpPr>
@@ -7435,7 +7263,7 @@
       </p:sp>
       <p:sp>
         <p:nvSpPr>
-          <p:cNvPr id="19" name="TextBox 18"/>
+          <p:cNvPr id="18" name="TextBox 17"/>
           <p:cNvSpPr txBox="1"/>
           <p:nvPr/>
         </p:nvSpPr>
@@ -7477,7 +7305,7 @@
       </p:sp>
       <p:sp>
         <p:nvSpPr>
-          <p:cNvPr id="20" name="Rectangle 19"/>
+          <p:cNvPr id="19" name="Rectangle 18"/>
           <p:cNvSpPr/>
           <p:nvPr/>
         </p:nvSpPr>
@@ -7520,7 +7348,7 @@
       </p:sp>
       <p:sp>
         <p:nvSpPr>
-          <p:cNvPr id="21" name="TextBox 20"/>
+          <p:cNvPr id="20" name="TextBox 19"/>
           <p:cNvSpPr txBox="1"/>
           <p:nvPr/>
         </p:nvSpPr>
@@ -7562,7 +7390,7 @@
       </p:sp>
       <p:sp>
         <p:nvSpPr>
-          <p:cNvPr id="22" name="TextBox 21"/>
+          <p:cNvPr id="21" name="TextBox 20"/>
           <p:cNvSpPr txBox="1"/>
           <p:nvPr/>
         </p:nvSpPr>
@@ -7604,7 +7432,7 @@
       </p:sp>
       <p:sp>
         <p:nvSpPr>
-          <p:cNvPr id="23" name="TextBox 22"/>
+          <p:cNvPr id="22" name="TextBox 21"/>
           <p:cNvSpPr txBox="1"/>
           <p:nvPr/>
         </p:nvSpPr>
@@ -7646,7 +7474,7 @@
       </p:sp>
       <p:sp>
         <p:nvSpPr>
-          <p:cNvPr id="24" name="TextBox 23"/>
+          <p:cNvPr id="23" name="TextBox 22"/>
           <p:cNvSpPr txBox="1"/>
           <p:nvPr/>
         </p:nvSpPr>
@@ -7688,7 +7516,7 @@
       </p:sp>
       <p:sp>
         <p:nvSpPr>
-          <p:cNvPr id="25" name="Rectangle 24"/>
+          <p:cNvPr id="24" name="Rectangle 23"/>
           <p:cNvSpPr/>
           <p:nvPr/>
         </p:nvSpPr>
@@ -7731,7 +7559,7 @@
       </p:sp>
       <p:sp>
         <p:nvSpPr>
-          <p:cNvPr id="26" name="TextBox 25"/>
+          <p:cNvPr id="25" name="TextBox 24"/>
           <p:cNvSpPr txBox="1"/>
           <p:nvPr/>
         </p:nvSpPr>
@@ -7773,7 +7601,7 @@
       </p:sp>
       <p:sp>
         <p:nvSpPr>
-          <p:cNvPr id="27" name="TextBox 26"/>
+          <p:cNvPr id="26" name="TextBox 25"/>
           <p:cNvSpPr txBox="1"/>
           <p:nvPr/>
         </p:nvSpPr>
@@ -7815,7 +7643,7 @@
       </p:sp>
       <p:sp>
         <p:nvSpPr>
-          <p:cNvPr id="28" name="TextBox 27"/>
+          <p:cNvPr id="27" name="TextBox 26"/>
           <p:cNvSpPr txBox="1"/>
           <p:nvPr/>
         </p:nvSpPr>
@@ -7857,7 +7685,7 @@
       </p:sp>
       <p:sp>
         <p:nvSpPr>
-          <p:cNvPr id="29" name="TextBox 28"/>
+          <p:cNvPr id="28" name="TextBox 27"/>
           <p:cNvSpPr txBox="1"/>
           <p:nvPr/>
         </p:nvSpPr>
@@ -7918,7 +7746,7 @@
       </p:sp>
       <p:sp>
         <p:nvSpPr>
-          <p:cNvPr id="30" name="TextBox 29"/>
+          <p:cNvPr id="29" name="TextBox 28"/>
           <p:cNvSpPr txBox="1"/>
           <p:nvPr/>
         </p:nvSpPr>
@@ -7960,7 +7788,7 @@
       </p:sp>
       <p:sp>
         <p:nvSpPr>
-          <p:cNvPr id="31" name="TextBox 30"/>
+          <p:cNvPr id="30" name="TextBox 29"/>
           <p:cNvSpPr txBox="1"/>
           <p:nvPr/>
         </p:nvSpPr>
@@ -8189,14 +8017,184 @@
       </p:sp>
       <p:sp>
         <p:nvSpPr>
-          <p:cNvPr id="6" name="Rectangle 5"/>
+          <p:cNvPr id="6" name="TextBox 5"/>
+          <p:cNvSpPr txBox="1"/>
+          <p:nvPr/>
+        </p:nvSpPr>
+        <p:spPr>
+          <a:xfrm>
+            <a:off x="5588000" y="533400"/>
+            <a:ext cx="6070600" cy="220979"/>
+          </a:xfrm>
+          <a:prstGeom prst="rect">
+            <a:avLst/>
+          </a:prstGeom>
+          <a:noFill/>
+        </p:spPr>
+        <p:txBody>
+          <a:bodyPr wrap="none" lIns="0" rIns="0" tIns="0" bIns="0">
+            <a:spAutoFit/>
+          </a:bodyPr>
+          <a:lstStyle/>
+          <a:p>
+            <a:pPr>
+              <a:lnSpc>
+                <a:spcPts val="1240"/>
+              </a:lnSpc>
+              <a:spcAft>
+                <a:spcPts val="0"/>
+              </a:spcAft>
+              <a:defRPr sz="1000" b="1">
+                <a:solidFill>
+                  <a:srgbClr val="68635B"/>
+                </a:solidFill>
+                <a:latin typeface="Arial"/>
+              </a:defRPr>
+            </a:pPr>
+            <a:r>
+              <a:t>VLASTNÍ OVĚŘENÍ / PRAGUE PULSE FEST</a:t>
+            </a:r>
+          </a:p>
+        </p:txBody>
+      </p:sp>
+      <p:sp>
+        <p:nvSpPr>
+          <p:cNvPr id="7" name="Rectangle 6"/>
           <p:cNvSpPr/>
           <p:nvPr/>
         </p:nvSpPr>
         <p:spPr>
           <a:xfrm>
-            <a:off x="1866900" y="368300"/>
-            <a:ext cx="88900" cy="431800"/>
+            <a:off x="533400" y="1155700"/>
+            <a:ext cx="11125200" cy="25400"/>
+          </a:xfrm>
+          <a:prstGeom prst="rect">
+            <a:avLst/>
+          </a:prstGeom>
+          <a:solidFill>
+            <a:srgbClr val="181817"/>
+          </a:solidFill>
+          <a:ln>
+            <a:noFill/>
+          </a:ln>
+        </p:spPr>
+        <p:style>
+          <a:lnRef idx="1">
+            <a:schemeClr val="accent1"/>
+          </a:lnRef>
+          <a:fillRef idx="3">
+            <a:schemeClr val="accent1"/>
+          </a:fillRef>
+          <a:effectRef idx="2">
+            <a:schemeClr val="accent1"/>
+          </a:effectRef>
+          <a:fontRef idx="minor">
+            <a:schemeClr val="lt1"/>
+          </a:fontRef>
+        </p:style>
+        <p:txBody>
+          <a:bodyPr rtlCol="0" anchor="ctr"/>
+          <a:lstStyle/>
+          <a:p>
+            <a:pPr algn="ctr"/>
+          </a:p>
+        </p:txBody>
+      </p:sp>
+      <p:sp>
+        <p:nvSpPr>
+          <p:cNvPr id="8" name="TextBox 7"/>
+          <p:cNvSpPr txBox="1"/>
+          <p:nvPr/>
+        </p:nvSpPr>
+        <p:spPr>
+          <a:xfrm>
+            <a:off x="508000" y="1422400"/>
+            <a:ext cx="11176000" cy="1079500"/>
+          </a:xfrm>
+          <a:prstGeom prst="rect">
+            <a:avLst/>
+          </a:prstGeom>
+          <a:noFill/>
+        </p:spPr>
+        <p:txBody>
+          <a:bodyPr wrap="none" lIns="0" rIns="0" tIns="0" bIns="0">
+            <a:spAutoFit/>
+          </a:bodyPr>
+          <a:lstStyle/>
+          <a:p>
+            <a:pPr>
+              <a:lnSpc>
+                <a:spcPts val="3740"/>
+              </a:lnSpc>
+              <a:spcAft>
+                <a:spcPts val="0"/>
+              </a:spcAft>
+              <a:defRPr sz="3400" b="1">
+                <a:solidFill>
+                  <a:srgbClr val="181817"/>
+                </a:solidFill>
+                <a:latin typeface="Arial"/>
+              </a:defRPr>
+            </a:pPr>
+            <a:r>
+              <a:t>Příklady nejsou cizí review.</a:t>
+            </a:r>
+          </a:p>
+        </p:txBody>
+      </p:sp>
+      <p:sp>
+        <p:nvSpPr>
+          <p:cNvPr id="9" name="Rectangle 8"/>
+          <p:cNvSpPr/>
+          <p:nvPr/>
+        </p:nvSpPr>
+        <p:spPr>
+          <a:xfrm>
+            <a:off x="533400" y="2768600"/>
+            <a:ext cx="3556000" cy="2603500"/>
+          </a:xfrm>
+          <a:prstGeom prst="rect">
+            <a:avLst/>
+          </a:prstGeom>
+          <a:solidFill>
+            <a:srgbClr val="181817"/>
+          </a:solidFill>
+          <a:ln>
+            <a:noFill/>
+          </a:ln>
+        </p:spPr>
+        <p:style>
+          <a:lnRef idx="1">
+            <a:schemeClr val="accent1"/>
+          </a:lnRef>
+          <a:fillRef idx="3">
+            <a:schemeClr val="accent1"/>
+          </a:fillRef>
+          <a:effectRef idx="2">
+            <a:schemeClr val="accent1"/>
+          </a:effectRef>
+          <a:fontRef idx="minor">
+            <a:schemeClr val="lt1"/>
+          </a:fontRef>
+        </p:style>
+        <p:txBody>
+          <a:bodyPr rtlCol="0" anchor="ctr"/>
+          <a:lstStyle/>
+          <a:p>
+            <a:pPr algn="ctr"/>
+          </a:p>
+        </p:txBody>
+      </p:sp>
+      <p:sp>
+        <p:nvSpPr>
+          <p:cNvPr id="10" name="Rectangle 9"/>
+          <p:cNvSpPr/>
+          <p:nvPr/>
+        </p:nvSpPr>
+        <p:spPr>
+          <a:xfrm>
+            <a:off x="533400" y="2768600"/>
+            <a:ext cx="3556000" cy="76200"/>
           </a:xfrm>
           <a:prstGeom prst="rect">
             <a:avLst/>
@@ -8232,14 +8230,14 @@
       </p:sp>
       <p:sp>
         <p:nvSpPr>
-          <p:cNvPr id="7" name="TextBox 6"/>
+          <p:cNvPr id="11" name="TextBox 10"/>
           <p:cNvSpPr txBox="1"/>
           <p:nvPr/>
         </p:nvSpPr>
         <p:spPr>
           <a:xfrm>
-            <a:off x="5588000" y="533400"/>
-            <a:ext cx="6070600" cy="220979"/>
+            <a:off x="749300" y="3035300"/>
+            <a:ext cx="3124200" cy="685800"/>
           </a:xfrm>
           <a:prstGeom prst="rect">
             <a:avLst/>
@@ -8254,40 +8252,136 @@
           <a:p>
             <a:pPr>
               <a:lnSpc>
-                <a:spcPts val="1240"/>
-              </a:lnSpc>
-              <a:spcAft>
-                <a:spcPts val="0"/>
-              </a:spcAft>
-              <a:defRPr sz="1000" b="1">
-                <a:solidFill>
-                  <a:srgbClr val="68635B"/>
-                </a:solidFill>
-                <a:latin typeface="Arial"/>
-              </a:defRPr>
-            </a:pPr>
-            <a:r>
-              <a:t>VLASTNÍ OVĚŘENÍ / PRAGUE PULSE FEST</a:t>
-            </a:r>
-          </a:p>
-        </p:txBody>
-      </p:sp>
-      <p:sp>
-        <p:nvSpPr>
-          <p:cNvPr id="8" name="Rectangle 7"/>
+                <a:spcPts val="2200"/>
+              </a:lnSpc>
+              <a:spcAft>
+                <a:spcPts val="0"/>
+              </a:spcAft>
+              <a:defRPr sz="2000" b="1">
+                <a:solidFill>
+                  <a:srgbClr val="F4F0E7"/>
+                </a:solidFill>
+                <a:latin typeface="Arial"/>
+              </a:defRPr>
+            </a:pPr>
+            <a:r>
+              <a:t>Datové minimum</a:t>
+            </a:r>
+          </a:p>
+        </p:txBody>
+      </p:sp>
+      <p:sp>
+        <p:nvSpPr>
+          <p:cNvPr id="12" name="TextBox 11"/>
+          <p:cNvSpPr txBox="1"/>
+          <p:nvPr/>
+        </p:nvSpPr>
+        <p:spPr>
+          <a:xfrm>
+            <a:off x="749300" y="3733800"/>
+            <a:ext cx="3124200" cy="1511300"/>
+          </a:xfrm>
+          <a:prstGeom prst="rect">
+            <a:avLst/>
+          </a:prstGeom>
+          <a:noFill/>
+        </p:spPr>
+        <p:txBody>
+          <a:bodyPr wrap="none" lIns="0" rIns="0" tIns="0" bIns="0">
+            <a:spAutoFit/>
+          </a:bodyPr>
+          <a:lstStyle/>
+          <a:p>
+            <a:pPr>
+              <a:lnSpc>
+                <a:spcPts val="1689"/>
+              </a:lnSpc>
+              <a:spcAft>
+                <a:spcPts val="0"/>
+              </a:spcAft>
+              <a:defRPr sz="1420" b="0">
+                <a:solidFill>
+                  <a:srgbClr val="F4F0E7"/>
+                </a:solidFill>
+                <a:latin typeface="Arial"/>
+              </a:defRPr>
+            </a:pPr>
+            <a:r>
+              <a:t>Builder kontroluje 3 dny, 3 scény,</a:t>
+            </a:r>
+          </a:p>
+          <a:p>
+            <a:pPr>
+              <a:lnSpc>
+                <a:spcPts val="1689"/>
+              </a:lnSpc>
+              <a:spcAft>
+                <a:spcPts val="0"/>
+              </a:spcAft>
+              <a:defRPr sz="1420" b="0">
+                <a:solidFill>
+                  <a:srgbClr val="F4F0E7"/>
+                </a:solidFill>
+                <a:latin typeface="Arial"/>
+              </a:defRPr>
+            </a:pPr>
+            <a:r>
+              <a:t>60 interpretů a 60 akcí.</a:t>
+            </a:r>
+          </a:p>
+          <a:p>
+            <a:pPr>
+              <a:lnSpc>
+                <a:spcPts val="1689"/>
+              </a:lnSpc>
+              <a:spcAft>
+                <a:spcPts val="0"/>
+              </a:spcAft>
+              <a:defRPr sz="1420" b="0">
+                <a:solidFill>
+                  <a:srgbClr val="F4F0E7"/>
+                </a:solidFill>
+                <a:latin typeface="Arial"/>
+              </a:defRPr>
+            </a:pPr>
+          </a:p>
+          <a:p>
+            <a:pPr>
+              <a:lnSpc>
+                <a:spcPts val="1689"/>
+              </a:lnSpc>
+              <a:spcAft>
+                <a:spcPts val="0"/>
+              </a:spcAft>
+              <a:defRPr sz="1420" b="0">
+                <a:solidFill>
+                  <a:srgbClr val="F4F0E7"/>
+                </a:solidFill>
+                <a:latin typeface="Arial"/>
+              </a:defRPr>
+            </a:pPr>
+            <a:r>
+              <a:t>Důkaz rozsahu, nikoli kvality UX.</a:t>
+            </a:r>
+          </a:p>
+        </p:txBody>
+      </p:sp>
+      <p:sp>
+        <p:nvSpPr>
+          <p:cNvPr id="13" name="Rectangle 12"/>
           <p:cNvSpPr/>
           <p:nvPr/>
         </p:nvSpPr>
         <p:spPr>
           <a:xfrm>
-            <a:off x="533400" y="1155700"/>
-            <a:ext cx="11125200" cy="25400"/>
+            <a:off x="4318000" y="2768600"/>
+            <a:ext cx="3556000" cy="2603500"/>
           </a:xfrm>
           <a:prstGeom prst="rect">
             <a:avLst/>
           </a:prstGeom>
           <a:solidFill>
-            <a:srgbClr val="181817"/>
+            <a:srgbClr val="E7E0D5"/>
           </a:solidFill>
           <a:ln>
             <a:noFill/>
@@ -8317,98 +8411,13 @@
       </p:sp>
       <p:sp>
         <p:nvSpPr>
-          <p:cNvPr id="9" name="TextBox 8"/>
-          <p:cNvSpPr txBox="1"/>
-          <p:nvPr/>
-        </p:nvSpPr>
-        <p:spPr>
-          <a:xfrm>
-            <a:off x="508000" y="1422400"/>
-            <a:ext cx="11176000" cy="1079500"/>
-          </a:xfrm>
-          <a:prstGeom prst="rect">
-            <a:avLst/>
-          </a:prstGeom>
-          <a:noFill/>
-        </p:spPr>
-        <p:txBody>
-          <a:bodyPr wrap="none" lIns="0" rIns="0" tIns="0" bIns="0">
-            <a:spAutoFit/>
-          </a:bodyPr>
-          <a:lstStyle/>
-          <a:p>
-            <a:pPr>
-              <a:lnSpc>
-                <a:spcPts val="3740"/>
-              </a:lnSpc>
-              <a:spcAft>
-                <a:spcPts val="0"/>
-              </a:spcAft>
-              <a:defRPr sz="3400" b="1">
-                <a:solidFill>
-                  <a:srgbClr val="181817"/>
-                </a:solidFill>
-                <a:latin typeface="Arial"/>
-              </a:defRPr>
-            </a:pPr>
-            <a:r>
-              <a:t>Příklady nejsou cizí review.</a:t>
-            </a:r>
-          </a:p>
-        </p:txBody>
-      </p:sp>
-      <p:sp>
-        <p:nvSpPr>
-          <p:cNvPr id="10" name="Rectangle 9"/>
+          <p:cNvPr id="14" name="Rectangle 13"/>
           <p:cNvSpPr/>
           <p:nvPr/>
         </p:nvSpPr>
         <p:spPr>
           <a:xfrm>
-            <a:off x="533400" y="2768600"/>
-            <a:ext cx="3556000" cy="2603500"/>
-          </a:xfrm>
-          <a:prstGeom prst="rect">
-            <a:avLst/>
-          </a:prstGeom>
-          <a:solidFill>
-            <a:srgbClr val="181817"/>
-          </a:solidFill>
-          <a:ln>
-            <a:noFill/>
-          </a:ln>
-        </p:spPr>
-        <p:style>
-          <a:lnRef idx="1">
-            <a:schemeClr val="accent1"/>
-          </a:lnRef>
-          <a:fillRef idx="3">
-            <a:schemeClr val="accent1"/>
-          </a:fillRef>
-          <a:effectRef idx="2">
-            <a:schemeClr val="accent1"/>
-          </a:effectRef>
-          <a:fontRef idx="minor">
-            <a:schemeClr val="lt1"/>
-          </a:fontRef>
-        </p:style>
-        <p:txBody>
-          <a:bodyPr rtlCol="0" anchor="ctr"/>
-          <a:lstStyle/>
-          <a:p>
-            <a:pPr algn="ctr"/>
-          </a:p>
-        </p:txBody>
-      </p:sp>
-      <p:sp>
-        <p:nvSpPr>
-          <p:cNvPr id="11" name="Rectangle 10"/>
-          <p:cNvSpPr/>
-          <p:nvPr/>
-        </p:nvSpPr>
-        <p:spPr>
-          <a:xfrm>
-            <a:off x="533400" y="2768600"/>
+            <a:off x="4318000" y="2768600"/>
             <a:ext cx="3556000" cy="76200"/>
           </a:xfrm>
           <a:prstGeom prst="rect">
@@ -8445,13 +8454,13 @@
       </p:sp>
       <p:sp>
         <p:nvSpPr>
-          <p:cNvPr id="12" name="TextBox 11"/>
+          <p:cNvPr id="15" name="TextBox 14"/>
           <p:cNvSpPr txBox="1"/>
           <p:nvPr/>
         </p:nvSpPr>
         <p:spPr>
           <a:xfrm>
-            <a:off x="749300" y="3035300"/>
+            <a:off x="4533900" y="3035300"/>
             <a:ext cx="3124200" cy="685800"/>
           </a:xfrm>
           <a:prstGeom prst="rect">
@@ -8474,26 +8483,26 @@
               </a:spcAft>
               <a:defRPr sz="2000" b="1">
                 <a:solidFill>
-                  <a:srgbClr val="F4F0E7"/>
-                </a:solidFill>
-                <a:latin typeface="Arial"/>
-              </a:defRPr>
-            </a:pPr>
-            <a:r>
-              <a:t>Datové minimum</a:t>
-            </a:r>
-          </a:p>
-        </p:txBody>
-      </p:sp>
-      <p:sp>
-        <p:nvSpPr>
-          <p:cNvPr id="13" name="TextBox 12"/>
+                  <a:srgbClr val="181817"/>
+                </a:solidFill>
+                <a:latin typeface="Arial"/>
+              </a:defRPr>
+            </a:pPr>
+            <a:r>
+              <a:t>Místní úložiště</a:t>
+            </a:r>
+          </a:p>
+        </p:txBody>
+      </p:sp>
+      <p:sp>
+        <p:nvSpPr>
+          <p:cNvPr id="16" name="TextBox 15"/>
           <p:cNvSpPr txBox="1"/>
           <p:nvPr/>
         </p:nvSpPr>
         <p:spPr>
           <a:xfrm>
-            <a:off x="749300" y="3733800"/>
+            <a:off x="4533900" y="3733800"/>
             <a:ext cx="3124200" cy="1511300"/>
           </a:xfrm>
           <a:prstGeom prst="rect">
@@ -8516,13 +8525,13 @@
               </a:spcAft>
               <a:defRPr sz="1420" b="0">
                 <a:solidFill>
-                  <a:srgbClr val="F4F0E7"/>
-                </a:solidFill>
-                <a:latin typeface="Arial"/>
-              </a:defRPr>
-            </a:pPr>
-            <a:r>
-              <a:t>Builder kontroluje 3 dny, 3 scény,</a:t>
+                  <a:srgbClr val="181817"/>
+                </a:solidFill>
+                <a:latin typeface="Arial"/>
+              </a:defRPr>
+            </a:pPr>
+            <a:r>
+              <a:t>Stav patří jednomu prohlížeči;</a:t>
             </a:r>
           </a:p>
           <a:p>
@@ -8535,13 +8544,13 @@
               </a:spcAft>
               <a:defRPr sz="1420" b="0">
                 <a:solidFill>
-                  <a:srgbClr val="F4F0E7"/>
-                </a:solidFill>
-                <a:latin typeface="Arial"/>
-              </a:defRPr>
-            </a:pPr>
-            <a:r>
-              <a:t>60 interpretů a 60 akcí.</a:t>
+                  <a:srgbClr val="181817"/>
+                </a:solidFill>
+                <a:latin typeface="Arial"/>
+              </a:defRPr>
+            </a:pPr>
+            <a:r>
+              <a:t>není sdílený JSON na serveru.</a:t>
             </a:r>
           </a:p>
           <a:p>
@@ -8554,7 +8563,7 @@
               </a:spcAft>
               <a:defRPr sz="1420" b="0">
                 <a:solidFill>
-                  <a:srgbClr val="F4F0E7"/>
+                  <a:srgbClr val="181817"/>
                 </a:solidFill>
                 <a:latin typeface="Arial"/>
               </a:defRPr>
@@ -8570,26 +8579,26 @@
               </a:spcAft>
               <a:defRPr sz="1420" b="0">
                 <a:solidFill>
-                  <a:srgbClr val="F4F0E7"/>
-                </a:solidFill>
-                <a:latin typeface="Arial"/>
-              </a:defRPr>
-            </a:pPr>
-            <a:r>
-              <a:t>Důkaz rozsahu, nikoli kvality UX.</a:t>
-            </a:r>
-          </a:p>
-        </p:txBody>
-      </p:sp>
-      <p:sp>
-        <p:nvSpPr>
-          <p:cNvPr id="14" name="Rectangle 13"/>
+                  <a:srgbClr val="181817"/>
+                </a:solidFill>
+                <a:latin typeface="Arial"/>
+              </a:defRPr>
+            </a:pPr>
+            <a:r>
+              <a:t>Hranice klientského zadání.</a:t>
+            </a:r>
+          </a:p>
+        </p:txBody>
+      </p:sp>
+      <p:sp>
+        <p:nvSpPr>
+          <p:cNvPr id="17" name="Rectangle 16"/>
           <p:cNvSpPr/>
           <p:nvPr/>
         </p:nvSpPr>
         <p:spPr>
           <a:xfrm>
-            <a:off x="4318000" y="2768600"/>
+            <a:off x="8102600" y="2768600"/>
             <a:ext cx="3556000" cy="2603500"/>
           </a:xfrm>
           <a:prstGeom prst="rect">
@@ -8626,13 +8635,13 @@
       </p:sp>
       <p:sp>
         <p:nvSpPr>
-          <p:cNvPr id="15" name="Rectangle 14"/>
+          <p:cNvPr id="18" name="Rectangle 17"/>
           <p:cNvSpPr/>
           <p:nvPr/>
         </p:nvSpPr>
         <p:spPr>
           <a:xfrm>
-            <a:off x="4318000" y="2768600"/>
+            <a:off x="8102600" y="2768600"/>
             <a:ext cx="3556000" cy="76200"/>
           </a:xfrm>
           <a:prstGeom prst="rect">
@@ -8669,13 +8678,13 @@
       </p:sp>
       <p:sp>
         <p:nvSpPr>
-          <p:cNvPr id="16" name="TextBox 15"/>
+          <p:cNvPr id="19" name="TextBox 18"/>
           <p:cNvSpPr txBox="1"/>
           <p:nvPr/>
         </p:nvSpPr>
         <p:spPr>
           <a:xfrm>
-            <a:off x="4533900" y="3035300"/>
+            <a:off x="8318500" y="3035300"/>
             <a:ext cx="3124200" cy="685800"/>
           </a:xfrm>
           <a:prstGeom prst="rect">
@@ -8704,20 +8713,20 @@
               </a:defRPr>
             </a:pPr>
             <a:r>
-              <a:t>Místní úložiště</a:t>
-            </a:r>
-          </a:p>
-        </p:txBody>
-      </p:sp>
-      <p:sp>
-        <p:nvSpPr>
-          <p:cNvPr id="17" name="TextBox 16"/>
+              <a:t>Chybějící podklady</a:t>
+            </a:r>
+          </a:p>
+        </p:txBody>
+      </p:sp>
+      <p:sp>
+        <p:nvSpPr>
+          <p:cNvPr id="20" name="TextBox 19"/>
           <p:cNvSpPr txBox="1"/>
           <p:nvPr/>
         </p:nvSpPr>
         <p:spPr>
           <a:xfrm>
-            <a:off x="4533900" y="3733800"/>
+            <a:off x="8318500" y="3733800"/>
             <a:ext cx="3124200" cy="1511300"/>
           </a:xfrm>
           <a:prstGeom prst="rect">
@@ -8746,7 +8755,7 @@
               </a:defRPr>
             </a:pPr>
             <a:r>
-              <a:t>Stav patří jednomu prohlížeči;</a:t>
+              <a:t>Cizí web a přijaté review nebyly</a:t>
             </a:r>
           </a:p>
           <a:p>
@@ -8765,7 +8774,7 @@
               </a:defRPr>
             </a:pPr>
             <a:r>
-              <a:t>není sdílený JSON na serveru.</a:t>
+              <a:t>dodány.</a:t>
             </a:r>
           </a:p>
           <a:p>
@@ -8800,107 +8809,40 @@
               </a:defRPr>
             </a:pPr>
             <a:r>
-              <a:t>Hranice klientského zadání.</a:t>
-            </a:r>
-          </a:p>
-        </p:txBody>
-      </p:sp>
-      <p:sp>
-        <p:nvSpPr>
-          <p:cNvPr id="18" name="Rectangle 17"/>
-          <p:cNvSpPr/>
-          <p:nvPr/>
-        </p:nvSpPr>
-        <p:spPr>
-          <a:xfrm>
-            <a:off x="8102600" y="2768600"/>
-            <a:ext cx="3556000" cy="2603500"/>
-          </a:xfrm>
-          <a:prstGeom prst="rect">
-            <a:avLst/>
-          </a:prstGeom>
-          <a:solidFill>
-            <a:srgbClr val="E7E0D5"/>
-          </a:solidFill>
-          <a:ln>
-            <a:noFill/>
-          </a:ln>
-        </p:spPr>
-        <p:style>
-          <a:lnRef idx="1">
-            <a:schemeClr val="accent1"/>
-          </a:lnRef>
-          <a:fillRef idx="3">
-            <a:schemeClr val="accent1"/>
-          </a:fillRef>
-          <a:effectRef idx="2">
-            <a:schemeClr val="accent1"/>
-          </a:effectRef>
-          <a:fontRef idx="minor">
-            <a:schemeClr val="lt1"/>
-          </a:fontRef>
-        </p:style>
-        <p:txBody>
-          <a:bodyPr rtlCol="0" anchor="ctr"/>
-          <a:lstStyle/>
-          <a:p>
-            <a:pPr algn="ctr"/>
-          </a:p>
-        </p:txBody>
-      </p:sp>
-      <p:sp>
-        <p:nvSpPr>
-          <p:cNvPr id="19" name="Rectangle 18"/>
-          <p:cNvSpPr/>
-          <p:nvPr/>
-        </p:nvSpPr>
-        <p:spPr>
-          <a:xfrm>
-            <a:off x="8102600" y="2768600"/>
-            <a:ext cx="3556000" cy="76200"/>
-          </a:xfrm>
-          <a:prstGeom prst="rect">
-            <a:avLst/>
-          </a:prstGeom>
-          <a:solidFill>
-            <a:srgbClr val="F45E2B"/>
-          </a:solidFill>
-          <a:ln>
-            <a:noFill/>
-          </a:ln>
-        </p:spPr>
-        <p:style>
-          <a:lnRef idx="1">
-            <a:schemeClr val="accent1"/>
-          </a:lnRef>
-          <a:fillRef idx="3">
-            <a:schemeClr val="accent1"/>
-          </a:fillRef>
-          <a:effectRef idx="2">
-            <a:schemeClr val="accent1"/>
-          </a:effectRef>
-          <a:fontRef idx="minor">
-            <a:schemeClr val="lt1"/>
-          </a:fontRef>
-        </p:style>
-        <p:txBody>
-          <a:bodyPr rtlCol="0" anchor="ctr"/>
-          <a:lstStyle/>
-          <a:p>
-            <a:pPr algn="ctr"/>
-          </a:p>
-        </p:txBody>
-      </p:sp>
-      <p:sp>
-        <p:nvSpPr>
-          <p:cNvPr id="20" name="TextBox 19"/>
+              <a:t>Nelze tvrdit nálezy ani jejich</a:t>
+            </a:r>
+          </a:p>
+          <a:p>
+            <a:pPr>
+              <a:lnSpc>
+                <a:spcPts val="1689"/>
+              </a:lnSpc>
+              <a:spcAft>
+                <a:spcPts val="0"/>
+              </a:spcAft>
+              <a:defRPr sz="1420" b="0">
+                <a:solidFill>
+                  <a:srgbClr val="181817"/>
+                </a:solidFill>
+                <a:latin typeface="Arial"/>
+              </a:defRPr>
+            </a:pPr>
+            <a:r>
+              <a:t>zapracování.</a:t>
+            </a:r>
+          </a:p>
+        </p:txBody>
+      </p:sp>
+      <p:sp>
+        <p:nvSpPr>
+          <p:cNvPr id="21" name="TextBox 20"/>
           <p:cNvSpPr txBox="1"/>
           <p:nvPr/>
         </p:nvSpPr>
         <p:spPr>
           <a:xfrm>
-            <a:off x="8318500" y="3035300"/>
-            <a:ext cx="3124200" cy="685800"/>
+            <a:off x="533400" y="6413500"/>
+            <a:ext cx="10033000" cy="181610"/>
           </a:xfrm>
           <a:prstGeom prst="rect">
             <a:avLst/>
@@ -8915,135 +8857,20 @@
           <a:p>
             <a:pPr>
               <a:lnSpc>
-                <a:spcPts val="2200"/>
-              </a:lnSpc>
-              <a:spcAft>
-                <a:spcPts val="0"/>
-              </a:spcAft>
-              <a:defRPr sz="2000" b="1">
-                <a:solidFill>
-                  <a:srgbClr val="181817"/>
-                </a:solidFill>
-                <a:latin typeface="Arial"/>
-              </a:defRPr>
-            </a:pPr>
-            <a:r>
-              <a:t>Chybějící podklady</a:t>
-            </a:r>
-          </a:p>
-        </p:txBody>
-      </p:sp>
-      <p:sp>
-        <p:nvSpPr>
-          <p:cNvPr id="21" name="TextBox 20"/>
-          <p:cNvSpPr txBox="1"/>
-          <p:nvPr/>
-        </p:nvSpPr>
-        <p:spPr>
-          <a:xfrm>
-            <a:off x="8318500" y="3733800"/>
-            <a:ext cx="3124200" cy="1511300"/>
-          </a:xfrm>
-          <a:prstGeom prst="rect">
-            <a:avLst/>
-          </a:prstGeom>
-          <a:noFill/>
-        </p:spPr>
-        <p:txBody>
-          <a:bodyPr wrap="none" lIns="0" rIns="0" tIns="0" bIns="0">
-            <a:spAutoFit/>
-          </a:bodyPr>
-          <a:lstStyle/>
-          <a:p>
-            <a:pPr>
-              <a:lnSpc>
-                <a:spcPts val="1689"/>
-              </a:lnSpc>
-              <a:spcAft>
-                <a:spcPts val="0"/>
-              </a:spcAft>
-              <a:defRPr sz="1420" b="0">
-                <a:solidFill>
-                  <a:srgbClr val="181817"/>
-                </a:solidFill>
-                <a:latin typeface="Arial"/>
-              </a:defRPr>
-            </a:pPr>
-            <a:r>
-              <a:t>Cizí web a přijaté review nebyly</a:t>
-            </a:r>
-          </a:p>
-          <a:p>
-            <a:pPr>
-              <a:lnSpc>
-                <a:spcPts val="1689"/>
-              </a:lnSpc>
-              <a:spcAft>
-                <a:spcPts val="0"/>
-              </a:spcAft>
-              <a:defRPr sz="1420" b="0">
-                <a:solidFill>
-                  <a:srgbClr val="181817"/>
-                </a:solidFill>
-                <a:latin typeface="Arial"/>
-              </a:defRPr>
-            </a:pPr>
-            <a:r>
-              <a:t>dodány.</a:t>
-            </a:r>
-          </a:p>
-          <a:p>
-            <a:pPr>
-              <a:lnSpc>
-                <a:spcPts val="1689"/>
-              </a:lnSpc>
-              <a:spcAft>
-                <a:spcPts val="0"/>
-              </a:spcAft>
-              <a:defRPr sz="1420" b="0">
-                <a:solidFill>
-                  <a:srgbClr val="181817"/>
-                </a:solidFill>
-                <a:latin typeface="Arial"/>
-              </a:defRPr>
-            </a:pPr>
-          </a:p>
-          <a:p>
-            <a:pPr>
-              <a:lnSpc>
-                <a:spcPts val="1689"/>
-              </a:lnSpc>
-              <a:spcAft>
-                <a:spcPts val="0"/>
-              </a:spcAft>
-              <a:defRPr sz="1420" b="0">
-                <a:solidFill>
-                  <a:srgbClr val="181817"/>
-                </a:solidFill>
-                <a:latin typeface="Arial"/>
-              </a:defRPr>
-            </a:pPr>
-            <a:r>
-              <a:t>Nelze tvrdit nálezy ani jejich</a:t>
-            </a:r>
-          </a:p>
-          <a:p>
-            <a:pPr>
-              <a:lnSpc>
-                <a:spcPts val="1689"/>
-              </a:lnSpc>
-              <a:spcAft>
-                <a:spcPts val="0"/>
-              </a:spcAft>
-              <a:defRPr sz="1420" b="0">
-                <a:solidFill>
-                  <a:srgbClr val="181817"/>
-                </a:solidFill>
-                <a:latin typeface="Arial"/>
-              </a:defRPr>
-            </a:pPr>
-            <a:r>
-              <a:t>zapracování.</a:t>
+                <a:spcPts val="930"/>
+              </a:lnSpc>
+              <a:spcAft>
+                <a:spcPts val="0"/>
+              </a:spcAft>
+              <a:defRPr sz="750" b="0">
+                <a:solidFill>
+                  <a:srgbClr val="68635B"/>
+                </a:solidFill>
+                <a:latin typeface="Arial"/>
+              </a:defRPr>
+            </a:pPr>
+            <a:r>
+              <a:t>METODICKÁ ŠABLONA — DOPLNIT CIZÍ PROJEKT</a:t>
             </a:r>
           </a:p>
         </p:txBody>
@@ -9051,48 +8878,6 @@
       <p:sp>
         <p:nvSpPr>
           <p:cNvPr id="22" name="TextBox 21"/>
-          <p:cNvSpPr txBox="1"/>
-          <p:nvPr/>
-        </p:nvSpPr>
-        <p:spPr>
-          <a:xfrm>
-            <a:off x="533400" y="6413500"/>
-            <a:ext cx="10033000" cy="181610"/>
-          </a:xfrm>
-          <a:prstGeom prst="rect">
-            <a:avLst/>
-          </a:prstGeom>
-          <a:noFill/>
-        </p:spPr>
-        <p:txBody>
-          <a:bodyPr wrap="none" lIns="0" rIns="0" tIns="0" bIns="0">
-            <a:spAutoFit/>
-          </a:bodyPr>
-          <a:lstStyle/>
-          <a:p>
-            <a:pPr>
-              <a:lnSpc>
-                <a:spcPts val="930"/>
-              </a:lnSpc>
-              <a:spcAft>
-                <a:spcPts val="0"/>
-              </a:spcAft>
-              <a:defRPr sz="750" b="0">
-                <a:solidFill>
-                  <a:srgbClr val="68635B"/>
-                </a:solidFill>
-                <a:latin typeface="Arial"/>
-              </a:defRPr>
-            </a:pPr>
-            <a:r>
-              <a:t>METODICKÁ ŠABLONA — DOPLNIT CIZÍ PROJEKT</a:t>
-            </a:r>
-          </a:p>
-        </p:txBody>
-      </p:sp>
-      <p:sp>
-        <p:nvSpPr>
-          <p:cNvPr id="23" name="TextBox 22"/>
           <p:cNvSpPr txBox="1"/>
           <p:nvPr/>
         </p:nvSpPr>
@@ -9321,14 +9106,184 @@
       </p:sp>
       <p:sp>
         <p:nvSpPr>
-          <p:cNvPr id="6" name="Rectangle 5"/>
+          <p:cNvPr id="6" name="TextBox 5"/>
+          <p:cNvSpPr txBox="1"/>
+          <p:nvPr/>
+        </p:nvSpPr>
+        <p:spPr>
+          <a:xfrm>
+            <a:off x="5588000" y="533400"/>
+            <a:ext cx="6070600" cy="220979"/>
+          </a:xfrm>
+          <a:prstGeom prst="rect">
+            <a:avLst/>
+          </a:prstGeom>
+          <a:noFill/>
+        </p:spPr>
+        <p:txBody>
+          <a:bodyPr wrap="none" lIns="0" rIns="0" tIns="0" bIns="0">
+            <a:spAutoFit/>
+          </a:bodyPr>
+          <a:lstStyle/>
+          <a:p>
+            <a:pPr>
+              <a:lnSpc>
+                <a:spcPts val="1240"/>
+              </a:lnSpc>
+              <a:spcAft>
+                <a:spcPts val="0"/>
+              </a:spcAft>
+              <a:defRPr sz="1000" b="1">
+                <a:solidFill>
+                  <a:srgbClr val="68635B"/>
+                </a:solidFill>
+                <a:latin typeface="Arial"/>
+              </a:defRPr>
+            </a:pPr>
+            <a:r>
+              <a:t>VÝSLEDKY, OVĚŘENÍ A AI</a:t>
+            </a:r>
+          </a:p>
+        </p:txBody>
+      </p:sp>
+      <p:sp>
+        <p:nvSpPr>
+          <p:cNvPr id="7" name="Rectangle 6"/>
           <p:cNvSpPr/>
           <p:nvPr/>
         </p:nvSpPr>
         <p:spPr>
           <a:xfrm>
-            <a:off x="1866900" y="368300"/>
-            <a:ext cx="88900" cy="431800"/>
+            <a:off x="533400" y="1155700"/>
+            <a:ext cx="11125200" cy="25400"/>
+          </a:xfrm>
+          <a:prstGeom prst="rect">
+            <a:avLst/>
+          </a:prstGeom>
+          <a:solidFill>
+            <a:srgbClr val="181817"/>
+          </a:solidFill>
+          <a:ln>
+            <a:noFill/>
+          </a:ln>
+        </p:spPr>
+        <p:style>
+          <a:lnRef idx="1">
+            <a:schemeClr val="accent1"/>
+          </a:lnRef>
+          <a:fillRef idx="3">
+            <a:schemeClr val="accent1"/>
+          </a:fillRef>
+          <a:effectRef idx="2">
+            <a:schemeClr val="accent1"/>
+          </a:effectRef>
+          <a:fontRef idx="minor">
+            <a:schemeClr val="lt1"/>
+          </a:fontRef>
+        </p:style>
+        <p:txBody>
+          <a:bodyPr rtlCol="0" anchor="ctr"/>
+          <a:lstStyle/>
+          <a:p>
+            <a:pPr algn="ctr"/>
+          </a:p>
+        </p:txBody>
+      </p:sp>
+      <p:sp>
+        <p:nvSpPr>
+          <p:cNvPr id="8" name="TextBox 7"/>
+          <p:cNvSpPr txBox="1"/>
+          <p:nvPr/>
+        </p:nvSpPr>
+        <p:spPr>
+          <a:xfrm>
+            <a:off x="508000" y="1422400"/>
+            <a:ext cx="11176000" cy="1079500"/>
+          </a:xfrm>
+          <a:prstGeom prst="rect">
+            <a:avLst/>
+          </a:prstGeom>
+          <a:noFill/>
+        </p:spPr>
+        <p:txBody>
+          <a:bodyPr wrap="none" lIns="0" rIns="0" tIns="0" bIns="0">
+            <a:spAutoFit/>
+          </a:bodyPr>
+          <a:lstStyle/>
+          <a:p>
+            <a:pPr>
+              <a:lnSpc>
+                <a:spcPts val="3740"/>
+              </a:lnSpc>
+              <a:spcAft>
+                <a:spcPts val="0"/>
+              </a:spcAft>
+              <a:defRPr sz="3400" b="1">
+                <a:solidFill>
+                  <a:srgbClr val="181817"/>
+                </a:solidFill>
+                <a:latin typeface="Arial"/>
+              </a:defRPr>
+            </a:pPr>
+            <a:r>
+              <a:t>Před odevzdáním doplnit.</a:t>
+            </a:r>
+          </a:p>
+        </p:txBody>
+      </p:sp>
+      <p:sp>
+        <p:nvSpPr>
+          <p:cNvPr id="9" name="Rectangle 8"/>
+          <p:cNvSpPr/>
+          <p:nvPr/>
+        </p:nvSpPr>
+        <p:spPr>
+          <a:xfrm>
+            <a:off x="533400" y="2768600"/>
+            <a:ext cx="5448300" cy="2603500"/>
+          </a:xfrm>
+          <a:prstGeom prst="rect">
+            <a:avLst/>
+          </a:prstGeom>
+          <a:solidFill>
+            <a:srgbClr val="181817"/>
+          </a:solidFill>
+          <a:ln>
+            <a:noFill/>
+          </a:ln>
+        </p:spPr>
+        <p:style>
+          <a:lnRef idx="1">
+            <a:schemeClr val="accent1"/>
+          </a:lnRef>
+          <a:fillRef idx="3">
+            <a:schemeClr val="accent1"/>
+          </a:fillRef>
+          <a:effectRef idx="2">
+            <a:schemeClr val="accent1"/>
+          </a:effectRef>
+          <a:fontRef idx="minor">
+            <a:schemeClr val="lt1"/>
+          </a:fontRef>
+        </p:style>
+        <p:txBody>
+          <a:bodyPr rtlCol="0" anchor="ctr"/>
+          <a:lstStyle/>
+          <a:p>
+            <a:pPr algn="ctr"/>
+          </a:p>
+        </p:txBody>
+      </p:sp>
+      <p:sp>
+        <p:nvSpPr>
+          <p:cNvPr id="10" name="Rectangle 9"/>
+          <p:cNvSpPr/>
+          <p:nvPr/>
+        </p:nvSpPr>
+        <p:spPr>
+          <a:xfrm>
+            <a:off x="533400" y="2768600"/>
+            <a:ext cx="5448300" cy="76200"/>
           </a:xfrm>
           <a:prstGeom prst="rect">
             <a:avLst/>
@@ -9364,14 +9319,14 @@
       </p:sp>
       <p:sp>
         <p:nvSpPr>
-          <p:cNvPr id="7" name="TextBox 6"/>
+          <p:cNvPr id="11" name="TextBox 10"/>
           <p:cNvSpPr txBox="1"/>
           <p:nvPr/>
         </p:nvSpPr>
         <p:spPr>
           <a:xfrm>
-            <a:off x="5588000" y="533400"/>
-            <a:ext cx="6070600" cy="220979"/>
+            <a:off x="749300" y="3035300"/>
+            <a:ext cx="5016500" cy="685800"/>
           </a:xfrm>
           <a:prstGeom prst="rect">
             <a:avLst/>
@@ -9386,40 +9341,136 @@
           <a:p>
             <a:pPr>
               <a:lnSpc>
-                <a:spcPts val="1240"/>
-              </a:lnSpc>
-              <a:spcAft>
-                <a:spcPts val="0"/>
-              </a:spcAft>
-              <a:defRPr sz="1000" b="1">
-                <a:solidFill>
-                  <a:srgbClr val="68635B"/>
-                </a:solidFill>
-                <a:latin typeface="Arial"/>
-              </a:defRPr>
-            </a:pPr>
-            <a:r>
-              <a:t>VÝSLEDKY, OVĚŘENÍ A AI</a:t>
-            </a:r>
-          </a:p>
-        </p:txBody>
-      </p:sp>
-      <p:sp>
-        <p:nvSpPr>
-          <p:cNvPr id="8" name="Rectangle 7"/>
+                <a:spcPts val="2200"/>
+              </a:lnSpc>
+              <a:spcAft>
+                <a:spcPts val="0"/>
+              </a:spcAft>
+              <a:defRPr sz="2000" b="1">
+                <a:solidFill>
+                  <a:srgbClr val="F4F0E7"/>
+                </a:solidFill>
+                <a:latin typeface="Arial"/>
+              </a:defRPr>
+            </a:pPr>
+            <a:r>
+              <a:t>Povinné podklady</a:t>
+            </a:r>
+          </a:p>
+        </p:txBody>
+      </p:sp>
+      <p:sp>
+        <p:nvSpPr>
+          <p:cNvPr id="12" name="TextBox 11"/>
+          <p:cNvSpPr txBox="1"/>
+          <p:nvPr/>
+        </p:nvSpPr>
+        <p:spPr>
+          <a:xfrm>
+            <a:off x="749300" y="3733800"/>
+            <a:ext cx="5016500" cy="1511300"/>
+          </a:xfrm>
+          <a:prstGeom prst="rect">
+            <a:avLst/>
+          </a:prstGeom>
+          <a:noFill/>
+        </p:spPr>
+        <p:txBody>
+          <a:bodyPr wrap="none" lIns="0" rIns="0" tIns="0" bIns="0">
+            <a:spAutoFit/>
+          </a:bodyPr>
+          <a:lstStyle/>
+          <a:p>
+            <a:pPr>
+              <a:lnSpc>
+                <a:spcPts val="1689"/>
+              </a:lnSpc>
+              <a:spcAft>
+                <a:spcPts val="0"/>
+              </a:spcAft>
+              <a:defRPr sz="1420" b="0">
+                <a:solidFill>
+                  <a:srgbClr val="F4F0E7"/>
+                </a:solidFill>
+                <a:latin typeface="Arial"/>
+              </a:defRPr>
+            </a:pPr>
+            <a:r>
+              <a:t>Hodnocený web + specifikace. Dva průchody. 3–5</a:t>
+            </a:r>
+          </a:p>
+          <a:p>
+            <a:pPr>
+              <a:lnSpc>
+                <a:spcPts val="1689"/>
+              </a:lnSpc>
+              <a:spcAft>
+                <a:spcPts val="0"/>
+              </a:spcAft>
+              <a:defRPr sz="1420" b="0">
+                <a:solidFill>
+                  <a:srgbClr val="F4F0E7"/>
+                </a:solidFill>
+                <a:latin typeface="Arial"/>
+              </a:defRPr>
+            </a:pPr>
+            <a:r>
+              <a:t>skutečných nálezů.</a:t>
+            </a:r>
+          </a:p>
+          <a:p>
+            <a:pPr>
+              <a:lnSpc>
+                <a:spcPts val="1689"/>
+              </a:lnSpc>
+              <a:spcAft>
+                <a:spcPts val="0"/>
+              </a:spcAft>
+              <a:defRPr sz="1420" b="0">
+                <a:solidFill>
+                  <a:srgbClr val="F4F0E7"/>
+                </a:solidFill>
+                <a:latin typeface="Arial"/>
+              </a:defRPr>
+            </a:pPr>
+          </a:p>
+          <a:p>
+            <a:pPr>
+              <a:lnSpc>
+                <a:spcPts val="1689"/>
+              </a:lnSpc>
+              <a:spcAft>
+                <a:spcPts val="0"/>
+              </a:spcAft>
+              <a:defRPr sz="1420" b="0">
+                <a:solidFill>
+                  <a:srgbClr val="F4F0E7"/>
+                </a:solidFill>
+                <a:latin typeface="Arial"/>
+              </a:defRPr>
+            </a:pPr>
+            <a:r>
+              <a:t>Důkazy, závažnost a doporučení.</a:t>
+            </a:r>
+          </a:p>
+        </p:txBody>
+      </p:sp>
+      <p:sp>
+        <p:nvSpPr>
+          <p:cNvPr id="13" name="Rectangle 12"/>
           <p:cNvSpPr/>
           <p:nvPr/>
         </p:nvSpPr>
         <p:spPr>
           <a:xfrm>
-            <a:off x="533400" y="1155700"/>
-            <a:ext cx="11125200" cy="25400"/>
+            <a:off x="6210300" y="2768600"/>
+            <a:ext cx="5448300" cy="2603500"/>
           </a:xfrm>
           <a:prstGeom prst="rect">
             <a:avLst/>
           </a:prstGeom>
           <a:solidFill>
-            <a:srgbClr val="181817"/>
+            <a:srgbClr val="E7E0D5"/>
           </a:solidFill>
           <a:ln>
             <a:noFill/>
@@ -9449,98 +9500,13 @@
       </p:sp>
       <p:sp>
         <p:nvSpPr>
-          <p:cNvPr id="9" name="TextBox 8"/>
-          <p:cNvSpPr txBox="1"/>
-          <p:nvPr/>
-        </p:nvSpPr>
-        <p:spPr>
-          <a:xfrm>
-            <a:off x="508000" y="1422400"/>
-            <a:ext cx="11176000" cy="1079500"/>
-          </a:xfrm>
-          <a:prstGeom prst="rect">
-            <a:avLst/>
-          </a:prstGeom>
-          <a:noFill/>
-        </p:spPr>
-        <p:txBody>
-          <a:bodyPr wrap="none" lIns="0" rIns="0" tIns="0" bIns="0">
-            <a:spAutoFit/>
-          </a:bodyPr>
-          <a:lstStyle/>
-          <a:p>
-            <a:pPr>
-              <a:lnSpc>
-                <a:spcPts val="3740"/>
-              </a:lnSpc>
-              <a:spcAft>
-                <a:spcPts val="0"/>
-              </a:spcAft>
-              <a:defRPr sz="3400" b="1">
-                <a:solidFill>
-                  <a:srgbClr val="181817"/>
-                </a:solidFill>
-                <a:latin typeface="Arial"/>
-              </a:defRPr>
-            </a:pPr>
-            <a:r>
-              <a:t>Před odevzdáním doplnit.</a:t>
-            </a:r>
-          </a:p>
-        </p:txBody>
-      </p:sp>
-      <p:sp>
-        <p:nvSpPr>
-          <p:cNvPr id="10" name="Rectangle 9"/>
+          <p:cNvPr id="14" name="Rectangle 13"/>
           <p:cNvSpPr/>
           <p:nvPr/>
         </p:nvSpPr>
         <p:spPr>
           <a:xfrm>
-            <a:off x="533400" y="2768600"/>
-            <a:ext cx="5448300" cy="2603500"/>
-          </a:xfrm>
-          <a:prstGeom prst="rect">
-            <a:avLst/>
-          </a:prstGeom>
-          <a:solidFill>
-            <a:srgbClr val="181817"/>
-          </a:solidFill>
-          <a:ln>
-            <a:noFill/>
-          </a:ln>
-        </p:spPr>
-        <p:style>
-          <a:lnRef idx="1">
-            <a:schemeClr val="accent1"/>
-          </a:lnRef>
-          <a:fillRef idx="3">
-            <a:schemeClr val="accent1"/>
-          </a:fillRef>
-          <a:effectRef idx="2">
-            <a:schemeClr val="accent1"/>
-          </a:effectRef>
-          <a:fontRef idx="minor">
-            <a:schemeClr val="lt1"/>
-          </a:fontRef>
-        </p:style>
-        <p:txBody>
-          <a:bodyPr rtlCol="0" anchor="ctr"/>
-          <a:lstStyle/>
-          <a:p>
-            <a:pPr algn="ctr"/>
-          </a:p>
-        </p:txBody>
-      </p:sp>
-      <p:sp>
-        <p:nvSpPr>
-          <p:cNvPr id="11" name="Rectangle 10"/>
-          <p:cNvSpPr/>
-          <p:nvPr/>
-        </p:nvSpPr>
-        <p:spPr>
-          <a:xfrm>
-            <a:off x="533400" y="2768600"/>
+            <a:off x="6210300" y="2768600"/>
             <a:ext cx="5448300" cy="76200"/>
           </a:xfrm>
           <a:prstGeom prst="rect">
@@ -9577,13 +9543,13 @@
       </p:sp>
       <p:sp>
         <p:nvSpPr>
-          <p:cNvPr id="12" name="TextBox 11"/>
+          <p:cNvPr id="15" name="TextBox 14"/>
           <p:cNvSpPr txBox="1"/>
           <p:nvPr/>
         </p:nvSpPr>
         <p:spPr>
           <a:xfrm>
-            <a:off x="749300" y="3035300"/>
+            <a:off x="6426200" y="3035300"/>
             <a:ext cx="5016500" cy="685800"/>
           </a:xfrm>
           <a:prstGeom prst="rect">
@@ -9606,26 +9572,26 @@
               </a:spcAft>
               <a:defRPr sz="2000" b="1">
                 <a:solidFill>
-                  <a:srgbClr val="F4F0E7"/>
-                </a:solidFill>
-                <a:latin typeface="Arial"/>
-              </a:defRPr>
-            </a:pPr>
-            <a:r>
-              <a:t>Povinné podklady</a:t>
-            </a:r>
-          </a:p>
-        </p:txBody>
-      </p:sp>
-      <p:sp>
-        <p:nvSpPr>
-          <p:cNvPr id="13" name="TextBox 12"/>
+                  <a:srgbClr val="181817"/>
+                </a:solidFill>
+                <a:latin typeface="Arial"/>
+              </a:defRPr>
+            </a:pPr>
+            <a:r>
+              <a:t>AI a odpovědnost</a:t>
+            </a:r>
+          </a:p>
+        </p:txBody>
+      </p:sp>
+      <p:sp>
+        <p:nvSpPr>
+          <p:cNvPr id="16" name="TextBox 15"/>
           <p:cNvSpPr txBox="1"/>
           <p:nvPr/>
         </p:nvSpPr>
         <p:spPr>
           <a:xfrm>
-            <a:off x="749300" y="3733800"/>
+            <a:off x="6426200" y="3733800"/>
             <a:ext cx="5016500" cy="1511300"/>
           </a:xfrm>
           <a:prstGeom prst="rect">
@@ -9648,13 +9614,13 @@
               </a:spcAft>
               <a:defRPr sz="1420" b="0">
                 <a:solidFill>
-                  <a:srgbClr val="F4F0E7"/>
-                </a:solidFill>
-                <a:latin typeface="Arial"/>
-              </a:defRPr>
-            </a:pPr>
-            <a:r>
-              <a:t>Hodnocený web + specifikace. Dva průchody. 3–5</a:t>
+                  <a:srgbClr val="181817"/>
+                </a:solidFill>
+                <a:latin typeface="Arial"/>
+              </a:defRPr>
+            </a:pPr>
+            <a:r>
+              <a:t>AI pomohla připravit metodiku a strukturu zápisu.</a:t>
             </a:r>
           </a:p>
           <a:p>
@@ -9667,14 +9633,11 @@
               </a:spcAft>
               <a:defRPr sz="1420" b="0">
                 <a:solidFill>
-                  <a:srgbClr val="F4F0E7"/>
-                </a:solidFill>
-                <a:latin typeface="Arial"/>
-              </a:defRPr>
-            </a:pPr>
-            <a:r>
-              <a:t>skutečných nálezů.</a:t>
-            </a:r>
+                  <a:srgbClr val="181817"/>
+                </a:solidFill>
+                <a:latin typeface="Arial"/>
+              </a:defRPr>
+            </a:pPr>
           </a:p>
           <a:p>
             <a:pPr>
@@ -9686,129 +9649,27 @@
               </a:spcAft>
               <a:defRPr sz="1420" b="0">
                 <a:solidFill>
-                  <a:srgbClr val="F4F0E7"/>
-                </a:solidFill>
-                <a:latin typeface="Arial"/>
-              </a:defRPr>
-            </a:pPr>
-          </a:p>
-          <a:p>
-            <a:pPr>
-              <a:lnSpc>
-                <a:spcPts val="1689"/>
-              </a:lnSpc>
-              <a:spcAft>
-                <a:spcPts val="0"/>
-              </a:spcAft>
-              <a:defRPr sz="1420" b="0">
-                <a:solidFill>
-                  <a:srgbClr val="F4F0E7"/>
-                </a:solidFill>
-                <a:latin typeface="Arial"/>
-              </a:defRPr>
-            </a:pPr>
-            <a:r>
-              <a:t>Důkazy, závažnost a doporučení.</a:t>
-            </a:r>
-          </a:p>
-        </p:txBody>
-      </p:sp>
-      <p:sp>
-        <p:nvSpPr>
-          <p:cNvPr id="14" name="Rectangle 13"/>
-          <p:cNvSpPr/>
-          <p:nvPr/>
-        </p:nvSpPr>
-        <p:spPr>
-          <a:xfrm>
-            <a:off x="6210300" y="2768600"/>
-            <a:ext cx="5448300" cy="2603500"/>
-          </a:xfrm>
-          <a:prstGeom prst="rect">
-            <a:avLst/>
-          </a:prstGeom>
-          <a:solidFill>
-            <a:srgbClr val="E7E0D5"/>
-          </a:solidFill>
-          <a:ln>
-            <a:noFill/>
-          </a:ln>
-        </p:spPr>
-        <p:style>
-          <a:lnRef idx="1">
-            <a:schemeClr val="accent1"/>
-          </a:lnRef>
-          <a:fillRef idx="3">
-            <a:schemeClr val="accent1"/>
-          </a:fillRef>
-          <a:effectRef idx="2">
-            <a:schemeClr val="accent1"/>
-          </a:effectRef>
-          <a:fontRef idx="minor">
-            <a:schemeClr val="lt1"/>
-          </a:fontRef>
-        </p:style>
-        <p:txBody>
-          <a:bodyPr rtlCol="0" anchor="ctr"/>
-          <a:lstStyle/>
-          <a:p>
-            <a:pPr algn="ctr"/>
-          </a:p>
-        </p:txBody>
-      </p:sp>
-      <p:sp>
-        <p:nvSpPr>
-          <p:cNvPr id="15" name="Rectangle 14"/>
-          <p:cNvSpPr/>
-          <p:nvPr/>
-        </p:nvSpPr>
-        <p:spPr>
-          <a:xfrm>
-            <a:off x="6210300" y="2768600"/>
-            <a:ext cx="5448300" cy="76200"/>
-          </a:xfrm>
-          <a:prstGeom prst="rect">
-            <a:avLst/>
-          </a:prstGeom>
-          <a:solidFill>
-            <a:srgbClr val="F45E2B"/>
-          </a:solidFill>
-          <a:ln>
-            <a:noFill/>
-          </a:ln>
-        </p:spPr>
-        <p:style>
-          <a:lnRef idx="1">
-            <a:schemeClr val="accent1"/>
-          </a:lnRef>
-          <a:fillRef idx="3">
-            <a:schemeClr val="accent1"/>
-          </a:fillRef>
-          <a:effectRef idx="2">
-            <a:schemeClr val="accent1"/>
-          </a:effectRef>
-          <a:fontRef idx="minor">
-            <a:schemeClr val="lt1"/>
-          </a:fontRef>
-        </p:style>
-        <p:txBody>
-          <a:bodyPr rtlCol="0" anchor="ctr"/>
-          <a:lstStyle/>
-          <a:p>
-            <a:pPr algn="ctr"/>
-          </a:p>
-        </p:txBody>
-      </p:sp>
-      <p:sp>
-        <p:nvSpPr>
-          <p:cNvPr id="16" name="TextBox 15"/>
+                  <a:srgbClr val="181817"/>
+                </a:solidFill>
+                <a:latin typeface="Arial"/>
+              </a:defRPr>
+            </a:pPr>
+            <a:r>
+              <a:t>Každý nález hodnotitel osobně ověří a obhájí.</a:t>
+            </a:r>
+          </a:p>
+        </p:txBody>
+      </p:sp>
+      <p:sp>
+        <p:nvSpPr>
+          <p:cNvPr id="17" name="TextBox 16"/>
           <p:cNvSpPr txBox="1"/>
           <p:nvPr/>
         </p:nvSpPr>
         <p:spPr>
           <a:xfrm>
-            <a:off x="6426200" y="3035300"/>
-            <a:ext cx="5016500" cy="685800"/>
+            <a:off x="533400" y="5676900"/>
+            <a:ext cx="11125200" cy="546100"/>
           </a:xfrm>
           <a:prstGeom prst="rect">
             <a:avLst/>
@@ -9823,34 +9684,34 @@
           <a:p>
             <a:pPr>
               <a:lnSpc>
-                <a:spcPts val="2200"/>
-              </a:lnSpc>
-              <a:spcAft>
-                <a:spcPts val="0"/>
-              </a:spcAft>
-              <a:defRPr sz="2000" b="1">
-                <a:solidFill>
-                  <a:srgbClr val="181817"/>
-                </a:solidFill>
-                <a:latin typeface="Arial"/>
-              </a:defRPr>
-            </a:pPr>
-            <a:r>
-              <a:t>AI a odpovědnost</a:t>
-            </a:r>
-          </a:p>
-        </p:txBody>
-      </p:sp>
-      <p:sp>
-        <p:nvSpPr>
-          <p:cNvPr id="17" name="TextBox 16"/>
+                <a:spcPts val="1583"/>
+              </a:lnSpc>
+              <a:spcAft>
+                <a:spcPts val="0"/>
+              </a:spcAft>
+              <a:defRPr sz="1320" b="0">
+                <a:solidFill>
+                  <a:srgbClr val="68635B"/>
+                </a:solidFill>
+                <a:latin typeface="Arial"/>
+              </a:defRPr>
+            </a:pPr>
+            <a:r>
+              <a:t>review.md i tyto snímky musí odrážet stejné skutečné výsledky.</a:t>
+            </a:r>
+          </a:p>
+        </p:txBody>
+      </p:sp>
+      <p:sp>
+        <p:nvSpPr>
+          <p:cNvPr id="18" name="TextBox 17"/>
           <p:cNvSpPr txBox="1"/>
           <p:nvPr/>
         </p:nvSpPr>
         <p:spPr>
           <a:xfrm>
-            <a:off x="6426200" y="3733800"/>
-            <a:ext cx="5016500" cy="1511300"/>
+            <a:off x="533400" y="6413500"/>
+            <a:ext cx="10033000" cy="181610"/>
           </a:xfrm>
           <a:prstGeom prst="rect">
             <a:avLst/>
@@ -9865,89 +9726,12 @@
           <a:p>
             <a:pPr>
               <a:lnSpc>
-                <a:spcPts val="1689"/>
-              </a:lnSpc>
-              <a:spcAft>
-                <a:spcPts val="0"/>
-              </a:spcAft>
-              <a:defRPr sz="1420" b="0">
-                <a:solidFill>
-                  <a:srgbClr val="181817"/>
-                </a:solidFill>
-                <a:latin typeface="Arial"/>
-              </a:defRPr>
-            </a:pPr>
-            <a:r>
-              <a:t>AI pomohla připravit metodiku a strukturu zápisu.</a:t>
-            </a:r>
-          </a:p>
-          <a:p>
-            <a:pPr>
-              <a:lnSpc>
-                <a:spcPts val="1689"/>
-              </a:lnSpc>
-              <a:spcAft>
-                <a:spcPts val="0"/>
-              </a:spcAft>
-              <a:defRPr sz="1420" b="0">
-                <a:solidFill>
-                  <a:srgbClr val="181817"/>
-                </a:solidFill>
-                <a:latin typeface="Arial"/>
-              </a:defRPr>
-            </a:pPr>
-          </a:p>
-          <a:p>
-            <a:pPr>
-              <a:lnSpc>
-                <a:spcPts val="1689"/>
-              </a:lnSpc>
-              <a:spcAft>
-                <a:spcPts val="0"/>
-              </a:spcAft>
-              <a:defRPr sz="1420" b="0">
-                <a:solidFill>
-                  <a:srgbClr val="181817"/>
-                </a:solidFill>
-                <a:latin typeface="Arial"/>
-              </a:defRPr>
-            </a:pPr>
-            <a:r>
-              <a:t>Každý nález hodnotitel osobně ověří a obhájí.</a:t>
-            </a:r>
-          </a:p>
-        </p:txBody>
-      </p:sp>
-      <p:sp>
-        <p:nvSpPr>
-          <p:cNvPr id="18" name="TextBox 17"/>
-          <p:cNvSpPr txBox="1"/>
-          <p:nvPr/>
-        </p:nvSpPr>
-        <p:spPr>
-          <a:xfrm>
-            <a:off x="533400" y="5676900"/>
-            <a:ext cx="11125200" cy="546100"/>
-          </a:xfrm>
-          <a:prstGeom prst="rect">
-            <a:avLst/>
-          </a:prstGeom>
-          <a:noFill/>
-        </p:spPr>
-        <p:txBody>
-          <a:bodyPr wrap="none" lIns="0" rIns="0" tIns="0" bIns="0">
-            <a:spAutoFit/>
-          </a:bodyPr>
-          <a:lstStyle/>
-          <a:p>
-            <a:pPr>
-              <a:lnSpc>
-                <a:spcPts val="1583"/>
-              </a:lnSpc>
-              <a:spcAft>
-                <a:spcPts val="0"/>
-              </a:spcAft>
-              <a:defRPr sz="1320" b="0">
+                <a:spcPts val="930"/>
+              </a:lnSpc>
+              <a:spcAft>
+                <a:spcPts val="0"/>
+              </a:spcAft>
+              <a:defRPr sz="750" b="0">
                 <a:solidFill>
                   <a:srgbClr val="68635B"/>
                 </a:solidFill>
@@ -9955,7 +9739,7 @@
               </a:defRPr>
             </a:pPr>
             <a:r>
-              <a:t>review.md i tyto snímky musí odrážet stejné skutečné výsledky.</a:t>
+              <a:t>METODICKÁ ŠABLONA — DOPLNIT CIZÍ PROJEKT</a:t>
             </a:r>
           </a:p>
         </p:txBody>
@@ -9963,48 +9747,6 @@
       <p:sp>
         <p:nvSpPr>
           <p:cNvPr id="19" name="TextBox 18"/>
-          <p:cNvSpPr txBox="1"/>
-          <p:nvPr/>
-        </p:nvSpPr>
-        <p:spPr>
-          <a:xfrm>
-            <a:off x="533400" y="6413500"/>
-            <a:ext cx="10033000" cy="181610"/>
-          </a:xfrm>
-          <a:prstGeom prst="rect">
-            <a:avLst/>
-          </a:prstGeom>
-          <a:noFill/>
-        </p:spPr>
-        <p:txBody>
-          <a:bodyPr wrap="none" lIns="0" rIns="0" tIns="0" bIns="0">
-            <a:spAutoFit/>
-          </a:bodyPr>
-          <a:lstStyle/>
-          <a:p>
-            <a:pPr>
-              <a:lnSpc>
-                <a:spcPts val="930"/>
-              </a:lnSpc>
-              <a:spcAft>
-                <a:spcPts val="0"/>
-              </a:spcAft>
-              <a:defRPr sz="750" b="0">
-                <a:solidFill>
-                  <a:srgbClr val="68635B"/>
-                </a:solidFill>
-                <a:latin typeface="Arial"/>
-              </a:defRPr>
-            </a:pPr>
-            <a:r>
-              <a:t>METODICKÁ ŠABLONA — DOPLNIT CIZÍ PROJEKT</a:t>
-            </a:r>
-          </a:p>
-        </p:txBody>
-      </p:sp>
-      <p:sp>
-        <p:nvSpPr>
-          <p:cNvPr id="20" name="TextBox 19"/>
           <p:cNvSpPr txBox="1"/>
           <p:nvPr/>
         </p:nvSpPr>

--- a/odevzdani/cviceni-06-cross-review/prezentace.pptx
+++ b/odevzdani/cviceni-06-cross-review/prezentace.pptx
@@ -507,7 +507,7 @@
           <a:lstStyle/>
           <a:p>
             <a:r>
-              <a:t>Tato prezentace je metodická příprava. Nemáme přidělený cizí web ani jeho specifikaci, a proto nemůžeme poctivě uvést skutečné nálezy. Před prezentací výsledků je nutné doplnit hodnocený projekt, verzi, podmínky a reálně provedené scénáře. Šablona ukazuje, jak použijeme dvě formalizované metody a jak budeme posuzovat závažnost. Není vhodné ji odevzdat jako hotové splnění cvičení šest bez doplnění výsledků. Na závěr jasně odlišíme příklady vlastního ověření od peer review.</a:t>
+              <a:t>Tato prezentace je metodická příprava. Nemáme přidělený cizí web ani jeho specifikaci, a proto nemůžeme poctivě uvést skutečné nálezy. Před prezentací výsledků je nutné doplnit hodnocený projekt, verzi, podmínky a reálně provedené scénáře. Šablona ukazuje, jak použijeme dvě formalizované metody a jak budeme posuzovat závažnost. Není vhodné ji odevzdat jako hotové splnění cvičení šest bez doplnění výsledků. Na závěr jasně odlišíme příklady vlastního ověření od peer review. Audiozpětná vazba našeho zadavatele není hodnocením přiděleného cizího projektu a chybějící posudek nenahrazuje.</a:t>
             </a:r>
           </a:p>
         </p:txBody>

--- a/odevzdani/cviceni-06-cross-review/prezentace.pptx
+++ b/odevzdani/cviceni-06-cross-review/prezentace.pptx
@@ -507,7 +507,7 @@
           <a:lstStyle/>
           <a:p>
             <a:r>
-              <a:t>Tato prezentace je metodická příprava. Nemáme přidělený cizí web ani jeho specifikaci, a proto nemůžeme poctivě uvést skutečné nálezy. Před prezentací výsledků je nutné doplnit hodnocený projekt, verzi, podmínky a reálně provedené scénáře. Šablona ukazuje, jak použijeme dvě formalizované metody a jak budeme posuzovat závažnost. Není vhodné ji odevzdat jako hotové splnění cvičení šest bez doplnění výsledků. Na závěr jasně odlišíme příklady vlastního ověření od peer review. Audiozpětná vazba našeho zadavatele není hodnocením přiděleného cizího projektu a chybějící posudek nenahrazuje.</a:t>
+              <a:t>[25 s] Toto je metodická šablona, ne dokončené hodnocení cizího webu. Přidělený projekt ani jeho specifikace nebyly poskytnuty. Připravený je postup, dvě metody a struktura evidence; po skutečném hodnocení musíme doplnit identitu cizího projektu a tři až pět ověřených nálezů. Jeho hodnoty nenahrazujeme zjištěními z našeho festivalu. Následující poznámky slouží jako osnova pro přibližně čtyřminutovou prezentaci po vyplnění.</a:t>
             </a:r>
           </a:p>
         </p:txBody>
@@ -577,7 +577,7 @@
           <a:lstStyle/>
           <a:p>
             <a:r>
-              <a:t>Heuristická evaluace posoudí obecné principy použitelnosti, například viditelnost stavu, konzistenci a prevenci chyb. Každý hodnotitel projde web samostatně a nálezy poté sjednotíme. Kognitivní průchod sleduje konkrétní úkol: zda uživatel ví, co chce udělat, všimne si správného ovládání, spojí jej s cílem a pozná úspěch. Vybereme dva scénáře z cizí specifikace, nikoli z našeho festivalu. Doplníme mobilní zobrazení a klávesnici. Expertní odhad nevydáváme za test s reprezentativními uživateli.</a:t>
+              <a:t>[30 s po doplnění] Uveďte název cizího projektu a verzi, kterou jste opravdu hodnotili. Převezměte dva scénáře z jeho specifikace a řekněte, co mělo být výsledkem. Doplňte datum a podmínky provedení. Nepoužívejte dnešní datum nebo jména jako náhradu za neprovedené hodnocení. Připravená šablona je pouze současný výstup přípravy; po provedení tento bod nahraďte konkrétním pokrokem od minulého cvičení. Rozhodněte, které nálezy mají největší dopad na dokončení scénářů.</a:t>
             </a:r>
           </a:p>
         </p:txBody>
@@ -647,7 +647,7 @@
           <a:lstStyle/>
           <a:p>
             <a:r>
-              <a:t>Stupnici je vhodné sjednotit před hodnocením. Kritický problém znemožní důležitý úkol, významný způsobuje chyby nebo zásadní nejistotu, drobný má omezený místní dopad. Nestačí každé nepohodlí označit za kritické. U nálezu vysvětlíme, komu brání, v jaké situaci a zda existuje obcházení. Pokud se neshodneme, vrátíme se ke scénáři a důkazu. Doporučení se pak řadí podle dopadu a ne podle toho, který problém nejvíce zaujal na screenshotu.</a:t>
+              <a:t>[40 s] Heuristické hodnocení přiřazuje zjištění ke konkrétním pravidlům, ne k osobnímu vkusu. Při kognitivním průchodu se u každého kroku ptáme, zda uživatel zná cíl, najde správný prvek, spojí si ho s cílem a pozná správný výsledek. Metody se doplňují: první hledá opakující se problémy rozhraní, druhá překážky konkrétního úkolu. Do skutečné prezentace doplňte, kde každá metoda vedla k nálezu. Expertní průchod nezaměňujte za experiment s reprezentativním vzorkem uživatelů.</a:t>
             </a:r>
           </a:p>
         </p:txBody>
@@ -717,7 +717,7 @@
           <a:lstStyle/>
           <a:p>
             <a:r>
-              <a:t>Každý nález potřebuje stránku a přesné kroky. Doplníme očekávaný a skutečný stav a screenshot nebo jiný důkaz. Propojíme jej s heuristikou nebo konkrétní otázkou kognitivního průchodu. Závažnost zdůvodníme dopadem na úkol a navrhneme změnu, která problém řeší. U prezentace vybereme tři až pět nejsilnějších reálných nálezů. V této připravené verzi jejich místa zůstávají nedoplněná, protože cizí projekt nebyl předán. Prázdné výsledky nelze nahradit věrohodně znějícími domněnkami.</a:t>
+              <a:t>[40 s] U každého nálezu doplňte reprodukovatelné kroky a důkaz, například screenshot s kontextem. Závažnost se odvozuje od dopadu: kritická chyba brání klíčovému úkolu bez rozumné náhrady, významná způsobuje chyby nebo nejistotu a drobná nebrání dosažení cíle. Samotné chybějící slovo bez kontextu není automaticky kritický problém. Každý návrh opravy spojte s příčinou. Rozlišujte mezi problémem použitelnosti a grafickou preferencí. Přesný formulář je připraven v review.md.</a:t>
             </a:r>
           </a:p>
         </p:txBody>
@@ -787,7 +787,7 @@
           <a:lstStyle/>
           <a:p>
             <a:r>
-              <a:t>Na vlastním projektu lze ukázat rozdíl mezi důkazem a tvrzením. Datový validátor skutečně spočítá entity a ověří reference, ale nezměří srozumitelnost rozhraní. Architektura localStorage dokládá místní ukládání, nikoli sdílené účty. A absence cizího webu znamená, že peer review není provedeno. Tyto příklady jsou označené jako vlastní ověření Prague Pulse Fest a nesmějí se objevit v tabulce nálezů jiného týmu. Po přidělení projektu je nahradíme skutečně pozorovanými případy.</a:t>
+              <a:t>[60–90 s po doplnění] Nahraďte tento snímek třemi až pěti skutečnými nálezy cizího projektu. Pro každý stručně řekněte, co se stalo, proč to uživateli vadí a jak problém opravit. Nejzávažnější příklad podpořte krátkou ukázkou nebo screenshotem; pokud potřebujete, použijte více místa a zkraťte ostatní snímky. V této šabloně žádné nálezy nejsou a R01 až R05 nejsou tvrzením o existenci chyb. Celý projev včetně ukázek má zůstat do pěti minut.</a:t>
             </a:r>
           </a:p>
         </p:txBody>
@@ -857,7 +857,7 @@
           <a:lstStyle/>
           <a:p>
             <a:r>
-              <a:t>K dokončení potřebujeme skutečný cizí projekt, jeho specifikaci a klíčové scénáře. Potom doplníme identifikaci verze, podmínky, dva průchody a tři až pět reálných nálezů. Zkontrolujeme shodu tabulky review a prezentace. AI může pomoci se stručností, strukturou a návrhem otázek, ale nesmí vytvářet neověřené problémy ani výpovědi testerů. Hodnotitel má každý nález osobně zopakovat. Takto připravené review bude konkrétní, spravedlivé a použitelné pro změny hodnoceného projektu.</a:t>
+              <a:t>[35 s po doplnění] AI pomohla připravit tuto metodiku a formulář. Nenahrazuje pozorování cizího projektu a v tuto chvíli z ní nepochází ověřené nálezy. Při skutečném review uveďte konkrétní návrh AI, jeho kontrolu a přijetí či odmítnutí. Například domnělý problém můžete odmítnout, pokud opakovaný průchod ukáže správnou cestu. Na závěr doporučte pořadí oprav podle dopadu. Před odevzdáním šablonu nahraďte skutečným review a zkontrolujte důkazy i čas prezentace.</a:t>
             </a:r>
           </a:p>
         </p:txBody>
@@ -3878,7 +3878,7 @@
             <a:avLst/>
           </a:prstGeom>
           <a:solidFill>
-            <a:srgbClr val="181817"/>
+            <a:srgbClr val="FFFFFF"/>
           </a:solidFill>
           <a:ln>
             <a:noFill/>
@@ -3914,14 +3914,14 @@
         </p:nvSpPr>
         <p:spPr>
           <a:xfrm>
-            <a:off x="8851900" y="0"/>
-            <a:ext cx="3340100" cy="6858000"/>
+            <a:off x="711200" y="609600"/>
+            <a:ext cx="76200" cy="381000"/>
           </a:xfrm>
           <a:prstGeom prst="rect">
             <a:avLst/>
           </a:prstGeom>
           <a:solidFill>
-            <a:srgbClr val="F45E2B"/>
+            <a:srgbClr val="E55024"/>
           </a:solidFill>
           <a:ln>
             <a:noFill/>
@@ -3957,8 +3957,8 @@
         </p:nvSpPr>
         <p:spPr>
           <a:xfrm>
-            <a:off x="533400" y="381000"/>
-            <a:ext cx="2476500" cy="350113"/>
+            <a:off x="977900" y="647700"/>
+            <a:ext cx="10502900" cy="317500"/>
           </a:xfrm>
           <a:prstGeom prst="rect">
             <a:avLst/>
@@ -3967,26 +3967,26 @@
         </p:spPr>
         <p:txBody>
           <a:bodyPr wrap="none" lIns="0" rIns="0" tIns="0" bIns="0">
-            <a:spAutoFit/>
+            <a:noAutofit/>
           </a:bodyPr>
           <a:lstStyle/>
           <a:p>
             <a:pPr>
               <a:lnSpc>
-                <a:spcPts val="2256"/>
+                <a:spcPts val="2360"/>
               </a:lnSpc>
               <a:spcAft>
                 <a:spcPts val="0"/>
               </a:spcAft>
-              <a:defRPr sz="1820" b="1">
+              <a:defRPr sz="2000" b="1">
                 <a:solidFill>
-                  <a:srgbClr val="F4F0E7"/>
+                  <a:srgbClr val="191B20"/>
                 </a:solidFill>
                 <a:latin typeface="Arial"/>
               </a:defRPr>
             </a:pPr>
             <a:r>
-              <a:t>PRAGUE</a:t>
+              <a:t>PRAGUE PULSE FEST</a:t>
             </a:r>
           </a:p>
         </p:txBody>
@@ -3999,8 +3999,8 @@
         </p:nvSpPr>
         <p:spPr>
           <a:xfrm>
-            <a:off x="533400" y="628650"/>
-            <a:ext cx="2476500" cy="513892"/>
+            <a:off x="711200" y="1600200"/>
+            <a:ext cx="10769600" cy="241300"/>
           </a:xfrm>
           <a:prstGeom prst="rect">
             <a:avLst/>
@@ -4009,26 +4009,26 @@
         </p:spPr>
         <p:txBody>
           <a:bodyPr wrap="none" lIns="0" rIns="0" tIns="0" bIns="0">
-            <a:spAutoFit/>
+            <a:noAutofit/>
           </a:bodyPr>
           <a:lstStyle/>
           <a:p>
             <a:pPr>
               <a:lnSpc>
-                <a:spcPts val="3546"/>
+                <a:spcPts val="1652"/>
               </a:lnSpc>
               <a:spcAft>
                 <a:spcPts val="0"/>
               </a:spcAft>
-              <a:defRPr sz="2860" b="1">
+              <a:defRPr sz="1400" b="1">
                 <a:solidFill>
-                  <a:srgbClr val="F4F0E7"/>
+                  <a:srgbClr val="E55024"/>
                 </a:solidFill>
                 <a:latin typeface="Arial"/>
               </a:defRPr>
             </a:pPr>
             <a:r>
-              <a:t>PULSE</a:t>
+              <a:t>CVIČENÍ 06 · K DOPLNĚNÍ</a:t>
             </a:r>
           </a:p>
         </p:txBody>
@@ -4041,8 +4041,8 @@
         </p:nvSpPr>
         <p:spPr>
           <a:xfrm>
-            <a:off x="533400" y="1041400"/>
-            <a:ext cx="2641600" cy="196570"/>
+            <a:off x="685800" y="2146300"/>
+            <a:ext cx="10795000" cy="1816100"/>
           </a:xfrm>
           <a:prstGeom prst="rect">
             <a:avLst/>
@@ -4051,26 +4051,26 @@
         </p:spPr>
         <p:txBody>
           <a:bodyPr wrap="none" lIns="0" rIns="0" tIns="0" bIns="0">
-            <a:spAutoFit/>
+            <a:noAutofit/>
           </a:bodyPr>
           <a:lstStyle/>
           <a:p>
             <a:pPr>
               <a:lnSpc>
-                <a:spcPts val="1047"/>
+                <a:spcPts val="5376"/>
               </a:lnSpc>
               <a:spcAft>
                 <a:spcPts val="0"/>
               </a:spcAft>
-              <a:defRPr sz="845" b="1">
+              <a:defRPr sz="4800" b="1">
                 <a:solidFill>
-                  <a:srgbClr val="F4F0E7"/>
+                  <a:srgbClr val="191B20"/>
                 </a:solidFill>
                 <a:latin typeface="Arial"/>
               </a:defRPr>
             </a:pPr>
             <a:r>
-              <a:t>FEST / 2027</a:t>
+              <a:t>Cross-review: šablona</a:t>
             </a:r>
           </a:p>
         </p:txBody>
@@ -4083,8 +4083,8 @@
         </p:nvSpPr>
         <p:spPr>
           <a:xfrm>
-            <a:off x="533400" y="1536700"/>
-            <a:ext cx="7874000" cy="236728"/>
+            <a:off x="711200" y="4191000"/>
+            <a:ext cx="10769600" cy="1016000"/>
           </a:xfrm>
           <a:prstGeom prst="rect">
             <a:avLst/>
@@ -4093,162 +4093,186 @@
         </p:spPr>
         <p:txBody>
           <a:bodyPr wrap="none" lIns="0" rIns="0" tIns="0" bIns="0">
-            <a:spAutoFit/>
+            <a:noAutofit/>
           </a:bodyPr>
           <a:lstStyle/>
           <a:p>
             <a:pPr>
               <a:lnSpc>
-                <a:spcPts val="1364"/>
+                <a:spcPts val="2713"/>
               </a:lnSpc>
               <a:spcAft>
                 <a:spcPts val="0"/>
               </a:spcAft>
-              <a:defRPr sz="1100" b="1">
+              <a:defRPr sz="2300" b="0">
                 <a:solidFill>
-                  <a:srgbClr val="F4F0E7"/>
+                  <a:srgbClr val="626773"/>
                 </a:solidFill>
                 <a:latin typeface="Arial"/>
               </a:defRPr>
             </a:pPr>
             <a:r>
-              <a:t>CVIČENÍ 06 / METODICKÁ ŠABLONA</a:t>
-            </a:r>
-          </a:p>
-        </p:txBody>
-      </p:sp>
-      <p:sp>
-        <p:nvSpPr>
-          <p:cNvPr id="8" name="TextBox 7"/>
-          <p:cNvSpPr txBox="1"/>
-          <p:nvPr/>
-        </p:nvSpPr>
-        <p:spPr>
-          <a:xfrm>
-            <a:off x="482600" y="2133600"/>
-            <a:ext cx="8001000" cy="2095500"/>
-          </a:xfrm>
-          <a:prstGeom prst="rect">
-            <a:avLst/>
-          </a:prstGeom>
-          <a:noFill/>
-        </p:spPr>
-        <p:txBody>
-          <a:bodyPr wrap="none" lIns="0" rIns="0" tIns="0" bIns="0">
-            <a:spAutoFit/>
-          </a:bodyPr>
-          <a:lstStyle/>
+              <a:t>Prague Pulse Fest · 1.–3. srpna 2027</a:t>
+            </a:r>
+          </a:p>
           <a:p>
             <a:pPr>
               <a:lnSpc>
-                <a:spcPts val="5830"/>
+                <a:spcPts val="2713"/>
               </a:lnSpc>
               <a:spcAft>
                 <a:spcPts val="0"/>
               </a:spcAft>
-              <a:defRPr sz="5500" b="1">
+              <a:defRPr sz="2300" b="0">
                 <a:solidFill>
-                  <a:srgbClr val="F4F0E7"/>
+                  <a:srgbClr val="626773"/>
                 </a:solidFill>
                 <a:latin typeface="Arial"/>
               </a:defRPr>
             </a:pPr>
             <a:r>
-              <a:t>Review potřebuje</a:t>
-            </a:r>
-          </a:p>
+              <a:t>Výstaviště Praha · fiktivní festival</a:t>
+            </a:r>
+          </a:p>
+        </p:txBody>
+      </p:sp>
+      <p:sp>
+        <p:nvSpPr>
+          <p:cNvPr id="8" name="TextBox 7"/>
+          <p:cNvSpPr txBox="1"/>
+          <p:nvPr/>
+        </p:nvSpPr>
+        <p:spPr>
+          <a:xfrm>
+            <a:off x="711200" y="5600700"/>
+            <a:ext cx="10769600" cy="304800"/>
+          </a:xfrm>
+          <a:prstGeom prst="rect">
+            <a:avLst/>
+          </a:prstGeom>
+          <a:noFill/>
+        </p:spPr>
+        <p:txBody>
+          <a:bodyPr wrap="none" lIns="0" rIns="0" tIns="0" bIns="0">
+            <a:noAutofit/>
+          </a:bodyPr>
+          <a:lstStyle/>
           <a:p>
             <a:pPr>
               <a:lnSpc>
-                <a:spcPts val="5830"/>
-              </a:lnSpc>
-              <a:spcAft>
-                <a:spcPts val="0"/>
-              </a:spcAft>
-              <a:defRPr sz="5500" b="1">
-                <a:solidFill>
-                  <a:srgbClr val="F4F0E7"/>
-                </a:solidFill>
-                <a:latin typeface="Arial"/>
-              </a:defRPr>
-            </a:pPr>
-            <a:r>
-              <a:t>skutečný důkaz.</a:t>
-            </a:r>
-          </a:p>
-        </p:txBody>
-      </p:sp>
-      <p:sp>
-        <p:nvSpPr>
-          <p:cNvPr id="9" name="TextBox 8"/>
-          <p:cNvSpPr txBox="1"/>
-          <p:nvPr/>
-        </p:nvSpPr>
-        <p:spPr>
-          <a:xfrm>
-            <a:off x="533400" y="4724400"/>
-            <a:ext cx="7747000" cy="1104900"/>
-          </a:xfrm>
-          <a:prstGeom prst="rect">
-            <a:avLst/>
-          </a:prstGeom>
-          <a:noFill/>
-        </p:spPr>
-        <p:txBody>
-          <a:bodyPr wrap="none" lIns="0" rIns="0" tIns="0" bIns="0">
-            <a:spAutoFit/>
-          </a:bodyPr>
-          <a:lstStyle/>
-          <a:p>
-            <a:pPr>
-              <a:lnSpc>
-                <a:spcPts val="2356"/>
+                <a:spcPts val="2242"/>
               </a:lnSpc>
               <a:spcAft>
                 <a:spcPts val="0"/>
               </a:spcAft>
               <a:defRPr sz="1900" b="0">
                 <a:solidFill>
-                  <a:srgbClr val="F4F0E7"/>
+                  <a:srgbClr val="191B20"/>
                 </a:solidFill>
                 <a:latin typeface="Arial"/>
               </a:defRPr>
             </a:pPr>
             <a:r>
-              <a:t>Cizí projekt dosud nebyl poskytnut.</a:t>
-            </a:r>
-          </a:p>
+              <a:t>Michal Ladra · Matěj Mlejnek · Jan Martínek</a:t>
+            </a:r>
+          </a:p>
+        </p:txBody>
+      </p:sp>
+      <p:sp>
+        <p:nvSpPr>
+          <p:cNvPr id="9" name="Rectangle 8"/>
+          <p:cNvSpPr/>
+          <p:nvPr/>
+        </p:nvSpPr>
+        <p:spPr>
+          <a:xfrm>
+            <a:off x="711200" y="6248400"/>
+            <a:ext cx="10769600" cy="12700"/>
+          </a:xfrm>
+          <a:prstGeom prst="rect">
+            <a:avLst/>
+          </a:prstGeom>
+          <a:solidFill>
+            <a:srgbClr val="DFE2E7"/>
+          </a:solidFill>
+          <a:ln>
+            <a:noFill/>
+          </a:ln>
+        </p:spPr>
+        <p:style>
+          <a:lnRef idx="1">
+            <a:schemeClr val="accent1"/>
+          </a:lnRef>
+          <a:fillRef idx="3">
+            <a:schemeClr val="accent1"/>
+          </a:fillRef>
+          <a:effectRef idx="2">
+            <a:schemeClr val="accent1"/>
+          </a:effectRef>
+          <a:fontRef idx="minor">
+            <a:schemeClr val="lt1"/>
+          </a:fontRef>
+        </p:style>
+        <p:txBody>
+          <a:bodyPr rtlCol="0" anchor="ctr"/>
+          <a:lstStyle/>
+          <a:p>
+            <a:pPr algn="ctr"/>
+          </a:p>
+        </p:txBody>
+      </p:sp>
+      <p:sp>
+        <p:nvSpPr>
+          <p:cNvPr id="10" name="TextBox 9"/>
+          <p:cNvSpPr txBox="1"/>
+          <p:nvPr/>
+        </p:nvSpPr>
+        <p:spPr>
+          <a:xfrm>
+            <a:off x="711200" y="6438900"/>
+            <a:ext cx="9652000" cy="203200"/>
+          </a:xfrm>
+          <a:prstGeom prst="rect">
+            <a:avLst/>
+          </a:prstGeom>
+          <a:noFill/>
+        </p:spPr>
+        <p:txBody>
+          <a:bodyPr wrap="none" lIns="0" rIns="0" tIns="0" bIns="0">
+            <a:noAutofit/>
+          </a:bodyPr>
+          <a:lstStyle/>
           <a:p>
             <a:pPr>
               <a:lnSpc>
-                <a:spcPts val="2356"/>
+                <a:spcPts val="1297"/>
               </a:lnSpc>
               <a:spcAft>
                 <a:spcPts val="0"/>
               </a:spcAft>
-              <a:defRPr sz="1900" b="0">
+              <a:defRPr sz="1100" b="0">
                 <a:solidFill>
-                  <a:srgbClr val="F4F0E7"/>
+                  <a:srgbClr val="626773"/>
                 </a:solidFill>
                 <a:latin typeface="Arial"/>
               </a:defRPr>
             </a:pPr>
             <a:r>
-              <a:t>Toto nejsou hotové výsledky peer review.</a:t>
-            </a:r>
-          </a:p>
-        </p:txBody>
-      </p:sp>
-      <p:sp>
-        <p:nvSpPr>
-          <p:cNvPr id="10" name="TextBox 9"/>
+              <a:t>ŠABLONA · doplnit skutečný cizí projekt</a:t>
+            </a:r>
+          </a:p>
+        </p:txBody>
+      </p:sp>
+      <p:sp>
+        <p:nvSpPr>
+          <p:cNvPr id="11" name="TextBox 10"/>
           <p:cNvSpPr txBox="1"/>
           <p:nvPr/>
         </p:nvSpPr>
         <p:spPr>
           <a:xfrm>
-            <a:off x="9220200" y="889000"/>
-            <a:ext cx="2667000" cy="961135"/>
+            <a:off x="10807700" y="6413500"/>
+            <a:ext cx="673100" cy="215900"/>
           </a:xfrm>
           <a:prstGeom prst="rect">
             <a:avLst/>
@@ -4257,316 +4281,26 @@
         </p:spPr>
         <p:txBody>
           <a:bodyPr wrap="none" lIns="0" rIns="0" tIns="0" bIns="0">
-            <a:spAutoFit/>
+            <a:noAutofit/>
           </a:bodyPr>
           <a:lstStyle/>
           <a:p>
             <a:pPr>
               <a:lnSpc>
-                <a:spcPts val="7067"/>
+                <a:spcPts val="1416"/>
               </a:lnSpc>
               <a:spcAft>
                 <a:spcPts val="0"/>
               </a:spcAft>
-              <a:defRPr sz="5700" b="1">
+              <a:defRPr sz="1200" b="0">
                 <a:solidFill>
-                  <a:srgbClr val="181817"/>
+                  <a:srgbClr val="626773"/>
                 </a:solidFill>
                 <a:latin typeface="Arial"/>
               </a:defRPr>
             </a:pPr>
             <a:r>
-              <a:t>1—3</a:t>
-            </a:r>
-          </a:p>
-        </p:txBody>
-      </p:sp>
-      <p:sp>
-        <p:nvSpPr>
-          <p:cNvPr id="11" name="TextBox 10"/>
-          <p:cNvSpPr txBox="1"/>
-          <p:nvPr/>
-        </p:nvSpPr>
-        <p:spPr>
-          <a:xfrm>
-            <a:off x="9220200" y="1765300"/>
-            <a:ext cx="2667000" cy="551688"/>
-          </a:xfrm>
-          <a:prstGeom prst="rect">
-            <a:avLst/>
-          </a:prstGeom>
-          <a:noFill/>
-        </p:spPr>
-        <p:txBody>
-          <a:bodyPr wrap="none" lIns="0" rIns="0" tIns="0" bIns="0">
-            <a:spAutoFit/>
-          </a:bodyPr>
-          <a:lstStyle/>
-          <a:p>
-            <a:pPr>
-              <a:lnSpc>
-                <a:spcPts val="3844"/>
-              </a:lnSpc>
-              <a:spcAft>
-                <a:spcPts val="0"/>
-              </a:spcAft>
-              <a:defRPr sz="3100" b="1">
-                <a:solidFill>
-                  <a:srgbClr val="181817"/>
-                </a:solidFill>
-                <a:latin typeface="Arial"/>
-              </a:defRPr>
-            </a:pPr>
-            <a:r>
-              <a:t>SRPEN</a:t>
-            </a:r>
-          </a:p>
-        </p:txBody>
-      </p:sp>
-      <p:sp>
-        <p:nvSpPr>
-          <p:cNvPr id="12" name="TextBox 11"/>
-          <p:cNvSpPr txBox="1"/>
-          <p:nvPr/>
-        </p:nvSpPr>
-        <p:spPr>
-          <a:xfrm>
-            <a:off x="9220200" y="2247900"/>
-            <a:ext cx="2667000" cy="724916"/>
-          </a:xfrm>
-          <a:prstGeom prst="rect">
-            <a:avLst/>
-          </a:prstGeom>
-          <a:noFill/>
-        </p:spPr>
-        <p:txBody>
-          <a:bodyPr wrap="none" lIns="0" rIns="0" tIns="0" bIns="0">
-            <a:spAutoFit/>
-          </a:bodyPr>
-          <a:lstStyle/>
-          <a:p>
-            <a:pPr>
-              <a:lnSpc>
-                <a:spcPts val="5208"/>
-              </a:lnSpc>
-              <a:spcAft>
-                <a:spcPts val="0"/>
-              </a:spcAft>
-              <a:defRPr sz="4200" b="1">
-                <a:solidFill>
-                  <a:srgbClr val="181817"/>
-                </a:solidFill>
-                <a:latin typeface="Arial"/>
-              </a:defRPr>
-            </a:pPr>
-            <a:r>
-              <a:t>2027</a:t>
-            </a:r>
-          </a:p>
-        </p:txBody>
-      </p:sp>
-      <p:sp>
-        <p:nvSpPr>
-          <p:cNvPr id="13" name="TextBox 12"/>
-          <p:cNvSpPr txBox="1"/>
-          <p:nvPr/>
-        </p:nvSpPr>
-        <p:spPr>
-          <a:xfrm>
-            <a:off x="9220200" y="3619500"/>
-            <a:ext cx="2540000" cy="598932"/>
-          </a:xfrm>
-          <a:prstGeom prst="rect">
-            <a:avLst/>
-          </a:prstGeom>
-          <a:noFill/>
-        </p:spPr>
-        <p:txBody>
-          <a:bodyPr wrap="none" lIns="0" rIns="0" tIns="0" bIns="0">
-            <a:spAutoFit/>
-          </a:bodyPr>
-          <a:lstStyle/>
-          <a:p>
-            <a:pPr>
-              <a:lnSpc>
-                <a:spcPts val="2108"/>
-              </a:lnSpc>
-              <a:spcAft>
-                <a:spcPts val="0"/>
-              </a:spcAft>
-              <a:defRPr sz="1700" b="1">
-                <a:solidFill>
-                  <a:srgbClr val="181817"/>
-                </a:solidFill>
-                <a:latin typeface="Arial"/>
-              </a:defRPr>
-            </a:pPr>
-            <a:r>
-              <a:t>PRAHA</a:t>
-            </a:r>
-          </a:p>
-          <a:p>
-            <a:pPr>
-              <a:lnSpc>
-                <a:spcPts val="2108"/>
-              </a:lnSpc>
-              <a:spcAft>
-                <a:spcPts val="0"/>
-              </a:spcAft>
-              <a:defRPr sz="1700" b="1">
-                <a:solidFill>
-                  <a:srgbClr val="181817"/>
-                </a:solidFill>
-                <a:latin typeface="Arial"/>
-              </a:defRPr>
-            </a:pPr>
-            <a:r>
-              <a:t>VLTAVA PARK</a:t>
-            </a:r>
-          </a:p>
-        </p:txBody>
-      </p:sp>
-      <p:sp>
-        <p:nvSpPr>
-          <p:cNvPr id="14" name="TextBox 13"/>
-          <p:cNvSpPr txBox="1"/>
-          <p:nvPr/>
-        </p:nvSpPr>
-        <p:spPr>
-          <a:xfrm>
-            <a:off x="9220200" y="5054600"/>
-            <a:ext cx="2540000" cy="882396"/>
-          </a:xfrm>
-          <a:prstGeom prst="rect">
-            <a:avLst/>
-          </a:prstGeom>
-          <a:noFill/>
-        </p:spPr>
-        <p:txBody>
-          <a:bodyPr wrap="none" lIns="0" rIns="0" tIns="0" bIns="0">
-            <a:spAutoFit/>
-          </a:bodyPr>
-          <a:lstStyle/>
-          <a:p>
-            <a:pPr>
-              <a:lnSpc>
-                <a:spcPts val="3224"/>
-              </a:lnSpc>
-              <a:spcAft>
-                <a:spcPts val="0"/>
-              </a:spcAft>
-              <a:defRPr sz="2600" b="1">
-                <a:solidFill>
-                  <a:srgbClr val="181817"/>
-                </a:solidFill>
-                <a:latin typeface="Arial"/>
-              </a:defRPr>
-            </a:pPr>
-            <a:r>
-              <a:t>CVIČENÍ</a:t>
-            </a:r>
-          </a:p>
-          <a:p>
-            <a:pPr>
-              <a:lnSpc>
-                <a:spcPts val="3224"/>
-              </a:lnSpc>
-              <a:spcAft>
-                <a:spcPts val="0"/>
-              </a:spcAft>
-              <a:defRPr sz="2600" b="1">
-                <a:solidFill>
-                  <a:srgbClr val="181817"/>
-                </a:solidFill>
-                <a:latin typeface="Arial"/>
-              </a:defRPr>
-            </a:pPr>
-            <a:r>
-              <a:t>06</a:t>
-            </a:r>
-          </a:p>
-        </p:txBody>
-      </p:sp>
-      <p:sp>
-        <p:nvSpPr>
-          <p:cNvPr id="15" name="TextBox 14"/>
-          <p:cNvSpPr txBox="1"/>
-          <p:nvPr/>
-        </p:nvSpPr>
-        <p:spPr>
-          <a:xfrm>
-            <a:off x="533400" y="6413500"/>
-            <a:ext cx="10033000" cy="181610"/>
-          </a:xfrm>
-          <a:prstGeom prst="rect">
-            <a:avLst/>
-          </a:prstGeom>
-          <a:noFill/>
-        </p:spPr>
-        <p:txBody>
-          <a:bodyPr wrap="none" lIns="0" rIns="0" tIns="0" bIns="0">
-            <a:spAutoFit/>
-          </a:bodyPr>
-          <a:lstStyle/>
-          <a:p>
-            <a:pPr>
-              <a:lnSpc>
-                <a:spcPts val="930"/>
-              </a:lnSpc>
-              <a:spcAft>
-                <a:spcPts val="0"/>
-              </a:spcAft>
-              <a:defRPr sz="750" b="0">
-                <a:solidFill>
-                  <a:srgbClr val="F4F0E7"/>
-                </a:solidFill>
-                <a:latin typeface="Arial"/>
-              </a:defRPr>
-            </a:pPr>
-            <a:r>
-              <a:t>METODICKÁ ŠABLONA — DOPLNIT CIZÍ PROJEKT</a:t>
-            </a:r>
-          </a:p>
-        </p:txBody>
-      </p:sp>
-      <p:sp>
-        <p:nvSpPr>
-          <p:cNvPr id="16" name="TextBox 15"/>
-          <p:cNvSpPr txBox="1"/>
-          <p:nvPr/>
-        </p:nvSpPr>
-        <p:spPr>
-          <a:xfrm>
-            <a:off x="10947400" y="6350000"/>
-            <a:ext cx="825500" cy="220979"/>
-          </a:xfrm>
-          <a:prstGeom prst="rect">
-            <a:avLst/>
-          </a:prstGeom>
-          <a:noFill/>
-        </p:spPr>
-        <p:txBody>
-          <a:bodyPr wrap="none" lIns="0" rIns="0" tIns="0" bIns="0">
-            <a:spAutoFit/>
-          </a:bodyPr>
-          <a:lstStyle/>
-          <a:p>
-            <a:pPr>
-              <a:lnSpc>
-                <a:spcPts val="1240"/>
-              </a:lnSpc>
-              <a:spcAft>
-                <a:spcPts val="0"/>
-              </a:spcAft>
-              <a:defRPr sz="1000" b="1">
-                <a:solidFill>
-                  <a:srgbClr val="F4F0E7"/>
-                </a:solidFill>
-                <a:latin typeface="Arial"/>
-              </a:defRPr>
-            </a:pPr>
-            <a:r>
-              <a:t>06 / 01</a:t>
+              <a:t>1 / 6</a:t>
             </a:r>
           </a:p>
         </p:txBody>
@@ -4604,7 +4338,7 @@
             <a:avLst/>
           </a:prstGeom>
           <a:solidFill>
-            <a:srgbClr val="F4F0E7"/>
+            <a:srgbClr val="FFFFFF"/>
           </a:solidFill>
           <a:ln>
             <a:noFill/>
@@ -4640,8 +4374,8 @@
         </p:nvSpPr>
         <p:spPr>
           <a:xfrm>
-            <a:off x="533400" y="304800"/>
-            <a:ext cx="1905000" cy="283972"/>
+            <a:off x="711200" y="457200"/>
+            <a:ext cx="10769600" cy="228600"/>
           </a:xfrm>
           <a:prstGeom prst="rect">
             <a:avLst/>
@@ -4650,172 +4384,46 @@
         </p:spPr>
         <p:txBody>
           <a:bodyPr wrap="none" lIns="0" rIns="0" tIns="0" bIns="0">
-            <a:spAutoFit/>
+            <a:noAutofit/>
           </a:bodyPr>
           <a:lstStyle/>
           <a:p>
             <a:pPr>
               <a:lnSpc>
-                <a:spcPts val="1736"/>
+                <a:spcPts val="1534"/>
               </a:lnSpc>
               <a:spcAft>
                 <a:spcPts val="0"/>
               </a:spcAft>
-              <a:defRPr sz="1400" b="1">
+              <a:defRPr sz="1300" b="1">
                 <a:solidFill>
-                  <a:srgbClr val="181817"/>
+                  <a:srgbClr val="626773"/>
                 </a:solidFill>
                 <a:latin typeface="Arial"/>
               </a:defRPr>
             </a:pPr>
             <a:r>
-              <a:t>PRAGUE</a:t>
-            </a:r>
-          </a:p>
-        </p:txBody>
-      </p:sp>
-      <p:sp>
-        <p:nvSpPr>
-          <p:cNvPr id="4" name="TextBox 3"/>
-          <p:cNvSpPr txBox="1"/>
-          <p:nvPr/>
-        </p:nvSpPr>
-        <p:spPr>
-          <a:xfrm>
-            <a:off x="533400" y="495300"/>
-            <a:ext cx="1905000" cy="409956"/>
-          </a:xfrm>
-          <a:prstGeom prst="rect">
-            <a:avLst/>
-          </a:prstGeom>
-          <a:noFill/>
-        </p:spPr>
-        <p:txBody>
-          <a:bodyPr wrap="none" lIns="0" rIns="0" tIns="0" bIns="0">
-            <a:spAutoFit/>
-          </a:bodyPr>
-          <a:lstStyle/>
-          <a:p>
-            <a:pPr>
-              <a:lnSpc>
-                <a:spcPts val="2728"/>
-              </a:lnSpc>
-              <a:spcAft>
-                <a:spcPts val="0"/>
-              </a:spcAft>
-              <a:defRPr sz="2200" b="1">
-                <a:solidFill>
-                  <a:srgbClr val="181817"/>
-                </a:solidFill>
-                <a:latin typeface="Arial"/>
-              </a:defRPr>
-            </a:pPr>
-            <a:r>
-              <a:t>PULSE</a:t>
-            </a:r>
-          </a:p>
-        </p:txBody>
-      </p:sp>
-      <p:sp>
-        <p:nvSpPr>
-          <p:cNvPr id="5" name="TextBox 4"/>
-          <p:cNvSpPr txBox="1"/>
-          <p:nvPr/>
-        </p:nvSpPr>
-        <p:spPr>
-          <a:xfrm>
-            <a:off x="533400" y="812800"/>
-            <a:ext cx="2032000" cy="165862"/>
-          </a:xfrm>
-          <a:prstGeom prst="rect">
-            <a:avLst/>
-          </a:prstGeom>
-          <a:noFill/>
-        </p:spPr>
-        <p:txBody>
-          <a:bodyPr wrap="none" lIns="0" rIns="0" tIns="0" bIns="0">
-            <a:spAutoFit/>
-          </a:bodyPr>
-          <a:lstStyle/>
-          <a:p>
-            <a:pPr>
-              <a:lnSpc>
-                <a:spcPts val="806"/>
-              </a:lnSpc>
-              <a:spcAft>
-                <a:spcPts val="0"/>
-              </a:spcAft>
-              <a:defRPr sz="650" b="1">
-                <a:solidFill>
-                  <a:srgbClr val="181817"/>
-                </a:solidFill>
-                <a:latin typeface="Arial"/>
-              </a:defRPr>
-            </a:pPr>
-            <a:r>
-              <a:t>FEST / 2027</a:t>
-            </a:r>
-          </a:p>
-        </p:txBody>
-      </p:sp>
-      <p:sp>
-        <p:nvSpPr>
-          <p:cNvPr id="6" name="TextBox 5"/>
-          <p:cNvSpPr txBox="1"/>
-          <p:nvPr/>
-        </p:nvSpPr>
-        <p:spPr>
-          <a:xfrm>
-            <a:off x="5588000" y="533400"/>
-            <a:ext cx="6070600" cy="220979"/>
-          </a:xfrm>
-          <a:prstGeom prst="rect">
-            <a:avLst/>
-          </a:prstGeom>
-          <a:noFill/>
-        </p:spPr>
-        <p:txBody>
-          <a:bodyPr wrap="none" lIns="0" rIns="0" tIns="0" bIns="0">
-            <a:spAutoFit/>
-          </a:bodyPr>
-          <a:lstStyle/>
-          <a:p>
-            <a:pPr>
-              <a:lnSpc>
-                <a:spcPts val="1240"/>
-              </a:lnSpc>
-              <a:spcAft>
-                <a:spcPts val="0"/>
-              </a:spcAft>
-              <a:defRPr sz="1000" b="1">
-                <a:solidFill>
-                  <a:srgbClr val="68635B"/>
-                </a:solidFill>
-                <a:latin typeface="Arial"/>
-              </a:defRPr>
-            </a:pPr>
-            <a:r>
-              <a:t>PLÁN EXPERTNÍHO HODNOCENÍ</a:t>
-            </a:r>
-          </a:p>
-        </p:txBody>
-      </p:sp>
-      <p:sp>
-        <p:nvSpPr>
-          <p:cNvPr id="7" name="Rectangle 6"/>
+              <a:t>VYPLNIT PODLE SKUTEČNÉHO REVIEW</a:t>
+            </a:r>
+          </a:p>
+        </p:txBody>
+      </p:sp>
+      <p:sp>
+        <p:nvSpPr>
+          <p:cNvPr id="4" name="Rectangle 3"/>
           <p:cNvSpPr/>
           <p:nvPr/>
         </p:nvSpPr>
         <p:spPr>
           <a:xfrm>
-            <a:off x="533400" y="1155700"/>
-            <a:ext cx="11125200" cy="25400"/>
+            <a:off x="711200" y="876300"/>
+            <a:ext cx="622300" cy="50800"/>
           </a:xfrm>
           <a:prstGeom prst="rect">
             <a:avLst/>
           </a:prstGeom>
           <a:solidFill>
-            <a:srgbClr val="181817"/>
+            <a:srgbClr val="E55024"/>
           </a:solidFill>
           <a:ln>
             <a:noFill/>
@@ -4845,14 +4453,14 @@
       </p:sp>
       <p:sp>
         <p:nvSpPr>
-          <p:cNvPr id="8" name="TextBox 7"/>
+          <p:cNvPr id="5" name="TextBox 4"/>
           <p:cNvSpPr txBox="1"/>
           <p:nvPr/>
         </p:nvSpPr>
         <p:spPr>
           <a:xfrm>
-            <a:off x="508000" y="1422400"/>
-            <a:ext cx="11176000" cy="1079500"/>
+            <a:off x="685800" y="1257300"/>
+            <a:ext cx="10795000" cy="1168400"/>
           </a:xfrm>
           <a:prstGeom prst="rect">
             <a:avLst/>
@@ -4861,46 +4469,46 @@
         </p:spPr>
         <p:txBody>
           <a:bodyPr wrap="none" lIns="0" rIns="0" tIns="0" bIns="0">
-            <a:spAutoFit/>
+            <a:noAutofit/>
           </a:bodyPr>
           <a:lstStyle/>
           <a:p>
             <a:pPr>
               <a:lnSpc>
-                <a:spcPts val="3740"/>
+                <a:spcPts val="4032"/>
               </a:lnSpc>
               <a:spcAft>
                 <a:spcPts val="0"/>
               </a:spcAft>
-              <a:defRPr sz="3400" b="1">
+              <a:defRPr sz="3600" b="1">
                 <a:solidFill>
-                  <a:srgbClr val="181817"/>
+                  <a:srgbClr val="191B20"/>
                 </a:solidFill>
                 <a:latin typeface="Arial"/>
               </a:defRPr>
             </a:pPr>
             <a:r>
-              <a:t>Dvě metody, odlišný pohled.</a:t>
-            </a:r>
-          </a:p>
-        </p:txBody>
-      </p:sp>
-      <p:sp>
-        <p:nvSpPr>
-          <p:cNvPr id="9" name="Rectangle 8"/>
+              <a:t>Podklady a podmínky hodnocení</a:t>
+            </a:r>
+          </a:p>
+        </p:txBody>
+      </p:sp>
+      <p:sp>
+        <p:nvSpPr>
+          <p:cNvPr id="6" name="Rectangle 5"/>
           <p:cNvSpPr/>
           <p:nvPr/>
         </p:nvSpPr>
         <p:spPr>
           <a:xfrm>
-            <a:off x="533400" y="2768600"/>
-            <a:ext cx="5448300" cy="2603500"/>
+            <a:off x="723900" y="2273300"/>
+            <a:ext cx="101600" cy="101600"/>
           </a:xfrm>
           <a:prstGeom prst="rect">
             <a:avLst/>
           </a:prstGeom>
           <a:solidFill>
-            <a:srgbClr val="181817"/>
+            <a:srgbClr val="E55024"/>
           </a:solidFill>
           <a:ln>
             <a:noFill/>
@@ -4930,20 +4538,62 @@
       </p:sp>
       <p:sp>
         <p:nvSpPr>
-          <p:cNvPr id="10" name="Rectangle 9"/>
+          <p:cNvPr id="7" name="TextBox 6"/>
+          <p:cNvSpPr txBox="1"/>
+          <p:nvPr/>
+        </p:nvSpPr>
+        <p:spPr>
+          <a:xfrm>
+            <a:off x="1066800" y="2146300"/>
+            <a:ext cx="10160000" cy="419100"/>
+          </a:xfrm>
+          <a:prstGeom prst="rect">
+            <a:avLst/>
+          </a:prstGeom>
+          <a:noFill/>
+        </p:spPr>
+        <p:txBody>
+          <a:bodyPr wrap="none" lIns="0" rIns="0" tIns="0" bIns="0">
+            <a:noAutofit/>
+          </a:bodyPr>
+          <a:lstStyle/>
+          <a:p>
+            <a:pPr>
+              <a:lnSpc>
+                <a:spcPts val="3360"/>
+              </a:lnSpc>
+              <a:spcAft>
+                <a:spcPts val="0"/>
+              </a:spcAft>
+              <a:defRPr sz="2800" b="0">
+                <a:solidFill>
+                  <a:srgbClr val="191B20"/>
+                </a:solidFill>
+                <a:latin typeface="Arial"/>
+              </a:defRPr>
+            </a:pPr>
+            <a:r>
+              <a:t>Hodnocený projekt, tým a přesná verze: doplnit.</a:t>
+            </a:r>
+          </a:p>
+        </p:txBody>
+      </p:sp>
+      <p:sp>
+        <p:nvSpPr>
+          <p:cNvPr id="8" name="Rectangle 7"/>
           <p:cNvSpPr/>
           <p:nvPr/>
         </p:nvSpPr>
         <p:spPr>
           <a:xfrm>
-            <a:off x="533400" y="2768600"/>
-            <a:ext cx="5448300" cy="76200"/>
+            <a:off x="723900" y="2971800"/>
+            <a:ext cx="101600" cy="101600"/>
           </a:xfrm>
           <a:prstGeom prst="rect">
             <a:avLst/>
           </a:prstGeom>
           <a:solidFill>
-            <a:srgbClr val="F45E2B"/>
+            <a:srgbClr val="E55024"/>
           </a:solidFill>
           <a:ln>
             <a:noFill/>
@@ -4973,14 +4623,14 @@
       </p:sp>
       <p:sp>
         <p:nvSpPr>
-          <p:cNvPr id="11" name="TextBox 10"/>
+          <p:cNvPr id="9" name="TextBox 8"/>
           <p:cNvSpPr txBox="1"/>
           <p:nvPr/>
         </p:nvSpPr>
         <p:spPr>
           <a:xfrm>
-            <a:off x="749300" y="3035300"/>
-            <a:ext cx="5016500" cy="685800"/>
+            <a:off x="1066800" y="2844800"/>
+            <a:ext cx="10160000" cy="419100"/>
           </a:xfrm>
           <a:prstGeom prst="rect">
             <a:avLst/>
@@ -4989,142 +4639,46 @@
         </p:spPr>
         <p:txBody>
           <a:bodyPr wrap="none" lIns="0" rIns="0" tIns="0" bIns="0">
-            <a:spAutoFit/>
+            <a:noAutofit/>
           </a:bodyPr>
           <a:lstStyle/>
           <a:p>
             <a:pPr>
               <a:lnSpc>
-                <a:spcPts val="2200"/>
+                <a:spcPts val="3360"/>
               </a:lnSpc>
               <a:spcAft>
                 <a:spcPts val="0"/>
               </a:spcAft>
-              <a:defRPr sz="2000" b="1">
+              <a:defRPr sz="2800" b="0">
                 <a:solidFill>
-                  <a:srgbClr val="F4F0E7"/>
+                  <a:srgbClr val="191B20"/>
                 </a:solidFill>
                 <a:latin typeface="Arial"/>
               </a:defRPr>
             </a:pPr>
             <a:r>
-              <a:t>Nielsenovy heuristiky</a:t>
-            </a:r>
-          </a:p>
-        </p:txBody>
-      </p:sp>
-      <p:sp>
-        <p:nvSpPr>
-          <p:cNvPr id="12" name="TextBox 11"/>
-          <p:cNvSpPr txBox="1"/>
-          <p:nvPr/>
-        </p:nvSpPr>
-        <p:spPr>
-          <a:xfrm>
-            <a:off x="749300" y="3733800"/>
-            <a:ext cx="5016500" cy="1511300"/>
-          </a:xfrm>
-          <a:prstGeom prst="rect">
-            <a:avLst/>
-          </a:prstGeom>
-          <a:noFill/>
-        </p:spPr>
-        <p:txBody>
-          <a:bodyPr wrap="none" lIns="0" rIns="0" tIns="0" bIns="0">
-            <a:spAutoFit/>
-          </a:bodyPr>
-          <a:lstStyle/>
-          <a:p>
-            <a:pPr>
-              <a:lnSpc>
-                <a:spcPts val="1689"/>
-              </a:lnSpc>
-              <a:spcAft>
-                <a:spcPts val="0"/>
-              </a:spcAft>
-              <a:defRPr sz="1420" b="0">
-                <a:solidFill>
-                  <a:srgbClr val="F4F0E7"/>
-                </a:solidFill>
-                <a:latin typeface="Arial"/>
-              </a:defRPr>
-            </a:pPr>
-            <a:r>
-              <a:t>Stav systému, konzistence, prevence chyb, kontrola</a:t>
-            </a:r>
-          </a:p>
-          <a:p>
-            <a:pPr>
-              <a:lnSpc>
-                <a:spcPts val="1689"/>
-              </a:lnSpc>
-              <a:spcAft>
-                <a:spcPts val="0"/>
-              </a:spcAft>
-              <a:defRPr sz="1420" b="0">
-                <a:solidFill>
-                  <a:srgbClr val="F4F0E7"/>
-                </a:solidFill>
-                <a:latin typeface="Arial"/>
-              </a:defRPr>
-            </a:pPr>
-            <a:r>
-              <a:t>uživatele a srozumitelná pomoc.</a:t>
-            </a:r>
-          </a:p>
-          <a:p>
-            <a:pPr>
-              <a:lnSpc>
-                <a:spcPts val="1689"/>
-              </a:lnSpc>
-              <a:spcAft>
-                <a:spcPts val="0"/>
-              </a:spcAft>
-              <a:defRPr sz="1420" b="0">
-                <a:solidFill>
-                  <a:srgbClr val="F4F0E7"/>
-                </a:solidFill>
-                <a:latin typeface="Arial"/>
-              </a:defRPr>
-            </a:pPr>
-          </a:p>
-          <a:p>
-            <a:pPr>
-              <a:lnSpc>
-                <a:spcPts val="1689"/>
-              </a:lnSpc>
-              <a:spcAft>
-                <a:spcPts val="0"/>
-              </a:spcAft>
-              <a:defRPr sz="1420" b="0">
-                <a:solidFill>
-                  <a:srgbClr val="F4F0E7"/>
-                </a:solidFill>
-                <a:latin typeface="Arial"/>
-              </a:defRPr>
-            </a:pPr>
-            <a:r>
-              <a:t>Nález přiřadit konkrétnímu pravidlu.</a:t>
-            </a:r>
-          </a:p>
-        </p:txBody>
-      </p:sp>
-      <p:sp>
-        <p:nvSpPr>
-          <p:cNvPr id="13" name="Rectangle 12"/>
+              <a:t>Dva scénáře z jeho specifikace: doplnit.</a:t>
+            </a:r>
+          </a:p>
+        </p:txBody>
+      </p:sp>
+      <p:sp>
+        <p:nvSpPr>
+          <p:cNvPr id="10" name="Rectangle 9"/>
           <p:cNvSpPr/>
           <p:nvPr/>
         </p:nvSpPr>
         <p:spPr>
           <a:xfrm>
-            <a:off x="6210300" y="2768600"/>
-            <a:ext cx="5448300" cy="2603500"/>
+            <a:off x="723900" y="3670300"/>
+            <a:ext cx="101600" cy="101600"/>
           </a:xfrm>
           <a:prstGeom prst="rect">
             <a:avLst/>
           </a:prstGeom>
           <a:solidFill>
-            <a:srgbClr val="E7E0D5"/>
+            <a:srgbClr val="E55024"/>
           </a:solidFill>
           <a:ln>
             <a:noFill/>
@@ -5154,20 +4708,62 @@
       </p:sp>
       <p:sp>
         <p:nvSpPr>
-          <p:cNvPr id="14" name="Rectangle 13"/>
+          <p:cNvPr id="11" name="TextBox 10"/>
+          <p:cNvSpPr txBox="1"/>
+          <p:nvPr/>
+        </p:nvSpPr>
+        <p:spPr>
+          <a:xfrm>
+            <a:off x="1066800" y="3543300"/>
+            <a:ext cx="10160000" cy="419100"/>
+          </a:xfrm>
+          <a:prstGeom prst="rect">
+            <a:avLst/>
+          </a:prstGeom>
+          <a:noFill/>
+        </p:spPr>
+        <p:txBody>
+          <a:bodyPr wrap="none" lIns="0" rIns="0" tIns="0" bIns="0">
+            <a:noAutofit/>
+          </a:bodyPr>
+          <a:lstStyle/>
+          <a:p>
+            <a:pPr>
+              <a:lnSpc>
+                <a:spcPts val="3360"/>
+              </a:lnSpc>
+              <a:spcAft>
+                <a:spcPts val="0"/>
+              </a:spcAft>
+              <a:defRPr sz="2800" b="0">
+                <a:solidFill>
+                  <a:srgbClr val="191B20"/>
+                </a:solidFill>
+                <a:latin typeface="Arial"/>
+              </a:defRPr>
+            </a:pPr>
+            <a:r>
+              <a:t>Datum, hodnotitelé, prohlížeč a rozlišení: doplnit.</a:t>
+            </a:r>
+          </a:p>
+        </p:txBody>
+      </p:sp>
+      <p:sp>
+        <p:nvSpPr>
+          <p:cNvPr id="12" name="Rectangle 11"/>
           <p:cNvSpPr/>
           <p:nvPr/>
         </p:nvSpPr>
         <p:spPr>
           <a:xfrm>
-            <a:off x="6210300" y="2768600"/>
-            <a:ext cx="5448300" cy="76200"/>
+            <a:off x="723900" y="4368800"/>
+            <a:ext cx="101600" cy="101600"/>
           </a:xfrm>
           <a:prstGeom prst="rect">
             <a:avLst/>
           </a:prstGeom>
           <a:solidFill>
-            <a:srgbClr val="F45E2B"/>
+            <a:srgbClr val="E55024"/>
           </a:solidFill>
           <a:ln>
             <a:noFill/>
@@ -5197,14 +4793,14 @@
       </p:sp>
       <p:sp>
         <p:nvSpPr>
-          <p:cNvPr id="15" name="TextBox 14"/>
+          <p:cNvPr id="13" name="TextBox 12"/>
           <p:cNvSpPr txBox="1"/>
           <p:nvPr/>
         </p:nvSpPr>
         <p:spPr>
           <a:xfrm>
-            <a:off x="6426200" y="3035300"/>
-            <a:ext cx="5016500" cy="685800"/>
+            <a:off x="1066800" y="4241800"/>
+            <a:ext cx="10160000" cy="419100"/>
           </a:xfrm>
           <a:prstGeom prst="rect">
             <a:avLst/>
@@ -5213,40 +4809,83 @@
         </p:spPr>
         <p:txBody>
           <a:bodyPr wrap="none" lIns="0" rIns="0" tIns="0" bIns="0">
-            <a:spAutoFit/>
+            <a:noAutofit/>
           </a:bodyPr>
           <a:lstStyle/>
           <a:p>
             <a:pPr>
               <a:lnSpc>
-                <a:spcPts val="2200"/>
+                <a:spcPts val="3360"/>
               </a:lnSpc>
               <a:spcAft>
                 <a:spcPts val="0"/>
               </a:spcAft>
-              <a:defRPr sz="2000" b="1">
+              <a:defRPr sz="2800" b="0">
                 <a:solidFill>
-                  <a:srgbClr val="181817"/>
+                  <a:srgbClr val="191B20"/>
                 </a:solidFill>
                 <a:latin typeface="Arial"/>
               </a:defRPr>
             </a:pPr>
             <a:r>
-              <a:t>Kognitivní průchod</a:t>
-            </a:r>
-          </a:p>
-        </p:txBody>
-      </p:sp>
-      <p:sp>
-        <p:nvSpPr>
-          <p:cNvPr id="16" name="TextBox 15"/>
+              <a:t>Od minula: připravena metodika a záznamový formulář.</a:t>
+            </a:r>
+          </a:p>
+        </p:txBody>
+      </p:sp>
+      <p:sp>
+        <p:nvSpPr>
+          <p:cNvPr id="14" name="Rectangle 13"/>
+          <p:cNvSpPr/>
+          <p:nvPr/>
+        </p:nvSpPr>
+        <p:spPr>
+          <a:xfrm>
+            <a:off x="711200" y="6248400"/>
+            <a:ext cx="10769600" cy="12700"/>
+          </a:xfrm>
+          <a:prstGeom prst="rect">
+            <a:avLst/>
+          </a:prstGeom>
+          <a:solidFill>
+            <a:srgbClr val="DFE2E7"/>
+          </a:solidFill>
+          <a:ln>
+            <a:noFill/>
+          </a:ln>
+        </p:spPr>
+        <p:style>
+          <a:lnRef idx="1">
+            <a:schemeClr val="accent1"/>
+          </a:lnRef>
+          <a:fillRef idx="3">
+            <a:schemeClr val="accent1"/>
+          </a:fillRef>
+          <a:effectRef idx="2">
+            <a:schemeClr val="accent1"/>
+          </a:effectRef>
+          <a:fontRef idx="minor">
+            <a:schemeClr val="lt1"/>
+          </a:fontRef>
+        </p:style>
+        <p:txBody>
+          <a:bodyPr rtlCol="0" anchor="ctr"/>
+          <a:lstStyle/>
+          <a:p>
+            <a:pPr algn="ctr"/>
+          </a:p>
+        </p:txBody>
+      </p:sp>
+      <p:sp>
+        <p:nvSpPr>
+          <p:cNvPr id="15" name="TextBox 14"/>
           <p:cNvSpPr txBox="1"/>
           <p:nvPr/>
         </p:nvSpPr>
         <p:spPr>
           <a:xfrm>
-            <a:off x="6426200" y="3733800"/>
-            <a:ext cx="5016500" cy="1511300"/>
+            <a:off x="711200" y="6438900"/>
+            <a:ext cx="9652000" cy="203200"/>
           </a:xfrm>
           <a:prstGeom prst="rect">
             <a:avLst/>
@@ -5255,187 +4894,68 @@
         </p:spPr>
         <p:txBody>
           <a:bodyPr wrap="none" lIns="0" rIns="0" tIns="0" bIns="0">
-            <a:spAutoFit/>
+            <a:noAutofit/>
           </a:bodyPr>
           <a:lstStyle/>
           <a:p>
             <a:pPr>
               <a:lnSpc>
-                <a:spcPts val="1689"/>
+                <a:spcPts val="1297"/>
               </a:lnSpc>
               <a:spcAft>
                 <a:spcPts val="0"/>
               </a:spcAft>
-              <a:defRPr sz="1420" b="0">
+              <a:defRPr sz="1100" b="0">
                 <a:solidFill>
-                  <a:srgbClr val="181817"/>
+                  <a:srgbClr val="626773"/>
                 </a:solidFill>
                 <a:latin typeface="Arial"/>
               </a:defRPr>
             </a:pPr>
             <a:r>
-              <a:t>Dva scénáře z cizí specifikace, krok po kroku.</a:t>
-            </a:r>
-          </a:p>
+              <a:t>ŠABLONA · doplnit skutečný cizí projekt</a:t>
+            </a:r>
+          </a:p>
+        </p:txBody>
+      </p:sp>
+      <p:sp>
+        <p:nvSpPr>
+          <p:cNvPr id="16" name="TextBox 15"/>
+          <p:cNvSpPr txBox="1"/>
+          <p:nvPr/>
+        </p:nvSpPr>
+        <p:spPr>
+          <a:xfrm>
+            <a:off x="10807700" y="6413500"/>
+            <a:ext cx="673100" cy="215900"/>
+          </a:xfrm>
+          <a:prstGeom prst="rect">
+            <a:avLst/>
+          </a:prstGeom>
+          <a:noFill/>
+        </p:spPr>
+        <p:txBody>
+          <a:bodyPr wrap="none" lIns="0" rIns="0" tIns="0" bIns="0">
+            <a:noAutofit/>
+          </a:bodyPr>
+          <a:lstStyle/>
           <a:p>
             <a:pPr>
               <a:lnSpc>
-                <a:spcPts val="1689"/>
+                <a:spcPts val="1416"/>
               </a:lnSpc>
               <a:spcAft>
                 <a:spcPts val="0"/>
               </a:spcAft>
-              <a:defRPr sz="1420" b="0">
+              <a:defRPr sz="1200" b="0">
                 <a:solidFill>
-                  <a:srgbClr val="181817"/>
+                  <a:srgbClr val="626773"/>
                 </a:solidFill>
                 <a:latin typeface="Arial"/>
               </a:defRPr>
             </a:pPr>
-          </a:p>
-          <a:p>
-            <a:pPr>
-              <a:lnSpc>
-                <a:spcPts val="1689"/>
-              </a:lnSpc>
-              <a:spcAft>
-                <a:spcPts val="0"/>
-              </a:spcAft>
-              <a:defRPr sz="1420" b="0">
-                <a:solidFill>
-                  <a:srgbClr val="181817"/>
-                </a:solidFill>
-                <a:latin typeface="Arial"/>
-              </a:defRPr>
-            </a:pPr>
-            <a:r>
-              <a:t>Ví uživatel co udělat, najde ovládání a pozná výsledek?</a:t>
-            </a:r>
-          </a:p>
-        </p:txBody>
-      </p:sp>
-      <p:sp>
-        <p:nvSpPr>
-          <p:cNvPr id="17" name="TextBox 16"/>
-          <p:cNvSpPr txBox="1"/>
-          <p:nvPr/>
-        </p:nvSpPr>
-        <p:spPr>
-          <a:xfrm>
-            <a:off x="533400" y="5676900"/>
-            <a:ext cx="11125200" cy="546100"/>
-          </a:xfrm>
-          <a:prstGeom prst="rect">
-            <a:avLst/>
-          </a:prstGeom>
-          <a:noFill/>
-        </p:spPr>
-        <p:txBody>
-          <a:bodyPr wrap="none" lIns="0" rIns="0" tIns="0" bIns="0">
-            <a:spAutoFit/>
-          </a:bodyPr>
-          <a:lstStyle/>
-          <a:p>
-            <a:pPr>
-              <a:lnSpc>
-                <a:spcPts val="1583"/>
-              </a:lnSpc>
-              <a:spcAft>
-                <a:spcPts val="0"/>
-              </a:spcAft>
-              <a:defRPr sz="1320" b="0">
-                <a:solidFill>
-                  <a:srgbClr val="68635B"/>
-                </a:solidFill>
-                <a:latin typeface="Arial"/>
-              </a:defRPr>
-            </a:pPr>
-            <a:r>
-              <a:t>Doplněk: úzký viewport, klávesnice, navigace a interaktivní stavy.</a:t>
-            </a:r>
-          </a:p>
-        </p:txBody>
-      </p:sp>
-      <p:sp>
-        <p:nvSpPr>
-          <p:cNvPr id="18" name="TextBox 17"/>
-          <p:cNvSpPr txBox="1"/>
-          <p:nvPr/>
-        </p:nvSpPr>
-        <p:spPr>
-          <a:xfrm>
-            <a:off x="533400" y="6413500"/>
-            <a:ext cx="10033000" cy="181610"/>
-          </a:xfrm>
-          <a:prstGeom prst="rect">
-            <a:avLst/>
-          </a:prstGeom>
-          <a:noFill/>
-        </p:spPr>
-        <p:txBody>
-          <a:bodyPr wrap="none" lIns="0" rIns="0" tIns="0" bIns="0">
-            <a:spAutoFit/>
-          </a:bodyPr>
-          <a:lstStyle/>
-          <a:p>
-            <a:pPr>
-              <a:lnSpc>
-                <a:spcPts val="930"/>
-              </a:lnSpc>
-              <a:spcAft>
-                <a:spcPts val="0"/>
-              </a:spcAft>
-              <a:defRPr sz="750" b="0">
-                <a:solidFill>
-                  <a:srgbClr val="68635B"/>
-                </a:solidFill>
-                <a:latin typeface="Arial"/>
-              </a:defRPr>
-            </a:pPr>
-            <a:r>
-              <a:t>METODICKÁ ŠABLONA — DOPLNIT CIZÍ PROJEKT</a:t>
-            </a:r>
-          </a:p>
-        </p:txBody>
-      </p:sp>
-      <p:sp>
-        <p:nvSpPr>
-          <p:cNvPr id="19" name="TextBox 18"/>
-          <p:cNvSpPr txBox="1"/>
-          <p:nvPr/>
-        </p:nvSpPr>
-        <p:spPr>
-          <a:xfrm>
-            <a:off x="10947400" y="6350000"/>
-            <a:ext cx="825500" cy="220979"/>
-          </a:xfrm>
-          <a:prstGeom prst="rect">
-            <a:avLst/>
-          </a:prstGeom>
-          <a:noFill/>
-        </p:spPr>
-        <p:txBody>
-          <a:bodyPr wrap="none" lIns="0" rIns="0" tIns="0" bIns="0">
-            <a:spAutoFit/>
-          </a:bodyPr>
-          <a:lstStyle/>
-          <a:p>
-            <a:pPr>
-              <a:lnSpc>
-                <a:spcPts val="1240"/>
-              </a:lnSpc>
-              <a:spcAft>
-                <a:spcPts val="0"/>
-              </a:spcAft>
-              <a:defRPr sz="1000" b="1">
-                <a:solidFill>
-                  <a:srgbClr val="68635B"/>
-                </a:solidFill>
-                <a:latin typeface="Arial"/>
-              </a:defRPr>
-            </a:pPr>
-            <a:r>
-              <a:t>06 / 02</a:t>
+            <a:r>
+              <a:t>2 / 6</a:t>
             </a:r>
           </a:p>
         </p:txBody>
@@ -5473,7 +4993,7 @@
             <a:avLst/>
           </a:prstGeom>
           <a:solidFill>
-            <a:srgbClr val="F4F0E7"/>
+            <a:srgbClr val="FFFFFF"/>
           </a:solidFill>
           <a:ln>
             <a:noFill/>
@@ -5509,8 +5029,8 @@
         </p:nvSpPr>
         <p:spPr>
           <a:xfrm>
-            <a:off x="533400" y="304800"/>
-            <a:ext cx="1905000" cy="283972"/>
+            <a:off x="711200" y="457200"/>
+            <a:ext cx="10769600" cy="228600"/>
           </a:xfrm>
           <a:prstGeom prst="rect">
             <a:avLst/>
@@ -5519,172 +5039,46 @@
         </p:spPr>
         <p:txBody>
           <a:bodyPr wrap="none" lIns="0" rIns="0" tIns="0" bIns="0">
-            <a:spAutoFit/>
+            <a:noAutofit/>
           </a:bodyPr>
           <a:lstStyle/>
           <a:p>
             <a:pPr>
               <a:lnSpc>
-                <a:spcPts val="1736"/>
+                <a:spcPts val="1534"/>
               </a:lnSpc>
               <a:spcAft>
                 <a:spcPts val="0"/>
               </a:spcAft>
-              <a:defRPr sz="1400" b="1">
+              <a:defRPr sz="1300" b="1">
                 <a:solidFill>
-                  <a:srgbClr val="181817"/>
+                  <a:srgbClr val="626773"/>
                 </a:solidFill>
                 <a:latin typeface="Arial"/>
               </a:defRPr>
             </a:pPr>
             <a:r>
-              <a:t>PRAGUE</a:t>
-            </a:r>
-          </a:p>
-        </p:txBody>
-      </p:sp>
-      <p:sp>
-        <p:nvSpPr>
-          <p:cNvPr id="4" name="TextBox 3"/>
-          <p:cNvSpPr txBox="1"/>
-          <p:nvPr/>
-        </p:nvSpPr>
-        <p:spPr>
-          <a:xfrm>
-            <a:off x="533400" y="495300"/>
-            <a:ext cx="1905000" cy="409956"/>
-          </a:xfrm>
-          <a:prstGeom prst="rect">
-            <a:avLst/>
-          </a:prstGeom>
-          <a:noFill/>
-        </p:spPr>
-        <p:txBody>
-          <a:bodyPr wrap="none" lIns="0" rIns="0" tIns="0" bIns="0">
-            <a:spAutoFit/>
-          </a:bodyPr>
-          <a:lstStyle/>
-          <a:p>
-            <a:pPr>
-              <a:lnSpc>
-                <a:spcPts val="2728"/>
-              </a:lnSpc>
-              <a:spcAft>
-                <a:spcPts val="0"/>
-              </a:spcAft>
-              <a:defRPr sz="2200" b="1">
-                <a:solidFill>
-                  <a:srgbClr val="181817"/>
-                </a:solidFill>
-                <a:latin typeface="Arial"/>
-              </a:defRPr>
-            </a:pPr>
-            <a:r>
-              <a:t>PULSE</a:t>
-            </a:r>
-          </a:p>
-        </p:txBody>
-      </p:sp>
-      <p:sp>
-        <p:nvSpPr>
-          <p:cNvPr id="5" name="TextBox 4"/>
-          <p:cNvSpPr txBox="1"/>
-          <p:nvPr/>
-        </p:nvSpPr>
-        <p:spPr>
-          <a:xfrm>
-            <a:off x="533400" y="812800"/>
-            <a:ext cx="2032000" cy="165862"/>
-          </a:xfrm>
-          <a:prstGeom prst="rect">
-            <a:avLst/>
-          </a:prstGeom>
-          <a:noFill/>
-        </p:spPr>
-        <p:txBody>
-          <a:bodyPr wrap="none" lIns="0" rIns="0" tIns="0" bIns="0">
-            <a:spAutoFit/>
-          </a:bodyPr>
-          <a:lstStyle/>
-          <a:p>
-            <a:pPr>
-              <a:lnSpc>
-                <a:spcPts val="806"/>
-              </a:lnSpc>
-              <a:spcAft>
-                <a:spcPts val="0"/>
-              </a:spcAft>
-              <a:defRPr sz="650" b="1">
-                <a:solidFill>
-                  <a:srgbClr val="181817"/>
-                </a:solidFill>
-                <a:latin typeface="Arial"/>
-              </a:defRPr>
-            </a:pPr>
-            <a:r>
-              <a:t>FEST / 2027</a:t>
-            </a:r>
-          </a:p>
-        </p:txBody>
-      </p:sp>
-      <p:sp>
-        <p:nvSpPr>
-          <p:cNvPr id="6" name="TextBox 5"/>
-          <p:cNvSpPr txBox="1"/>
-          <p:nvPr/>
-        </p:nvSpPr>
-        <p:spPr>
-          <a:xfrm>
-            <a:off x="5588000" y="533400"/>
-            <a:ext cx="6070600" cy="220979"/>
-          </a:xfrm>
-          <a:prstGeom prst="rect">
-            <a:avLst/>
-          </a:prstGeom>
-          <a:noFill/>
-        </p:spPr>
-        <p:txBody>
-          <a:bodyPr wrap="none" lIns="0" rIns="0" tIns="0" bIns="0">
-            <a:spAutoFit/>
-          </a:bodyPr>
-          <a:lstStyle/>
-          <a:p>
-            <a:pPr>
-              <a:lnSpc>
-                <a:spcPts val="1240"/>
-              </a:lnSpc>
-              <a:spcAft>
-                <a:spcPts val="0"/>
-              </a:spcAft>
-              <a:defRPr sz="1000" b="1">
-                <a:solidFill>
-                  <a:srgbClr val="68635B"/>
-                </a:solidFill>
-                <a:latin typeface="Arial"/>
-              </a:defRPr>
-            </a:pPr>
-            <a:r>
-              <a:t>PŘEDEM SJEDNOCENÁ STUPNICE</a:t>
-            </a:r>
-          </a:p>
-        </p:txBody>
-      </p:sp>
-      <p:sp>
-        <p:nvSpPr>
-          <p:cNvPr id="7" name="Rectangle 6"/>
+              <a:t>JAK HODNOCENÍ PROVÉST</a:t>
+            </a:r>
+          </a:p>
+        </p:txBody>
+      </p:sp>
+      <p:sp>
+        <p:nvSpPr>
+          <p:cNvPr id="4" name="Rectangle 3"/>
           <p:cNvSpPr/>
           <p:nvPr/>
         </p:nvSpPr>
         <p:spPr>
           <a:xfrm>
-            <a:off x="533400" y="1155700"/>
-            <a:ext cx="11125200" cy="25400"/>
+            <a:off x="711200" y="876300"/>
+            <a:ext cx="622300" cy="50800"/>
           </a:xfrm>
           <a:prstGeom prst="rect">
             <a:avLst/>
           </a:prstGeom>
           <a:solidFill>
-            <a:srgbClr val="181817"/>
+            <a:srgbClr val="E55024"/>
           </a:solidFill>
           <a:ln>
             <a:noFill/>
@@ -5714,14 +5108,14 @@
       </p:sp>
       <p:sp>
         <p:nvSpPr>
-          <p:cNvPr id="8" name="TextBox 7"/>
+          <p:cNvPr id="5" name="TextBox 4"/>
           <p:cNvSpPr txBox="1"/>
           <p:nvPr/>
         </p:nvSpPr>
         <p:spPr>
           <a:xfrm>
-            <a:off x="508000" y="1422400"/>
-            <a:ext cx="11176000" cy="1079500"/>
+            <a:off x="685800" y="1257300"/>
+            <a:ext cx="10795000" cy="1168400"/>
           </a:xfrm>
           <a:prstGeom prst="rect">
             <a:avLst/>
@@ -5730,46 +5124,46 @@
         </p:spPr>
         <p:txBody>
           <a:bodyPr wrap="none" lIns="0" rIns="0" tIns="0" bIns="0">
-            <a:spAutoFit/>
+            <a:noAutofit/>
           </a:bodyPr>
           <a:lstStyle/>
           <a:p>
             <a:pPr>
               <a:lnSpc>
-                <a:spcPts val="3740"/>
+                <a:spcPts val="4032"/>
               </a:lnSpc>
               <a:spcAft>
                 <a:spcPts val="0"/>
               </a:spcAft>
-              <a:defRPr sz="3400" b="1">
+              <a:defRPr sz="3600" b="1">
                 <a:solidFill>
-                  <a:srgbClr val="181817"/>
+                  <a:srgbClr val="191B20"/>
                 </a:solidFill>
                 <a:latin typeface="Arial"/>
               </a:defRPr>
             </a:pPr>
             <a:r>
-              <a:t>Závažnost určuje dopad.</a:t>
-            </a:r>
-          </a:p>
-        </p:txBody>
-      </p:sp>
-      <p:sp>
-        <p:nvSpPr>
-          <p:cNvPr id="9" name="Rectangle 8"/>
+              <a:t>Dvě formalizované metody</a:t>
+            </a:r>
+          </a:p>
+        </p:txBody>
+      </p:sp>
+      <p:sp>
+        <p:nvSpPr>
+          <p:cNvPr id="6" name="Rectangle 5"/>
           <p:cNvSpPr/>
           <p:nvPr/>
         </p:nvSpPr>
         <p:spPr>
           <a:xfrm>
-            <a:off x="533400" y="2768600"/>
-            <a:ext cx="3556000" cy="2603500"/>
+            <a:off x="723900" y="2273300"/>
+            <a:ext cx="101600" cy="101600"/>
           </a:xfrm>
           <a:prstGeom prst="rect">
             <a:avLst/>
           </a:prstGeom>
           <a:solidFill>
-            <a:srgbClr val="181817"/>
+            <a:srgbClr val="E55024"/>
           </a:solidFill>
           <a:ln>
             <a:noFill/>
@@ -5799,20 +5193,62 @@
       </p:sp>
       <p:sp>
         <p:nvSpPr>
-          <p:cNvPr id="10" name="Rectangle 9"/>
+          <p:cNvPr id="7" name="TextBox 6"/>
+          <p:cNvSpPr txBox="1"/>
+          <p:nvPr/>
+        </p:nvSpPr>
+        <p:spPr>
+          <a:xfrm>
+            <a:off x="1066800" y="2146300"/>
+            <a:ext cx="10160000" cy="419100"/>
+          </a:xfrm>
+          <a:prstGeom prst="rect">
+            <a:avLst/>
+          </a:prstGeom>
+          <a:noFill/>
+        </p:spPr>
+        <p:txBody>
+          <a:bodyPr wrap="none" lIns="0" rIns="0" tIns="0" bIns="0">
+            <a:noAutofit/>
+          </a:bodyPr>
+          <a:lstStyle/>
+          <a:p>
+            <a:pPr>
+              <a:lnSpc>
+                <a:spcPts val="3360"/>
+              </a:lnSpc>
+              <a:spcAft>
+                <a:spcPts val="0"/>
+              </a:spcAft>
+              <a:defRPr sz="2800" b="0">
+                <a:solidFill>
+                  <a:srgbClr val="191B20"/>
+                </a:solidFill>
+                <a:latin typeface="Arial"/>
+              </a:defRPr>
+            </a:pPr>
+            <a:r>
+              <a:t>Nielsenovy heuristiky: stav, konzistence a prevence chyb.</a:t>
+            </a:r>
+          </a:p>
+        </p:txBody>
+      </p:sp>
+      <p:sp>
+        <p:nvSpPr>
+          <p:cNvPr id="8" name="Rectangle 7"/>
           <p:cNvSpPr/>
           <p:nvPr/>
         </p:nvSpPr>
         <p:spPr>
           <a:xfrm>
-            <a:off x="533400" y="2768600"/>
-            <a:ext cx="3556000" cy="76200"/>
+            <a:off x="723900" y="2971800"/>
+            <a:ext cx="101600" cy="101600"/>
           </a:xfrm>
           <a:prstGeom prst="rect">
             <a:avLst/>
           </a:prstGeom>
           <a:solidFill>
-            <a:srgbClr val="F45E2B"/>
+            <a:srgbClr val="E55024"/>
           </a:solidFill>
           <a:ln>
             <a:noFill/>
@@ -5842,14 +5278,14 @@
       </p:sp>
       <p:sp>
         <p:nvSpPr>
-          <p:cNvPr id="11" name="TextBox 10"/>
+          <p:cNvPr id="9" name="TextBox 8"/>
           <p:cNvSpPr txBox="1"/>
           <p:nvPr/>
         </p:nvSpPr>
         <p:spPr>
           <a:xfrm>
-            <a:off x="749300" y="3035300"/>
-            <a:ext cx="3124200" cy="685800"/>
+            <a:off x="1066800" y="2844800"/>
+            <a:ext cx="10160000" cy="419100"/>
           </a:xfrm>
           <a:prstGeom prst="rect">
             <a:avLst/>
@@ -5858,161 +5294,46 @@
         </p:spPr>
         <p:txBody>
           <a:bodyPr wrap="none" lIns="0" rIns="0" tIns="0" bIns="0">
-            <a:spAutoFit/>
+            <a:noAutofit/>
           </a:bodyPr>
           <a:lstStyle/>
           <a:p>
             <a:pPr>
               <a:lnSpc>
-                <a:spcPts val="2200"/>
+                <a:spcPts val="3360"/>
               </a:lnSpc>
               <a:spcAft>
                 <a:spcPts val="0"/>
               </a:spcAft>
-              <a:defRPr sz="2000" b="1">
+              <a:defRPr sz="2800" b="0">
                 <a:solidFill>
-                  <a:srgbClr val="F4F0E7"/>
+                  <a:srgbClr val="191B20"/>
                 </a:solidFill>
                 <a:latin typeface="Arial"/>
               </a:defRPr>
             </a:pPr>
             <a:r>
-              <a:t>Kritický</a:t>
-            </a:r>
-          </a:p>
-        </p:txBody>
-      </p:sp>
-      <p:sp>
-        <p:nvSpPr>
-          <p:cNvPr id="12" name="TextBox 11"/>
-          <p:cNvSpPr txBox="1"/>
-          <p:nvPr/>
-        </p:nvSpPr>
-        <p:spPr>
-          <a:xfrm>
-            <a:off x="749300" y="3733800"/>
-            <a:ext cx="3124200" cy="1511300"/>
-          </a:xfrm>
-          <a:prstGeom prst="rect">
-            <a:avLst/>
-          </a:prstGeom>
-          <a:noFill/>
-        </p:spPr>
-        <p:txBody>
-          <a:bodyPr wrap="none" lIns="0" rIns="0" tIns="0" bIns="0">
-            <a:spAutoFit/>
-          </a:bodyPr>
-          <a:lstStyle/>
-          <a:p>
-            <a:pPr>
-              <a:lnSpc>
-                <a:spcPts val="1689"/>
-              </a:lnSpc>
-              <a:spcAft>
-                <a:spcPts val="0"/>
-              </a:spcAft>
-              <a:defRPr sz="1420" b="0">
-                <a:solidFill>
-                  <a:srgbClr val="F4F0E7"/>
-                </a:solidFill>
-                <a:latin typeface="Arial"/>
-              </a:defRPr>
-            </a:pPr>
-            <a:r>
-              <a:t>Klíčový scénář nelze dokončit a</a:t>
-            </a:r>
-          </a:p>
-          <a:p>
-            <a:pPr>
-              <a:lnSpc>
-                <a:spcPts val="1689"/>
-              </a:lnSpc>
-              <a:spcAft>
-                <a:spcPts val="0"/>
-              </a:spcAft>
-              <a:defRPr sz="1420" b="0">
-                <a:solidFill>
-                  <a:srgbClr val="F4F0E7"/>
-                </a:solidFill>
-                <a:latin typeface="Arial"/>
-              </a:defRPr>
-            </a:pPr>
-            <a:r>
-              <a:t>neexistuje rozumná náhradní</a:t>
-            </a:r>
-          </a:p>
-          <a:p>
-            <a:pPr>
-              <a:lnSpc>
-                <a:spcPts val="1689"/>
-              </a:lnSpc>
-              <a:spcAft>
-                <a:spcPts val="0"/>
-              </a:spcAft>
-              <a:defRPr sz="1420" b="0">
-                <a:solidFill>
-                  <a:srgbClr val="F4F0E7"/>
-                </a:solidFill>
-                <a:latin typeface="Arial"/>
-              </a:defRPr>
-            </a:pPr>
-            <a:r>
-              <a:t>cesta.</a:t>
-            </a:r>
-          </a:p>
-          <a:p>
-            <a:pPr>
-              <a:lnSpc>
-                <a:spcPts val="1689"/>
-              </a:lnSpc>
-              <a:spcAft>
-                <a:spcPts val="0"/>
-              </a:spcAft>
-              <a:defRPr sz="1420" b="0">
-                <a:solidFill>
-                  <a:srgbClr val="F4F0E7"/>
-                </a:solidFill>
-                <a:latin typeface="Arial"/>
-              </a:defRPr>
-            </a:pPr>
-          </a:p>
-          <a:p>
-            <a:pPr>
-              <a:lnSpc>
-                <a:spcPts val="1689"/>
-              </a:lnSpc>
-              <a:spcAft>
-                <a:spcPts val="0"/>
-              </a:spcAft>
-              <a:defRPr sz="1420" b="0">
-                <a:solidFill>
-                  <a:srgbClr val="F4F0E7"/>
-                </a:solidFill>
-                <a:latin typeface="Arial"/>
-              </a:defRPr>
-            </a:pPr>
-            <a:r>
-              <a:t>Doložit konkrétní blokující krok.</a:t>
-            </a:r>
-          </a:p>
-        </p:txBody>
-      </p:sp>
-      <p:sp>
-        <p:nvSpPr>
-          <p:cNvPr id="13" name="Rectangle 12"/>
+              <a:t>Kognitivní průchod: dva scénáře krok za krokem.</a:t>
+            </a:r>
+          </a:p>
+        </p:txBody>
+      </p:sp>
+      <p:sp>
+        <p:nvSpPr>
+          <p:cNvPr id="10" name="Rectangle 9"/>
           <p:cNvSpPr/>
           <p:nvPr/>
         </p:nvSpPr>
         <p:spPr>
           <a:xfrm>
-            <a:off x="4318000" y="2768600"/>
-            <a:ext cx="3556000" cy="2603500"/>
+            <a:off x="723900" y="3670300"/>
+            <a:ext cx="101600" cy="101600"/>
           </a:xfrm>
           <a:prstGeom prst="rect">
             <a:avLst/>
           </a:prstGeom>
           <a:solidFill>
-            <a:srgbClr val="E7E0D5"/>
+            <a:srgbClr val="E55024"/>
           </a:solidFill>
           <a:ln>
             <a:noFill/>
@@ -6042,20 +5363,62 @@
       </p:sp>
       <p:sp>
         <p:nvSpPr>
-          <p:cNvPr id="14" name="Rectangle 13"/>
+          <p:cNvPr id="11" name="TextBox 10"/>
+          <p:cNvSpPr txBox="1"/>
+          <p:nvPr/>
+        </p:nvSpPr>
+        <p:spPr>
+          <a:xfrm>
+            <a:off x="1066800" y="3543300"/>
+            <a:ext cx="10160000" cy="419100"/>
+          </a:xfrm>
+          <a:prstGeom prst="rect">
+            <a:avLst/>
+          </a:prstGeom>
+          <a:noFill/>
+        </p:spPr>
+        <p:txBody>
+          <a:bodyPr wrap="none" lIns="0" rIns="0" tIns="0" bIns="0">
+            <a:noAutofit/>
+          </a:bodyPr>
+          <a:lstStyle/>
+          <a:p>
+            <a:pPr>
+              <a:lnSpc>
+                <a:spcPts val="3360"/>
+              </a:lnSpc>
+              <a:spcAft>
+                <a:spcPts val="0"/>
+              </a:spcAft>
+              <a:defRPr sz="2800" b="0">
+                <a:solidFill>
+                  <a:srgbClr val="191B20"/>
+                </a:solidFill>
+                <a:latin typeface="Arial"/>
+              </a:defRPr>
+            </a:pPr>
+            <a:r>
+              <a:t>U kroku: cíl → nalezení ovládání → akce → zpětná vazba.</a:t>
+            </a:r>
+          </a:p>
+        </p:txBody>
+      </p:sp>
+      <p:sp>
+        <p:nvSpPr>
+          <p:cNvPr id="12" name="Rectangle 11"/>
           <p:cNvSpPr/>
           <p:nvPr/>
         </p:nvSpPr>
         <p:spPr>
           <a:xfrm>
-            <a:off x="4318000" y="2768600"/>
-            <a:ext cx="3556000" cy="76200"/>
+            <a:off x="723900" y="4368800"/>
+            <a:ext cx="101600" cy="101600"/>
           </a:xfrm>
           <a:prstGeom prst="rect">
             <a:avLst/>
           </a:prstGeom>
           <a:solidFill>
-            <a:srgbClr val="F45E2B"/>
+            <a:srgbClr val="E55024"/>
           </a:solidFill>
           <a:ln>
             <a:noFill/>
@@ -6085,14 +5448,14 @@
       </p:sp>
       <p:sp>
         <p:nvSpPr>
-          <p:cNvPr id="15" name="TextBox 14"/>
+          <p:cNvPr id="13" name="TextBox 12"/>
           <p:cNvSpPr txBox="1"/>
           <p:nvPr/>
         </p:nvSpPr>
         <p:spPr>
           <a:xfrm>
-            <a:off x="4533900" y="3035300"/>
-            <a:ext cx="3124200" cy="685800"/>
+            <a:off x="1066800" y="4241800"/>
+            <a:ext cx="10160000" cy="419100"/>
           </a:xfrm>
           <a:prstGeom prst="rect">
             <a:avLst/>
@@ -6101,180 +5464,46 @@
         </p:spPr>
         <p:txBody>
           <a:bodyPr wrap="none" lIns="0" rIns="0" tIns="0" bIns="0">
-            <a:spAutoFit/>
+            <a:noAutofit/>
           </a:bodyPr>
           <a:lstStyle/>
           <a:p>
             <a:pPr>
               <a:lnSpc>
-                <a:spcPts val="2200"/>
+                <a:spcPts val="3360"/>
               </a:lnSpc>
               <a:spcAft>
                 <a:spcPts val="0"/>
               </a:spcAft>
-              <a:defRPr sz="2000" b="1">
+              <a:defRPr sz="2800" b="0">
                 <a:solidFill>
-                  <a:srgbClr val="181817"/>
+                  <a:srgbClr val="191B20"/>
                 </a:solidFill>
                 <a:latin typeface="Arial"/>
               </a:defRPr>
             </a:pPr>
             <a:r>
-              <a:t>Významný</a:t>
-            </a:r>
-          </a:p>
-        </p:txBody>
-      </p:sp>
-      <p:sp>
-        <p:nvSpPr>
-          <p:cNvPr id="16" name="TextBox 15"/>
-          <p:cNvSpPr txBox="1"/>
-          <p:nvPr/>
-        </p:nvSpPr>
-        <p:spPr>
-          <a:xfrm>
-            <a:off x="4533900" y="3733800"/>
-            <a:ext cx="3124200" cy="1511300"/>
-          </a:xfrm>
-          <a:prstGeom prst="rect">
-            <a:avLst/>
-          </a:prstGeom>
-          <a:noFill/>
-        </p:spPr>
-        <p:txBody>
-          <a:bodyPr wrap="none" lIns="0" rIns="0" tIns="0" bIns="0">
-            <a:spAutoFit/>
-          </a:bodyPr>
-          <a:lstStyle/>
-          <a:p>
-            <a:pPr>
-              <a:lnSpc>
-                <a:spcPts val="1689"/>
-              </a:lnSpc>
-              <a:spcAft>
-                <a:spcPts val="0"/>
-              </a:spcAft>
-              <a:defRPr sz="1420" b="0">
-                <a:solidFill>
-                  <a:srgbClr val="181817"/>
-                </a:solidFill>
-                <a:latin typeface="Arial"/>
-              </a:defRPr>
-            </a:pPr>
-            <a:r>
-              <a:t>Cesta existuje, ale opakovaně</a:t>
-            </a:r>
-          </a:p>
-          <a:p>
-            <a:pPr>
-              <a:lnSpc>
-                <a:spcPts val="1689"/>
-              </a:lnSpc>
-              <a:spcAft>
-                <a:spcPts val="0"/>
-              </a:spcAft>
-              <a:defRPr sz="1420" b="0">
-                <a:solidFill>
-                  <a:srgbClr val="181817"/>
-                </a:solidFill>
-                <a:latin typeface="Arial"/>
-              </a:defRPr>
-            </a:pPr>
-            <a:r>
-              <a:t>vede k chybám nebo zásadní</a:t>
-            </a:r>
-          </a:p>
-          <a:p>
-            <a:pPr>
-              <a:lnSpc>
-                <a:spcPts val="1689"/>
-              </a:lnSpc>
-              <a:spcAft>
-                <a:spcPts val="0"/>
-              </a:spcAft>
-              <a:defRPr sz="1420" b="0">
-                <a:solidFill>
-                  <a:srgbClr val="181817"/>
-                </a:solidFill>
-                <a:latin typeface="Arial"/>
-              </a:defRPr>
-            </a:pPr>
-            <a:r>
-              <a:t>nejistotě.</a:t>
-            </a:r>
-          </a:p>
-          <a:p>
-            <a:pPr>
-              <a:lnSpc>
-                <a:spcPts val="1689"/>
-              </a:lnSpc>
-              <a:spcAft>
-                <a:spcPts val="0"/>
-              </a:spcAft>
-              <a:defRPr sz="1420" b="0">
-                <a:solidFill>
-                  <a:srgbClr val="181817"/>
-                </a:solidFill>
-                <a:latin typeface="Arial"/>
-              </a:defRPr>
-            </a:pPr>
-          </a:p>
-          <a:p>
-            <a:pPr>
-              <a:lnSpc>
-                <a:spcPts val="1689"/>
-              </a:lnSpc>
-              <a:spcAft>
-                <a:spcPts val="0"/>
-              </a:spcAft>
-              <a:defRPr sz="1420" b="0">
-                <a:solidFill>
-                  <a:srgbClr val="181817"/>
-                </a:solidFill>
-                <a:latin typeface="Arial"/>
-              </a:defRPr>
-            </a:pPr>
-            <a:r>
-              <a:t>Popsat náklady a četnost</a:t>
-            </a:r>
-          </a:p>
-          <a:p>
-            <a:pPr>
-              <a:lnSpc>
-                <a:spcPts val="1689"/>
-              </a:lnSpc>
-              <a:spcAft>
-                <a:spcPts val="0"/>
-              </a:spcAft>
-              <a:defRPr sz="1420" b="0">
-                <a:solidFill>
-                  <a:srgbClr val="181817"/>
-                </a:solidFill>
-                <a:latin typeface="Arial"/>
-              </a:defRPr>
-            </a:pPr>
-            <a:r>
-              <a:t>problému.</a:t>
-            </a:r>
-          </a:p>
-        </p:txBody>
-      </p:sp>
-      <p:sp>
-        <p:nvSpPr>
-          <p:cNvPr id="17" name="Rectangle 16"/>
+              <a:t>Doplnit mobil, klávesnici a prázdné či chybové stavy.</a:t>
+            </a:r>
+          </a:p>
+        </p:txBody>
+      </p:sp>
+      <p:sp>
+        <p:nvSpPr>
+          <p:cNvPr id="14" name="Rectangle 13"/>
           <p:cNvSpPr/>
           <p:nvPr/>
         </p:nvSpPr>
         <p:spPr>
           <a:xfrm>
-            <a:off x="8102600" y="2768600"/>
-            <a:ext cx="3556000" cy="2603500"/>
+            <a:off x="711200" y="6248400"/>
+            <a:ext cx="10769600" cy="12700"/>
           </a:xfrm>
           <a:prstGeom prst="rect">
             <a:avLst/>
           </a:prstGeom>
           <a:solidFill>
-            <a:srgbClr val="E7E0D5"/>
+            <a:srgbClr val="DFE2E7"/>
           </a:solidFill>
           <a:ln>
             <a:noFill/>
@@ -6304,57 +5533,14 @@
       </p:sp>
       <p:sp>
         <p:nvSpPr>
-          <p:cNvPr id="18" name="Rectangle 17"/>
-          <p:cNvSpPr/>
-          <p:nvPr/>
-        </p:nvSpPr>
-        <p:spPr>
-          <a:xfrm>
-            <a:off x="8102600" y="2768600"/>
-            <a:ext cx="3556000" cy="76200"/>
-          </a:xfrm>
-          <a:prstGeom prst="rect">
-            <a:avLst/>
-          </a:prstGeom>
-          <a:solidFill>
-            <a:srgbClr val="F45E2B"/>
-          </a:solidFill>
-          <a:ln>
-            <a:noFill/>
-          </a:ln>
-        </p:spPr>
-        <p:style>
-          <a:lnRef idx="1">
-            <a:schemeClr val="accent1"/>
-          </a:lnRef>
-          <a:fillRef idx="3">
-            <a:schemeClr val="accent1"/>
-          </a:fillRef>
-          <a:effectRef idx="2">
-            <a:schemeClr val="accent1"/>
-          </a:effectRef>
-          <a:fontRef idx="minor">
-            <a:schemeClr val="lt1"/>
-          </a:fontRef>
-        </p:style>
-        <p:txBody>
-          <a:bodyPr rtlCol="0" anchor="ctr"/>
-          <a:lstStyle/>
-          <a:p>
-            <a:pPr algn="ctr"/>
-          </a:p>
-        </p:txBody>
-      </p:sp>
-      <p:sp>
-        <p:nvSpPr>
-          <p:cNvPr id="19" name="TextBox 18"/>
+          <p:cNvPr id="15" name="TextBox 14"/>
           <p:cNvSpPr txBox="1"/>
           <p:nvPr/>
         </p:nvSpPr>
         <p:spPr>
           <a:xfrm>
-            <a:off x="8318500" y="3035300"/>
-            <a:ext cx="3124200" cy="685800"/>
+            <a:off x="711200" y="6438900"/>
+            <a:ext cx="9652000" cy="203200"/>
           </a:xfrm>
           <a:prstGeom prst="rect">
             <a:avLst/>
@@ -6363,40 +5549,40 @@
         </p:spPr>
         <p:txBody>
           <a:bodyPr wrap="none" lIns="0" rIns="0" tIns="0" bIns="0">
-            <a:spAutoFit/>
+            <a:noAutofit/>
           </a:bodyPr>
           <a:lstStyle/>
           <a:p>
             <a:pPr>
               <a:lnSpc>
-                <a:spcPts val="2200"/>
+                <a:spcPts val="1297"/>
               </a:lnSpc>
               <a:spcAft>
                 <a:spcPts val="0"/>
               </a:spcAft>
-              <a:defRPr sz="2000" b="1">
+              <a:defRPr sz="1100" b="0">
                 <a:solidFill>
-                  <a:srgbClr val="181817"/>
+                  <a:srgbClr val="626773"/>
                 </a:solidFill>
                 <a:latin typeface="Arial"/>
               </a:defRPr>
             </a:pPr>
             <a:r>
-              <a:t>Drobný</a:t>
-            </a:r>
-          </a:p>
-        </p:txBody>
-      </p:sp>
-      <p:sp>
-        <p:nvSpPr>
-          <p:cNvPr id="20" name="TextBox 19"/>
+              <a:t>ŠABLONA · doplnit skutečný cizí projekt</a:t>
+            </a:r>
+          </a:p>
+        </p:txBody>
+      </p:sp>
+      <p:sp>
+        <p:nvSpPr>
+          <p:cNvPr id="16" name="TextBox 15"/>
           <p:cNvSpPr txBox="1"/>
           <p:nvPr/>
         </p:nvSpPr>
         <p:spPr>
           <a:xfrm>
-            <a:off x="8318500" y="3733800"/>
-            <a:ext cx="3124200" cy="1511300"/>
+            <a:off x="10807700" y="6413500"/>
+            <a:ext cx="673100" cy="215900"/>
           </a:xfrm>
           <a:prstGeom prst="rect">
             <a:avLst/>
@@ -6405,164 +5591,26 @@
         </p:spPr>
         <p:txBody>
           <a:bodyPr wrap="none" lIns="0" rIns="0" tIns="0" bIns="0">
-            <a:spAutoFit/>
+            <a:noAutofit/>
           </a:bodyPr>
           <a:lstStyle/>
           <a:p>
             <a:pPr>
               <a:lnSpc>
-                <a:spcPts val="1689"/>
+                <a:spcPts val="1416"/>
               </a:lnSpc>
               <a:spcAft>
                 <a:spcPts val="0"/>
               </a:spcAft>
-              <a:defRPr sz="1420" b="0">
+              <a:defRPr sz="1200" b="0">
                 <a:solidFill>
-                  <a:srgbClr val="181817"/>
+                  <a:srgbClr val="626773"/>
                 </a:solidFill>
                 <a:latin typeface="Arial"/>
               </a:defRPr>
             </a:pPr>
             <a:r>
-              <a:t>Lokální nesrovnalost či čitelnost;</a:t>
-            </a:r>
-          </a:p>
-          <a:p>
-            <a:pPr>
-              <a:lnSpc>
-                <a:spcPts val="1689"/>
-              </a:lnSpc>
-              <a:spcAft>
-                <a:spcPts val="0"/>
-              </a:spcAft>
-              <a:defRPr sz="1420" b="0">
-                <a:solidFill>
-                  <a:srgbClr val="181817"/>
-                </a:solidFill>
-                <a:latin typeface="Arial"/>
-              </a:defRPr>
-            </a:pPr>
-            <a:r>
-              <a:t>cíl zůstává dosažitelný.</a:t>
-            </a:r>
-          </a:p>
-          <a:p>
-            <a:pPr>
-              <a:lnSpc>
-                <a:spcPts val="1689"/>
-              </a:lnSpc>
-              <a:spcAft>
-                <a:spcPts val="0"/>
-              </a:spcAft>
-              <a:defRPr sz="1420" b="0">
-                <a:solidFill>
-                  <a:srgbClr val="181817"/>
-                </a:solidFill>
-                <a:latin typeface="Arial"/>
-              </a:defRPr>
-            </a:pPr>
-          </a:p>
-          <a:p>
-            <a:pPr>
-              <a:lnSpc>
-                <a:spcPts val="1689"/>
-              </a:lnSpc>
-              <a:spcAft>
-                <a:spcPts val="0"/>
-              </a:spcAft>
-              <a:defRPr sz="1420" b="0">
-                <a:solidFill>
-                  <a:srgbClr val="181817"/>
-                </a:solidFill>
-                <a:latin typeface="Arial"/>
-              </a:defRPr>
-            </a:pPr>
-            <a:r>
-              <a:t>Oddělit od pouhé preference.</a:t>
-            </a:r>
-          </a:p>
-        </p:txBody>
-      </p:sp>
-      <p:sp>
-        <p:nvSpPr>
-          <p:cNvPr id="21" name="TextBox 20"/>
-          <p:cNvSpPr txBox="1"/>
-          <p:nvPr/>
-        </p:nvSpPr>
-        <p:spPr>
-          <a:xfrm>
-            <a:off x="533400" y="6413500"/>
-            <a:ext cx="10033000" cy="181610"/>
-          </a:xfrm>
-          <a:prstGeom prst="rect">
-            <a:avLst/>
-          </a:prstGeom>
-          <a:noFill/>
-        </p:spPr>
-        <p:txBody>
-          <a:bodyPr wrap="none" lIns="0" rIns="0" tIns="0" bIns="0">
-            <a:spAutoFit/>
-          </a:bodyPr>
-          <a:lstStyle/>
-          <a:p>
-            <a:pPr>
-              <a:lnSpc>
-                <a:spcPts val="930"/>
-              </a:lnSpc>
-              <a:spcAft>
-                <a:spcPts val="0"/>
-              </a:spcAft>
-              <a:defRPr sz="750" b="0">
-                <a:solidFill>
-                  <a:srgbClr val="68635B"/>
-                </a:solidFill>
-                <a:latin typeface="Arial"/>
-              </a:defRPr>
-            </a:pPr>
-            <a:r>
-              <a:t>METODICKÁ ŠABLONA — DOPLNIT CIZÍ PROJEKT</a:t>
-            </a:r>
-          </a:p>
-        </p:txBody>
-      </p:sp>
-      <p:sp>
-        <p:nvSpPr>
-          <p:cNvPr id="22" name="TextBox 21"/>
-          <p:cNvSpPr txBox="1"/>
-          <p:nvPr/>
-        </p:nvSpPr>
-        <p:spPr>
-          <a:xfrm>
-            <a:off x="10947400" y="6350000"/>
-            <a:ext cx="825500" cy="220979"/>
-          </a:xfrm>
-          <a:prstGeom prst="rect">
-            <a:avLst/>
-          </a:prstGeom>
-          <a:noFill/>
-        </p:spPr>
-        <p:txBody>
-          <a:bodyPr wrap="none" lIns="0" rIns="0" tIns="0" bIns="0">
-            <a:spAutoFit/>
-          </a:bodyPr>
-          <a:lstStyle/>
-          <a:p>
-            <a:pPr>
-              <a:lnSpc>
-                <a:spcPts val="1240"/>
-              </a:lnSpc>
-              <a:spcAft>
-                <a:spcPts val="0"/>
-              </a:spcAft>
-              <a:defRPr sz="1000" b="1">
-                <a:solidFill>
-                  <a:srgbClr val="68635B"/>
-                </a:solidFill>
-                <a:latin typeface="Arial"/>
-              </a:defRPr>
-            </a:pPr>
-            <a:r>
-              <a:t>06 / 03</a:t>
+              <a:t>3 / 6</a:t>
             </a:r>
           </a:p>
         </p:txBody>
@@ -6600,7 +5648,7 @@
             <a:avLst/>
           </a:prstGeom>
           <a:solidFill>
-            <a:srgbClr val="F4F0E7"/>
+            <a:srgbClr val="FFFFFF"/>
           </a:solidFill>
           <a:ln>
             <a:noFill/>
@@ -6636,8 +5684,8 @@
         </p:nvSpPr>
         <p:spPr>
           <a:xfrm>
-            <a:off x="533400" y="304800"/>
-            <a:ext cx="1905000" cy="283972"/>
+            <a:off x="711200" y="457200"/>
+            <a:ext cx="10769600" cy="228600"/>
           </a:xfrm>
           <a:prstGeom prst="rect">
             <a:avLst/>
@@ -6646,172 +5694,46 @@
         </p:spPr>
         <p:txBody>
           <a:bodyPr wrap="none" lIns="0" rIns="0" tIns="0" bIns="0">
-            <a:spAutoFit/>
+            <a:noAutofit/>
           </a:bodyPr>
           <a:lstStyle/>
           <a:p>
             <a:pPr>
               <a:lnSpc>
-                <a:spcPts val="1736"/>
+                <a:spcPts val="1534"/>
               </a:lnSpc>
               <a:spcAft>
                 <a:spcPts val="0"/>
               </a:spcAft>
-              <a:defRPr sz="1400" b="1">
+              <a:defRPr sz="1300" b="1">
                 <a:solidFill>
-                  <a:srgbClr val="181817"/>
+                  <a:srgbClr val="626773"/>
                 </a:solidFill>
                 <a:latin typeface="Arial"/>
               </a:defRPr>
             </a:pPr>
             <a:r>
-              <a:t>PRAGUE</a:t>
-            </a:r>
-          </a:p>
-        </p:txBody>
-      </p:sp>
-      <p:sp>
-        <p:nvSpPr>
-          <p:cNvPr id="4" name="TextBox 3"/>
-          <p:cNvSpPr txBox="1"/>
-          <p:nvPr/>
-        </p:nvSpPr>
-        <p:spPr>
-          <a:xfrm>
-            <a:off x="533400" y="495300"/>
-            <a:ext cx="1905000" cy="409956"/>
-          </a:xfrm>
-          <a:prstGeom prst="rect">
-            <a:avLst/>
-          </a:prstGeom>
-          <a:noFill/>
-        </p:spPr>
-        <p:txBody>
-          <a:bodyPr wrap="none" lIns="0" rIns="0" tIns="0" bIns="0">
-            <a:spAutoFit/>
-          </a:bodyPr>
-          <a:lstStyle/>
-          <a:p>
-            <a:pPr>
-              <a:lnSpc>
-                <a:spcPts val="2728"/>
-              </a:lnSpc>
-              <a:spcAft>
-                <a:spcPts val="0"/>
-              </a:spcAft>
-              <a:defRPr sz="2200" b="1">
-                <a:solidFill>
-                  <a:srgbClr val="181817"/>
-                </a:solidFill>
-                <a:latin typeface="Arial"/>
-              </a:defRPr>
-            </a:pPr>
-            <a:r>
-              <a:t>PULSE</a:t>
-            </a:r>
-          </a:p>
-        </p:txBody>
-      </p:sp>
-      <p:sp>
-        <p:nvSpPr>
-          <p:cNvPr id="5" name="TextBox 4"/>
-          <p:cNvSpPr txBox="1"/>
-          <p:nvPr/>
-        </p:nvSpPr>
-        <p:spPr>
-          <a:xfrm>
-            <a:off x="533400" y="812800"/>
-            <a:ext cx="2032000" cy="165862"/>
-          </a:xfrm>
-          <a:prstGeom prst="rect">
-            <a:avLst/>
-          </a:prstGeom>
-          <a:noFill/>
-        </p:spPr>
-        <p:txBody>
-          <a:bodyPr wrap="none" lIns="0" rIns="0" tIns="0" bIns="0">
-            <a:spAutoFit/>
-          </a:bodyPr>
-          <a:lstStyle/>
-          <a:p>
-            <a:pPr>
-              <a:lnSpc>
-                <a:spcPts val="806"/>
-              </a:lnSpc>
-              <a:spcAft>
-                <a:spcPts val="0"/>
-              </a:spcAft>
-              <a:defRPr sz="650" b="1">
-                <a:solidFill>
-                  <a:srgbClr val="181817"/>
-                </a:solidFill>
-                <a:latin typeface="Arial"/>
-              </a:defRPr>
-            </a:pPr>
-            <a:r>
-              <a:t>FEST / 2027</a:t>
-            </a:r>
-          </a:p>
-        </p:txBody>
-      </p:sp>
-      <p:sp>
-        <p:nvSpPr>
-          <p:cNvPr id="6" name="TextBox 5"/>
-          <p:cNvSpPr txBox="1"/>
-          <p:nvPr/>
-        </p:nvSpPr>
-        <p:spPr>
-          <a:xfrm>
-            <a:off x="5588000" y="533400"/>
-            <a:ext cx="6070600" cy="220979"/>
-          </a:xfrm>
-          <a:prstGeom prst="rect">
-            <a:avLst/>
-          </a:prstGeom>
-          <a:noFill/>
-        </p:spPr>
-        <p:txBody>
-          <a:bodyPr wrap="none" lIns="0" rIns="0" tIns="0" bIns="0">
-            <a:spAutoFit/>
-          </a:bodyPr>
-          <a:lstStyle/>
-          <a:p>
-            <a:pPr>
-              <a:lnSpc>
-                <a:spcPts val="1240"/>
-              </a:lnSpc>
-              <a:spcAft>
-                <a:spcPts val="0"/>
-              </a:spcAft>
-              <a:defRPr sz="1000" b="1">
-                <a:solidFill>
-                  <a:srgbClr val="68635B"/>
-                </a:solidFill>
-                <a:latin typeface="Arial"/>
-              </a:defRPr>
-            </a:pPr>
-            <a:r>
-              <a:t>ŠABLONA SKUTEČNÉHO NÁLEZU</a:t>
-            </a:r>
-          </a:p>
-        </p:txBody>
-      </p:sp>
-      <p:sp>
-        <p:nvSpPr>
-          <p:cNvPr id="7" name="Rectangle 6"/>
+              <a:t>POŽADOVANÁ EVIDENCE</a:t>
+            </a:r>
+          </a:p>
+        </p:txBody>
+      </p:sp>
+      <p:sp>
+        <p:nvSpPr>
+          <p:cNvPr id="4" name="Rectangle 3"/>
           <p:cNvSpPr/>
           <p:nvPr/>
         </p:nvSpPr>
         <p:spPr>
           <a:xfrm>
-            <a:off x="533400" y="1155700"/>
-            <a:ext cx="11125200" cy="25400"/>
+            <a:off x="711200" y="876300"/>
+            <a:ext cx="622300" cy="50800"/>
           </a:xfrm>
           <a:prstGeom prst="rect">
             <a:avLst/>
           </a:prstGeom>
           <a:solidFill>
-            <a:srgbClr val="181817"/>
+            <a:srgbClr val="E55024"/>
           </a:solidFill>
           <a:ln>
             <a:noFill/>
@@ -6841,14 +5763,14 @@
       </p:sp>
       <p:sp>
         <p:nvSpPr>
-          <p:cNvPr id="8" name="TextBox 7"/>
+          <p:cNvPr id="5" name="TextBox 4"/>
           <p:cNvSpPr txBox="1"/>
           <p:nvPr/>
         </p:nvSpPr>
         <p:spPr>
           <a:xfrm>
-            <a:off x="508000" y="1422400"/>
-            <a:ext cx="11176000" cy="1079500"/>
+            <a:off x="685800" y="1257300"/>
+            <a:ext cx="10795000" cy="1168400"/>
           </a:xfrm>
           <a:prstGeom prst="rect">
             <a:avLst/>
@@ -6857,46 +5779,46 @@
         </p:spPr>
         <p:txBody>
           <a:bodyPr wrap="none" lIns="0" rIns="0" tIns="0" bIns="0">
-            <a:spAutoFit/>
+            <a:noAutofit/>
           </a:bodyPr>
           <a:lstStyle/>
           <a:p>
             <a:pPr>
               <a:lnSpc>
-                <a:spcPts val="3740"/>
+                <a:spcPts val="4032"/>
               </a:lnSpc>
               <a:spcAft>
                 <a:spcPts val="0"/>
               </a:spcAft>
-              <a:defRPr sz="3400" b="1">
+              <a:defRPr sz="3600" b="1">
                 <a:solidFill>
-                  <a:srgbClr val="181817"/>
+                  <a:srgbClr val="191B20"/>
                 </a:solidFill>
                 <a:latin typeface="Arial"/>
               </a:defRPr>
             </a:pPr>
             <a:r>
-              <a:t>Od pozorování k doporučení.</a:t>
-            </a:r>
-          </a:p>
-        </p:txBody>
-      </p:sp>
-      <p:sp>
-        <p:nvSpPr>
-          <p:cNvPr id="9" name="Rectangle 8"/>
+              <a:t>Jak zapsat nález a jeho závažnost</a:t>
+            </a:r>
+          </a:p>
+        </p:txBody>
+      </p:sp>
+      <p:sp>
+        <p:nvSpPr>
+          <p:cNvPr id="6" name="Rectangle 5"/>
           <p:cNvSpPr/>
           <p:nvPr/>
         </p:nvSpPr>
         <p:spPr>
           <a:xfrm>
-            <a:off x="533400" y="2946400"/>
-            <a:ext cx="2552700" cy="1765300"/>
+            <a:off x="723900" y="2273300"/>
+            <a:ext cx="101600" cy="101600"/>
           </a:xfrm>
           <a:prstGeom prst="rect">
             <a:avLst/>
           </a:prstGeom>
           <a:solidFill>
-            <a:srgbClr val="181817"/>
+            <a:srgbClr val="E55024"/>
           </a:solidFill>
           <a:ln>
             <a:noFill/>
@@ -6926,14 +5848,14 @@
       </p:sp>
       <p:sp>
         <p:nvSpPr>
-          <p:cNvPr id="10" name="TextBox 9"/>
+          <p:cNvPr id="7" name="TextBox 6"/>
           <p:cNvSpPr txBox="1"/>
           <p:nvPr/>
         </p:nvSpPr>
         <p:spPr>
           <a:xfrm>
-            <a:off x="723900" y="3162300"/>
-            <a:ext cx="2133600" cy="236728"/>
+            <a:off x="1066800" y="2146300"/>
+            <a:ext cx="10160000" cy="419100"/>
           </a:xfrm>
           <a:prstGeom prst="rect">
             <a:avLst/>
@@ -6942,40 +5864,83 @@
         </p:spPr>
         <p:txBody>
           <a:bodyPr wrap="none" lIns="0" rIns="0" tIns="0" bIns="0">
-            <a:spAutoFit/>
+            <a:noAutofit/>
           </a:bodyPr>
           <a:lstStyle/>
           <a:p>
             <a:pPr>
               <a:lnSpc>
-                <a:spcPts val="1364"/>
+                <a:spcPts val="3360"/>
               </a:lnSpc>
               <a:spcAft>
                 <a:spcPts val="0"/>
               </a:spcAft>
-              <a:defRPr sz="1100" b="1">
+              <a:defRPr sz="2800" b="0">
                 <a:solidFill>
-                  <a:srgbClr val="F45E2B"/>
+                  <a:srgbClr val="191B20"/>
                 </a:solidFill>
                 <a:latin typeface="Arial"/>
               </a:defRPr>
             </a:pPr>
             <a:r>
-              <a:t>01</a:t>
-            </a:r>
-          </a:p>
-        </p:txBody>
-      </p:sp>
-      <p:sp>
-        <p:nvSpPr>
-          <p:cNvPr id="11" name="TextBox 10"/>
+              <a:t>Stránka a kroky → očekávaný a skutečný výsledek.</a:t>
+            </a:r>
+          </a:p>
+        </p:txBody>
+      </p:sp>
+      <p:sp>
+        <p:nvSpPr>
+          <p:cNvPr id="8" name="Rectangle 7"/>
+          <p:cNvSpPr/>
+          <p:nvPr/>
+        </p:nvSpPr>
+        <p:spPr>
+          <a:xfrm>
+            <a:off x="723900" y="2971800"/>
+            <a:ext cx="101600" cy="101600"/>
+          </a:xfrm>
+          <a:prstGeom prst="rect">
+            <a:avLst/>
+          </a:prstGeom>
+          <a:solidFill>
+            <a:srgbClr val="E55024"/>
+          </a:solidFill>
+          <a:ln>
+            <a:noFill/>
+          </a:ln>
+        </p:spPr>
+        <p:style>
+          <a:lnRef idx="1">
+            <a:schemeClr val="accent1"/>
+          </a:lnRef>
+          <a:fillRef idx="3">
+            <a:schemeClr val="accent1"/>
+          </a:fillRef>
+          <a:effectRef idx="2">
+            <a:schemeClr val="accent1"/>
+          </a:effectRef>
+          <a:fontRef idx="minor">
+            <a:schemeClr val="lt1"/>
+          </a:fontRef>
+        </p:style>
+        <p:txBody>
+          <a:bodyPr rtlCol="0" anchor="ctr"/>
+          <a:lstStyle/>
+          <a:p>
+            <a:pPr algn="ctr"/>
+          </a:p>
+        </p:txBody>
+      </p:sp>
+      <p:sp>
+        <p:nvSpPr>
+          <p:cNvPr id="9" name="TextBox 8"/>
           <p:cNvSpPr txBox="1"/>
           <p:nvPr/>
         </p:nvSpPr>
         <p:spPr>
           <a:xfrm>
-            <a:off x="723900" y="3568700"/>
-            <a:ext cx="2133600" cy="444500"/>
+            <a:off x="1066800" y="2844800"/>
+            <a:ext cx="10160000" cy="419100"/>
           </a:xfrm>
           <a:prstGeom prst="rect">
             <a:avLst/>
@@ -6984,40 +5949,83 @@
         </p:spPr>
         <p:txBody>
           <a:bodyPr wrap="none" lIns="0" rIns="0" tIns="0" bIns="0">
-            <a:spAutoFit/>
+            <a:noAutofit/>
           </a:bodyPr>
           <a:lstStyle/>
           <a:p>
             <a:pPr>
               <a:lnSpc>
-                <a:spcPts val="2728"/>
+                <a:spcPts val="3360"/>
               </a:lnSpc>
               <a:spcAft>
                 <a:spcPts val="0"/>
               </a:spcAft>
-              <a:defRPr sz="2200" b="1">
+              <a:defRPr sz="2800" b="0">
                 <a:solidFill>
-                  <a:srgbClr val="F4F0E7"/>
+                  <a:srgbClr val="191B20"/>
                 </a:solidFill>
                 <a:latin typeface="Arial"/>
               </a:defRPr>
             </a:pPr>
             <a:r>
-              <a:t>Kroky</a:t>
-            </a:r>
-          </a:p>
-        </p:txBody>
-      </p:sp>
-      <p:sp>
-        <p:nvSpPr>
-          <p:cNvPr id="12" name="TextBox 11"/>
+              <a:t>Metoda, důkaz a dopad na uživatelův cíl.</a:t>
+            </a:r>
+          </a:p>
+        </p:txBody>
+      </p:sp>
+      <p:sp>
+        <p:nvSpPr>
+          <p:cNvPr id="10" name="Rectangle 9"/>
+          <p:cNvSpPr/>
+          <p:nvPr/>
+        </p:nvSpPr>
+        <p:spPr>
+          <a:xfrm>
+            <a:off x="723900" y="3670300"/>
+            <a:ext cx="101600" cy="101600"/>
+          </a:xfrm>
+          <a:prstGeom prst="rect">
+            <a:avLst/>
+          </a:prstGeom>
+          <a:solidFill>
+            <a:srgbClr val="E55024"/>
+          </a:solidFill>
+          <a:ln>
+            <a:noFill/>
+          </a:ln>
+        </p:spPr>
+        <p:style>
+          <a:lnRef idx="1">
+            <a:schemeClr val="accent1"/>
+          </a:lnRef>
+          <a:fillRef idx="3">
+            <a:schemeClr val="accent1"/>
+          </a:fillRef>
+          <a:effectRef idx="2">
+            <a:schemeClr val="accent1"/>
+          </a:effectRef>
+          <a:fontRef idx="minor">
+            <a:schemeClr val="lt1"/>
+          </a:fontRef>
+        </p:style>
+        <p:txBody>
+          <a:bodyPr rtlCol="0" anchor="ctr"/>
+          <a:lstStyle/>
+          <a:p>
+            <a:pPr algn="ctr"/>
+          </a:p>
+        </p:txBody>
+      </p:sp>
+      <p:sp>
+        <p:nvSpPr>
+          <p:cNvPr id="11" name="TextBox 10"/>
           <p:cNvSpPr txBox="1"/>
           <p:nvPr/>
         </p:nvSpPr>
         <p:spPr>
           <a:xfrm>
-            <a:off x="723900" y="4140200"/>
-            <a:ext cx="2133600" cy="406400"/>
+            <a:off x="1066800" y="3543300"/>
+            <a:ext cx="10160000" cy="419100"/>
           </a:xfrm>
           <a:prstGeom prst="rect">
             <a:avLst/>
@@ -7026,804 +6034,238 @@
         </p:spPr>
         <p:txBody>
           <a:bodyPr wrap="none" lIns="0" rIns="0" tIns="0" bIns="0">
-            <a:spAutoFit/>
+            <a:noAutofit/>
           </a:bodyPr>
           <a:lstStyle/>
           <a:p>
             <a:pPr>
               <a:lnSpc>
-                <a:spcPts val="1488"/>
+                <a:spcPts val="3360"/>
+              </a:lnSpc>
+              <a:spcAft>
+                <a:spcPts val="0"/>
+              </a:spcAft>
+              <a:defRPr sz="2800" b="0">
+                <a:solidFill>
+                  <a:srgbClr val="191B20"/>
+                </a:solidFill>
+                <a:latin typeface="Arial"/>
+              </a:defRPr>
+            </a:pPr>
+            <a:r>
+              <a:t>Kritický: blokuje cíl; významný: zásadně komplikuje cestu.</a:t>
+            </a:r>
+          </a:p>
+        </p:txBody>
+      </p:sp>
+      <p:sp>
+        <p:nvSpPr>
+          <p:cNvPr id="12" name="Rectangle 11"/>
+          <p:cNvSpPr/>
+          <p:nvPr/>
+        </p:nvSpPr>
+        <p:spPr>
+          <a:xfrm>
+            <a:off x="723900" y="4368800"/>
+            <a:ext cx="101600" cy="101600"/>
+          </a:xfrm>
+          <a:prstGeom prst="rect">
+            <a:avLst/>
+          </a:prstGeom>
+          <a:solidFill>
+            <a:srgbClr val="E55024"/>
+          </a:solidFill>
+          <a:ln>
+            <a:noFill/>
+          </a:ln>
+        </p:spPr>
+        <p:style>
+          <a:lnRef idx="1">
+            <a:schemeClr val="accent1"/>
+          </a:lnRef>
+          <a:fillRef idx="3">
+            <a:schemeClr val="accent1"/>
+          </a:fillRef>
+          <a:effectRef idx="2">
+            <a:schemeClr val="accent1"/>
+          </a:effectRef>
+          <a:fontRef idx="minor">
+            <a:schemeClr val="lt1"/>
+          </a:fontRef>
+        </p:style>
+        <p:txBody>
+          <a:bodyPr rtlCol="0" anchor="ctr"/>
+          <a:lstStyle/>
+          <a:p>
+            <a:pPr algn="ctr"/>
+          </a:p>
+        </p:txBody>
+      </p:sp>
+      <p:sp>
+        <p:nvSpPr>
+          <p:cNvPr id="13" name="TextBox 12"/>
+          <p:cNvSpPr txBox="1"/>
+          <p:nvPr/>
+        </p:nvSpPr>
+        <p:spPr>
+          <a:xfrm>
+            <a:off x="1066800" y="4241800"/>
+            <a:ext cx="10160000" cy="419100"/>
+          </a:xfrm>
+          <a:prstGeom prst="rect">
+            <a:avLst/>
+          </a:prstGeom>
+          <a:noFill/>
+        </p:spPr>
+        <p:txBody>
+          <a:bodyPr wrap="none" lIns="0" rIns="0" tIns="0" bIns="0">
+            <a:noAutofit/>
+          </a:bodyPr>
+          <a:lstStyle/>
+          <a:p>
+            <a:pPr>
+              <a:lnSpc>
+                <a:spcPts val="3360"/>
+              </a:lnSpc>
+              <a:spcAft>
+                <a:spcPts val="0"/>
+              </a:spcAft>
+              <a:defRPr sz="2800" b="0">
+                <a:solidFill>
+                  <a:srgbClr val="191B20"/>
+                </a:solidFill>
+                <a:latin typeface="Arial"/>
+              </a:defRPr>
+            </a:pPr>
+            <a:r>
+              <a:t>Drobný: místní problém; vždy připojit návrh opravy.</a:t>
+            </a:r>
+          </a:p>
+        </p:txBody>
+      </p:sp>
+      <p:sp>
+        <p:nvSpPr>
+          <p:cNvPr id="14" name="Rectangle 13"/>
+          <p:cNvSpPr/>
+          <p:nvPr/>
+        </p:nvSpPr>
+        <p:spPr>
+          <a:xfrm>
+            <a:off x="711200" y="6248400"/>
+            <a:ext cx="10769600" cy="12700"/>
+          </a:xfrm>
+          <a:prstGeom prst="rect">
+            <a:avLst/>
+          </a:prstGeom>
+          <a:solidFill>
+            <a:srgbClr val="DFE2E7"/>
+          </a:solidFill>
+          <a:ln>
+            <a:noFill/>
+          </a:ln>
+        </p:spPr>
+        <p:style>
+          <a:lnRef idx="1">
+            <a:schemeClr val="accent1"/>
+          </a:lnRef>
+          <a:fillRef idx="3">
+            <a:schemeClr val="accent1"/>
+          </a:fillRef>
+          <a:effectRef idx="2">
+            <a:schemeClr val="accent1"/>
+          </a:effectRef>
+          <a:fontRef idx="minor">
+            <a:schemeClr val="lt1"/>
+          </a:fontRef>
+        </p:style>
+        <p:txBody>
+          <a:bodyPr rtlCol="0" anchor="ctr"/>
+          <a:lstStyle/>
+          <a:p>
+            <a:pPr algn="ctr"/>
+          </a:p>
+        </p:txBody>
+      </p:sp>
+      <p:sp>
+        <p:nvSpPr>
+          <p:cNvPr id="15" name="TextBox 14"/>
+          <p:cNvSpPr txBox="1"/>
+          <p:nvPr/>
+        </p:nvSpPr>
+        <p:spPr>
+          <a:xfrm>
+            <a:off x="711200" y="6438900"/>
+            <a:ext cx="9652000" cy="203200"/>
+          </a:xfrm>
+          <a:prstGeom prst="rect">
+            <a:avLst/>
+          </a:prstGeom>
+          <a:noFill/>
+        </p:spPr>
+        <p:txBody>
+          <a:bodyPr wrap="none" lIns="0" rIns="0" tIns="0" bIns="0">
+            <a:noAutofit/>
+          </a:bodyPr>
+          <a:lstStyle/>
+          <a:p>
+            <a:pPr>
+              <a:lnSpc>
+                <a:spcPts val="1297"/>
+              </a:lnSpc>
+              <a:spcAft>
+                <a:spcPts val="0"/>
+              </a:spcAft>
+              <a:defRPr sz="1100" b="0">
+                <a:solidFill>
+                  <a:srgbClr val="626773"/>
+                </a:solidFill>
+                <a:latin typeface="Arial"/>
+              </a:defRPr>
+            </a:pPr>
+            <a:r>
+              <a:t>ŠABLONA · doplnit skutečný cizí projekt</a:t>
+            </a:r>
+          </a:p>
+        </p:txBody>
+      </p:sp>
+      <p:sp>
+        <p:nvSpPr>
+          <p:cNvPr id="16" name="TextBox 15"/>
+          <p:cNvSpPr txBox="1"/>
+          <p:nvPr/>
+        </p:nvSpPr>
+        <p:spPr>
+          <a:xfrm>
+            <a:off x="10807700" y="6413500"/>
+            <a:ext cx="673100" cy="215900"/>
+          </a:xfrm>
+          <a:prstGeom prst="rect">
+            <a:avLst/>
+          </a:prstGeom>
+          <a:noFill/>
+        </p:spPr>
+        <p:txBody>
+          <a:bodyPr wrap="none" lIns="0" rIns="0" tIns="0" bIns="0">
+            <a:noAutofit/>
+          </a:bodyPr>
+          <a:lstStyle/>
+          <a:p>
+            <a:pPr>
+              <a:lnSpc>
+                <a:spcPts val="1416"/>
               </a:lnSpc>
               <a:spcAft>
                 <a:spcPts val="0"/>
               </a:spcAft>
               <a:defRPr sz="1200" b="0">
                 <a:solidFill>
-                  <a:srgbClr val="F4F0E7"/>
+                  <a:srgbClr val="626773"/>
                 </a:solidFill>
                 <a:latin typeface="Arial"/>
               </a:defRPr>
             </a:pPr>
             <a:r>
-              <a:t>Stránka + akce</a:t>
-            </a:r>
-          </a:p>
-        </p:txBody>
-      </p:sp>
-      <p:sp>
-        <p:nvSpPr>
-          <p:cNvPr id="13" name="TextBox 12"/>
-          <p:cNvSpPr txBox="1"/>
-          <p:nvPr/>
-        </p:nvSpPr>
-        <p:spPr>
-          <a:xfrm>
-            <a:off x="3098800" y="3657600"/>
-            <a:ext cx="292100" cy="394208"/>
-          </a:xfrm>
-          <a:prstGeom prst="rect">
-            <a:avLst/>
-          </a:prstGeom>
-          <a:noFill/>
-        </p:spPr>
-        <p:txBody>
-          <a:bodyPr wrap="none" lIns="0" rIns="0" tIns="0" bIns="0">
-            <a:spAutoFit/>
-          </a:bodyPr>
-          <a:lstStyle/>
-          <a:p>
-            <a:pPr>
-              <a:lnSpc>
-                <a:spcPts val="2604"/>
-              </a:lnSpc>
-              <a:spcAft>
-                <a:spcPts val="0"/>
-              </a:spcAft>
-              <a:defRPr sz="2100" b="1">
-                <a:solidFill>
-                  <a:srgbClr val="181817"/>
-                </a:solidFill>
-                <a:latin typeface="Arial"/>
-              </a:defRPr>
-            </a:pPr>
-            <a:r>
-              <a:t>›</a:t>
-            </a:r>
-          </a:p>
-        </p:txBody>
-      </p:sp>
-      <p:sp>
-        <p:nvSpPr>
-          <p:cNvPr id="14" name="Rectangle 13"/>
-          <p:cNvSpPr/>
-          <p:nvPr/>
-        </p:nvSpPr>
-        <p:spPr>
-          <a:xfrm>
-            <a:off x="3390900" y="2946400"/>
-            <a:ext cx="2552700" cy="1765300"/>
-          </a:xfrm>
-          <a:prstGeom prst="rect">
-            <a:avLst/>
-          </a:prstGeom>
-          <a:solidFill>
-            <a:srgbClr val="E7E0D5"/>
-          </a:solidFill>
-          <a:ln>
-            <a:noFill/>
-          </a:ln>
-        </p:spPr>
-        <p:style>
-          <a:lnRef idx="1">
-            <a:schemeClr val="accent1"/>
-          </a:lnRef>
-          <a:fillRef idx="3">
-            <a:schemeClr val="accent1"/>
-          </a:fillRef>
-          <a:effectRef idx="2">
-            <a:schemeClr val="accent1"/>
-          </a:effectRef>
-          <a:fontRef idx="minor">
-            <a:schemeClr val="lt1"/>
-          </a:fontRef>
-        </p:style>
-        <p:txBody>
-          <a:bodyPr rtlCol="0" anchor="ctr"/>
-          <a:lstStyle/>
-          <a:p>
-            <a:pPr algn="ctr"/>
-          </a:p>
-        </p:txBody>
-      </p:sp>
-      <p:sp>
-        <p:nvSpPr>
-          <p:cNvPr id="15" name="TextBox 14"/>
-          <p:cNvSpPr txBox="1"/>
-          <p:nvPr/>
-        </p:nvSpPr>
-        <p:spPr>
-          <a:xfrm>
-            <a:off x="3581400" y="3162300"/>
-            <a:ext cx="2133600" cy="236728"/>
-          </a:xfrm>
-          <a:prstGeom prst="rect">
-            <a:avLst/>
-          </a:prstGeom>
-          <a:noFill/>
-        </p:spPr>
-        <p:txBody>
-          <a:bodyPr wrap="none" lIns="0" rIns="0" tIns="0" bIns="0">
-            <a:spAutoFit/>
-          </a:bodyPr>
-          <a:lstStyle/>
-          <a:p>
-            <a:pPr>
-              <a:lnSpc>
-                <a:spcPts val="1364"/>
-              </a:lnSpc>
-              <a:spcAft>
-                <a:spcPts val="0"/>
-              </a:spcAft>
-              <a:defRPr sz="1100" b="1">
-                <a:solidFill>
-                  <a:srgbClr val="F45E2B"/>
-                </a:solidFill>
-                <a:latin typeface="Arial"/>
-              </a:defRPr>
-            </a:pPr>
-            <a:r>
-              <a:t>02</a:t>
-            </a:r>
-          </a:p>
-        </p:txBody>
-      </p:sp>
-      <p:sp>
-        <p:nvSpPr>
-          <p:cNvPr id="16" name="TextBox 15"/>
-          <p:cNvSpPr txBox="1"/>
-          <p:nvPr/>
-        </p:nvSpPr>
-        <p:spPr>
-          <a:xfrm>
-            <a:off x="3581400" y="3568700"/>
-            <a:ext cx="2133600" cy="444500"/>
-          </a:xfrm>
-          <a:prstGeom prst="rect">
-            <a:avLst/>
-          </a:prstGeom>
-          <a:noFill/>
-        </p:spPr>
-        <p:txBody>
-          <a:bodyPr wrap="none" lIns="0" rIns="0" tIns="0" bIns="0">
-            <a:spAutoFit/>
-          </a:bodyPr>
-          <a:lstStyle/>
-          <a:p>
-            <a:pPr>
-              <a:lnSpc>
-                <a:spcPts val="2728"/>
-              </a:lnSpc>
-              <a:spcAft>
-                <a:spcPts val="0"/>
-              </a:spcAft>
-              <a:defRPr sz="2200" b="1">
-                <a:solidFill>
-                  <a:srgbClr val="181817"/>
-                </a:solidFill>
-                <a:latin typeface="Arial"/>
-              </a:defRPr>
-            </a:pPr>
-            <a:r>
-              <a:t>Důkaz</a:t>
-            </a:r>
-          </a:p>
-        </p:txBody>
-      </p:sp>
-      <p:sp>
-        <p:nvSpPr>
-          <p:cNvPr id="17" name="TextBox 16"/>
-          <p:cNvSpPr txBox="1"/>
-          <p:nvPr/>
-        </p:nvSpPr>
-        <p:spPr>
-          <a:xfrm>
-            <a:off x="3581400" y="4140200"/>
-            <a:ext cx="2133600" cy="406400"/>
-          </a:xfrm>
-          <a:prstGeom prst="rect">
-            <a:avLst/>
-          </a:prstGeom>
-          <a:noFill/>
-        </p:spPr>
-        <p:txBody>
-          <a:bodyPr wrap="none" lIns="0" rIns="0" tIns="0" bIns="0">
-            <a:spAutoFit/>
-          </a:bodyPr>
-          <a:lstStyle/>
-          <a:p>
-            <a:pPr>
-              <a:lnSpc>
-                <a:spcPts val="1488"/>
-              </a:lnSpc>
-              <a:spcAft>
-                <a:spcPts val="0"/>
-              </a:spcAft>
-              <a:defRPr sz="1200" b="0">
-                <a:solidFill>
-                  <a:srgbClr val="181817"/>
-                </a:solidFill>
-                <a:latin typeface="Arial"/>
-              </a:defRPr>
-            </a:pPr>
-            <a:r>
-              <a:t>Skutečný stav</a:t>
-            </a:r>
-          </a:p>
-        </p:txBody>
-      </p:sp>
-      <p:sp>
-        <p:nvSpPr>
-          <p:cNvPr id="18" name="TextBox 17"/>
-          <p:cNvSpPr txBox="1"/>
-          <p:nvPr/>
-        </p:nvSpPr>
-        <p:spPr>
-          <a:xfrm>
-            <a:off x="5956300" y="3657600"/>
-            <a:ext cx="292100" cy="394208"/>
-          </a:xfrm>
-          <a:prstGeom prst="rect">
-            <a:avLst/>
-          </a:prstGeom>
-          <a:noFill/>
-        </p:spPr>
-        <p:txBody>
-          <a:bodyPr wrap="none" lIns="0" rIns="0" tIns="0" bIns="0">
-            <a:spAutoFit/>
-          </a:bodyPr>
-          <a:lstStyle/>
-          <a:p>
-            <a:pPr>
-              <a:lnSpc>
-                <a:spcPts val="2604"/>
-              </a:lnSpc>
-              <a:spcAft>
-                <a:spcPts val="0"/>
-              </a:spcAft>
-              <a:defRPr sz="2100" b="1">
-                <a:solidFill>
-                  <a:srgbClr val="181817"/>
-                </a:solidFill>
-                <a:latin typeface="Arial"/>
-              </a:defRPr>
-            </a:pPr>
-            <a:r>
-              <a:t>›</a:t>
-            </a:r>
-          </a:p>
-        </p:txBody>
-      </p:sp>
-      <p:sp>
-        <p:nvSpPr>
-          <p:cNvPr id="19" name="Rectangle 18"/>
-          <p:cNvSpPr/>
-          <p:nvPr/>
-        </p:nvSpPr>
-        <p:spPr>
-          <a:xfrm>
-            <a:off x="6248400" y="2946400"/>
-            <a:ext cx="2552700" cy="1765300"/>
-          </a:xfrm>
-          <a:prstGeom prst="rect">
-            <a:avLst/>
-          </a:prstGeom>
-          <a:solidFill>
-            <a:srgbClr val="E7E0D5"/>
-          </a:solidFill>
-          <a:ln>
-            <a:noFill/>
-          </a:ln>
-        </p:spPr>
-        <p:style>
-          <a:lnRef idx="1">
-            <a:schemeClr val="accent1"/>
-          </a:lnRef>
-          <a:fillRef idx="3">
-            <a:schemeClr val="accent1"/>
-          </a:fillRef>
-          <a:effectRef idx="2">
-            <a:schemeClr val="accent1"/>
-          </a:effectRef>
-          <a:fontRef idx="minor">
-            <a:schemeClr val="lt1"/>
-          </a:fontRef>
-        </p:style>
-        <p:txBody>
-          <a:bodyPr rtlCol="0" anchor="ctr"/>
-          <a:lstStyle/>
-          <a:p>
-            <a:pPr algn="ctr"/>
-          </a:p>
-        </p:txBody>
-      </p:sp>
-      <p:sp>
-        <p:nvSpPr>
-          <p:cNvPr id="20" name="TextBox 19"/>
-          <p:cNvSpPr txBox="1"/>
-          <p:nvPr/>
-        </p:nvSpPr>
-        <p:spPr>
-          <a:xfrm>
-            <a:off x="6438900" y="3162300"/>
-            <a:ext cx="2133600" cy="236728"/>
-          </a:xfrm>
-          <a:prstGeom prst="rect">
-            <a:avLst/>
-          </a:prstGeom>
-          <a:noFill/>
-        </p:spPr>
-        <p:txBody>
-          <a:bodyPr wrap="none" lIns="0" rIns="0" tIns="0" bIns="0">
-            <a:spAutoFit/>
-          </a:bodyPr>
-          <a:lstStyle/>
-          <a:p>
-            <a:pPr>
-              <a:lnSpc>
-                <a:spcPts val="1364"/>
-              </a:lnSpc>
-              <a:spcAft>
-                <a:spcPts val="0"/>
-              </a:spcAft>
-              <a:defRPr sz="1100" b="1">
-                <a:solidFill>
-                  <a:srgbClr val="F45E2B"/>
-                </a:solidFill>
-                <a:latin typeface="Arial"/>
-              </a:defRPr>
-            </a:pPr>
-            <a:r>
-              <a:t>03</a:t>
-            </a:r>
-          </a:p>
-        </p:txBody>
-      </p:sp>
-      <p:sp>
-        <p:nvSpPr>
-          <p:cNvPr id="21" name="TextBox 20"/>
-          <p:cNvSpPr txBox="1"/>
-          <p:nvPr/>
-        </p:nvSpPr>
-        <p:spPr>
-          <a:xfrm>
-            <a:off x="6438900" y="3568700"/>
-            <a:ext cx="2133600" cy="444500"/>
-          </a:xfrm>
-          <a:prstGeom prst="rect">
-            <a:avLst/>
-          </a:prstGeom>
-          <a:noFill/>
-        </p:spPr>
-        <p:txBody>
-          <a:bodyPr wrap="none" lIns="0" rIns="0" tIns="0" bIns="0">
-            <a:spAutoFit/>
-          </a:bodyPr>
-          <a:lstStyle/>
-          <a:p>
-            <a:pPr>
-              <a:lnSpc>
-                <a:spcPts val="2728"/>
-              </a:lnSpc>
-              <a:spcAft>
-                <a:spcPts val="0"/>
-              </a:spcAft>
-              <a:defRPr sz="2200" b="1">
-                <a:solidFill>
-                  <a:srgbClr val="181817"/>
-                </a:solidFill>
-                <a:latin typeface="Arial"/>
-              </a:defRPr>
-            </a:pPr>
-            <a:r>
-              <a:t>Dopad</a:t>
-            </a:r>
-          </a:p>
-        </p:txBody>
-      </p:sp>
-      <p:sp>
-        <p:nvSpPr>
-          <p:cNvPr id="22" name="TextBox 21"/>
-          <p:cNvSpPr txBox="1"/>
-          <p:nvPr/>
-        </p:nvSpPr>
-        <p:spPr>
-          <a:xfrm>
-            <a:off x="6438900" y="4140200"/>
-            <a:ext cx="2133600" cy="406400"/>
-          </a:xfrm>
-          <a:prstGeom prst="rect">
-            <a:avLst/>
-          </a:prstGeom>
-          <a:noFill/>
-        </p:spPr>
-        <p:txBody>
-          <a:bodyPr wrap="none" lIns="0" rIns="0" tIns="0" bIns="0">
-            <a:spAutoFit/>
-          </a:bodyPr>
-          <a:lstStyle/>
-          <a:p>
-            <a:pPr>
-              <a:lnSpc>
-                <a:spcPts val="1488"/>
-              </a:lnSpc>
-              <a:spcAft>
-                <a:spcPts val="0"/>
-              </a:spcAft>
-              <a:defRPr sz="1200" b="0">
-                <a:solidFill>
-                  <a:srgbClr val="181817"/>
-                </a:solidFill>
-                <a:latin typeface="Arial"/>
-              </a:defRPr>
-            </a:pPr>
-            <a:r>
-              <a:t>Cíl + závažnost</a:t>
-            </a:r>
-          </a:p>
-        </p:txBody>
-      </p:sp>
-      <p:sp>
-        <p:nvSpPr>
-          <p:cNvPr id="23" name="TextBox 22"/>
-          <p:cNvSpPr txBox="1"/>
-          <p:nvPr/>
-        </p:nvSpPr>
-        <p:spPr>
-          <a:xfrm>
-            <a:off x="8813800" y="3657600"/>
-            <a:ext cx="292100" cy="394208"/>
-          </a:xfrm>
-          <a:prstGeom prst="rect">
-            <a:avLst/>
-          </a:prstGeom>
-          <a:noFill/>
-        </p:spPr>
-        <p:txBody>
-          <a:bodyPr wrap="none" lIns="0" rIns="0" tIns="0" bIns="0">
-            <a:spAutoFit/>
-          </a:bodyPr>
-          <a:lstStyle/>
-          <a:p>
-            <a:pPr>
-              <a:lnSpc>
-                <a:spcPts val="2604"/>
-              </a:lnSpc>
-              <a:spcAft>
-                <a:spcPts val="0"/>
-              </a:spcAft>
-              <a:defRPr sz="2100" b="1">
-                <a:solidFill>
-                  <a:srgbClr val="181817"/>
-                </a:solidFill>
-                <a:latin typeface="Arial"/>
-              </a:defRPr>
-            </a:pPr>
-            <a:r>
-              <a:t>›</a:t>
-            </a:r>
-          </a:p>
-        </p:txBody>
-      </p:sp>
-      <p:sp>
-        <p:nvSpPr>
-          <p:cNvPr id="24" name="Rectangle 23"/>
-          <p:cNvSpPr/>
-          <p:nvPr/>
-        </p:nvSpPr>
-        <p:spPr>
-          <a:xfrm>
-            <a:off x="9105900" y="2946400"/>
-            <a:ext cx="2552700" cy="1765300"/>
-          </a:xfrm>
-          <a:prstGeom prst="rect">
-            <a:avLst/>
-          </a:prstGeom>
-          <a:solidFill>
-            <a:srgbClr val="E7E0D5"/>
-          </a:solidFill>
-          <a:ln>
-            <a:noFill/>
-          </a:ln>
-        </p:spPr>
-        <p:style>
-          <a:lnRef idx="1">
-            <a:schemeClr val="accent1"/>
-          </a:lnRef>
-          <a:fillRef idx="3">
-            <a:schemeClr val="accent1"/>
-          </a:fillRef>
-          <a:effectRef idx="2">
-            <a:schemeClr val="accent1"/>
-          </a:effectRef>
-          <a:fontRef idx="minor">
-            <a:schemeClr val="lt1"/>
-          </a:fontRef>
-        </p:style>
-        <p:txBody>
-          <a:bodyPr rtlCol="0" anchor="ctr"/>
-          <a:lstStyle/>
-          <a:p>
-            <a:pPr algn="ctr"/>
-          </a:p>
-        </p:txBody>
-      </p:sp>
-      <p:sp>
-        <p:nvSpPr>
-          <p:cNvPr id="25" name="TextBox 24"/>
-          <p:cNvSpPr txBox="1"/>
-          <p:nvPr/>
-        </p:nvSpPr>
-        <p:spPr>
-          <a:xfrm>
-            <a:off x="9296400" y="3162300"/>
-            <a:ext cx="2133600" cy="236728"/>
-          </a:xfrm>
-          <a:prstGeom prst="rect">
-            <a:avLst/>
-          </a:prstGeom>
-          <a:noFill/>
-        </p:spPr>
-        <p:txBody>
-          <a:bodyPr wrap="none" lIns="0" rIns="0" tIns="0" bIns="0">
-            <a:spAutoFit/>
-          </a:bodyPr>
-          <a:lstStyle/>
-          <a:p>
-            <a:pPr>
-              <a:lnSpc>
-                <a:spcPts val="1364"/>
-              </a:lnSpc>
-              <a:spcAft>
-                <a:spcPts val="0"/>
-              </a:spcAft>
-              <a:defRPr sz="1100" b="1">
-                <a:solidFill>
-                  <a:srgbClr val="F45E2B"/>
-                </a:solidFill>
-                <a:latin typeface="Arial"/>
-              </a:defRPr>
-            </a:pPr>
-            <a:r>
-              <a:t>04</a:t>
-            </a:r>
-          </a:p>
-        </p:txBody>
-      </p:sp>
-      <p:sp>
-        <p:nvSpPr>
-          <p:cNvPr id="26" name="TextBox 25"/>
-          <p:cNvSpPr txBox="1"/>
-          <p:nvPr/>
-        </p:nvSpPr>
-        <p:spPr>
-          <a:xfrm>
-            <a:off x="9296400" y="3568700"/>
-            <a:ext cx="2133600" cy="444500"/>
-          </a:xfrm>
-          <a:prstGeom prst="rect">
-            <a:avLst/>
-          </a:prstGeom>
-          <a:noFill/>
-        </p:spPr>
-        <p:txBody>
-          <a:bodyPr wrap="none" lIns="0" rIns="0" tIns="0" bIns="0">
-            <a:spAutoFit/>
-          </a:bodyPr>
-          <a:lstStyle/>
-          <a:p>
-            <a:pPr>
-              <a:lnSpc>
-                <a:spcPts val="2728"/>
-              </a:lnSpc>
-              <a:spcAft>
-                <a:spcPts val="0"/>
-              </a:spcAft>
-              <a:defRPr sz="2200" b="1">
-                <a:solidFill>
-                  <a:srgbClr val="181817"/>
-                </a:solidFill>
-                <a:latin typeface="Arial"/>
-              </a:defRPr>
-            </a:pPr>
-            <a:r>
-              <a:t>Návrh</a:t>
-            </a:r>
-          </a:p>
-        </p:txBody>
-      </p:sp>
-      <p:sp>
-        <p:nvSpPr>
-          <p:cNvPr id="27" name="TextBox 26"/>
-          <p:cNvSpPr txBox="1"/>
-          <p:nvPr/>
-        </p:nvSpPr>
-        <p:spPr>
-          <a:xfrm>
-            <a:off x="9296400" y="4140200"/>
-            <a:ext cx="2133600" cy="406400"/>
-          </a:xfrm>
-          <a:prstGeom prst="rect">
-            <a:avLst/>
-          </a:prstGeom>
-          <a:noFill/>
-        </p:spPr>
-        <p:txBody>
-          <a:bodyPr wrap="none" lIns="0" rIns="0" tIns="0" bIns="0">
-            <a:spAutoFit/>
-          </a:bodyPr>
-          <a:lstStyle/>
-          <a:p>
-            <a:pPr>
-              <a:lnSpc>
-                <a:spcPts val="1488"/>
-              </a:lnSpc>
-              <a:spcAft>
-                <a:spcPts val="0"/>
-              </a:spcAft>
-              <a:defRPr sz="1200" b="0">
-                <a:solidFill>
-                  <a:srgbClr val="181817"/>
-                </a:solidFill>
-                <a:latin typeface="Arial"/>
-              </a:defRPr>
-            </a:pPr>
-            <a:r>
-              <a:t>Konkrétní oprava</a:t>
-            </a:r>
-          </a:p>
-        </p:txBody>
-      </p:sp>
-      <p:sp>
-        <p:nvSpPr>
-          <p:cNvPr id="28" name="TextBox 27"/>
-          <p:cNvSpPr txBox="1"/>
-          <p:nvPr/>
-        </p:nvSpPr>
-        <p:spPr>
-          <a:xfrm>
-            <a:off x="533400" y="5207000"/>
-            <a:ext cx="11125200" cy="1016000"/>
-          </a:xfrm>
-          <a:prstGeom prst="rect">
-            <a:avLst/>
-          </a:prstGeom>
-          <a:noFill/>
-        </p:spPr>
-        <p:txBody>
-          <a:bodyPr wrap="none" lIns="0" rIns="0" tIns="0" bIns="0">
-            <a:spAutoFit/>
-          </a:bodyPr>
-          <a:lstStyle/>
-          <a:p>
-            <a:pPr>
-              <a:lnSpc>
-                <a:spcPts val="2108"/>
-              </a:lnSpc>
-              <a:spcAft>
-                <a:spcPts val="0"/>
-              </a:spcAft>
-              <a:defRPr sz="1700" b="0">
-                <a:solidFill>
-                  <a:srgbClr val="181817"/>
-                </a:solidFill>
-                <a:latin typeface="Arial"/>
-              </a:defRPr>
-            </a:pPr>
-            <a:r>
-              <a:t>R01–R05: doplnit až po průchodu skutečným cizím projektem.</a:t>
-            </a:r>
-          </a:p>
-          <a:p>
-            <a:pPr>
-              <a:lnSpc>
-                <a:spcPts val="2108"/>
-              </a:lnSpc>
-              <a:spcAft>
-                <a:spcPts val="0"/>
-              </a:spcAft>
-              <a:defRPr sz="1700" b="0">
-                <a:solidFill>
-                  <a:srgbClr val="181817"/>
-                </a:solidFill>
-                <a:latin typeface="Arial"/>
-              </a:defRPr>
-            </a:pPr>
-            <a:r>
-              <a:t>Screenshot bez vysvětlení dopadu nestačí.</a:t>
-            </a:r>
-          </a:p>
-        </p:txBody>
-      </p:sp>
-      <p:sp>
-        <p:nvSpPr>
-          <p:cNvPr id="29" name="TextBox 28"/>
-          <p:cNvSpPr txBox="1"/>
-          <p:nvPr/>
-        </p:nvSpPr>
-        <p:spPr>
-          <a:xfrm>
-            <a:off x="533400" y="6413500"/>
-            <a:ext cx="10033000" cy="181610"/>
-          </a:xfrm>
-          <a:prstGeom prst="rect">
-            <a:avLst/>
-          </a:prstGeom>
-          <a:noFill/>
-        </p:spPr>
-        <p:txBody>
-          <a:bodyPr wrap="none" lIns="0" rIns="0" tIns="0" bIns="0">
-            <a:spAutoFit/>
-          </a:bodyPr>
-          <a:lstStyle/>
-          <a:p>
-            <a:pPr>
-              <a:lnSpc>
-                <a:spcPts val="930"/>
-              </a:lnSpc>
-              <a:spcAft>
-                <a:spcPts val="0"/>
-              </a:spcAft>
-              <a:defRPr sz="750" b="0">
-                <a:solidFill>
-                  <a:srgbClr val="68635B"/>
-                </a:solidFill>
-                <a:latin typeface="Arial"/>
-              </a:defRPr>
-            </a:pPr>
-            <a:r>
-              <a:t>METODICKÁ ŠABLONA — DOPLNIT CIZÍ PROJEKT</a:t>
-            </a:r>
-          </a:p>
-        </p:txBody>
-      </p:sp>
-      <p:sp>
-        <p:nvSpPr>
-          <p:cNvPr id="30" name="TextBox 29"/>
-          <p:cNvSpPr txBox="1"/>
-          <p:nvPr/>
-        </p:nvSpPr>
-        <p:spPr>
-          <a:xfrm>
-            <a:off x="10947400" y="6350000"/>
-            <a:ext cx="825500" cy="220979"/>
-          </a:xfrm>
-          <a:prstGeom prst="rect">
-            <a:avLst/>
-          </a:prstGeom>
-          <a:noFill/>
-        </p:spPr>
-        <p:txBody>
-          <a:bodyPr wrap="none" lIns="0" rIns="0" tIns="0" bIns="0">
-            <a:spAutoFit/>
-          </a:bodyPr>
-          <a:lstStyle/>
-          <a:p>
-            <a:pPr>
-              <a:lnSpc>
-                <a:spcPts val="1240"/>
-              </a:lnSpc>
-              <a:spcAft>
-                <a:spcPts val="0"/>
-              </a:spcAft>
-              <a:defRPr sz="1000" b="1">
-                <a:solidFill>
-                  <a:srgbClr val="68635B"/>
-                </a:solidFill>
-                <a:latin typeface="Arial"/>
-              </a:defRPr>
-            </a:pPr>
-            <a:r>
-              <a:t>06 / 04</a:t>
+              <a:t>4 / 6</a:t>
             </a:r>
           </a:p>
         </p:txBody>
@@ -7861,7 +6303,7 @@
             <a:avLst/>
           </a:prstGeom>
           <a:solidFill>
-            <a:srgbClr val="F4F0E7"/>
+            <a:srgbClr val="FFFFFF"/>
           </a:solidFill>
           <a:ln>
             <a:noFill/>
@@ -7897,8 +6339,8 @@
         </p:nvSpPr>
         <p:spPr>
           <a:xfrm>
-            <a:off x="533400" y="304800"/>
-            <a:ext cx="1905000" cy="283972"/>
+            <a:off x="711200" y="457200"/>
+            <a:ext cx="10769600" cy="228600"/>
           </a:xfrm>
           <a:prstGeom prst="rect">
             <a:avLst/>
@@ -7907,172 +6349,46 @@
         </p:spPr>
         <p:txBody>
           <a:bodyPr wrap="none" lIns="0" rIns="0" tIns="0" bIns="0">
-            <a:spAutoFit/>
+            <a:noAutofit/>
           </a:bodyPr>
           <a:lstStyle/>
           <a:p>
             <a:pPr>
               <a:lnSpc>
-                <a:spcPts val="1736"/>
+                <a:spcPts val="1534"/>
               </a:lnSpc>
               <a:spcAft>
                 <a:spcPts val="0"/>
               </a:spcAft>
-              <a:defRPr sz="1400" b="1">
+              <a:defRPr sz="1300" b="1">
                 <a:solidFill>
-                  <a:srgbClr val="181817"/>
+                  <a:srgbClr val="626773"/>
                 </a:solidFill>
                 <a:latin typeface="Arial"/>
               </a:defRPr>
             </a:pPr>
             <a:r>
-              <a:t>PRAGUE</a:t>
-            </a:r>
-          </a:p>
-        </p:txBody>
-      </p:sp>
-      <p:sp>
-        <p:nvSpPr>
-          <p:cNvPr id="4" name="TextBox 3"/>
-          <p:cNvSpPr txBox="1"/>
-          <p:nvPr/>
-        </p:nvSpPr>
-        <p:spPr>
-          <a:xfrm>
-            <a:off x="533400" y="495300"/>
-            <a:ext cx="1905000" cy="409956"/>
-          </a:xfrm>
-          <a:prstGeom prst="rect">
-            <a:avLst/>
-          </a:prstGeom>
-          <a:noFill/>
-        </p:spPr>
-        <p:txBody>
-          <a:bodyPr wrap="none" lIns="0" rIns="0" tIns="0" bIns="0">
-            <a:spAutoFit/>
-          </a:bodyPr>
-          <a:lstStyle/>
-          <a:p>
-            <a:pPr>
-              <a:lnSpc>
-                <a:spcPts val="2728"/>
-              </a:lnSpc>
-              <a:spcAft>
-                <a:spcPts val="0"/>
-              </a:spcAft>
-              <a:defRPr sz="2200" b="1">
-                <a:solidFill>
-                  <a:srgbClr val="181817"/>
-                </a:solidFill>
-                <a:latin typeface="Arial"/>
-              </a:defRPr>
-            </a:pPr>
-            <a:r>
-              <a:t>PULSE</a:t>
-            </a:r>
-          </a:p>
-        </p:txBody>
-      </p:sp>
-      <p:sp>
-        <p:nvSpPr>
-          <p:cNvPr id="5" name="TextBox 4"/>
-          <p:cNvSpPr txBox="1"/>
-          <p:nvPr/>
-        </p:nvSpPr>
-        <p:spPr>
-          <a:xfrm>
-            <a:off x="533400" y="812800"/>
-            <a:ext cx="2032000" cy="165862"/>
-          </a:xfrm>
-          <a:prstGeom prst="rect">
-            <a:avLst/>
-          </a:prstGeom>
-          <a:noFill/>
-        </p:spPr>
-        <p:txBody>
-          <a:bodyPr wrap="none" lIns="0" rIns="0" tIns="0" bIns="0">
-            <a:spAutoFit/>
-          </a:bodyPr>
-          <a:lstStyle/>
-          <a:p>
-            <a:pPr>
-              <a:lnSpc>
-                <a:spcPts val="806"/>
-              </a:lnSpc>
-              <a:spcAft>
-                <a:spcPts val="0"/>
-              </a:spcAft>
-              <a:defRPr sz="650" b="1">
-                <a:solidFill>
-                  <a:srgbClr val="181817"/>
-                </a:solidFill>
-                <a:latin typeface="Arial"/>
-              </a:defRPr>
-            </a:pPr>
-            <a:r>
-              <a:t>FEST / 2027</a:t>
-            </a:r>
-          </a:p>
-        </p:txBody>
-      </p:sp>
-      <p:sp>
-        <p:nvSpPr>
-          <p:cNvPr id="6" name="TextBox 5"/>
-          <p:cNvSpPr txBox="1"/>
-          <p:nvPr/>
-        </p:nvSpPr>
-        <p:spPr>
-          <a:xfrm>
-            <a:off x="5588000" y="533400"/>
-            <a:ext cx="6070600" cy="220979"/>
-          </a:xfrm>
-          <a:prstGeom prst="rect">
-            <a:avLst/>
-          </a:prstGeom>
-          <a:noFill/>
-        </p:spPr>
-        <p:txBody>
-          <a:bodyPr wrap="none" lIns="0" rIns="0" tIns="0" bIns="0">
-            <a:spAutoFit/>
-          </a:bodyPr>
-          <a:lstStyle/>
-          <a:p>
-            <a:pPr>
-              <a:lnSpc>
-                <a:spcPts val="1240"/>
-              </a:lnSpc>
-              <a:spcAft>
-                <a:spcPts val="0"/>
-              </a:spcAft>
-              <a:defRPr sz="1000" b="1">
-                <a:solidFill>
-                  <a:srgbClr val="68635B"/>
-                </a:solidFill>
-                <a:latin typeface="Arial"/>
-              </a:defRPr>
-            </a:pPr>
-            <a:r>
-              <a:t>VLASTNÍ OVĚŘENÍ / PRAGUE PULSE FEST</a:t>
-            </a:r>
-          </a:p>
-        </p:txBody>
-      </p:sp>
-      <p:sp>
-        <p:nvSpPr>
-          <p:cNvPr id="7" name="Rectangle 6"/>
+              <a:t>DOPLNIT SKUTEČNÉ VÝSLEDKY</a:t>
+            </a:r>
+          </a:p>
+        </p:txBody>
+      </p:sp>
+      <p:sp>
+        <p:nvSpPr>
+          <p:cNvPr id="4" name="Rectangle 3"/>
           <p:cNvSpPr/>
           <p:nvPr/>
         </p:nvSpPr>
         <p:spPr>
           <a:xfrm>
-            <a:off x="533400" y="1155700"/>
-            <a:ext cx="11125200" cy="25400"/>
+            <a:off x="711200" y="876300"/>
+            <a:ext cx="622300" cy="50800"/>
           </a:xfrm>
           <a:prstGeom prst="rect">
             <a:avLst/>
           </a:prstGeom>
           <a:solidFill>
-            <a:srgbClr val="181817"/>
+            <a:srgbClr val="E55024"/>
           </a:solidFill>
           <a:ln>
             <a:noFill/>
@@ -8102,14 +6418,14 @@
       </p:sp>
       <p:sp>
         <p:nvSpPr>
-          <p:cNvPr id="8" name="TextBox 7"/>
+          <p:cNvPr id="5" name="TextBox 4"/>
           <p:cNvSpPr txBox="1"/>
           <p:nvPr/>
         </p:nvSpPr>
         <p:spPr>
           <a:xfrm>
-            <a:off x="508000" y="1422400"/>
-            <a:ext cx="11176000" cy="1079500"/>
+            <a:off x="685800" y="1257300"/>
+            <a:ext cx="10795000" cy="1168400"/>
           </a:xfrm>
           <a:prstGeom prst="rect">
             <a:avLst/>
@@ -8118,46 +6434,46 @@
         </p:spPr>
         <p:txBody>
           <a:bodyPr wrap="none" lIns="0" rIns="0" tIns="0" bIns="0">
-            <a:spAutoFit/>
+            <a:noAutofit/>
           </a:bodyPr>
           <a:lstStyle/>
           <a:p>
             <a:pPr>
               <a:lnSpc>
-                <a:spcPts val="3740"/>
+                <a:spcPts val="4032"/>
               </a:lnSpc>
               <a:spcAft>
                 <a:spcPts val="0"/>
               </a:spcAft>
-              <a:defRPr sz="3400" b="1">
+              <a:defRPr sz="3600" b="1">
                 <a:solidFill>
-                  <a:srgbClr val="181817"/>
+                  <a:srgbClr val="191B20"/>
                 </a:solidFill>
                 <a:latin typeface="Arial"/>
               </a:defRPr>
             </a:pPr>
             <a:r>
-              <a:t>Příklady nejsou cizí review.</a:t>
-            </a:r>
-          </a:p>
-        </p:txBody>
-      </p:sp>
-      <p:sp>
-        <p:nvSpPr>
-          <p:cNvPr id="9" name="Rectangle 8"/>
+              <a:t>Tři až pět hlavních nálezů</a:t>
+            </a:r>
+          </a:p>
+        </p:txBody>
+      </p:sp>
+      <p:sp>
+        <p:nvSpPr>
+          <p:cNvPr id="6" name="Rectangle 5"/>
           <p:cNvSpPr/>
           <p:nvPr/>
         </p:nvSpPr>
         <p:spPr>
           <a:xfrm>
-            <a:off x="533400" y="2768600"/>
-            <a:ext cx="3556000" cy="2603500"/>
+            <a:off x="723900" y="2273300"/>
+            <a:ext cx="101600" cy="101600"/>
           </a:xfrm>
           <a:prstGeom prst="rect">
             <a:avLst/>
           </a:prstGeom>
           <a:solidFill>
-            <a:srgbClr val="181817"/>
+            <a:srgbClr val="E55024"/>
           </a:solidFill>
           <a:ln>
             <a:noFill/>
@@ -8187,20 +6503,62 @@
       </p:sp>
       <p:sp>
         <p:nvSpPr>
-          <p:cNvPr id="10" name="Rectangle 9"/>
+          <p:cNvPr id="7" name="TextBox 6"/>
+          <p:cNvSpPr txBox="1"/>
+          <p:nvPr/>
+        </p:nvSpPr>
+        <p:spPr>
+          <a:xfrm>
+            <a:off x="1066800" y="2146300"/>
+            <a:ext cx="10160000" cy="419100"/>
+          </a:xfrm>
+          <a:prstGeom prst="rect">
+            <a:avLst/>
+          </a:prstGeom>
+          <a:noFill/>
+        </p:spPr>
+        <p:txBody>
+          <a:bodyPr wrap="none" lIns="0" rIns="0" tIns="0" bIns="0">
+            <a:noAutofit/>
+          </a:bodyPr>
+          <a:lstStyle/>
+          <a:p>
+            <a:pPr>
+              <a:lnSpc>
+                <a:spcPts val="3360"/>
+              </a:lnSpc>
+              <a:spcAft>
+                <a:spcPts val="0"/>
+              </a:spcAft>
+              <a:defRPr sz="2800" b="0">
+                <a:solidFill>
+                  <a:srgbClr val="191B20"/>
+                </a:solidFill>
+                <a:latin typeface="Arial"/>
+              </a:defRPr>
+            </a:pPr>
+            <a:r>
+              <a:t>R01: problém, závažnost, důkaz a doporučení — doplnit.</a:t>
+            </a:r>
+          </a:p>
+        </p:txBody>
+      </p:sp>
+      <p:sp>
+        <p:nvSpPr>
+          <p:cNvPr id="8" name="Rectangle 7"/>
           <p:cNvSpPr/>
           <p:nvPr/>
         </p:nvSpPr>
         <p:spPr>
           <a:xfrm>
-            <a:off x="533400" y="2768600"/>
-            <a:ext cx="3556000" cy="76200"/>
+            <a:off x="723900" y="2971800"/>
+            <a:ext cx="101600" cy="101600"/>
           </a:xfrm>
           <a:prstGeom prst="rect">
             <a:avLst/>
           </a:prstGeom>
           <a:solidFill>
-            <a:srgbClr val="F45E2B"/>
+            <a:srgbClr val="E55024"/>
           </a:solidFill>
           <a:ln>
             <a:noFill/>
@@ -8230,14 +6588,14 @@
       </p:sp>
       <p:sp>
         <p:nvSpPr>
-          <p:cNvPr id="11" name="TextBox 10"/>
+          <p:cNvPr id="9" name="TextBox 8"/>
           <p:cNvSpPr txBox="1"/>
           <p:nvPr/>
         </p:nvSpPr>
         <p:spPr>
           <a:xfrm>
-            <a:off x="749300" y="3035300"/>
-            <a:ext cx="3124200" cy="685800"/>
+            <a:off x="1066800" y="2844800"/>
+            <a:ext cx="10160000" cy="419100"/>
           </a:xfrm>
           <a:prstGeom prst="rect">
             <a:avLst/>
@@ -8246,142 +6604,46 @@
         </p:spPr>
         <p:txBody>
           <a:bodyPr wrap="none" lIns="0" rIns="0" tIns="0" bIns="0">
-            <a:spAutoFit/>
+            <a:noAutofit/>
           </a:bodyPr>
           <a:lstStyle/>
           <a:p>
             <a:pPr>
               <a:lnSpc>
-                <a:spcPts val="2200"/>
+                <a:spcPts val="3360"/>
               </a:lnSpc>
               <a:spcAft>
                 <a:spcPts val="0"/>
               </a:spcAft>
-              <a:defRPr sz="2000" b="1">
+              <a:defRPr sz="2800" b="0">
                 <a:solidFill>
-                  <a:srgbClr val="F4F0E7"/>
+                  <a:srgbClr val="191B20"/>
                 </a:solidFill>
                 <a:latin typeface="Arial"/>
               </a:defRPr>
             </a:pPr>
             <a:r>
-              <a:t>Datové minimum</a:t>
-            </a:r>
-          </a:p>
-        </p:txBody>
-      </p:sp>
-      <p:sp>
-        <p:nvSpPr>
-          <p:cNvPr id="12" name="TextBox 11"/>
-          <p:cNvSpPr txBox="1"/>
-          <p:nvPr/>
-        </p:nvSpPr>
-        <p:spPr>
-          <a:xfrm>
-            <a:off x="749300" y="3733800"/>
-            <a:ext cx="3124200" cy="1511300"/>
-          </a:xfrm>
-          <a:prstGeom prst="rect">
-            <a:avLst/>
-          </a:prstGeom>
-          <a:noFill/>
-        </p:spPr>
-        <p:txBody>
-          <a:bodyPr wrap="none" lIns="0" rIns="0" tIns="0" bIns="0">
-            <a:spAutoFit/>
-          </a:bodyPr>
-          <a:lstStyle/>
-          <a:p>
-            <a:pPr>
-              <a:lnSpc>
-                <a:spcPts val="1689"/>
-              </a:lnSpc>
-              <a:spcAft>
-                <a:spcPts val="0"/>
-              </a:spcAft>
-              <a:defRPr sz="1420" b="0">
-                <a:solidFill>
-                  <a:srgbClr val="F4F0E7"/>
-                </a:solidFill>
-                <a:latin typeface="Arial"/>
-              </a:defRPr>
-            </a:pPr>
-            <a:r>
-              <a:t>Builder kontroluje 3 dny, 3 scény,</a:t>
-            </a:r>
-          </a:p>
-          <a:p>
-            <a:pPr>
-              <a:lnSpc>
-                <a:spcPts val="1689"/>
-              </a:lnSpc>
-              <a:spcAft>
-                <a:spcPts val="0"/>
-              </a:spcAft>
-              <a:defRPr sz="1420" b="0">
-                <a:solidFill>
-                  <a:srgbClr val="F4F0E7"/>
-                </a:solidFill>
-                <a:latin typeface="Arial"/>
-              </a:defRPr>
-            </a:pPr>
-            <a:r>
-              <a:t>60 interpretů a 60 akcí.</a:t>
-            </a:r>
-          </a:p>
-          <a:p>
-            <a:pPr>
-              <a:lnSpc>
-                <a:spcPts val="1689"/>
-              </a:lnSpc>
-              <a:spcAft>
-                <a:spcPts val="0"/>
-              </a:spcAft>
-              <a:defRPr sz="1420" b="0">
-                <a:solidFill>
-                  <a:srgbClr val="F4F0E7"/>
-                </a:solidFill>
-                <a:latin typeface="Arial"/>
-              </a:defRPr>
-            </a:pPr>
-          </a:p>
-          <a:p>
-            <a:pPr>
-              <a:lnSpc>
-                <a:spcPts val="1689"/>
-              </a:lnSpc>
-              <a:spcAft>
-                <a:spcPts val="0"/>
-              </a:spcAft>
-              <a:defRPr sz="1420" b="0">
-                <a:solidFill>
-                  <a:srgbClr val="F4F0E7"/>
-                </a:solidFill>
-                <a:latin typeface="Arial"/>
-              </a:defRPr>
-            </a:pPr>
-            <a:r>
-              <a:t>Důkaz rozsahu, nikoli kvality UX.</a:t>
-            </a:r>
-          </a:p>
-        </p:txBody>
-      </p:sp>
-      <p:sp>
-        <p:nvSpPr>
-          <p:cNvPr id="13" name="Rectangle 12"/>
+              <a:t>R02: problém, závažnost, důkaz a doporučení — doplnit.</a:t>
+            </a:r>
+          </a:p>
+        </p:txBody>
+      </p:sp>
+      <p:sp>
+        <p:nvSpPr>
+          <p:cNvPr id="10" name="Rectangle 9"/>
           <p:cNvSpPr/>
           <p:nvPr/>
         </p:nvSpPr>
         <p:spPr>
           <a:xfrm>
-            <a:off x="4318000" y="2768600"/>
-            <a:ext cx="3556000" cy="2603500"/>
+            <a:off x="723900" y="3670300"/>
+            <a:ext cx="101600" cy="101600"/>
           </a:xfrm>
           <a:prstGeom prst="rect">
             <a:avLst/>
           </a:prstGeom>
           <a:solidFill>
-            <a:srgbClr val="E7E0D5"/>
+            <a:srgbClr val="E55024"/>
           </a:solidFill>
           <a:ln>
             <a:noFill/>
@@ -8411,20 +6673,62 @@
       </p:sp>
       <p:sp>
         <p:nvSpPr>
-          <p:cNvPr id="14" name="Rectangle 13"/>
+          <p:cNvPr id="11" name="TextBox 10"/>
+          <p:cNvSpPr txBox="1"/>
+          <p:nvPr/>
+        </p:nvSpPr>
+        <p:spPr>
+          <a:xfrm>
+            <a:off x="1066800" y="3543300"/>
+            <a:ext cx="10160000" cy="419100"/>
+          </a:xfrm>
+          <a:prstGeom prst="rect">
+            <a:avLst/>
+          </a:prstGeom>
+          <a:noFill/>
+        </p:spPr>
+        <p:txBody>
+          <a:bodyPr wrap="none" lIns="0" rIns="0" tIns="0" bIns="0">
+            <a:noAutofit/>
+          </a:bodyPr>
+          <a:lstStyle/>
+          <a:p>
+            <a:pPr>
+              <a:lnSpc>
+                <a:spcPts val="3360"/>
+              </a:lnSpc>
+              <a:spcAft>
+                <a:spcPts val="0"/>
+              </a:spcAft>
+              <a:defRPr sz="2800" b="0">
+                <a:solidFill>
+                  <a:srgbClr val="191B20"/>
+                </a:solidFill>
+                <a:latin typeface="Arial"/>
+              </a:defRPr>
+            </a:pPr>
+            <a:r>
+              <a:t>R03: problém, závažnost, důkaz a doporučení — doplnit.</a:t>
+            </a:r>
+          </a:p>
+        </p:txBody>
+      </p:sp>
+      <p:sp>
+        <p:nvSpPr>
+          <p:cNvPr id="12" name="Rectangle 11"/>
           <p:cNvSpPr/>
           <p:nvPr/>
         </p:nvSpPr>
         <p:spPr>
           <a:xfrm>
-            <a:off x="4318000" y="2768600"/>
-            <a:ext cx="3556000" cy="76200"/>
+            <a:off x="723900" y="4368800"/>
+            <a:ext cx="101600" cy="101600"/>
           </a:xfrm>
           <a:prstGeom prst="rect">
             <a:avLst/>
           </a:prstGeom>
           <a:solidFill>
-            <a:srgbClr val="F45E2B"/>
+            <a:srgbClr val="E55024"/>
           </a:solidFill>
           <a:ln>
             <a:noFill/>
@@ -8454,14 +6758,14 @@
       </p:sp>
       <p:sp>
         <p:nvSpPr>
-          <p:cNvPr id="15" name="TextBox 14"/>
+          <p:cNvPr id="13" name="TextBox 12"/>
           <p:cNvSpPr txBox="1"/>
           <p:nvPr/>
         </p:nvSpPr>
         <p:spPr>
           <a:xfrm>
-            <a:off x="4533900" y="3035300"/>
-            <a:ext cx="3124200" cy="685800"/>
+            <a:off x="1066800" y="4241800"/>
+            <a:ext cx="10160000" cy="419100"/>
           </a:xfrm>
           <a:prstGeom prst="rect">
             <a:avLst/>
@@ -8470,142 +6774,46 @@
         </p:spPr>
         <p:txBody>
           <a:bodyPr wrap="none" lIns="0" rIns="0" tIns="0" bIns="0">
-            <a:spAutoFit/>
+            <a:noAutofit/>
           </a:bodyPr>
           <a:lstStyle/>
           <a:p>
             <a:pPr>
               <a:lnSpc>
-                <a:spcPts val="2200"/>
+                <a:spcPts val="3360"/>
               </a:lnSpc>
               <a:spcAft>
                 <a:spcPts val="0"/>
               </a:spcAft>
-              <a:defRPr sz="2000" b="1">
+              <a:defRPr sz="2800" b="0">
                 <a:solidFill>
-                  <a:srgbClr val="181817"/>
+                  <a:srgbClr val="191B20"/>
                 </a:solidFill>
                 <a:latin typeface="Arial"/>
               </a:defRPr>
             </a:pPr>
             <a:r>
-              <a:t>Místní úložiště</a:t>
-            </a:r>
-          </a:p>
-        </p:txBody>
-      </p:sp>
-      <p:sp>
-        <p:nvSpPr>
-          <p:cNvPr id="16" name="TextBox 15"/>
-          <p:cNvSpPr txBox="1"/>
-          <p:nvPr/>
-        </p:nvSpPr>
-        <p:spPr>
-          <a:xfrm>
-            <a:off x="4533900" y="3733800"/>
-            <a:ext cx="3124200" cy="1511300"/>
-          </a:xfrm>
-          <a:prstGeom prst="rect">
-            <a:avLst/>
-          </a:prstGeom>
-          <a:noFill/>
-        </p:spPr>
-        <p:txBody>
-          <a:bodyPr wrap="none" lIns="0" rIns="0" tIns="0" bIns="0">
-            <a:spAutoFit/>
-          </a:bodyPr>
-          <a:lstStyle/>
-          <a:p>
-            <a:pPr>
-              <a:lnSpc>
-                <a:spcPts val="1689"/>
-              </a:lnSpc>
-              <a:spcAft>
-                <a:spcPts val="0"/>
-              </a:spcAft>
-              <a:defRPr sz="1420" b="0">
-                <a:solidFill>
-                  <a:srgbClr val="181817"/>
-                </a:solidFill>
-                <a:latin typeface="Arial"/>
-              </a:defRPr>
-            </a:pPr>
-            <a:r>
-              <a:t>Stav patří jednomu prohlížeči;</a:t>
-            </a:r>
-          </a:p>
-          <a:p>
-            <a:pPr>
-              <a:lnSpc>
-                <a:spcPts val="1689"/>
-              </a:lnSpc>
-              <a:spcAft>
-                <a:spcPts val="0"/>
-              </a:spcAft>
-              <a:defRPr sz="1420" b="0">
-                <a:solidFill>
-                  <a:srgbClr val="181817"/>
-                </a:solidFill>
-                <a:latin typeface="Arial"/>
-              </a:defRPr>
-            </a:pPr>
-            <a:r>
-              <a:t>není sdílený JSON na serveru.</a:t>
-            </a:r>
-          </a:p>
-          <a:p>
-            <a:pPr>
-              <a:lnSpc>
-                <a:spcPts val="1689"/>
-              </a:lnSpc>
-              <a:spcAft>
-                <a:spcPts val="0"/>
-              </a:spcAft>
-              <a:defRPr sz="1420" b="0">
-                <a:solidFill>
-                  <a:srgbClr val="181817"/>
-                </a:solidFill>
-                <a:latin typeface="Arial"/>
-              </a:defRPr>
-            </a:pPr>
-          </a:p>
-          <a:p>
-            <a:pPr>
-              <a:lnSpc>
-                <a:spcPts val="1689"/>
-              </a:lnSpc>
-              <a:spcAft>
-                <a:spcPts val="0"/>
-              </a:spcAft>
-              <a:defRPr sz="1420" b="0">
-                <a:solidFill>
-                  <a:srgbClr val="181817"/>
-                </a:solidFill>
-                <a:latin typeface="Arial"/>
-              </a:defRPr>
-            </a:pPr>
-            <a:r>
-              <a:t>Hranice klientského zadání.</a:t>
-            </a:r>
-          </a:p>
-        </p:txBody>
-      </p:sp>
-      <p:sp>
-        <p:nvSpPr>
-          <p:cNvPr id="17" name="Rectangle 16"/>
+              <a:t>R04–R05: přidat pouze ověřené a podstatné nálezy.</a:t>
+            </a:r>
+          </a:p>
+        </p:txBody>
+      </p:sp>
+      <p:sp>
+        <p:nvSpPr>
+          <p:cNvPr id="14" name="Rectangle 13"/>
           <p:cNvSpPr/>
           <p:nvPr/>
         </p:nvSpPr>
         <p:spPr>
           <a:xfrm>
-            <a:off x="8102600" y="2768600"/>
-            <a:ext cx="3556000" cy="2603500"/>
+            <a:off x="711200" y="6248400"/>
+            <a:ext cx="10769600" cy="12700"/>
           </a:xfrm>
           <a:prstGeom prst="rect">
             <a:avLst/>
           </a:prstGeom>
           <a:solidFill>
-            <a:srgbClr val="E7E0D5"/>
+            <a:srgbClr val="DFE2E7"/>
           </a:solidFill>
           <a:ln>
             <a:noFill/>
@@ -8635,57 +6843,14 @@
       </p:sp>
       <p:sp>
         <p:nvSpPr>
-          <p:cNvPr id="18" name="Rectangle 17"/>
-          <p:cNvSpPr/>
-          <p:nvPr/>
-        </p:nvSpPr>
-        <p:spPr>
-          <a:xfrm>
-            <a:off x="8102600" y="2768600"/>
-            <a:ext cx="3556000" cy="76200"/>
-          </a:xfrm>
-          <a:prstGeom prst="rect">
-            <a:avLst/>
-          </a:prstGeom>
-          <a:solidFill>
-            <a:srgbClr val="F45E2B"/>
-          </a:solidFill>
-          <a:ln>
-            <a:noFill/>
-          </a:ln>
-        </p:spPr>
-        <p:style>
-          <a:lnRef idx="1">
-            <a:schemeClr val="accent1"/>
-          </a:lnRef>
-          <a:fillRef idx="3">
-            <a:schemeClr val="accent1"/>
-          </a:fillRef>
-          <a:effectRef idx="2">
-            <a:schemeClr val="accent1"/>
-          </a:effectRef>
-          <a:fontRef idx="minor">
-            <a:schemeClr val="lt1"/>
-          </a:fontRef>
-        </p:style>
-        <p:txBody>
-          <a:bodyPr rtlCol="0" anchor="ctr"/>
-          <a:lstStyle/>
-          <a:p>
-            <a:pPr algn="ctr"/>
-          </a:p>
-        </p:txBody>
-      </p:sp>
-      <p:sp>
-        <p:nvSpPr>
-          <p:cNvPr id="19" name="TextBox 18"/>
+          <p:cNvPr id="15" name="TextBox 14"/>
           <p:cNvSpPr txBox="1"/>
           <p:nvPr/>
         </p:nvSpPr>
         <p:spPr>
           <a:xfrm>
-            <a:off x="8318500" y="3035300"/>
-            <a:ext cx="3124200" cy="685800"/>
+            <a:off x="711200" y="6438900"/>
+            <a:ext cx="9652000" cy="203200"/>
           </a:xfrm>
           <a:prstGeom prst="rect">
             <a:avLst/>
@@ -8694,40 +6859,40 @@
         </p:spPr>
         <p:txBody>
           <a:bodyPr wrap="none" lIns="0" rIns="0" tIns="0" bIns="0">
-            <a:spAutoFit/>
+            <a:noAutofit/>
           </a:bodyPr>
           <a:lstStyle/>
           <a:p>
             <a:pPr>
               <a:lnSpc>
-                <a:spcPts val="2200"/>
+                <a:spcPts val="1297"/>
               </a:lnSpc>
               <a:spcAft>
                 <a:spcPts val="0"/>
               </a:spcAft>
-              <a:defRPr sz="2000" b="1">
+              <a:defRPr sz="1100" b="0">
                 <a:solidFill>
-                  <a:srgbClr val="181817"/>
+                  <a:srgbClr val="626773"/>
                 </a:solidFill>
                 <a:latin typeface="Arial"/>
               </a:defRPr>
             </a:pPr>
             <a:r>
-              <a:t>Chybějící podklady</a:t>
-            </a:r>
-          </a:p>
-        </p:txBody>
-      </p:sp>
-      <p:sp>
-        <p:nvSpPr>
-          <p:cNvPr id="20" name="TextBox 19"/>
+              <a:t>ŠABLONA · doplnit skutečný cizí projekt</a:t>
+            </a:r>
+          </a:p>
+        </p:txBody>
+      </p:sp>
+      <p:sp>
+        <p:nvSpPr>
+          <p:cNvPr id="16" name="TextBox 15"/>
           <p:cNvSpPr txBox="1"/>
           <p:nvPr/>
         </p:nvSpPr>
         <p:spPr>
           <a:xfrm>
-            <a:off x="8318500" y="3733800"/>
-            <a:ext cx="3124200" cy="1511300"/>
+            <a:off x="10807700" y="6413500"/>
+            <a:ext cx="673100" cy="215900"/>
           </a:xfrm>
           <a:prstGeom prst="rect">
             <a:avLst/>
@@ -8736,183 +6901,26 @@
         </p:spPr>
         <p:txBody>
           <a:bodyPr wrap="none" lIns="0" rIns="0" tIns="0" bIns="0">
-            <a:spAutoFit/>
+            <a:noAutofit/>
           </a:bodyPr>
           <a:lstStyle/>
           <a:p>
             <a:pPr>
               <a:lnSpc>
-                <a:spcPts val="1689"/>
+                <a:spcPts val="1416"/>
               </a:lnSpc>
               <a:spcAft>
                 <a:spcPts val="0"/>
               </a:spcAft>
-              <a:defRPr sz="1420" b="0">
+              <a:defRPr sz="1200" b="0">
                 <a:solidFill>
-                  <a:srgbClr val="181817"/>
+                  <a:srgbClr val="626773"/>
                 </a:solidFill>
                 <a:latin typeface="Arial"/>
               </a:defRPr>
             </a:pPr>
             <a:r>
-              <a:t>Cizí web a přijaté review nebyly</a:t>
-            </a:r>
-          </a:p>
-          <a:p>
-            <a:pPr>
-              <a:lnSpc>
-                <a:spcPts val="1689"/>
-              </a:lnSpc>
-              <a:spcAft>
-                <a:spcPts val="0"/>
-              </a:spcAft>
-              <a:defRPr sz="1420" b="0">
-                <a:solidFill>
-                  <a:srgbClr val="181817"/>
-                </a:solidFill>
-                <a:latin typeface="Arial"/>
-              </a:defRPr>
-            </a:pPr>
-            <a:r>
-              <a:t>dodány.</a:t>
-            </a:r>
-          </a:p>
-          <a:p>
-            <a:pPr>
-              <a:lnSpc>
-                <a:spcPts val="1689"/>
-              </a:lnSpc>
-              <a:spcAft>
-                <a:spcPts val="0"/>
-              </a:spcAft>
-              <a:defRPr sz="1420" b="0">
-                <a:solidFill>
-                  <a:srgbClr val="181817"/>
-                </a:solidFill>
-                <a:latin typeface="Arial"/>
-              </a:defRPr>
-            </a:pPr>
-          </a:p>
-          <a:p>
-            <a:pPr>
-              <a:lnSpc>
-                <a:spcPts val="1689"/>
-              </a:lnSpc>
-              <a:spcAft>
-                <a:spcPts val="0"/>
-              </a:spcAft>
-              <a:defRPr sz="1420" b="0">
-                <a:solidFill>
-                  <a:srgbClr val="181817"/>
-                </a:solidFill>
-                <a:latin typeface="Arial"/>
-              </a:defRPr>
-            </a:pPr>
-            <a:r>
-              <a:t>Nelze tvrdit nálezy ani jejich</a:t>
-            </a:r>
-          </a:p>
-          <a:p>
-            <a:pPr>
-              <a:lnSpc>
-                <a:spcPts val="1689"/>
-              </a:lnSpc>
-              <a:spcAft>
-                <a:spcPts val="0"/>
-              </a:spcAft>
-              <a:defRPr sz="1420" b="0">
-                <a:solidFill>
-                  <a:srgbClr val="181817"/>
-                </a:solidFill>
-                <a:latin typeface="Arial"/>
-              </a:defRPr>
-            </a:pPr>
-            <a:r>
-              <a:t>zapracování.</a:t>
-            </a:r>
-          </a:p>
-        </p:txBody>
-      </p:sp>
-      <p:sp>
-        <p:nvSpPr>
-          <p:cNvPr id="21" name="TextBox 20"/>
-          <p:cNvSpPr txBox="1"/>
-          <p:nvPr/>
-        </p:nvSpPr>
-        <p:spPr>
-          <a:xfrm>
-            <a:off x="533400" y="6413500"/>
-            <a:ext cx="10033000" cy="181610"/>
-          </a:xfrm>
-          <a:prstGeom prst="rect">
-            <a:avLst/>
-          </a:prstGeom>
-          <a:noFill/>
-        </p:spPr>
-        <p:txBody>
-          <a:bodyPr wrap="none" lIns="0" rIns="0" tIns="0" bIns="0">
-            <a:spAutoFit/>
-          </a:bodyPr>
-          <a:lstStyle/>
-          <a:p>
-            <a:pPr>
-              <a:lnSpc>
-                <a:spcPts val="930"/>
-              </a:lnSpc>
-              <a:spcAft>
-                <a:spcPts val="0"/>
-              </a:spcAft>
-              <a:defRPr sz="750" b="0">
-                <a:solidFill>
-                  <a:srgbClr val="68635B"/>
-                </a:solidFill>
-                <a:latin typeface="Arial"/>
-              </a:defRPr>
-            </a:pPr>
-            <a:r>
-              <a:t>METODICKÁ ŠABLONA — DOPLNIT CIZÍ PROJEKT</a:t>
-            </a:r>
-          </a:p>
-        </p:txBody>
-      </p:sp>
-      <p:sp>
-        <p:nvSpPr>
-          <p:cNvPr id="22" name="TextBox 21"/>
-          <p:cNvSpPr txBox="1"/>
-          <p:nvPr/>
-        </p:nvSpPr>
-        <p:spPr>
-          <a:xfrm>
-            <a:off x="10947400" y="6350000"/>
-            <a:ext cx="825500" cy="220979"/>
-          </a:xfrm>
-          <a:prstGeom prst="rect">
-            <a:avLst/>
-          </a:prstGeom>
-          <a:noFill/>
-        </p:spPr>
-        <p:txBody>
-          <a:bodyPr wrap="none" lIns="0" rIns="0" tIns="0" bIns="0">
-            <a:spAutoFit/>
-          </a:bodyPr>
-          <a:lstStyle/>
-          <a:p>
-            <a:pPr>
-              <a:lnSpc>
-                <a:spcPts val="1240"/>
-              </a:lnSpc>
-              <a:spcAft>
-                <a:spcPts val="0"/>
-              </a:spcAft>
-              <a:defRPr sz="1000" b="1">
-                <a:solidFill>
-                  <a:srgbClr val="68635B"/>
-                </a:solidFill>
-                <a:latin typeface="Arial"/>
-              </a:defRPr>
-            </a:pPr>
-            <a:r>
-              <a:t>06 / 05</a:t>
+              <a:t>5 / 6</a:t>
             </a:r>
           </a:p>
         </p:txBody>
@@ -8950,7 +6958,7 @@
             <a:avLst/>
           </a:prstGeom>
           <a:solidFill>
-            <a:srgbClr val="F4F0E7"/>
+            <a:srgbClr val="FFFFFF"/>
           </a:solidFill>
           <a:ln>
             <a:noFill/>
@@ -8986,8 +6994,8 @@
         </p:nvSpPr>
         <p:spPr>
           <a:xfrm>
-            <a:off x="533400" y="304800"/>
-            <a:ext cx="1905000" cy="283972"/>
+            <a:off x="711200" y="457200"/>
+            <a:ext cx="10769600" cy="228600"/>
           </a:xfrm>
           <a:prstGeom prst="rect">
             <a:avLst/>
@@ -8996,172 +7004,46 @@
         </p:spPr>
         <p:txBody>
           <a:bodyPr wrap="none" lIns="0" rIns="0" tIns="0" bIns="0">
-            <a:spAutoFit/>
+            <a:noAutofit/>
           </a:bodyPr>
           <a:lstStyle/>
           <a:p>
             <a:pPr>
               <a:lnSpc>
-                <a:spcPts val="1736"/>
+                <a:spcPts val="1534"/>
               </a:lnSpc>
               <a:spcAft>
                 <a:spcPts val="0"/>
               </a:spcAft>
-              <a:defRPr sz="1400" b="1">
+              <a:defRPr sz="1300" b="1">
                 <a:solidFill>
-                  <a:srgbClr val="181817"/>
+                  <a:srgbClr val="626773"/>
                 </a:solidFill>
                 <a:latin typeface="Arial"/>
               </a:defRPr>
             </a:pPr>
             <a:r>
-              <a:t>PRAGUE</a:t>
-            </a:r>
-          </a:p>
-        </p:txBody>
-      </p:sp>
-      <p:sp>
-        <p:nvSpPr>
-          <p:cNvPr id="4" name="TextBox 3"/>
-          <p:cNvSpPr txBox="1"/>
-          <p:nvPr/>
-        </p:nvSpPr>
-        <p:spPr>
-          <a:xfrm>
-            <a:off x="533400" y="495300"/>
-            <a:ext cx="1905000" cy="409956"/>
-          </a:xfrm>
-          <a:prstGeom prst="rect">
-            <a:avLst/>
-          </a:prstGeom>
-          <a:noFill/>
-        </p:spPr>
-        <p:txBody>
-          <a:bodyPr wrap="none" lIns="0" rIns="0" tIns="0" bIns="0">
-            <a:spAutoFit/>
-          </a:bodyPr>
-          <a:lstStyle/>
-          <a:p>
-            <a:pPr>
-              <a:lnSpc>
-                <a:spcPts val="2728"/>
-              </a:lnSpc>
-              <a:spcAft>
-                <a:spcPts val="0"/>
-              </a:spcAft>
-              <a:defRPr sz="2200" b="1">
-                <a:solidFill>
-                  <a:srgbClr val="181817"/>
-                </a:solidFill>
-                <a:latin typeface="Arial"/>
-              </a:defRPr>
-            </a:pPr>
-            <a:r>
-              <a:t>PULSE</a:t>
-            </a:r>
-          </a:p>
-        </p:txBody>
-      </p:sp>
-      <p:sp>
-        <p:nvSpPr>
-          <p:cNvPr id="5" name="TextBox 4"/>
-          <p:cNvSpPr txBox="1"/>
-          <p:nvPr/>
-        </p:nvSpPr>
-        <p:spPr>
-          <a:xfrm>
-            <a:off x="533400" y="812800"/>
-            <a:ext cx="2032000" cy="165862"/>
-          </a:xfrm>
-          <a:prstGeom prst="rect">
-            <a:avLst/>
-          </a:prstGeom>
-          <a:noFill/>
-        </p:spPr>
-        <p:txBody>
-          <a:bodyPr wrap="none" lIns="0" rIns="0" tIns="0" bIns="0">
-            <a:spAutoFit/>
-          </a:bodyPr>
-          <a:lstStyle/>
-          <a:p>
-            <a:pPr>
-              <a:lnSpc>
-                <a:spcPts val="806"/>
-              </a:lnSpc>
-              <a:spcAft>
-                <a:spcPts val="0"/>
-              </a:spcAft>
-              <a:defRPr sz="650" b="1">
-                <a:solidFill>
-                  <a:srgbClr val="181817"/>
-                </a:solidFill>
-                <a:latin typeface="Arial"/>
-              </a:defRPr>
-            </a:pPr>
-            <a:r>
-              <a:t>FEST / 2027</a:t>
-            </a:r>
-          </a:p>
-        </p:txBody>
-      </p:sp>
-      <p:sp>
-        <p:nvSpPr>
-          <p:cNvPr id="6" name="TextBox 5"/>
-          <p:cNvSpPr txBox="1"/>
-          <p:nvPr/>
-        </p:nvSpPr>
-        <p:spPr>
-          <a:xfrm>
-            <a:off x="5588000" y="533400"/>
-            <a:ext cx="6070600" cy="220979"/>
-          </a:xfrm>
-          <a:prstGeom prst="rect">
-            <a:avLst/>
-          </a:prstGeom>
-          <a:noFill/>
-        </p:spPr>
-        <p:txBody>
-          <a:bodyPr wrap="none" lIns="0" rIns="0" tIns="0" bIns="0">
-            <a:spAutoFit/>
-          </a:bodyPr>
-          <a:lstStyle/>
-          <a:p>
-            <a:pPr>
-              <a:lnSpc>
-                <a:spcPts val="1240"/>
-              </a:lnSpc>
-              <a:spcAft>
-                <a:spcPts val="0"/>
-              </a:spcAft>
-              <a:defRPr sz="1000" b="1">
-                <a:solidFill>
-                  <a:srgbClr val="68635B"/>
-                </a:solidFill>
-                <a:latin typeface="Arial"/>
-              </a:defRPr>
-            </a:pPr>
-            <a:r>
-              <a:t>VÝSLEDKY, OVĚŘENÍ A AI</a:t>
-            </a:r>
-          </a:p>
-        </p:txBody>
-      </p:sp>
-      <p:sp>
-        <p:nvSpPr>
-          <p:cNvPr id="7" name="Rectangle 6"/>
+              <a:t>DOPLNIT PODLE PROVEDENÉ PRÁCE</a:t>
+            </a:r>
+          </a:p>
+        </p:txBody>
+      </p:sp>
+      <p:sp>
+        <p:nvSpPr>
+          <p:cNvPr id="4" name="Rectangle 3"/>
           <p:cNvSpPr/>
           <p:nvPr/>
         </p:nvSpPr>
         <p:spPr>
           <a:xfrm>
-            <a:off x="533400" y="1155700"/>
-            <a:ext cx="11125200" cy="25400"/>
+            <a:off x="711200" y="876300"/>
+            <a:ext cx="622300" cy="50800"/>
           </a:xfrm>
           <a:prstGeom prst="rect">
             <a:avLst/>
           </a:prstGeom>
           <a:solidFill>
-            <a:srgbClr val="181817"/>
+            <a:srgbClr val="E55024"/>
           </a:solidFill>
           <a:ln>
             <a:noFill/>
@@ -9191,14 +7073,14 @@
       </p:sp>
       <p:sp>
         <p:nvSpPr>
-          <p:cNvPr id="8" name="TextBox 7"/>
+          <p:cNvPr id="5" name="TextBox 4"/>
           <p:cNvSpPr txBox="1"/>
           <p:nvPr/>
         </p:nvSpPr>
         <p:spPr>
           <a:xfrm>
-            <a:off x="508000" y="1422400"/>
-            <a:ext cx="11176000" cy="1079500"/>
+            <a:off x="685800" y="1257300"/>
+            <a:ext cx="10795000" cy="1168400"/>
           </a:xfrm>
           <a:prstGeom prst="rect">
             <a:avLst/>
@@ -9207,46 +7089,46 @@
         </p:spPr>
         <p:txBody>
           <a:bodyPr wrap="none" lIns="0" rIns="0" tIns="0" bIns="0">
-            <a:spAutoFit/>
+            <a:noAutofit/>
           </a:bodyPr>
           <a:lstStyle/>
           <a:p>
             <a:pPr>
               <a:lnSpc>
-                <a:spcPts val="3740"/>
+                <a:spcPts val="4032"/>
               </a:lnSpc>
               <a:spcAft>
                 <a:spcPts val="0"/>
               </a:spcAft>
-              <a:defRPr sz="3400" b="1">
+              <a:defRPr sz="3600" b="1">
                 <a:solidFill>
-                  <a:srgbClr val="181817"/>
+                  <a:srgbClr val="191B20"/>
                 </a:solidFill>
                 <a:latin typeface="Arial"/>
               </a:defRPr>
             </a:pPr>
             <a:r>
-              <a:t>Před odevzdáním doplnit.</a:t>
-            </a:r>
-          </a:p>
-        </p:txBody>
-      </p:sp>
-      <p:sp>
-        <p:nvSpPr>
-          <p:cNvPr id="9" name="Rectangle 8"/>
+              <a:t>AI a vlastní ověření nálezů</a:t>
+            </a:r>
+          </a:p>
+        </p:txBody>
+      </p:sp>
+      <p:sp>
+        <p:nvSpPr>
+          <p:cNvPr id="6" name="Rectangle 5"/>
           <p:cNvSpPr/>
           <p:nvPr/>
         </p:nvSpPr>
         <p:spPr>
           <a:xfrm>
-            <a:off x="533400" y="2768600"/>
-            <a:ext cx="5448300" cy="2603500"/>
+            <a:off x="723900" y="2273300"/>
+            <a:ext cx="101600" cy="101600"/>
           </a:xfrm>
           <a:prstGeom prst="rect">
             <a:avLst/>
           </a:prstGeom>
           <a:solidFill>
-            <a:srgbClr val="181817"/>
+            <a:srgbClr val="E55024"/>
           </a:solidFill>
           <a:ln>
             <a:noFill/>
@@ -9276,20 +7158,62 @@
       </p:sp>
       <p:sp>
         <p:nvSpPr>
-          <p:cNvPr id="10" name="Rectangle 9"/>
+          <p:cNvPr id="7" name="TextBox 6"/>
+          <p:cNvSpPr txBox="1"/>
+          <p:nvPr/>
+        </p:nvSpPr>
+        <p:spPr>
+          <a:xfrm>
+            <a:off x="1066800" y="2146300"/>
+            <a:ext cx="10160000" cy="419100"/>
+          </a:xfrm>
+          <a:prstGeom prst="rect">
+            <a:avLst/>
+          </a:prstGeom>
+          <a:noFill/>
+        </p:spPr>
+        <p:txBody>
+          <a:bodyPr wrap="none" lIns="0" rIns="0" tIns="0" bIns="0">
+            <a:noAutofit/>
+          </a:bodyPr>
+          <a:lstStyle/>
+          <a:p>
+            <a:pPr>
+              <a:lnSpc>
+                <a:spcPts val="3360"/>
+              </a:lnSpc>
+              <a:spcAft>
+                <a:spcPts val="0"/>
+              </a:spcAft>
+              <a:defRPr sz="2800" b="0">
+                <a:solidFill>
+                  <a:srgbClr val="191B20"/>
+                </a:solidFill>
+                <a:latin typeface="Arial"/>
+              </a:defRPr>
+            </a:pPr>
+            <a:r>
+              <a:t>AI nyní: návrh metodiky a struktury formuláře.</a:t>
+            </a:r>
+          </a:p>
+        </p:txBody>
+      </p:sp>
+      <p:sp>
+        <p:nvSpPr>
+          <p:cNvPr id="8" name="Rectangle 7"/>
           <p:cNvSpPr/>
           <p:nvPr/>
         </p:nvSpPr>
         <p:spPr>
           <a:xfrm>
-            <a:off x="533400" y="2768600"/>
-            <a:ext cx="5448300" cy="76200"/>
+            <a:off x="723900" y="2971800"/>
+            <a:ext cx="101600" cy="101600"/>
           </a:xfrm>
           <a:prstGeom prst="rect">
             <a:avLst/>
           </a:prstGeom>
           <a:solidFill>
-            <a:srgbClr val="F45E2B"/>
+            <a:srgbClr val="E55024"/>
           </a:solidFill>
           <a:ln>
             <a:noFill/>
@@ -9319,14 +7243,14 @@
       </p:sp>
       <p:sp>
         <p:nvSpPr>
-          <p:cNvPr id="11" name="TextBox 10"/>
+          <p:cNvPr id="9" name="TextBox 8"/>
           <p:cNvSpPr txBox="1"/>
           <p:nvPr/>
         </p:nvSpPr>
         <p:spPr>
           <a:xfrm>
-            <a:off x="749300" y="3035300"/>
-            <a:ext cx="5016500" cy="685800"/>
+            <a:off x="1066800" y="2844800"/>
+            <a:ext cx="10160000" cy="419100"/>
           </a:xfrm>
           <a:prstGeom prst="rect">
             <a:avLst/>
@@ -9335,142 +7259,46 @@
         </p:spPr>
         <p:txBody>
           <a:bodyPr wrap="none" lIns="0" rIns="0" tIns="0" bIns="0">
-            <a:spAutoFit/>
+            <a:noAutofit/>
           </a:bodyPr>
           <a:lstStyle/>
           <a:p>
             <a:pPr>
               <a:lnSpc>
-                <a:spcPts val="2200"/>
+                <a:spcPts val="3360"/>
               </a:lnSpc>
               <a:spcAft>
                 <a:spcPts val="0"/>
               </a:spcAft>
-              <a:defRPr sz="2000" b="1">
+              <a:defRPr sz="2800" b="0">
                 <a:solidFill>
-                  <a:srgbClr val="F4F0E7"/>
+                  <a:srgbClr val="191B20"/>
                 </a:solidFill>
                 <a:latin typeface="Arial"/>
               </a:defRPr>
             </a:pPr>
             <a:r>
-              <a:t>Povinné podklady</a:t>
-            </a:r>
-          </a:p>
-        </p:txBody>
-      </p:sp>
-      <p:sp>
-        <p:nvSpPr>
-          <p:cNvPr id="12" name="TextBox 11"/>
-          <p:cNvSpPr txBox="1"/>
-          <p:nvPr/>
-        </p:nvSpPr>
-        <p:spPr>
-          <a:xfrm>
-            <a:off x="749300" y="3733800"/>
-            <a:ext cx="5016500" cy="1511300"/>
-          </a:xfrm>
-          <a:prstGeom prst="rect">
-            <a:avLst/>
-          </a:prstGeom>
-          <a:noFill/>
-        </p:spPr>
-        <p:txBody>
-          <a:bodyPr wrap="none" lIns="0" rIns="0" tIns="0" bIns="0">
-            <a:spAutoFit/>
-          </a:bodyPr>
-          <a:lstStyle/>
-          <a:p>
-            <a:pPr>
-              <a:lnSpc>
-                <a:spcPts val="1689"/>
-              </a:lnSpc>
-              <a:spcAft>
-                <a:spcPts val="0"/>
-              </a:spcAft>
-              <a:defRPr sz="1420" b="0">
-                <a:solidFill>
-                  <a:srgbClr val="F4F0E7"/>
-                </a:solidFill>
-                <a:latin typeface="Arial"/>
-              </a:defRPr>
-            </a:pPr>
-            <a:r>
-              <a:t>Hodnocený web + specifikace. Dva průchody. 3–5</a:t>
-            </a:r>
-          </a:p>
-          <a:p>
-            <a:pPr>
-              <a:lnSpc>
-                <a:spcPts val="1689"/>
-              </a:lnSpc>
-              <a:spcAft>
-                <a:spcPts val="0"/>
-              </a:spcAft>
-              <a:defRPr sz="1420" b="0">
-                <a:solidFill>
-                  <a:srgbClr val="F4F0E7"/>
-                </a:solidFill>
-                <a:latin typeface="Arial"/>
-              </a:defRPr>
-            </a:pPr>
-            <a:r>
-              <a:t>skutečných nálezů.</a:t>
-            </a:r>
-          </a:p>
-          <a:p>
-            <a:pPr>
-              <a:lnSpc>
-                <a:spcPts val="1689"/>
-              </a:lnSpc>
-              <a:spcAft>
-                <a:spcPts val="0"/>
-              </a:spcAft>
-              <a:defRPr sz="1420" b="0">
-                <a:solidFill>
-                  <a:srgbClr val="F4F0E7"/>
-                </a:solidFill>
-                <a:latin typeface="Arial"/>
-              </a:defRPr>
-            </a:pPr>
-          </a:p>
-          <a:p>
-            <a:pPr>
-              <a:lnSpc>
-                <a:spcPts val="1689"/>
-              </a:lnSpc>
-              <a:spcAft>
-                <a:spcPts val="0"/>
-              </a:spcAft>
-              <a:defRPr sz="1420" b="0">
-                <a:solidFill>
-                  <a:srgbClr val="F4F0E7"/>
-                </a:solidFill>
-                <a:latin typeface="Arial"/>
-              </a:defRPr>
-            </a:pPr>
-            <a:r>
-              <a:t>Důkazy, závažnost a doporučení.</a:t>
-            </a:r>
-          </a:p>
-        </p:txBody>
-      </p:sp>
-      <p:sp>
-        <p:nvSpPr>
-          <p:cNvPr id="13" name="Rectangle 12"/>
+              <a:t>Každý budoucí nález zopakovat na hodnoceném webu.</a:t>
+            </a:r>
+          </a:p>
+        </p:txBody>
+      </p:sp>
+      <p:sp>
+        <p:nvSpPr>
+          <p:cNvPr id="10" name="Rectangle 9"/>
           <p:cNvSpPr/>
           <p:nvPr/>
         </p:nvSpPr>
         <p:spPr>
           <a:xfrm>
-            <a:off x="6210300" y="2768600"/>
-            <a:ext cx="5448300" cy="2603500"/>
+            <a:off x="723900" y="3670300"/>
+            <a:ext cx="101600" cy="101600"/>
           </a:xfrm>
           <a:prstGeom prst="rect">
             <a:avLst/>
           </a:prstGeom>
           <a:solidFill>
-            <a:srgbClr val="E7E0D5"/>
+            <a:srgbClr val="E55024"/>
           </a:solidFill>
           <a:ln>
             <a:noFill/>
@@ -9500,20 +7328,62 @@
       </p:sp>
       <p:sp>
         <p:nvSpPr>
-          <p:cNvPr id="14" name="Rectangle 13"/>
+          <p:cNvPr id="11" name="TextBox 10"/>
+          <p:cNvSpPr txBox="1"/>
+          <p:nvPr/>
+        </p:nvSpPr>
+        <p:spPr>
+          <a:xfrm>
+            <a:off x="1066800" y="3543300"/>
+            <a:ext cx="10160000" cy="419100"/>
+          </a:xfrm>
+          <a:prstGeom prst="rect">
+            <a:avLst/>
+          </a:prstGeom>
+          <a:noFill/>
+        </p:spPr>
+        <p:txBody>
+          <a:bodyPr wrap="none" lIns="0" rIns="0" tIns="0" bIns="0">
+            <a:noAutofit/>
+          </a:bodyPr>
+          <a:lstStyle/>
+          <a:p>
+            <a:pPr>
+              <a:lnSpc>
+                <a:spcPts val="3360"/>
+              </a:lnSpc>
+              <a:spcAft>
+                <a:spcPts val="0"/>
+              </a:spcAft>
+              <a:defRPr sz="2800" b="0">
+                <a:solidFill>
+                  <a:srgbClr val="191B20"/>
+                </a:solidFill>
+                <a:latin typeface="Arial"/>
+              </a:defRPr>
+            </a:pPr>
+            <a:r>
+              <a:t>Zapsat přijatý, upravený i odmítnutý návrh AI a důvod.</a:t>
+            </a:r>
+          </a:p>
+        </p:txBody>
+      </p:sp>
+      <p:sp>
+        <p:nvSpPr>
+          <p:cNvPr id="12" name="Rectangle 11"/>
           <p:cNvSpPr/>
           <p:nvPr/>
         </p:nvSpPr>
         <p:spPr>
           <a:xfrm>
-            <a:off x="6210300" y="2768600"/>
-            <a:ext cx="5448300" cy="76200"/>
+            <a:off x="723900" y="4368800"/>
+            <a:ext cx="101600" cy="101600"/>
           </a:xfrm>
           <a:prstGeom prst="rect">
             <a:avLst/>
           </a:prstGeom>
           <a:solidFill>
-            <a:srgbClr val="F45E2B"/>
+            <a:srgbClr val="E55024"/>
           </a:solidFill>
           <a:ln>
             <a:noFill/>
@@ -9543,14 +7413,14 @@
       </p:sp>
       <p:sp>
         <p:nvSpPr>
-          <p:cNvPr id="15" name="TextBox 14"/>
+          <p:cNvPr id="13" name="TextBox 12"/>
           <p:cNvSpPr txBox="1"/>
           <p:nvPr/>
         </p:nvSpPr>
         <p:spPr>
           <a:xfrm>
-            <a:off x="6426200" y="3035300"/>
-            <a:ext cx="5016500" cy="685800"/>
+            <a:off x="1066800" y="4241800"/>
+            <a:ext cx="10160000" cy="419100"/>
           </a:xfrm>
           <a:prstGeom prst="rect">
             <a:avLst/>
@@ -9559,40 +7429,83 @@
         </p:spPr>
         <p:txBody>
           <a:bodyPr wrap="none" lIns="0" rIns="0" tIns="0" bIns="0">
-            <a:spAutoFit/>
+            <a:noAutofit/>
           </a:bodyPr>
           <a:lstStyle/>
           <a:p>
             <a:pPr>
               <a:lnSpc>
-                <a:spcPts val="2200"/>
+                <a:spcPts val="3360"/>
               </a:lnSpc>
               <a:spcAft>
                 <a:spcPts val="0"/>
               </a:spcAft>
-              <a:defRPr sz="2000" b="1">
+              <a:defRPr sz="2800" b="0">
                 <a:solidFill>
-                  <a:srgbClr val="181817"/>
+                  <a:srgbClr val="191B20"/>
                 </a:solidFill>
                 <a:latin typeface="Arial"/>
               </a:defRPr>
             </a:pPr>
             <a:r>
-              <a:t>AI a odpovědnost</a:t>
-            </a:r>
-          </a:p>
-        </p:txBody>
-      </p:sp>
-      <p:sp>
-        <p:nvSpPr>
-          <p:cNvPr id="16" name="TextBox 15"/>
+              <a:t>Závěr po doplnění: doporučit priority oprav cizímu týmu.</a:t>
+            </a:r>
+          </a:p>
+        </p:txBody>
+      </p:sp>
+      <p:sp>
+        <p:nvSpPr>
+          <p:cNvPr id="14" name="Rectangle 13"/>
+          <p:cNvSpPr/>
+          <p:nvPr/>
+        </p:nvSpPr>
+        <p:spPr>
+          <a:xfrm>
+            <a:off x="711200" y="6248400"/>
+            <a:ext cx="10769600" cy="12700"/>
+          </a:xfrm>
+          <a:prstGeom prst="rect">
+            <a:avLst/>
+          </a:prstGeom>
+          <a:solidFill>
+            <a:srgbClr val="DFE2E7"/>
+          </a:solidFill>
+          <a:ln>
+            <a:noFill/>
+          </a:ln>
+        </p:spPr>
+        <p:style>
+          <a:lnRef idx="1">
+            <a:schemeClr val="accent1"/>
+          </a:lnRef>
+          <a:fillRef idx="3">
+            <a:schemeClr val="accent1"/>
+          </a:fillRef>
+          <a:effectRef idx="2">
+            <a:schemeClr val="accent1"/>
+          </a:effectRef>
+          <a:fontRef idx="minor">
+            <a:schemeClr val="lt1"/>
+          </a:fontRef>
+        </p:style>
+        <p:txBody>
+          <a:bodyPr rtlCol="0" anchor="ctr"/>
+          <a:lstStyle/>
+          <a:p>
+            <a:pPr algn="ctr"/>
+          </a:p>
+        </p:txBody>
+      </p:sp>
+      <p:sp>
+        <p:nvSpPr>
+          <p:cNvPr id="15" name="TextBox 14"/>
           <p:cNvSpPr txBox="1"/>
           <p:nvPr/>
         </p:nvSpPr>
         <p:spPr>
           <a:xfrm>
-            <a:off x="6426200" y="3733800"/>
-            <a:ext cx="5016500" cy="1511300"/>
+            <a:off x="711200" y="6438900"/>
+            <a:ext cx="9652000" cy="203200"/>
           </a:xfrm>
           <a:prstGeom prst="rect">
             <a:avLst/>
@@ -9601,187 +7514,68 @@
         </p:spPr>
         <p:txBody>
           <a:bodyPr wrap="none" lIns="0" rIns="0" tIns="0" bIns="0">
-            <a:spAutoFit/>
+            <a:noAutofit/>
           </a:bodyPr>
           <a:lstStyle/>
           <a:p>
             <a:pPr>
               <a:lnSpc>
-                <a:spcPts val="1689"/>
+                <a:spcPts val="1297"/>
               </a:lnSpc>
               <a:spcAft>
                 <a:spcPts val="0"/>
               </a:spcAft>
-              <a:defRPr sz="1420" b="0">
+              <a:defRPr sz="1100" b="0">
                 <a:solidFill>
-                  <a:srgbClr val="181817"/>
+                  <a:srgbClr val="626773"/>
                 </a:solidFill>
                 <a:latin typeface="Arial"/>
               </a:defRPr>
             </a:pPr>
             <a:r>
-              <a:t>AI pomohla připravit metodiku a strukturu zápisu.</a:t>
-            </a:r>
-          </a:p>
+              <a:t>ŠABLONA · doplnit skutečný cizí projekt</a:t>
+            </a:r>
+          </a:p>
+        </p:txBody>
+      </p:sp>
+      <p:sp>
+        <p:nvSpPr>
+          <p:cNvPr id="16" name="TextBox 15"/>
+          <p:cNvSpPr txBox="1"/>
+          <p:nvPr/>
+        </p:nvSpPr>
+        <p:spPr>
+          <a:xfrm>
+            <a:off x="10807700" y="6413500"/>
+            <a:ext cx="673100" cy="215900"/>
+          </a:xfrm>
+          <a:prstGeom prst="rect">
+            <a:avLst/>
+          </a:prstGeom>
+          <a:noFill/>
+        </p:spPr>
+        <p:txBody>
+          <a:bodyPr wrap="none" lIns="0" rIns="0" tIns="0" bIns="0">
+            <a:noAutofit/>
+          </a:bodyPr>
+          <a:lstStyle/>
           <a:p>
             <a:pPr>
               <a:lnSpc>
-                <a:spcPts val="1689"/>
+                <a:spcPts val="1416"/>
               </a:lnSpc>
               <a:spcAft>
                 <a:spcPts val="0"/>
               </a:spcAft>
-              <a:defRPr sz="1420" b="0">
+              <a:defRPr sz="1200" b="0">
                 <a:solidFill>
-                  <a:srgbClr val="181817"/>
+                  <a:srgbClr val="626773"/>
                 </a:solidFill>
                 <a:latin typeface="Arial"/>
               </a:defRPr>
             </a:pPr>
-          </a:p>
-          <a:p>
-            <a:pPr>
-              <a:lnSpc>
-                <a:spcPts val="1689"/>
-              </a:lnSpc>
-              <a:spcAft>
-                <a:spcPts val="0"/>
-              </a:spcAft>
-              <a:defRPr sz="1420" b="0">
-                <a:solidFill>
-                  <a:srgbClr val="181817"/>
-                </a:solidFill>
-                <a:latin typeface="Arial"/>
-              </a:defRPr>
-            </a:pPr>
-            <a:r>
-              <a:t>Každý nález hodnotitel osobně ověří a obhájí.</a:t>
-            </a:r>
-          </a:p>
-        </p:txBody>
-      </p:sp>
-      <p:sp>
-        <p:nvSpPr>
-          <p:cNvPr id="17" name="TextBox 16"/>
-          <p:cNvSpPr txBox="1"/>
-          <p:nvPr/>
-        </p:nvSpPr>
-        <p:spPr>
-          <a:xfrm>
-            <a:off x="533400" y="5676900"/>
-            <a:ext cx="11125200" cy="546100"/>
-          </a:xfrm>
-          <a:prstGeom prst="rect">
-            <a:avLst/>
-          </a:prstGeom>
-          <a:noFill/>
-        </p:spPr>
-        <p:txBody>
-          <a:bodyPr wrap="none" lIns="0" rIns="0" tIns="0" bIns="0">
-            <a:spAutoFit/>
-          </a:bodyPr>
-          <a:lstStyle/>
-          <a:p>
-            <a:pPr>
-              <a:lnSpc>
-                <a:spcPts val="1583"/>
-              </a:lnSpc>
-              <a:spcAft>
-                <a:spcPts val="0"/>
-              </a:spcAft>
-              <a:defRPr sz="1320" b="0">
-                <a:solidFill>
-                  <a:srgbClr val="68635B"/>
-                </a:solidFill>
-                <a:latin typeface="Arial"/>
-              </a:defRPr>
-            </a:pPr>
-            <a:r>
-              <a:t>review.md i tyto snímky musí odrážet stejné skutečné výsledky.</a:t>
-            </a:r>
-          </a:p>
-        </p:txBody>
-      </p:sp>
-      <p:sp>
-        <p:nvSpPr>
-          <p:cNvPr id="18" name="TextBox 17"/>
-          <p:cNvSpPr txBox="1"/>
-          <p:nvPr/>
-        </p:nvSpPr>
-        <p:spPr>
-          <a:xfrm>
-            <a:off x="533400" y="6413500"/>
-            <a:ext cx="10033000" cy="181610"/>
-          </a:xfrm>
-          <a:prstGeom prst="rect">
-            <a:avLst/>
-          </a:prstGeom>
-          <a:noFill/>
-        </p:spPr>
-        <p:txBody>
-          <a:bodyPr wrap="none" lIns="0" rIns="0" tIns="0" bIns="0">
-            <a:spAutoFit/>
-          </a:bodyPr>
-          <a:lstStyle/>
-          <a:p>
-            <a:pPr>
-              <a:lnSpc>
-                <a:spcPts val="930"/>
-              </a:lnSpc>
-              <a:spcAft>
-                <a:spcPts val="0"/>
-              </a:spcAft>
-              <a:defRPr sz="750" b="0">
-                <a:solidFill>
-                  <a:srgbClr val="68635B"/>
-                </a:solidFill>
-                <a:latin typeface="Arial"/>
-              </a:defRPr>
-            </a:pPr>
-            <a:r>
-              <a:t>METODICKÁ ŠABLONA — DOPLNIT CIZÍ PROJEKT</a:t>
-            </a:r>
-          </a:p>
-        </p:txBody>
-      </p:sp>
-      <p:sp>
-        <p:nvSpPr>
-          <p:cNvPr id="19" name="TextBox 18"/>
-          <p:cNvSpPr txBox="1"/>
-          <p:nvPr/>
-        </p:nvSpPr>
-        <p:spPr>
-          <a:xfrm>
-            <a:off x="10947400" y="6350000"/>
-            <a:ext cx="825500" cy="220979"/>
-          </a:xfrm>
-          <a:prstGeom prst="rect">
-            <a:avLst/>
-          </a:prstGeom>
-          <a:noFill/>
-        </p:spPr>
-        <p:txBody>
-          <a:bodyPr wrap="none" lIns="0" rIns="0" tIns="0" bIns="0">
-            <a:spAutoFit/>
-          </a:bodyPr>
-          <a:lstStyle/>
-          <a:p>
-            <a:pPr>
-              <a:lnSpc>
-                <a:spcPts val="1240"/>
-              </a:lnSpc>
-              <a:spcAft>
-                <a:spcPts val="0"/>
-              </a:spcAft>
-              <a:defRPr sz="1000" b="1">
-                <a:solidFill>
-                  <a:srgbClr val="68635B"/>
-                </a:solidFill>
-                <a:latin typeface="Arial"/>
-              </a:defRPr>
-            </a:pPr>
-            <a:r>
-              <a:t>06 / 06</a:t>
+            <a:r>
+              <a:t>6 / 6</a:t>
             </a:r>
           </a:p>
         </p:txBody>

--- a/odevzdani/cviceni-06-cross-review/prezentace.pptx
+++ b/odevzdani/cviceni-06-cross-review/prezentace.pptx
@@ -3878,7 +3878,7 @@
             <a:avLst/>
           </a:prstGeom>
           <a:solidFill>
-            <a:srgbClr val="FFFFFF"/>
+            <a:srgbClr val="101217"/>
           </a:solidFill>
           <a:ln>
             <a:noFill/>
@@ -3914,14 +3914,14 @@
         </p:nvSpPr>
         <p:spPr>
           <a:xfrm>
-            <a:off x="711200" y="609600"/>
-            <a:ext cx="76200" cy="381000"/>
+            <a:off x="0" y="0"/>
+            <a:ext cx="152400" cy="6858000"/>
           </a:xfrm>
           <a:prstGeom prst="rect">
             <a:avLst/>
           </a:prstGeom>
           <a:solidFill>
-            <a:srgbClr val="E55024"/>
+            <a:srgbClr val="FF885D"/>
           </a:solidFill>
           <a:ln>
             <a:noFill/>
@@ -3951,56 +3951,100 @@
       </p:sp>
       <p:sp>
         <p:nvSpPr>
-          <p:cNvPr id="4" name="TextBox 3"/>
+          <p:cNvPr id="4" name="Rectangle 3"/>
+          <p:cNvSpPr/>
+          <p:nvPr/>
+        </p:nvSpPr>
+        <p:spPr>
+          <a:xfrm>
+            <a:off x="8255000" y="0"/>
+            <a:ext cx="3937000" cy="6858000"/>
+          </a:xfrm>
+          <a:prstGeom prst="rect">
+            <a:avLst/>
+          </a:prstGeom>
+          <a:solidFill>
+            <a:srgbClr val="1D222C"/>
+          </a:solidFill>
+          <a:ln>
+            <a:noFill/>
+          </a:ln>
+        </p:spPr>
+        <p:style>
+          <a:lnRef idx="1">
+            <a:schemeClr val="accent1"/>
+          </a:lnRef>
+          <a:fillRef idx="3">
+            <a:schemeClr val="accent1"/>
+          </a:fillRef>
+          <a:effectRef idx="2">
+            <a:schemeClr val="accent1"/>
+          </a:effectRef>
+          <a:fontRef idx="minor">
+            <a:schemeClr val="lt1"/>
+          </a:fontRef>
+        </p:style>
+        <p:txBody>
+          <a:bodyPr rtlCol="0" anchor="ctr"/>
+          <a:lstStyle/>
+          <a:p>
+            <a:pPr algn="ctr"/>
+          </a:p>
+        </p:txBody>
+      </p:sp>
+      <p:sp>
+        <p:nvSpPr>
+          <p:cNvPr id="5" name="Rectangle 4"/>
+          <p:cNvSpPr/>
+          <p:nvPr/>
+        </p:nvSpPr>
+        <p:spPr>
+          <a:xfrm>
+            <a:off x="8255000" y="0"/>
+            <a:ext cx="3937000" cy="101600"/>
+          </a:xfrm>
+          <a:prstGeom prst="rect">
+            <a:avLst/>
+          </a:prstGeom>
+          <a:solidFill>
+            <a:srgbClr val="FF885D"/>
+          </a:solidFill>
+          <a:ln>
+            <a:noFill/>
+          </a:ln>
+        </p:spPr>
+        <p:style>
+          <a:lnRef idx="1">
+            <a:schemeClr val="accent1"/>
+          </a:lnRef>
+          <a:fillRef idx="3">
+            <a:schemeClr val="accent1"/>
+          </a:fillRef>
+          <a:effectRef idx="2">
+            <a:schemeClr val="accent1"/>
+          </a:effectRef>
+          <a:fontRef idx="minor">
+            <a:schemeClr val="lt1"/>
+          </a:fontRef>
+        </p:style>
+        <p:txBody>
+          <a:bodyPr rtlCol="0" anchor="ctr"/>
+          <a:lstStyle/>
+          <a:p>
+            <a:pPr algn="ctr"/>
+          </a:p>
+        </p:txBody>
+      </p:sp>
+      <p:sp>
+        <p:nvSpPr>
+          <p:cNvPr id="6" name="TextBox 5"/>
           <p:cNvSpPr txBox="1"/>
           <p:nvPr/>
         </p:nvSpPr>
         <p:spPr>
           <a:xfrm>
-            <a:off x="977900" y="647700"/>
-            <a:ext cx="10502900" cy="317500"/>
-          </a:xfrm>
-          <a:prstGeom prst="rect">
-            <a:avLst/>
-          </a:prstGeom>
-          <a:noFill/>
-        </p:spPr>
-        <p:txBody>
-          <a:bodyPr wrap="none" lIns="0" rIns="0" tIns="0" bIns="0">
-            <a:noAutofit/>
-          </a:bodyPr>
-          <a:lstStyle/>
-          <a:p>
-            <a:pPr>
-              <a:lnSpc>
-                <a:spcPts val="2360"/>
-              </a:lnSpc>
-              <a:spcAft>
-                <a:spcPts val="0"/>
-              </a:spcAft>
-              <a:defRPr sz="2000" b="1">
-                <a:solidFill>
-                  <a:srgbClr val="191B20"/>
-                </a:solidFill>
-                <a:latin typeface="Arial"/>
-              </a:defRPr>
-            </a:pPr>
-            <a:r>
-              <a:t>PRAGUE PULSE FEST</a:t>
-            </a:r>
-          </a:p>
-        </p:txBody>
-      </p:sp>
-      <p:sp>
-        <p:nvSpPr>
-          <p:cNvPr id="5" name="TextBox 4"/>
-          <p:cNvSpPr txBox="1"/>
-          <p:nvPr/>
-        </p:nvSpPr>
-        <p:spPr>
-          <a:xfrm>
-            <a:off x="711200" y="1600200"/>
-            <a:ext cx="10769600" cy="241300"/>
+            <a:off x="609600" y="546100"/>
+            <a:ext cx="10972800" cy="304800"/>
           </a:xfrm>
           <a:prstGeom prst="rect">
             <a:avLst/>
@@ -4022,7 +4066,7 @@
               </a:spcAft>
               <a:defRPr sz="1400" b="1">
                 <a:solidFill>
-                  <a:srgbClr val="E55024"/>
+                  <a:srgbClr val="FF885D"/>
                 </a:solidFill>
                 <a:latin typeface="Arial"/>
               </a:defRPr>
@@ -4035,14 +4079,14 @@
       </p:sp>
       <p:sp>
         <p:nvSpPr>
-          <p:cNvPr id="6" name="TextBox 5"/>
+          <p:cNvPr id="7" name="TextBox 6"/>
           <p:cNvSpPr txBox="1"/>
           <p:nvPr/>
         </p:nvSpPr>
         <p:spPr>
           <a:xfrm>
-            <a:off x="685800" y="2146300"/>
-            <a:ext cx="10795000" cy="1816100"/>
+            <a:off x="571500" y="1193800"/>
+            <a:ext cx="10985500" cy="1879600"/>
           </a:xfrm>
           <a:prstGeom prst="rect">
             <a:avLst/>
@@ -4057,19 +4101,80 @@
           <a:p>
             <a:pPr>
               <a:lnSpc>
-                <a:spcPts val="5376"/>
+                <a:spcPts val="6467"/>
               </a:lnSpc>
               <a:spcAft>
                 <a:spcPts val="0"/>
               </a:spcAft>
-              <a:defRPr sz="4800" b="1">
+              <a:defRPr sz="6600" b="1">
                 <a:solidFill>
-                  <a:srgbClr val="191B20"/>
+                  <a:srgbClr val="F5F6FA"/>
                 </a:solidFill>
                 <a:latin typeface="Arial"/>
               </a:defRPr>
             </a:pPr>
             <a:r>
+              <a:t>PRAGUE</a:t>
+            </a:r>
+          </a:p>
+          <a:p>
+            <a:pPr>
+              <a:lnSpc>
+                <a:spcPts val="6467"/>
+              </a:lnSpc>
+              <a:spcAft>
+                <a:spcPts val="0"/>
+              </a:spcAft>
+              <a:defRPr sz="6600" b="1">
+                <a:solidFill>
+                  <a:srgbClr val="F5F6FA"/>
+                </a:solidFill>
+                <a:latin typeface="Arial"/>
+              </a:defRPr>
+            </a:pPr>
+            <a:r>
+              <a:t>PULSE FEST</a:t>
+            </a:r>
+          </a:p>
+        </p:txBody>
+      </p:sp>
+      <p:sp>
+        <p:nvSpPr>
+          <p:cNvPr id="8" name="TextBox 7"/>
+          <p:cNvSpPr txBox="1"/>
+          <p:nvPr/>
+        </p:nvSpPr>
+        <p:spPr>
+          <a:xfrm>
+            <a:off x="609600" y="3492500"/>
+            <a:ext cx="10858500" cy="1092200"/>
+          </a:xfrm>
+          <a:prstGeom prst="rect">
+            <a:avLst/>
+          </a:prstGeom>
+          <a:noFill/>
+        </p:spPr>
+        <p:txBody>
+          <a:bodyPr wrap="none" lIns="0" rIns="0" tIns="0" bIns="0">
+            <a:noAutofit/>
+          </a:bodyPr>
+          <a:lstStyle/>
+          <a:p>
+            <a:pPr>
+              <a:lnSpc>
+                <a:spcPts val="4028"/>
+              </a:lnSpc>
+              <a:spcAft>
+                <a:spcPts val="0"/>
+              </a:spcAft>
+              <a:defRPr sz="3800" b="1">
+                <a:solidFill>
+                  <a:srgbClr val="FF885D"/>
+                </a:solidFill>
+                <a:latin typeface="Arial"/>
+              </a:defRPr>
+            </a:pPr>
+            <a:r>
               <a:t>Cross-review: šablona</a:t>
             </a:r>
           </a:p>
@@ -4077,14 +4182,14 @@
       </p:sp>
       <p:sp>
         <p:nvSpPr>
-          <p:cNvPr id="7" name="TextBox 6"/>
+          <p:cNvPr id="9" name="TextBox 8"/>
           <p:cNvSpPr txBox="1"/>
           <p:nvPr/>
         </p:nvSpPr>
         <p:spPr>
           <a:xfrm>
-            <a:off x="711200" y="4191000"/>
-            <a:ext cx="10769600" cy="1016000"/>
+            <a:off x="609600" y="4889500"/>
+            <a:ext cx="10858500" cy="825500"/>
           </a:xfrm>
           <a:prstGeom prst="rect">
             <a:avLst/>
@@ -4106,7 +4211,7 @@
               </a:spcAft>
               <a:defRPr sz="2300" b="0">
                 <a:solidFill>
-                  <a:srgbClr val="626773"/>
+                  <a:srgbClr val="B7BFCC"/>
                 </a:solidFill>
                 <a:latin typeface="Arial"/>
               </a:defRPr>
@@ -4125,7 +4230,7 @@
               </a:spcAft>
               <a:defRPr sz="2300" b="0">
                 <a:solidFill>
-                  <a:srgbClr val="626773"/>
+                  <a:srgbClr val="B7BFCC"/>
                 </a:solidFill>
                 <a:latin typeface="Arial"/>
               </a:defRPr>
@@ -4138,14 +4243,14 @@
       </p:sp>
       <p:sp>
         <p:nvSpPr>
-          <p:cNvPr id="8" name="TextBox 7"/>
+          <p:cNvPr id="10" name="TextBox 9"/>
           <p:cNvSpPr txBox="1"/>
           <p:nvPr/>
         </p:nvSpPr>
         <p:spPr>
           <a:xfrm>
-            <a:off x="711200" y="5600700"/>
-            <a:ext cx="10769600" cy="304800"/>
+            <a:off x="609600" y="5880100"/>
+            <a:ext cx="10972800" cy="330200"/>
           </a:xfrm>
           <a:prstGeom prst="rect">
             <a:avLst/>
@@ -4160,14 +4265,14 @@
           <a:p>
             <a:pPr>
               <a:lnSpc>
-                <a:spcPts val="2242"/>
+                <a:spcPts val="2124"/>
               </a:lnSpc>
               <a:spcAft>
                 <a:spcPts val="0"/>
               </a:spcAft>
-              <a:defRPr sz="1900" b="0">
+              <a:defRPr sz="1800" b="0">
                 <a:solidFill>
-                  <a:srgbClr val="191B20"/>
+                  <a:srgbClr val="F5F6FA"/>
                 </a:solidFill>
                 <a:latin typeface="Arial"/>
               </a:defRPr>
@@ -4180,20 +4285,20 @@
       </p:sp>
       <p:sp>
         <p:nvSpPr>
-          <p:cNvPr id="9" name="Rectangle 8"/>
+          <p:cNvPr id="11" name="Rectangle 10"/>
           <p:cNvSpPr/>
           <p:nvPr/>
         </p:nvSpPr>
         <p:spPr>
           <a:xfrm>
-            <a:off x="711200" y="6248400"/>
-            <a:ext cx="10769600" cy="12700"/>
+            <a:off x="609600" y="6273800"/>
+            <a:ext cx="10972800" cy="12700"/>
           </a:xfrm>
           <a:prstGeom prst="rect">
             <a:avLst/>
           </a:prstGeom>
           <a:solidFill>
-            <a:srgbClr val="DFE2E7"/>
+            <a:srgbClr val="3D4552"/>
           </a:solidFill>
           <a:ln>
             <a:noFill/>
@@ -4223,14 +4328,14 @@
       </p:sp>
       <p:sp>
         <p:nvSpPr>
-          <p:cNvPr id="10" name="TextBox 9"/>
+          <p:cNvPr id="12" name="TextBox 11"/>
           <p:cNvSpPr txBox="1"/>
           <p:nvPr/>
         </p:nvSpPr>
         <p:spPr>
           <a:xfrm>
-            <a:off x="711200" y="6438900"/>
-            <a:ext cx="9652000" cy="203200"/>
+            <a:off x="609600" y="6464300"/>
+            <a:ext cx="9906000" cy="203200"/>
           </a:xfrm>
           <a:prstGeom prst="rect">
             <a:avLst/>
@@ -4252,7 +4357,7 @@
               </a:spcAft>
               <a:defRPr sz="1100" b="0">
                 <a:solidFill>
-                  <a:srgbClr val="626773"/>
+                  <a:srgbClr val="B7BFCC"/>
                 </a:solidFill>
                 <a:latin typeface="Arial"/>
               </a:defRPr>
@@ -4265,14 +4370,14 @@
       </p:sp>
       <p:sp>
         <p:nvSpPr>
-          <p:cNvPr id="11" name="TextBox 10"/>
+          <p:cNvPr id="13" name="TextBox 12"/>
           <p:cNvSpPr txBox="1"/>
           <p:nvPr/>
         </p:nvSpPr>
         <p:spPr>
           <a:xfrm>
-            <a:off x="10807700" y="6413500"/>
-            <a:ext cx="673100" cy="215900"/>
+            <a:off x="10972800" y="6438900"/>
+            <a:ext cx="609600" cy="215900"/>
           </a:xfrm>
           <a:prstGeom prst="rect">
             <a:avLst/>
@@ -4294,7 +4399,7 @@
               </a:spcAft>
               <a:defRPr sz="1200" b="0">
                 <a:solidFill>
-                  <a:srgbClr val="626773"/>
+                  <a:srgbClr val="B7BFCC"/>
                 </a:solidFill>
                 <a:latin typeface="Arial"/>
               </a:defRPr>
@@ -4338,7 +4443,7 @@
             <a:avLst/>
           </a:prstGeom>
           <a:solidFill>
-            <a:srgbClr val="FFFFFF"/>
+            <a:srgbClr val="101217"/>
           </a:solidFill>
           <a:ln>
             <a:noFill/>
@@ -4368,14 +4473,57 @@
       </p:sp>
       <p:sp>
         <p:nvSpPr>
-          <p:cNvPr id="3" name="TextBox 2"/>
+          <p:cNvPr id="3" name="Rectangle 2"/>
+          <p:cNvSpPr/>
+          <p:nvPr/>
+        </p:nvSpPr>
+        <p:spPr>
+          <a:xfrm>
+            <a:off x="0" y="0"/>
+            <a:ext cx="101600" cy="6858000"/>
+          </a:xfrm>
+          <a:prstGeom prst="rect">
+            <a:avLst/>
+          </a:prstGeom>
+          <a:solidFill>
+            <a:srgbClr val="FF885D"/>
+          </a:solidFill>
+          <a:ln>
+            <a:noFill/>
+          </a:ln>
+        </p:spPr>
+        <p:style>
+          <a:lnRef idx="1">
+            <a:schemeClr val="accent1"/>
+          </a:lnRef>
+          <a:fillRef idx="3">
+            <a:schemeClr val="accent1"/>
+          </a:fillRef>
+          <a:effectRef idx="2">
+            <a:schemeClr val="accent1"/>
+          </a:effectRef>
+          <a:fontRef idx="minor">
+            <a:schemeClr val="lt1"/>
+          </a:fontRef>
+        </p:style>
+        <p:txBody>
+          <a:bodyPr rtlCol="0" anchor="ctr"/>
+          <a:lstStyle/>
+          <a:p>
+            <a:pPr algn="ctr"/>
+          </a:p>
+        </p:txBody>
+      </p:sp>
+      <p:sp>
+        <p:nvSpPr>
+          <p:cNvPr id="4" name="TextBox 3"/>
           <p:cNvSpPr txBox="1"/>
           <p:nvPr/>
         </p:nvSpPr>
         <p:spPr>
           <a:xfrm>
-            <a:off x="711200" y="457200"/>
-            <a:ext cx="10769600" cy="228600"/>
+            <a:off x="609600" y="444500"/>
+            <a:ext cx="10972800" cy="279400"/>
           </a:xfrm>
           <a:prstGeom prst="rect">
             <a:avLst/>
@@ -4397,7 +4545,7 @@
               </a:spcAft>
               <a:defRPr sz="1300" b="1">
                 <a:solidFill>
-                  <a:srgbClr val="626773"/>
+                  <a:srgbClr val="B7BFCC"/>
                 </a:solidFill>
                 <a:latin typeface="Arial"/>
               </a:defRPr>
@@ -4410,20 +4558,20 @@
       </p:sp>
       <p:sp>
         <p:nvSpPr>
-          <p:cNvPr id="4" name="Rectangle 3"/>
+          <p:cNvPr id="5" name="Rectangle 4"/>
           <p:cNvSpPr/>
           <p:nvPr/>
         </p:nvSpPr>
         <p:spPr>
           <a:xfrm>
-            <a:off x="711200" y="876300"/>
-            <a:ext cx="622300" cy="50800"/>
+            <a:off x="609600" y="876300"/>
+            <a:ext cx="685800" cy="50800"/>
           </a:xfrm>
           <a:prstGeom prst="rect">
             <a:avLst/>
           </a:prstGeom>
           <a:solidFill>
-            <a:srgbClr val="E55024"/>
+            <a:srgbClr val="FF885D"/>
           </a:solidFill>
           <a:ln>
             <a:noFill/>
@@ -4453,14 +4601,14 @@
       </p:sp>
       <p:sp>
         <p:nvSpPr>
-          <p:cNvPr id="5" name="TextBox 4"/>
+          <p:cNvPr id="6" name="TextBox 5"/>
           <p:cNvSpPr txBox="1"/>
           <p:nvPr/>
         </p:nvSpPr>
         <p:spPr>
           <a:xfrm>
-            <a:off x="685800" y="1257300"/>
-            <a:ext cx="10795000" cy="1168400"/>
+            <a:off x="584200" y="1206500"/>
+            <a:ext cx="10998200" cy="1130300"/>
           </a:xfrm>
           <a:prstGeom prst="rect">
             <a:avLst/>
@@ -4482,7 +4630,7 @@
               </a:spcAft>
               <a:defRPr sz="3600" b="1">
                 <a:solidFill>
-                  <a:srgbClr val="191B20"/>
+                  <a:srgbClr val="F5F6FA"/>
                 </a:solidFill>
                 <a:latin typeface="Arial"/>
               </a:defRPr>
@@ -4495,20 +4643,20 @@
       </p:sp>
       <p:sp>
         <p:nvSpPr>
-          <p:cNvPr id="6" name="Rectangle 5"/>
+          <p:cNvPr id="7" name="Rectangle 6"/>
           <p:cNvSpPr/>
           <p:nvPr/>
         </p:nvSpPr>
         <p:spPr>
           <a:xfrm>
-            <a:off x="723900" y="2273300"/>
+            <a:off x="711200" y="2336800"/>
             <a:ext cx="101600" cy="101600"/>
           </a:xfrm>
           <a:prstGeom prst="rect">
             <a:avLst/>
           </a:prstGeom>
           <a:solidFill>
-            <a:srgbClr val="E55024"/>
+            <a:srgbClr val="FF885D"/>
           </a:solidFill>
           <a:ln>
             <a:noFill/>
@@ -4538,13 +4686,13 @@
       </p:sp>
       <p:sp>
         <p:nvSpPr>
-          <p:cNvPr id="7" name="TextBox 6"/>
+          <p:cNvPr id="8" name="TextBox 7"/>
           <p:cNvSpPr txBox="1"/>
           <p:nvPr/>
         </p:nvSpPr>
         <p:spPr>
           <a:xfrm>
-            <a:off x="1066800" y="2146300"/>
+            <a:off x="1066800" y="2209800"/>
             <a:ext cx="10160000" cy="419100"/>
           </a:xfrm>
           <a:prstGeom prst="rect">
@@ -4567,7 +4715,7 @@
               </a:spcAft>
               <a:defRPr sz="2800" b="0">
                 <a:solidFill>
-                  <a:srgbClr val="191B20"/>
+                  <a:srgbClr val="F5F6FA"/>
                 </a:solidFill>
                 <a:latin typeface="Arial"/>
               </a:defRPr>
@@ -4580,20 +4728,20 @@
       </p:sp>
       <p:sp>
         <p:nvSpPr>
-          <p:cNvPr id="8" name="Rectangle 7"/>
+          <p:cNvPr id="9" name="Rectangle 8"/>
           <p:cNvSpPr/>
           <p:nvPr/>
         </p:nvSpPr>
         <p:spPr>
           <a:xfrm>
-            <a:off x="723900" y="2971800"/>
+            <a:off x="711200" y="3009900"/>
             <a:ext cx="101600" cy="101600"/>
           </a:xfrm>
           <a:prstGeom prst="rect">
             <a:avLst/>
           </a:prstGeom>
           <a:solidFill>
-            <a:srgbClr val="E55024"/>
+            <a:srgbClr val="FF885D"/>
           </a:solidFill>
           <a:ln>
             <a:noFill/>
@@ -4623,13 +4771,13 @@
       </p:sp>
       <p:sp>
         <p:nvSpPr>
-          <p:cNvPr id="9" name="TextBox 8"/>
+          <p:cNvPr id="10" name="TextBox 9"/>
           <p:cNvSpPr txBox="1"/>
           <p:nvPr/>
         </p:nvSpPr>
         <p:spPr>
           <a:xfrm>
-            <a:off x="1066800" y="2844800"/>
+            <a:off x="1066800" y="2882900"/>
             <a:ext cx="10160000" cy="419100"/>
           </a:xfrm>
           <a:prstGeom prst="rect">
@@ -4652,7 +4800,7 @@
               </a:spcAft>
               <a:defRPr sz="2800" b="0">
                 <a:solidFill>
-                  <a:srgbClr val="191B20"/>
+                  <a:srgbClr val="F5F6FA"/>
                 </a:solidFill>
                 <a:latin typeface="Arial"/>
               </a:defRPr>
@@ -4665,20 +4813,20 @@
       </p:sp>
       <p:sp>
         <p:nvSpPr>
-          <p:cNvPr id="10" name="Rectangle 9"/>
+          <p:cNvPr id="11" name="Rectangle 10"/>
           <p:cNvSpPr/>
           <p:nvPr/>
         </p:nvSpPr>
         <p:spPr>
           <a:xfrm>
-            <a:off x="723900" y="3670300"/>
+            <a:off x="711200" y="3683000"/>
             <a:ext cx="101600" cy="101600"/>
           </a:xfrm>
           <a:prstGeom prst="rect">
             <a:avLst/>
           </a:prstGeom>
           <a:solidFill>
-            <a:srgbClr val="E55024"/>
+            <a:srgbClr val="FF885D"/>
           </a:solidFill>
           <a:ln>
             <a:noFill/>
@@ -4708,13 +4856,13 @@
       </p:sp>
       <p:sp>
         <p:nvSpPr>
-          <p:cNvPr id="11" name="TextBox 10"/>
+          <p:cNvPr id="12" name="TextBox 11"/>
           <p:cNvSpPr txBox="1"/>
           <p:nvPr/>
         </p:nvSpPr>
         <p:spPr>
           <a:xfrm>
-            <a:off x="1066800" y="3543300"/>
+            <a:off x="1066800" y="3556000"/>
             <a:ext cx="10160000" cy="419100"/>
           </a:xfrm>
           <a:prstGeom prst="rect">
@@ -4737,7 +4885,7 @@
               </a:spcAft>
               <a:defRPr sz="2800" b="0">
                 <a:solidFill>
-                  <a:srgbClr val="191B20"/>
+                  <a:srgbClr val="F5F6FA"/>
                 </a:solidFill>
                 <a:latin typeface="Arial"/>
               </a:defRPr>
@@ -4750,20 +4898,20 @@
       </p:sp>
       <p:sp>
         <p:nvSpPr>
-          <p:cNvPr id="12" name="Rectangle 11"/>
+          <p:cNvPr id="13" name="Rectangle 12"/>
           <p:cNvSpPr/>
           <p:nvPr/>
         </p:nvSpPr>
         <p:spPr>
           <a:xfrm>
-            <a:off x="723900" y="4368800"/>
+            <a:off x="711200" y="4356100"/>
             <a:ext cx="101600" cy="101600"/>
           </a:xfrm>
           <a:prstGeom prst="rect">
             <a:avLst/>
           </a:prstGeom>
           <a:solidFill>
-            <a:srgbClr val="E55024"/>
+            <a:srgbClr val="FF885D"/>
           </a:solidFill>
           <a:ln>
             <a:noFill/>
@@ -4793,13 +4941,13 @@
       </p:sp>
       <p:sp>
         <p:nvSpPr>
-          <p:cNvPr id="13" name="TextBox 12"/>
+          <p:cNvPr id="14" name="TextBox 13"/>
           <p:cNvSpPr txBox="1"/>
           <p:nvPr/>
         </p:nvSpPr>
         <p:spPr>
           <a:xfrm>
-            <a:off x="1066800" y="4241800"/>
+            <a:off x="1066800" y="4229100"/>
             <a:ext cx="10160000" cy="419100"/>
           </a:xfrm>
           <a:prstGeom prst="rect">
@@ -4822,7 +4970,7 @@
               </a:spcAft>
               <a:defRPr sz="2800" b="0">
                 <a:solidFill>
-                  <a:srgbClr val="191B20"/>
+                  <a:srgbClr val="F5F6FA"/>
                 </a:solidFill>
                 <a:latin typeface="Arial"/>
               </a:defRPr>
@@ -4835,20 +4983,20 @@
       </p:sp>
       <p:sp>
         <p:nvSpPr>
-          <p:cNvPr id="14" name="Rectangle 13"/>
+          <p:cNvPr id="15" name="Rectangle 14"/>
           <p:cNvSpPr/>
           <p:nvPr/>
         </p:nvSpPr>
         <p:spPr>
           <a:xfrm>
-            <a:off x="711200" y="6248400"/>
-            <a:ext cx="10769600" cy="12700"/>
+            <a:off x="609600" y="6273800"/>
+            <a:ext cx="10972800" cy="12700"/>
           </a:xfrm>
           <a:prstGeom prst="rect">
             <a:avLst/>
           </a:prstGeom>
           <a:solidFill>
-            <a:srgbClr val="DFE2E7"/>
+            <a:srgbClr val="3D4552"/>
           </a:solidFill>
           <a:ln>
             <a:noFill/>
@@ -4878,14 +5026,14 @@
       </p:sp>
       <p:sp>
         <p:nvSpPr>
-          <p:cNvPr id="15" name="TextBox 14"/>
+          <p:cNvPr id="16" name="TextBox 15"/>
           <p:cNvSpPr txBox="1"/>
           <p:nvPr/>
         </p:nvSpPr>
         <p:spPr>
           <a:xfrm>
-            <a:off x="711200" y="6438900"/>
-            <a:ext cx="9652000" cy="203200"/>
+            <a:off x="609600" y="6464300"/>
+            <a:ext cx="9906000" cy="203200"/>
           </a:xfrm>
           <a:prstGeom prst="rect">
             <a:avLst/>
@@ -4907,7 +5055,7 @@
               </a:spcAft>
               <a:defRPr sz="1100" b="0">
                 <a:solidFill>
-                  <a:srgbClr val="626773"/>
+                  <a:srgbClr val="B7BFCC"/>
                 </a:solidFill>
                 <a:latin typeface="Arial"/>
               </a:defRPr>
@@ -4920,14 +5068,14 @@
       </p:sp>
       <p:sp>
         <p:nvSpPr>
-          <p:cNvPr id="16" name="TextBox 15"/>
+          <p:cNvPr id="17" name="TextBox 16"/>
           <p:cNvSpPr txBox="1"/>
           <p:nvPr/>
         </p:nvSpPr>
         <p:spPr>
           <a:xfrm>
-            <a:off x="10807700" y="6413500"/>
-            <a:ext cx="673100" cy="215900"/>
+            <a:off x="10972800" y="6438900"/>
+            <a:ext cx="609600" cy="215900"/>
           </a:xfrm>
           <a:prstGeom prst="rect">
             <a:avLst/>
@@ -4949,7 +5097,7 @@
               </a:spcAft>
               <a:defRPr sz="1200" b="0">
                 <a:solidFill>
-                  <a:srgbClr val="626773"/>
+                  <a:srgbClr val="B7BFCC"/>
                 </a:solidFill>
                 <a:latin typeface="Arial"/>
               </a:defRPr>
@@ -4993,7 +5141,7 @@
             <a:avLst/>
           </a:prstGeom>
           <a:solidFill>
-            <a:srgbClr val="FFFFFF"/>
+            <a:srgbClr val="101217"/>
           </a:solidFill>
           <a:ln>
             <a:noFill/>
@@ -5023,14 +5171,57 @@
       </p:sp>
       <p:sp>
         <p:nvSpPr>
-          <p:cNvPr id="3" name="TextBox 2"/>
+          <p:cNvPr id="3" name="Rectangle 2"/>
+          <p:cNvSpPr/>
+          <p:nvPr/>
+        </p:nvSpPr>
+        <p:spPr>
+          <a:xfrm>
+            <a:off x="0" y="0"/>
+            <a:ext cx="101600" cy="6858000"/>
+          </a:xfrm>
+          <a:prstGeom prst="rect">
+            <a:avLst/>
+          </a:prstGeom>
+          <a:solidFill>
+            <a:srgbClr val="FF885D"/>
+          </a:solidFill>
+          <a:ln>
+            <a:noFill/>
+          </a:ln>
+        </p:spPr>
+        <p:style>
+          <a:lnRef idx="1">
+            <a:schemeClr val="accent1"/>
+          </a:lnRef>
+          <a:fillRef idx="3">
+            <a:schemeClr val="accent1"/>
+          </a:fillRef>
+          <a:effectRef idx="2">
+            <a:schemeClr val="accent1"/>
+          </a:effectRef>
+          <a:fontRef idx="minor">
+            <a:schemeClr val="lt1"/>
+          </a:fontRef>
+        </p:style>
+        <p:txBody>
+          <a:bodyPr rtlCol="0" anchor="ctr"/>
+          <a:lstStyle/>
+          <a:p>
+            <a:pPr algn="ctr"/>
+          </a:p>
+        </p:txBody>
+      </p:sp>
+      <p:sp>
+        <p:nvSpPr>
+          <p:cNvPr id="4" name="TextBox 3"/>
           <p:cNvSpPr txBox="1"/>
           <p:nvPr/>
         </p:nvSpPr>
         <p:spPr>
           <a:xfrm>
-            <a:off x="711200" y="457200"/>
-            <a:ext cx="10769600" cy="228600"/>
+            <a:off x="609600" y="444500"/>
+            <a:ext cx="10972800" cy="279400"/>
           </a:xfrm>
           <a:prstGeom prst="rect">
             <a:avLst/>
@@ -5052,7 +5243,7 @@
               </a:spcAft>
               <a:defRPr sz="1300" b="1">
                 <a:solidFill>
-                  <a:srgbClr val="626773"/>
+                  <a:srgbClr val="B7BFCC"/>
                 </a:solidFill>
                 <a:latin typeface="Arial"/>
               </a:defRPr>
@@ -5065,20 +5256,20 @@
       </p:sp>
       <p:sp>
         <p:nvSpPr>
-          <p:cNvPr id="4" name="Rectangle 3"/>
+          <p:cNvPr id="5" name="Rectangle 4"/>
           <p:cNvSpPr/>
           <p:nvPr/>
         </p:nvSpPr>
         <p:spPr>
           <a:xfrm>
-            <a:off x="711200" y="876300"/>
-            <a:ext cx="622300" cy="50800"/>
+            <a:off x="609600" y="876300"/>
+            <a:ext cx="685800" cy="50800"/>
           </a:xfrm>
           <a:prstGeom prst="rect">
             <a:avLst/>
           </a:prstGeom>
           <a:solidFill>
-            <a:srgbClr val="E55024"/>
+            <a:srgbClr val="FF885D"/>
           </a:solidFill>
           <a:ln>
             <a:noFill/>
@@ -5108,14 +5299,14 @@
       </p:sp>
       <p:sp>
         <p:nvSpPr>
-          <p:cNvPr id="5" name="TextBox 4"/>
+          <p:cNvPr id="6" name="TextBox 5"/>
           <p:cNvSpPr txBox="1"/>
           <p:nvPr/>
         </p:nvSpPr>
         <p:spPr>
           <a:xfrm>
-            <a:off x="685800" y="1257300"/>
-            <a:ext cx="10795000" cy="1168400"/>
+            <a:off x="584200" y="1206500"/>
+            <a:ext cx="10998200" cy="1130300"/>
           </a:xfrm>
           <a:prstGeom prst="rect">
             <a:avLst/>
@@ -5137,7 +5328,7 @@
               </a:spcAft>
               <a:defRPr sz="3600" b="1">
                 <a:solidFill>
-                  <a:srgbClr val="191B20"/>
+                  <a:srgbClr val="F5F6FA"/>
                 </a:solidFill>
                 <a:latin typeface="Arial"/>
               </a:defRPr>
@@ -5150,20 +5341,20 @@
       </p:sp>
       <p:sp>
         <p:nvSpPr>
-          <p:cNvPr id="6" name="Rectangle 5"/>
+          <p:cNvPr id="7" name="Rectangle 6"/>
           <p:cNvSpPr/>
           <p:nvPr/>
         </p:nvSpPr>
         <p:spPr>
           <a:xfrm>
-            <a:off x="723900" y="2273300"/>
+            <a:off x="711200" y="2336800"/>
             <a:ext cx="101600" cy="101600"/>
           </a:xfrm>
           <a:prstGeom prst="rect">
             <a:avLst/>
           </a:prstGeom>
           <a:solidFill>
-            <a:srgbClr val="E55024"/>
+            <a:srgbClr val="FF885D"/>
           </a:solidFill>
           <a:ln>
             <a:noFill/>
@@ -5193,13 +5384,13 @@
       </p:sp>
       <p:sp>
         <p:nvSpPr>
-          <p:cNvPr id="7" name="TextBox 6"/>
+          <p:cNvPr id="8" name="TextBox 7"/>
           <p:cNvSpPr txBox="1"/>
           <p:nvPr/>
         </p:nvSpPr>
         <p:spPr>
           <a:xfrm>
-            <a:off x="1066800" y="2146300"/>
+            <a:off x="1066800" y="2209800"/>
             <a:ext cx="10160000" cy="419100"/>
           </a:xfrm>
           <a:prstGeom prst="rect">
@@ -5222,7 +5413,7 @@
               </a:spcAft>
               <a:defRPr sz="2800" b="0">
                 <a:solidFill>
-                  <a:srgbClr val="191B20"/>
+                  <a:srgbClr val="F5F6FA"/>
                 </a:solidFill>
                 <a:latin typeface="Arial"/>
               </a:defRPr>
@@ -5235,20 +5426,20 @@
       </p:sp>
       <p:sp>
         <p:nvSpPr>
-          <p:cNvPr id="8" name="Rectangle 7"/>
+          <p:cNvPr id="9" name="Rectangle 8"/>
           <p:cNvSpPr/>
           <p:nvPr/>
         </p:nvSpPr>
         <p:spPr>
           <a:xfrm>
-            <a:off x="723900" y="2971800"/>
+            <a:off x="711200" y="3009900"/>
             <a:ext cx="101600" cy="101600"/>
           </a:xfrm>
           <a:prstGeom prst="rect">
             <a:avLst/>
           </a:prstGeom>
           <a:solidFill>
-            <a:srgbClr val="E55024"/>
+            <a:srgbClr val="FF885D"/>
           </a:solidFill>
           <a:ln>
             <a:noFill/>
@@ -5278,13 +5469,13 @@
       </p:sp>
       <p:sp>
         <p:nvSpPr>
-          <p:cNvPr id="9" name="TextBox 8"/>
+          <p:cNvPr id="10" name="TextBox 9"/>
           <p:cNvSpPr txBox="1"/>
           <p:nvPr/>
         </p:nvSpPr>
         <p:spPr>
           <a:xfrm>
-            <a:off x="1066800" y="2844800"/>
+            <a:off x="1066800" y="2882900"/>
             <a:ext cx="10160000" cy="419100"/>
           </a:xfrm>
           <a:prstGeom prst="rect">
@@ -5307,7 +5498,7 @@
               </a:spcAft>
               <a:defRPr sz="2800" b="0">
                 <a:solidFill>
-                  <a:srgbClr val="191B20"/>
+                  <a:srgbClr val="F5F6FA"/>
                 </a:solidFill>
                 <a:latin typeface="Arial"/>
               </a:defRPr>
@@ -5320,20 +5511,20 @@
       </p:sp>
       <p:sp>
         <p:nvSpPr>
-          <p:cNvPr id="10" name="Rectangle 9"/>
+          <p:cNvPr id="11" name="Rectangle 10"/>
           <p:cNvSpPr/>
           <p:nvPr/>
         </p:nvSpPr>
         <p:spPr>
           <a:xfrm>
-            <a:off x="723900" y="3670300"/>
+            <a:off x="711200" y="3683000"/>
             <a:ext cx="101600" cy="101600"/>
           </a:xfrm>
           <a:prstGeom prst="rect">
             <a:avLst/>
           </a:prstGeom>
           <a:solidFill>
-            <a:srgbClr val="E55024"/>
+            <a:srgbClr val="FF885D"/>
           </a:solidFill>
           <a:ln>
             <a:noFill/>
@@ -5363,13 +5554,13 @@
       </p:sp>
       <p:sp>
         <p:nvSpPr>
-          <p:cNvPr id="11" name="TextBox 10"/>
+          <p:cNvPr id="12" name="TextBox 11"/>
           <p:cNvSpPr txBox="1"/>
           <p:nvPr/>
         </p:nvSpPr>
         <p:spPr>
           <a:xfrm>
-            <a:off x="1066800" y="3543300"/>
+            <a:off x="1066800" y="3556000"/>
             <a:ext cx="10160000" cy="419100"/>
           </a:xfrm>
           <a:prstGeom prst="rect">
@@ -5392,7 +5583,7 @@
               </a:spcAft>
               <a:defRPr sz="2800" b="0">
                 <a:solidFill>
-                  <a:srgbClr val="191B20"/>
+                  <a:srgbClr val="F5F6FA"/>
                 </a:solidFill>
                 <a:latin typeface="Arial"/>
               </a:defRPr>
@@ -5405,20 +5596,20 @@
       </p:sp>
       <p:sp>
         <p:nvSpPr>
-          <p:cNvPr id="12" name="Rectangle 11"/>
+          <p:cNvPr id="13" name="Rectangle 12"/>
           <p:cNvSpPr/>
           <p:nvPr/>
         </p:nvSpPr>
         <p:spPr>
           <a:xfrm>
-            <a:off x="723900" y="4368800"/>
+            <a:off x="711200" y="4356100"/>
             <a:ext cx="101600" cy="101600"/>
           </a:xfrm>
           <a:prstGeom prst="rect">
             <a:avLst/>
           </a:prstGeom>
           <a:solidFill>
-            <a:srgbClr val="E55024"/>
+            <a:srgbClr val="FF885D"/>
           </a:solidFill>
           <a:ln>
             <a:noFill/>
@@ -5448,13 +5639,13 @@
       </p:sp>
       <p:sp>
         <p:nvSpPr>
-          <p:cNvPr id="13" name="TextBox 12"/>
+          <p:cNvPr id="14" name="TextBox 13"/>
           <p:cNvSpPr txBox="1"/>
           <p:nvPr/>
         </p:nvSpPr>
         <p:spPr>
           <a:xfrm>
-            <a:off x="1066800" y="4241800"/>
+            <a:off x="1066800" y="4229100"/>
             <a:ext cx="10160000" cy="419100"/>
           </a:xfrm>
           <a:prstGeom prst="rect">
@@ -5477,7 +5668,7 @@
               </a:spcAft>
               <a:defRPr sz="2800" b="0">
                 <a:solidFill>
-                  <a:srgbClr val="191B20"/>
+                  <a:srgbClr val="F5F6FA"/>
                 </a:solidFill>
                 <a:latin typeface="Arial"/>
               </a:defRPr>
@@ -5490,20 +5681,20 @@
       </p:sp>
       <p:sp>
         <p:nvSpPr>
-          <p:cNvPr id="14" name="Rectangle 13"/>
+          <p:cNvPr id="15" name="Rectangle 14"/>
           <p:cNvSpPr/>
           <p:nvPr/>
         </p:nvSpPr>
         <p:spPr>
           <a:xfrm>
-            <a:off x="711200" y="6248400"/>
-            <a:ext cx="10769600" cy="12700"/>
+            <a:off x="609600" y="6273800"/>
+            <a:ext cx="10972800" cy="12700"/>
           </a:xfrm>
           <a:prstGeom prst="rect">
             <a:avLst/>
           </a:prstGeom>
           <a:solidFill>
-            <a:srgbClr val="DFE2E7"/>
+            <a:srgbClr val="3D4552"/>
           </a:solidFill>
           <a:ln>
             <a:noFill/>
@@ -5533,14 +5724,14 @@
       </p:sp>
       <p:sp>
         <p:nvSpPr>
-          <p:cNvPr id="15" name="TextBox 14"/>
+          <p:cNvPr id="16" name="TextBox 15"/>
           <p:cNvSpPr txBox="1"/>
           <p:nvPr/>
         </p:nvSpPr>
         <p:spPr>
           <a:xfrm>
-            <a:off x="711200" y="6438900"/>
-            <a:ext cx="9652000" cy="203200"/>
+            <a:off x="609600" y="6464300"/>
+            <a:ext cx="9906000" cy="203200"/>
           </a:xfrm>
           <a:prstGeom prst="rect">
             <a:avLst/>
@@ -5562,7 +5753,7 @@
               </a:spcAft>
               <a:defRPr sz="1100" b="0">
                 <a:solidFill>
-                  <a:srgbClr val="626773"/>
+                  <a:srgbClr val="B7BFCC"/>
                 </a:solidFill>
                 <a:latin typeface="Arial"/>
               </a:defRPr>
@@ -5575,14 +5766,14 @@
       </p:sp>
       <p:sp>
         <p:nvSpPr>
-          <p:cNvPr id="16" name="TextBox 15"/>
+          <p:cNvPr id="17" name="TextBox 16"/>
           <p:cNvSpPr txBox="1"/>
           <p:nvPr/>
         </p:nvSpPr>
         <p:spPr>
           <a:xfrm>
-            <a:off x="10807700" y="6413500"/>
-            <a:ext cx="673100" cy="215900"/>
+            <a:off x="10972800" y="6438900"/>
+            <a:ext cx="609600" cy="215900"/>
           </a:xfrm>
           <a:prstGeom prst="rect">
             <a:avLst/>
@@ -5604,7 +5795,7 @@
               </a:spcAft>
               <a:defRPr sz="1200" b="0">
                 <a:solidFill>
-                  <a:srgbClr val="626773"/>
+                  <a:srgbClr val="B7BFCC"/>
                 </a:solidFill>
                 <a:latin typeface="Arial"/>
               </a:defRPr>
@@ -5648,7 +5839,7 @@
             <a:avLst/>
           </a:prstGeom>
           <a:solidFill>
-            <a:srgbClr val="FFFFFF"/>
+            <a:srgbClr val="101217"/>
           </a:solidFill>
           <a:ln>
             <a:noFill/>
@@ -5678,14 +5869,57 @@
       </p:sp>
       <p:sp>
         <p:nvSpPr>
-          <p:cNvPr id="3" name="TextBox 2"/>
+          <p:cNvPr id="3" name="Rectangle 2"/>
+          <p:cNvSpPr/>
+          <p:nvPr/>
+        </p:nvSpPr>
+        <p:spPr>
+          <a:xfrm>
+            <a:off x="0" y="0"/>
+            <a:ext cx="101600" cy="6858000"/>
+          </a:xfrm>
+          <a:prstGeom prst="rect">
+            <a:avLst/>
+          </a:prstGeom>
+          <a:solidFill>
+            <a:srgbClr val="FF885D"/>
+          </a:solidFill>
+          <a:ln>
+            <a:noFill/>
+          </a:ln>
+        </p:spPr>
+        <p:style>
+          <a:lnRef idx="1">
+            <a:schemeClr val="accent1"/>
+          </a:lnRef>
+          <a:fillRef idx="3">
+            <a:schemeClr val="accent1"/>
+          </a:fillRef>
+          <a:effectRef idx="2">
+            <a:schemeClr val="accent1"/>
+          </a:effectRef>
+          <a:fontRef idx="minor">
+            <a:schemeClr val="lt1"/>
+          </a:fontRef>
+        </p:style>
+        <p:txBody>
+          <a:bodyPr rtlCol="0" anchor="ctr"/>
+          <a:lstStyle/>
+          <a:p>
+            <a:pPr algn="ctr"/>
+          </a:p>
+        </p:txBody>
+      </p:sp>
+      <p:sp>
+        <p:nvSpPr>
+          <p:cNvPr id="4" name="TextBox 3"/>
           <p:cNvSpPr txBox="1"/>
           <p:nvPr/>
         </p:nvSpPr>
         <p:spPr>
           <a:xfrm>
-            <a:off x="711200" y="457200"/>
-            <a:ext cx="10769600" cy="228600"/>
+            <a:off x="609600" y="444500"/>
+            <a:ext cx="10972800" cy="279400"/>
           </a:xfrm>
           <a:prstGeom prst="rect">
             <a:avLst/>
@@ -5707,7 +5941,7 @@
               </a:spcAft>
               <a:defRPr sz="1300" b="1">
                 <a:solidFill>
-                  <a:srgbClr val="626773"/>
+                  <a:srgbClr val="B7BFCC"/>
                 </a:solidFill>
                 <a:latin typeface="Arial"/>
               </a:defRPr>
@@ -5720,20 +5954,20 @@
       </p:sp>
       <p:sp>
         <p:nvSpPr>
-          <p:cNvPr id="4" name="Rectangle 3"/>
+          <p:cNvPr id="5" name="Rectangle 4"/>
           <p:cNvSpPr/>
           <p:nvPr/>
         </p:nvSpPr>
         <p:spPr>
           <a:xfrm>
-            <a:off x="711200" y="876300"/>
-            <a:ext cx="622300" cy="50800"/>
+            <a:off x="609600" y="876300"/>
+            <a:ext cx="685800" cy="50800"/>
           </a:xfrm>
           <a:prstGeom prst="rect">
             <a:avLst/>
           </a:prstGeom>
           <a:solidFill>
-            <a:srgbClr val="E55024"/>
+            <a:srgbClr val="FF885D"/>
           </a:solidFill>
           <a:ln>
             <a:noFill/>
@@ -5763,14 +5997,14 @@
       </p:sp>
       <p:sp>
         <p:nvSpPr>
-          <p:cNvPr id="5" name="TextBox 4"/>
+          <p:cNvPr id="6" name="TextBox 5"/>
           <p:cNvSpPr txBox="1"/>
           <p:nvPr/>
         </p:nvSpPr>
         <p:spPr>
           <a:xfrm>
-            <a:off x="685800" y="1257300"/>
-            <a:ext cx="10795000" cy="1168400"/>
+            <a:off x="584200" y="1206500"/>
+            <a:ext cx="10998200" cy="1130300"/>
           </a:xfrm>
           <a:prstGeom prst="rect">
             <a:avLst/>
@@ -5792,7 +6026,7 @@
               </a:spcAft>
               <a:defRPr sz="3600" b="1">
                 <a:solidFill>
-                  <a:srgbClr val="191B20"/>
+                  <a:srgbClr val="F5F6FA"/>
                 </a:solidFill>
                 <a:latin typeface="Arial"/>
               </a:defRPr>
@@ -5805,20 +6039,20 @@
       </p:sp>
       <p:sp>
         <p:nvSpPr>
-          <p:cNvPr id="6" name="Rectangle 5"/>
+          <p:cNvPr id="7" name="Rectangle 6"/>
           <p:cNvSpPr/>
           <p:nvPr/>
         </p:nvSpPr>
         <p:spPr>
           <a:xfrm>
-            <a:off x="723900" y="2273300"/>
+            <a:off x="711200" y="2336800"/>
             <a:ext cx="101600" cy="101600"/>
           </a:xfrm>
           <a:prstGeom prst="rect">
             <a:avLst/>
           </a:prstGeom>
           <a:solidFill>
-            <a:srgbClr val="E55024"/>
+            <a:srgbClr val="FF885D"/>
           </a:solidFill>
           <a:ln>
             <a:noFill/>
@@ -5848,13 +6082,13 @@
       </p:sp>
       <p:sp>
         <p:nvSpPr>
-          <p:cNvPr id="7" name="TextBox 6"/>
+          <p:cNvPr id="8" name="TextBox 7"/>
           <p:cNvSpPr txBox="1"/>
           <p:nvPr/>
         </p:nvSpPr>
         <p:spPr>
           <a:xfrm>
-            <a:off x="1066800" y="2146300"/>
+            <a:off x="1066800" y="2209800"/>
             <a:ext cx="10160000" cy="419100"/>
           </a:xfrm>
           <a:prstGeom prst="rect">
@@ -5877,7 +6111,7 @@
               </a:spcAft>
               <a:defRPr sz="2800" b="0">
                 <a:solidFill>
-                  <a:srgbClr val="191B20"/>
+                  <a:srgbClr val="F5F6FA"/>
                 </a:solidFill>
                 <a:latin typeface="Arial"/>
               </a:defRPr>
@@ -5890,20 +6124,20 @@
       </p:sp>
       <p:sp>
         <p:nvSpPr>
-          <p:cNvPr id="8" name="Rectangle 7"/>
+          <p:cNvPr id="9" name="Rectangle 8"/>
           <p:cNvSpPr/>
           <p:nvPr/>
         </p:nvSpPr>
         <p:spPr>
           <a:xfrm>
-            <a:off x="723900" y="2971800"/>
+            <a:off x="711200" y="3009900"/>
             <a:ext cx="101600" cy="101600"/>
           </a:xfrm>
           <a:prstGeom prst="rect">
             <a:avLst/>
           </a:prstGeom>
           <a:solidFill>
-            <a:srgbClr val="E55024"/>
+            <a:srgbClr val="FF885D"/>
           </a:solidFill>
           <a:ln>
             <a:noFill/>
@@ -5933,13 +6167,13 @@
       </p:sp>
       <p:sp>
         <p:nvSpPr>
-          <p:cNvPr id="9" name="TextBox 8"/>
+          <p:cNvPr id="10" name="TextBox 9"/>
           <p:cNvSpPr txBox="1"/>
           <p:nvPr/>
         </p:nvSpPr>
         <p:spPr>
           <a:xfrm>
-            <a:off x="1066800" y="2844800"/>
+            <a:off x="1066800" y="2882900"/>
             <a:ext cx="10160000" cy="419100"/>
           </a:xfrm>
           <a:prstGeom prst="rect">
@@ -5962,7 +6196,7 @@
               </a:spcAft>
               <a:defRPr sz="2800" b="0">
                 <a:solidFill>
-                  <a:srgbClr val="191B20"/>
+                  <a:srgbClr val="F5F6FA"/>
                 </a:solidFill>
                 <a:latin typeface="Arial"/>
               </a:defRPr>
@@ -5975,20 +6209,20 @@
       </p:sp>
       <p:sp>
         <p:nvSpPr>
-          <p:cNvPr id="10" name="Rectangle 9"/>
+          <p:cNvPr id="11" name="Rectangle 10"/>
           <p:cNvSpPr/>
           <p:nvPr/>
         </p:nvSpPr>
         <p:spPr>
           <a:xfrm>
-            <a:off x="723900" y="3670300"/>
+            <a:off x="711200" y="3683000"/>
             <a:ext cx="101600" cy="101600"/>
           </a:xfrm>
           <a:prstGeom prst="rect">
             <a:avLst/>
           </a:prstGeom>
           <a:solidFill>
-            <a:srgbClr val="E55024"/>
+            <a:srgbClr val="FF885D"/>
           </a:solidFill>
           <a:ln>
             <a:noFill/>
@@ -6018,13 +6252,13 @@
       </p:sp>
       <p:sp>
         <p:nvSpPr>
-          <p:cNvPr id="11" name="TextBox 10"/>
+          <p:cNvPr id="12" name="TextBox 11"/>
           <p:cNvSpPr txBox="1"/>
           <p:nvPr/>
         </p:nvSpPr>
         <p:spPr>
           <a:xfrm>
-            <a:off x="1066800" y="3543300"/>
+            <a:off x="1066800" y="3556000"/>
             <a:ext cx="10160000" cy="419100"/>
           </a:xfrm>
           <a:prstGeom prst="rect">
@@ -6047,7 +6281,7 @@
               </a:spcAft>
               <a:defRPr sz="2800" b="0">
                 <a:solidFill>
-                  <a:srgbClr val="191B20"/>
+                  <a:srgbClr val="F5F6FA"/>
                 </a:solidFill>
                 <a:latin typeface="Arial"/>
               </a:defRPr>
@@ -6060,20 +6294,20 @@
       </p:sp>
       <p:sp>
         <p:nvSpPr>
-          <p:cNvPr id="12" name="Rectangle 11"/>
+          <p:cNvPr id="13" name="Rectangle 12"/>
           <p:cNvSpPr/>
           <p:nvPr/>
         </p:nvSpPr>
         <p:spPr>
           <a:xfrm>
-            <a:off x="723900" y="4368800"/>
+            <a:off x="711200" y="4356100"/>
             <a:ext cx="101600" cy="101600"/>
           </a:xfrm>
           <a:prstGeom prst="rect">
             <a:avLst/>
           </a:prstGeom>
           <a:solidFill>
-            <a:srgbClr val="E55024"/>
+            <a:srgbClr val="FF885D"/>
           </a:solidFill>
           <a:ln>
             <a:noFill/>
@@ -6103,13 +6337,13 @@
       </p:sp>
       <p:sp>
         <p:nvSpPr>
-          <p:cNvPr id="13" name="TextBox 12"/>
+          <p:cNvPr id="14" name="TextBox 13"/>
           <p:cNvSpPr txBox="1"/>
           <p:nvPr/>
         </p:nvSpPr>
         <p:spPr>
           <a:xfrm>
-            <a:off x="1066800" y="4241800"/>
+            <a:off x="1066800" y="4229100"/>
             <a:ext cx="10160000" cy="419100"/>
           </a:xfrm>
           <a:prstGeom prst="rect">
@@ -6132,7 +6366,7 @@
               </a:spcAft>
               <a:defRPr sz="2800" b="0">
                 <a:solidFill>
-                  <a:srgbClr val="191B20"/>
+                  <a:srgbClr val="F5F6FA"/>
                 </a:solidFill>
                 <a:latin typeface="Arial"/>
               </a:defRPr>
@@ -6145,20 +6379,20 @@
       </p:sp>
       <p:sp>
         <p:nvSpPr>
-          <p:cNvPr id="14" name="Rectangle 13"/>
+          <p:cNvPr id="15" name="Rectangle 14"/>
           <p:cNvSpPr/>
           <p:nvPr/>
         </p:nvSpPr>
         <p:spPr>
           <a:xfrm>
-            <a:off x="711200" y="6248400"/>
-            <a:ext cx="10769600" cy="12700"/>
+            <a:off x="609600" y="6273800"/>
+            <a:ext cx="10972800" cy="12700"/>
           </a:xfrm>
           <a:prstGeom prst="rect">
             <a:avLst/>
           </a:prstGeom>
           <a:solidFill>
-            <a:srgbClr val="DFE2E7"/>
+            <a:srgbClr val="3D4552"/>
           </a:solidFill>
           <a:ln>
             <a:noFill/>
@@ -6188,14 +6422,14 @@
       </p:sp>
       <p:sp>
         <p:nvSpPr>
-          <p:cNvPr id="15" name="TextBox 14"/>
+          <p:cNvPr id="16" name="TextBox 15"/>
           <p:cNvSpPr txBox="1"/>
           <p:nvPr/>
         </p:nvSpPr>
         <p:spPr>
           <a:xfrm>
-            <a:off x="711200" y="6438900"/>
-            <a:ext cx="9652000" cy="203200"/>
+            <a:off x="609600" y="6464300"/>
+            <a:ext cx="9906000" cy="203200"/>
           </a:xfrm>
           <a:prstGeom prst="rect">
             <a:avLst/>
@@ -6217,7 +6451,7 @@
               </a:spcAft>
               <a:defRPr sz="1100" b="0">
                 <a:solidFill>
-                  <a:srgbClr val="626773"/>
+                  <a:srgbClr val="B7BFCC"/>
                 </a:solidFill>
                 <a:latin typeface="Arial"/>
               </a:defRPr>
@@ -6230,14 +6464,14 @@
       </p:sp>
       <p:sp>
         <p:nvSpPr>
-          <p:cNvPr id="16" name="TextBox 15"/>
+          <p:cNvPr id="17" name="TextBox 16"/>
           <p:cNvSpPr txBox="1"/>
           <p:nvPr/>
         </p:nvSpPr>
         <p:spPr>
           <a:xfrm>
-            <a:off x="10807700" y="6413500"/>
-            <a:ext cx="673100" cy="215900"/>
+            <a:off x="10972800" y="6438900"/>
+            <a:ext cx="609600" cy="215900"/>
           </a:xfrm>
           <a:prstGeom prst="rect">
             <a:avLst/>
@@ -6259,7 +6493,7 @@
               </a:spcAft>
               <a:defRPr sz="1200" b="0">
                 <a:solidFill>
-                  <a:srgbClr val="626773"/>
+                  <a:srgbClr val="B7BFCC"/>
                 </a:solidFill>
                 <a:latin typeface="Arial"/>
               </a:defRPr>
@@ -6303,7 +6537,7 @@
             <a:avLst/>
           </a:prstGeom>
           <a:solidFill>
-            <a:srgbClr val="FFFFFF"/>
+            <a:srgbClr val="101217"/>
           </a:solidFill>
           <a:ln>
             <a:noFill/>
@@ -6333,14 +6567,57 @@
       </p:sp>
       <p:sp>
         <p:nvSpPr>
-          <p:cNvPr id="3" name="TextBox 2"/>
+          <p:cNvPr id="3" name="Rectangle 2"/>
+          <p:cNvSpPr/>
+          <p:nvPr/>
+        </p:nvSpPr>
+        <p:spPr>
+          <a:xfrm>
+            <a:off x="0" y="0"/>
+            <a:ext cx="101600" cy="6858000"/>
+          </a:xfrm>
+          <a:prstGeom prst="rect">
+            <a:avLst/>
+          </a:prstGeom>
+          <a:solidFill>
+            <a:srgbClr val="FF885D"/>
+          </a:solidFill>
+          <a:ln>
+            <a:noFill/>
+          </a:ln>
+        </p:spPr>
+        <p:style>
+          <a:lnRef idx="1">
+            <a:schemeClr val="accent1"/>
+          </a:lnRef>
+          <a:fillRef idx="3">
+            <a:schemeClr val="accent1"/>
+          </a:fillRef>
+          <a:effectRef idx="2">
+            <a:schemeClr val="accent1"/>
+          </a:effectRef>
+          <a:fontRef idx="minor">
+            <a:schemeClr val="lt1"/>
+          </a:fontRef>
+        </p:style>
+        <p:txBody>
+          <a:bodyPr rtlCol="0" anchor="ctr"/>
+          <a:lstStyle/>
+          <a:p>
+            <a:pPr algn="ctr"/>
+          </a:p>
+        </p:txBody>
+      </p:sp>
+      <p:sp>
+        <p:nvSpPr>
+          <p:cNvPr id="4" name="TextBox 3"/>
           <p:cNvSpPr txBox="1"/>
           <p:nvPr/>
         </p:nvSpPr>
         <p:spPr>
           <a:xfrm>
-            <a:off x="711200" y="457200"/>
-            <a:ext cx="10769600" cy="228600"/>
+            <a:off x="609600" y="444500"/>
+            <a:ext cx="10972800" cy="279400"/>
           </a:xfrm>
           <a:prstGeom prst="rect">
             <a:avLst/>
@@ -6362,7 +6639,7 @@
               </a:spcAft>
               <a:defRPr sz="1300" b="1">
                 <a:solidFill>
-                  <a:srgbClr val="626773"/>
+                  <a:srgbClr val="B7BFCC"/>
                 </a:solidFill>
                 <a:latin typeface="Arial"/>
               </a:defRPr>
@@ -6375,20 +6652,20 @@
       </p:sp>
       <p:sp>
         <p:nvSpPr>
-          <p:cNvPr id="4" name="Rectangle 3"/>
+          <p:cNvPr id="5" name="Rectangle 4"/>
           <p:cNvSpPr/>
           <p:nvPr/>
         </p:nvSpPr>
         <p:spPr>
           <a:xfrm>
-            <a:off x="711200" y="876300"/>
-            <a:ext cx="622300" cy="50800"/>
+            <a:off x="609600" y="876300"/>
+            <a:ext cx="685800" cy="50800"/>
           </a:xfrm>
           <a:prstGeom prst="rect">
             <a:avLst/>
           </a:prstGeom>
           <a:solidFill>
-            <a:srgbClr val="E55024"/>
+            <a:srgbClr val="FF885D"/>
           </a:solidFill>
           <a:ln>
             <a:noFill/>
@@ -6418,14 +6695,14 @@
       </p:sp>
       <p:sp>
         <p:nvSpPr>
-          <p:cNvPr id="5" name="TextBox 4"/>
+          <p:cNvPr id="6" name="TextBox 5"/>
           <p:cNvSpPr txBox="1"/>
           <p:nvPr/>
         </p:nvSpPr>
         <p:spPr>
           <a:xfrm>
-            <a:off x="685800" y="1257300"/>
-            <a:ext cx="10795000" cy="1168400"/>
+            <a:off x="584200" y="1206500"/>
+            <a:ext cx="10998200" cy="1130300"/>
           </a:xfrm>
           <a:prstGeom prst="rect">
             <a:avLst/>
@@ -6447,7 +6724,7 @@
               </a:spcAft>
               <a:defRPr sz="3600" b="1">
                 <a:solidFill>
-                  <a:srgbClr val="191B20"/>
+                  <a:srgbClr val="F5F6FA"/>
                 </a:solidFill>
                 <a:latin typeface="Arial"/>
               </a:defRPr>
@@ -6460,20 +6737,20 @@
       </p:sp>
       <p:sp>
         <p:nvSpPr>
-          <p:cNvPr id="6" name="Rectangle 5"/>
+          <p:cNvPr id="7" name="Rectangle 6"/>
           <p:cNvSpPr/>
           <p:nvPr/>
         </p:nvSpPr>
         <p:spPr>
           <a:xfrm>
-            <a:off x="723900" y="2273300"/>
+            <a:off x="711200" y="2336800"/>
             <a:ext cx="101600" cy="101600"/>
           </a:xfrm>
           <a:prstGeom prst="rect">
             <a:avLst/>
           </a:prstGeom>
           <a:solidFill>
-            <a:srgbClr val="E55024"/>
+            <a:srgbClr val="FF885D"/>
           </a:solidFill>
           <a:ln>
             <a:noFill/>
@@ -6503,13 +6780,13 @@
       </p:sp>
       <p:sp>
         <p:nvSpPr>
-          <p:cNvPr id="7" name="TextBox 6"/>
+          <p:cNvPr id="8" name="TextBox 7"/>
           <p:cNvSpPr txBox="1"/>
           <p:nvPr/>
         </p:nvSpPr>
         <p:spPr>
           <a:xfrm>
-            <a:off x="1066800" y="2146300"/>
+            <a:off x="1066800" y="2209800"/>
             <a:ext cx="10160000" cy="419100"/>
           </a:xfrm>
           <a:prstGeom prst="rect">
@@ -6532,7 +6809,7 @@
               </a:spcAft>
               <a:defRPr sz="2800" b="0">
                 <a:solidFill>
-                  <a:srgbClr val="191B20"/>
+                  <a:srgbClr val="F5F6FA"/>
                 </a:solidFill>
                 <a:latin typeface="Arial"/>
               </a:defRPr>
@@ -6545,20 +6822,20 @@
       </p:sp>
       <p:sp>
         <p:nvSpPr>
-          <p:cNvPr id="8" name="Rectangle 7"/>
+          <p:cNvPr id="9" name="Rectangle 8"/>
           <p:cNvSpPr/>
           <p:nvPr/>
         </p:nvSpPr>
         <p:spPr>
           <a:xfrm>
-            <a:off x="723900" y="2971800"/>
+            <a:off x="711200" y="3009900"/>
             <a:ext cx="101600" cy="101600"/>
           </a:xfrm>
           <a:prstGeom prst="rect">
             <a:avLst/>
           </a:prstGeom>
           <a:solidFill>
-            <a:srgbClr val="E55024"/>
+            <a:srgbClr val="FF885D"/>
           </a:solidFill>
           <a:ln>
             <a:noFill/>
@@ -6588,13 +6865,13 @@
       </p:sp>
       <p:sp>
         <p:nvSpPr>
-          <p:cNvPr id="9" name="TextBox 8"/>
+          <p:cNvPr id="10" name="TextBox 9"/>
           <p:cNvSpPr txBox="1"/>
           <p:nvPr/>
         </p:nvSpPr>
         <p:spPr>
           <a:xfrm>
-            <a:off x="1066800" y="2844800"/>
+            <a:off x="1066800" y="2882900"/>
             <a:ext cx="10160000" cy="419100"/>
           </a:xfrm>
           <a:prstGeom prst="rect">
@@ -6617,7 +6894,7 @@
               </a:spcAft>
               <a:defRPr sz="2800" b="0">
                 <a:solidFill>
-                  <a:srgbClr val="191B20"/>
+                  <a:srgbClr val="F5F6FA"/>
                 </a:solidFill>
                 <a:latin typeface="Arial"/>
               </a:defRPr>
@@ -6630,20 +6907,20 @@
       </p:sp>
       <p:sp>
         <p:nvSpPr>
-          <p:cNvPr id="10" name="Rectangle 9"/>
+          <p:cNvPr id="11" name="Rectangle 10"/>
           <p:cNvSpPr/>
           <p:nvPr/>
         </p:nvSpPr>
         <p:spPr>
           <a:xfrm>
-            <a:off x="723900" y="3670300"/>
+            <a:off x="711200" y="3683000"/>
             <a:ext cx="101600" cy="101600"/>
           </a:xfrm>
           <a:prstGeom prst="rect">
             <a:avLst/>
           </a:prstGeom>
           <a:solidFill>
-            <a:srgbClr val="E55024"/>
+            <a:srgbClr val="FF885D"/>
           </a:solidFill>
           <a:ln>
             <a:noFill/>
@@ -6673,13 +6950,13 @@
       </p:sp>
       <p:sp>
         <p:nvSpPr>
-          <p:cNvPr id="11" name="TextBox 10"/>
+          <p:cNvPr id="12" name="TextBox 11"/>
           <p:cNvSpPr txBox="1"/>
           <p:nvPr/>
         </p:nvSpPr>
         <p:spPr>
           <a:xfrm>
-            <a:off x="1066800" y="3543300"/>
+            <a:off x="1066800" y="3556000"/>
             <a:ext cx="10160000" cy="419100"/>
           </a:xfrm>
           <a:prstGeom prst="rect">
@@ -6702,7 +6979,7 @@
               </a:spcAft>
               <a:defRPr sz="2800" b="0">
                 <a:solidFill>
-                  <a:srgbClr val="191B20"/>
+                  <a:srgbClr val="F5F6FA"/>
                 </a:solidFill>
                 <a:latin typeface="Arial"/>
               </a:defRPr>
@@ -6715,20 +6992,20 @@
       </p:sp>
       <p:sp>
         <p:nvSpPr>
-          <p:cNvPr id="12" name="Rectangle 11"/>
+          <p:cNvPr id="13" name="Rectangle 12"/>
           <p:cNvSpPr/>
           <p:nvPr/>
         </p:nvSpPr>
         <p:spPr>
           <a:xfrm>
-            <a:off x="723900" y="4368800"/>
+            <a:off x="711200" y="4356100"/>
             <a:ext cx="101600" cy="101600"/>
           </a:xfrm>
           <a:prstGeom prst="rect">
             <a:avLst/>
           </a:prstGeom>
           <a:solidFill>
-            <a:srgbClr val="E55024"/>
+            <a:srgbClr val="FF885D"/>
           </a:solidFill>
           <a:ln>
             <a:noFill/>
@@ -6758,13 +7035,13 @@
       </p:sp>
       <p:sp>
         <p:nvSpPr>
-          <p:cNvPr id="13" name="TextBox 12"/>
+          <p:cNvPr id="14" name="TextBox 13"/>
           <p:cNvSpPr txBox="1"/>
           <p:nvPr/>
         </p:nvSpPr>
         <p:spPr>
           <a:xfrm>
-            <a:off x="1066800" y="4241800"/>
+            <a:off x="1066800" y="4229100"/>
             <a:ext cx="10160000" cy="419100"/>
           </a:xfrm>
           <a:prstGeom prst="rect">
@@ -6787,7 +7064,7 @@
               </a:spcAft>
               <a:defRPr sz="2800" b="0">
                 <a:solidFill>
-                  <a:srgbClr val="191B20"/>
+                  <a:srgbClr val="F5F6FA"/>
                 </a:solidFill>
                 <a:latin typeface="Arial"/>
               </a:defRPr>
@@ -6800,20 +7077,20 @@
       </p:sp>
       <p:sp>
         <p:nvSpPr>
-          <p:cNvPr id="14" name="Rectangle 13"/>
+          <p:cNvPr id="15" name="Rectangle 14"/>
           <p:cNvSpPr/>
           <p:nvPr/>
         </p:nvSpPr>
         <p:spPr>
           <a:xfrm>
-            <a:off x="711200" y="6248400"/>
-            <a:ext cx="10769600" cy="12700"/>
+            <a:off x="609600" y="6273800"/>
+            <a:ext cx="10972800" cy="12700"/>
           </a:xfrm>
           <a:prstGeom prst="rect">
             <a:avLst/>
           </a:prstGeom>
           <a:solidFill>
-            <a:srgbClr val="DFE2E7"/>
+            <a:srgbClr val="3D4552"/>
           </a:solidFill>
           <a:ln>
             <a:noFill/>
@@ -6843,14 +7120,14 @@
       </p:sp>
       <p:sp>
         <p:nvSpPr>
-          <p:cNvPr id="15" name="TextBox 14"/>
+          <p:cNvPr id="16" name="TextBox 15"/>
           <p:cNvSpPr txBox="1"/>
           <p:nvPr/>
         </p:nvSpPr>
         <p:spPr>
           <a:xfrm>
-            <a:off x="711200" y="6438900"/>
-            <a:ext cx="9652000" cy="203200"/>
+            <a:off x="609600" y="6464300"/>
+            <a:ext cx="9906000" cy="203200"/>
           </a:xfrm>
           <a:prstGeom prst="rect">
             <a:avLst/>
@@ -6872,7 +7149,7 @@
               </a:spcAft>
               <a:defRPr sz="1100" b="0">
                 <a:solidFill>
-                  <a:srgbClr val="626773"/>
+                  <a:srgbClr val="B7BFCC"/>
                 </a:solidFill>
                 <a:latin typeface="Arial"/>
               </a:defRPr>
@@ -6885,14 +7162,14 @@
       </p:sp>
       <p:sp>
         <p:nvSpPr>
-          <p:cNvPr id="16" name="TextBox 15"/>
+          <p:cNvPr id="17" name="TextBox 16"/>
           <p:cNvSpPr txBox="1"/>
           <p:nvPr/>
         </p:nvSpPr>
         <p:spPr>
           <a:xfrm>
-            <a:off x="10807700" y="6413500"/>
-            <a:ext cx="673100" cy="215900"/>
+            <a:off x="10972800" y="6438900"/>
+            <a:ext cx="609600" cy="215900"/>
           </a:xfrm>
           <a:prstGeom prst="rect">
             <a:avLst/>
@@ -6914,7 +7191,7 @@
               </a:spcAft>
               <a:defRPr sz="1200" b="0">
                 <a:solidFill>
-                  <a:srgbClr val="626773"/>
+                  <a:srgbClr val="B7BFCC"/>
                 </a:solidFill>
                 <a:latin typeface="Arial"/>
               </a:defRPr>
@@ -6958,7 +7235,7 @@
             <a:avLst/>
           </a:prstGeom>
           <a:solidFill>
-            <a:srgbClr val="FFFFFF"/>
+            <a:srgbClr val="101217"/>
           </a:solidFill>
           <a:ln>
             <a:noFill/>
@@ -6988,14 +7265,57 @@
       </p:sp>
       <p:sp>
         <p:nvSpPr>
-          <p:cNvPr id="3" name="TextBox 2"/>
+          <p:cNvPr id="3" name="Rectangle 2"/>
+          <p:cNvSpPr/>
+          <p:nvPr/>
+        </p:nvSpPr>
+        <p:spPr>
+          <a:xfrm>
+            <a:off x="0" y="0"/>
+            <a:ext cx="101600" cy="6858000"/>
+          </a:xfrm>
+          <a:prstGeom prst="rect">
+            <a:avLst/>
+          </a:prstGeom>
+          <a:solidFill>
+            <a:srgbClr val="FF885D"/>
+          </a:solidFill>
+          <a:ln>
+            <a:noFill/>
+          </a:ln>
+        </p:spPr>
+        <p:style>
+          <a:lnRef idx="1">
+            <a:schemeClr val="accent1"/>
+          </a:lnRef>
+          <a:fillRef idx="3">
+            <a:schemeClr val="accent1"/>
+          </a:fillRef>
+          <a:effectRef idx="2">
+            <a:schemeClr val="accent1"/>
+          </a:effectRef>
+          <a:fontRef idx="minor">
+            <a:schemeClr val="lt1"/>
+          </a:fontRef>
+        </p:style>
+        <p:txBody>
+          <a:bodyPr rtlCol="0" anchor="ctr"/>
+          <a:lstStyle/>
+          <a:p>
+            <a:pPr algn="ctr"/>
+          </a:p>
+        </p:txBody>
+      </p:sp>
+      <p:sp>
+        <p:nvSpPr>
+          <p:cNvPr id="4" name="TextBox 3"/>
           <p:cNvSpPr txBox="1"/>
           <p:nvPr/>
         </p:nvSpPr>
         <p:spPr>
           <a:xfrm>
-            <a:off x="711200" y="457200"/>
-            <a:ext cx="10769600" cy="228600"/>
+            <a:off x="609600" y="444500"/>
+            <a:ext cx="10972800" cy="279400"/>
           </a:xfrm>
           <a:prstGeom prst="rect">
             <a:avLst/>
@@ -7017,7 +7337,7 @@
               </a:spcAft>
               <a:defRPr sz="1300" b="1">
                 <a:solidFill>
-                  <a:srgbClr val="626773"/>
+                  <a:srgbClr val="B7BFCC"/>
                 </a:solidFill>
                 <a:latin typeface="Arial"/>
               </a:defRPr>
@@ -7030,20 +7350,20 @@
       </p:sp>
       <p:sp>
         <p:nvSpPr>
-          <p:cNvPr id="4" name="Rectangle 3"/>
+          <p:cNvPr id="5" name="Rectangle 4"/>
           <p:cNvSpPr/>
           <p:nvPr/>
         </p:nvSpPr>
         <p:spPr>
           <a:xfrm>
-            <a:off x="711200" y="876300"/>
-            <a:ext cx="622300" cy="50800"/>
+            <a:off x="609600" y="876300"/>
+            <a:ext cx="685800" cy="50800"/>
           </a:xfrm>
           <a:prstGeom prst="rect">
             <a:avLst/>
           </a:prstGeom>
           <a:solidFill>
-            <a:srgbClr val="E55024"/>
+            <a:srgbClr val="FF885D"/>
           </a:solidFill>
           <a:ln>
             <a:noFill/>
@@ -7073,14 +7393,14 @@
       </p:sp>
       <p:sp>
         <p:nvSpPr>
-          <p:cNvPr id="5" name="TextBox 4"/>
+          <p:cNvPr id="6" name="TextBox 5"/>
           <p:cNvSpPr txBox="1"/>
           <p:nvPr/>
         </p:nvSpPr>
         <p:spPr>
           <a:xfrm>
-            <a:off x="685800" y="1257300"/>
-            <a:ext cx="10795000" cy="1168400"/>
+            <a:off x="584200" y="1206500"/>
+            <a:ext cx="10998200" cy="1130300"/>
           </a:xfrm>
           <a:prstGeom prst="rect">
             <a:avLst/>
@@ -7102,7 +7422,7 @@
               </a:spcAft>
               <a:defRPr sz="3600" b="1">
                 <a:solidFill>
-                  <a:srgbClr val="191B20"/>
+                  <a:srgbClr val="F5F6FA"/>
                 </a:solidFill>
                 <a:latin typeface="Arial"/>
               </a:defRPr>
@@ -7115,20 +7435,20 @@
       </p:sp>
       <p:sp>
         <p:nvSpPr>
-          <p:cNvPr id="6" name="Rectangle 5"/>
+          <p:cNvPr id="7" name="Rectangle 6"/>
           <p:cNvSpPr/>
           <p:nvPr/>
         </p:nvSpPr>
         <p:spPr>
           <a:xfrm>
-            <a:off x="723900" y="2273300"/>
+            <a:off x="711200" y="2336800"/>
             <a:ext cx="101600" cy="101600"/>
           </a:xfrm>
           <a:prstGeom prst="rect">
             <a:avLst/>
           </a:prstGeom>
           <a:solidFill>
-            <a:srgbClr val="E55024"/>
+            <a:srgbClr val="FF885D"/>
           </a:solidFill>
           <a:ln>
             <a:noFill/>
@@ -7158,13 +7478,13 @@
       </p:sp>
       <p:sp>
         <p:nvSpPr>
-          <p:cNvPr id="7" name="TextBox 6"/>
+          <p:cNvPr id="8" name="TextBox 7"/>
           <p:cNvSpPr txBox="1"/>
           <p:nvPr/>
         </p:nvSpPr>
         <p:spPr>
           <a:xfrm>
-            <a:off x="1066800" y="2146300"/>
+            <a:off x="1066800" y="2209800"/>
             <a:ext cx="10160000" cy="419100"/>
           </a:xfrm>
           <a:prstGeom prst="rect">
@@ -7187,7 +7507,7 @@
               </a:spcAft>
               <a:defRPr sz="2800" b="0">
                 <a:solidFill>
-                  <a:srgbClr val="191B20"/>
+                  <a:srgbClr val="F5F6FA"/>
                 </a:solidFill>
                 <a:latin typeface="Arial"/>
               </a:defRPr>
@@ -7200,20 +7520,20 @@
       </p:sp>
       <p:sp>
         <p:nvSpPr>
-          <p:cNvPr id="8" name="Rectangle 7"/>
+          <p:cNvPr id="9" name="Rectangle 8"/>
           <p:cNvSpPr/>
           <p:nvPr/>
         </p:nvSpPr>
         <p:spPr>
           <a:xfrm>
-            <a:off x="723900" y="2971800"/>
+            <a:off x="711200" y="3009900"/>
             <a:ext cx="101600" cy="101600"/>
           </a:xfrm>
           <a:prstGeom prst="rect">
             <a:avLst/>
           </a:prstGeom>
           <a:solidFill>
-            <a:srgbClr val="E55024"/>
+            <a:srgbClr val="FF885D"/>
           </a:solidFill>
           <a:ln>
             <a:noFill/>
@@ -7243,13 +7563,13 @@
       </p:sp>
       <p:sp>
         <p:nvSpPr>
-          <p:cNvPr id="9" name="TextBox 8"/>
+          <p:cNvPr id="10" name="TextBox 9"/>
           <p:cNvSpPr txBox="1"/>
           <p:nvPr/>
         </p:nvSpPr>
         <p:spPr>
           <a:xfrm>
-            <a:off x="1066800" y="2844800"/>
+            <a:off x="1066800" y="2882900"/>
             <a:ext cx="10160000" cy="419100"/>
           </a:xfrm>
           <a:prstGeom prst="rect">
@@ -7272,7 +7592,7 @@
               </a:spcAft>
               <a:defRPr sz="2800" b="0">
                 <a:solidFill>
-                  <a:srgbClr val="191B20"/>
+                  <a:srgbClr val="F5F6FA"/>
                 </a:solidFill>
                 <a:latin typeface="Arial"/>
               </a:defRPr>
@@ -7285,20 +7605,20 @@
       </p:sp>
       <p:sp>
         <p:nvSpPr>
-          <p:cNvPr id="10" name="Rectangle 9"/>
+          <p:cNvPr id="11" name="Rectangle 10"/>
           <p:cNvSpPr/>
           <p:nvPr/>
         </p:nvSpPr>
         <p:spPr>
           <a:xfrm>
-            <a:off x="723900" y="3670300"/>
+            <a:off x="711200" y="3683000"/>
             <a:ext cx="101600" cy="101600"/>
           </a:xfrm>
           <a:prstGeom prst="rect">
             <a:avLst/>
           </a:prstGeom>
           <a:solidFill>
-            <a:srgbClr val="E55024"/>
+            <a:srgbClr val="FF885D"/>
           </a:solidFill>
           <a:ln>
             <a:noFill/>
@@ -7328,13 +7648,13 @@
       </p:sp>
       <p:sp>
         <p:nvSpPr>
-          <p:cNvPr id="11" name="TextBox 10"/>
+          <p:cNvPr id="12" name="TextBox 11"/>
           <p:cNvSpPr txBox="1"/>
           <p:nvPr/>
         </p:nvSpPr>
         <p:spPr>
           <a:xfrm>
-            <a:off x="1066800" y="3543300"/>
+            <a:off x="1066800" y="3556000"/>
             <a:ext cx="10160000" cy="419100"/>
           </a:xfrm>
           <a:prstGeom prst="rect">
@@ -7357,7 +7677,7 @@
               </a:spcAft>
               <a:defRPr sz="2800" b="0">
                 <a:solidFill>
-                  <a:srgbClr val="191B20"/>
+                  <a:srgbClr val="F5F6FA"/>
                 </a:solidFill>
                 <a:latin typeface="Arial"/>
               </a:defRPr>
@@ -7370,20 +7690,20 @@
       </p:sp>
       <p:sp>
         <p:nvSpPr>
-          <p:cNvPr id="12" name="Rectangle 11"/>
+          <p:cNvPr id="13" name="Rectangle 12"/>
           <p:cNvSpPr/>
           <p:nvPr/>
         </p:nvSpPr>
         <p:spPr>
           <a:xfrm>
-            <a:off x="723900" y="4368800"/>
+            <a:off x="711200" y="4356100"/>
             <a:ext cx="101600" cy="101600"/>
           </a:xfrm>
           <a:prstGeom prst="rect">
             <a:avLst/>
           </a:prstGeom>
           <a:solidFill>
-            <a:srgbClr val="E55024"/>
+            <a:srgbClr val="FF885D"/>
           </a:solidFill>
           <a:ln>
             <a:noFill/>
@@ -7413,13 +7733,13 @@
       </p:sp>
       <p:sp>
         <p:nvSpPr>
-          <p:cNvPr id="13" name="TextBox 12"/>
+          <p:cNvPr id="14" name="TextBox 13"/>
           <p:cNvSpPr txBox="1"/>
           <p:nvPr/>
         </p:nvSpPr>
         <p:spPr>
           <a:xfrm>
-            <a:off x="1066800" y="4241800"/>
+            <a:off x="1066800" y="4229100"/>
             <a:ext cx="10160000" cy="419100"/>
           </a:xfrm>
           <a:prstGeom prst="rect">
@@ -7442,7 +7762,7 @@
               </a:spcAft>
               <a:defRPr sz="2800" b="0">
                 <a:solidFill>
-                  <a:srgbClr val="191B20"/>
+                  <a:srgbClr val="F5F6FA"/>
                 </a:solidFill>
                 <a:latin typeface="Arial"/>
               </a:defRPr>
@@ -7455,20 +7775,20 @@
       </p:sp>
       <p:sp>
         <p:nvSpPr>
-          <p:cNvPr id="14" name="Rectangle 13"/>
+          <p:cNvPr id="15" name="Rectangle 14"/>
           <p:cNvSpPr/>
           <p:nvPr/>
         </p:nvSpPr>
         <p:spPr>
           <a:xfrm>
-            <a:off x="711200" y="6248400"/>
-            <a:ext cx="10769600" cy="12700"/>
+            <a:off x="609600" y="6273800"/>
+            <a:ext cx="10972800" cy="12700"/>
           </a:xfrm>
           <a:prstGeom prst="rect">
             <a:avLst/>
           </a:prstGeom>
           <a:solidFill>
-            <a:srgbClr val="DFE2E7"/>
+            <a:srgbClr val="3D4552"/>
           </a:solidFill>
           <a:ln>
             <a:noFill/>
@@ -7498,14 +7818,14 @@
       </p:sp>
       <p:sp>
         <p:nvSpPr>
-          <p:cNvPr id="15" name="TextBox 14"/>
+          <p:cNvPr id="16" name="TextBox 15"/>
           <p:cNvSpPr txBox="1"/>
           <p:nvPr/>
         </p:nvSpPr>
         <p:spPr>
           <a:xfrm>
-            <a:off x="711200" y="6438900"/>
-            <a:ext cx="9652000" cy="203200"/>
+            <a:off x="609600" y="6464300"/>
+            <a:ext cx="9906000" cy="203200"/>
           </a:xfrm>
           <a:prstGeom prst="rect">
             <a:avLst/>
@@ -7527,7 +7847,7 @@
               </a:spcAft>
               <a:defRPr sz="1100" b="0">
                 <a:solidFill>
-                  <a:srgbClr val="626773"/>
+                  <a:srgbClr val="B7BFCC"/>
                 </a:solidFill>
                 <a:latin typeface="Arial"/>
               </a:defRPr>
@@ -7540,14 +7860,14 @@
       </p:sp>
       <p:sp>
         <p:nvSpPr>
-          <p:cNvPr id="16" name="TextBox 15"/>
+          <p:cNvPr id="17" name="TextBox 16"/>
           <p:cNvSpPr txBox="1"/>
           <p:nvPr/>
         </p:nvSpPr>
         <p:spPr>
           <a:xfrm>
-            <a:off x="10807700" y="6413500"/>
-            <a:ext cx="673100" cy="215900"/>
+            <a:off x="10972800" y="6438900"/>
+            <a:ext cx="609600" cy="215900"/>
           </a:xfrm>
           <a:prstGeom prst="rect">
             <a:avLst/>
@@ -7569,7 +7889,7 @@
               </a:spcAft>
               <a:defRPr sz="1200" b="0">
                 <a:solidFill>
-                  <a:srgbClr val="626773"/>
+                  <a:srgbClr val="B7BFCC"/>
                 </a:solidFill>
                 <a:latin typeface="Arial"/>
               </a:defRPr>
